--- a/lessons/lesson-05/slides.pptx
+++ b/lessons/lesson-05/slides.pptx
@@ -2,33 +2,33 @@
 <file path=ppt/presentation.xml><?xml version="1.0" encoding="utf-8"?>
 <p:presentation xmlns:p="http://schemas.openxmlformats.org/presentationml/2006/main">
   <p:sldMasterIdLst>
-    <p:sldMasterId xmlns:r="http://schemas.openxmlformats.org/officeDocument/2006/relationships" id="2147483648" r:id="Rc9de51f6750b4847"/>
+    <p:sldMasterId xmlns:r="http://schemas.openxmlformats.org/officeDocument/2006/relationships" id="2147483648" r:id="R06a63d3fe350409e"/>
   </p:sldMasterIdLst>
   <p:notesMasterIdLst>
-    <p:notesMasterId xmlns:r="http://schemas.openxmlformats.org/officeDocument/2006/relationships" r:id="Red44b009cb844b50"/>
+    <p:notesMasterId xmlns:r="http://schemas.openxmlformats.org/officeDocument/2006/relationships" r:id="R612c19c686934159"/>
   </p:notesMasterIdLst>
   <p:sldIdLst>
-    <p:sldId xmlns:r="http://schemas.openxmlformats.org/officeDocument/2006/relationships" id="256" r:id="R34f8b0393f3845da"/>
-    <p:sldId xmlns:r="http://schemas.openxmlformats.org/officeDocument/2006/relationships" id="257" r:id="Rb4dff49ae8e64c38"/>
-    <p:sldId xmlns:r="http://schemas.openxmlformats.org/officeDocument/2006/relationships" id="258" r:id="Rff9265e550d44282"/>
-    <p:sldId xmlns:r="http://schemas.openxmlformats.org/officeDocument/2006/relationships" id="259" r:id="R6a07794305724a10"/>
-    <p:sldId xmlns:r="http://schemas.openxmlformats.org/officeDocument/2006/relationships" id="260" r:id="R04e001a9a17048a2"/>
-    <p:sldId xmlns:r="http://schemas.openxmlformats.org/officeDocument/2006/relationships" id="261" r:id="R4f0dd53dbd7f495e"/>
-    <p:sldId xmlns:r="http://schemas.openxmlformats.org/officeDocument/2006/relationships" id="262" r:id="Rdd486aa6db5a4c29"/>
-    <p:sldId xmlns:r="http://schemas.openxmlformats.org/officeDocument/2006/relationships" id="263" r:id="R92a40c9f4bb642d7"/>
-    <p:sldId xmlns:r="http://schemas.openxmlformats.org/officeDocument/2006/relationships" id="264" r:id="R82c35a52e7904bf7"/>
-    <p:sldId xmlns:r="http://schemas.openxmlformats.org/officeDocument/2006/relationships" id="265" r:id="Ra5a3358c620d4a06"/>
-    <p:sldId xmlns:r="http://schemas.openxmlformats.org/officeDocument/2006/relationships" id="266" r:id="Rcc4eb6b37c804e53"/>
-    <p:sldId xmlns:r="http://schemas.openxmlformats.org/officeDocument/2006/relationships" id="267" r:id="R6112714bf3aa49e5"/>
-    <p:sldId xmlns:r="http://schemas.openxmlformats.org/officeDocument/2006/relationships" id="268" r:id="R516dcfa565244a4c"/>
-    <p:sldId xmlns:r="http://schemas.openxmlformats.org/officeDocument/2006/relationships" id="269" r:id="R5b4b8f7045b94dcb"/>
-    <p:sldId xmlns:r="http://schemas.openxmlformats.org/officeDocument/2006/relationships" id="270" r:id="Rd5da21ebb28d4bf5"/>
-    <p:sldId xmlns:r="http://schemas.openxmlformats.org/officeDocument/2006/relationships" id="271" r:id="R2f98ffc080014025"/>
-    <p:sldId xmlns:r="http://schemas.openxmlformats.org/officeDocument/2006/relationships" id="272" r:id="R2bf21575b65c4465"/>
-    <p:sldId xmlns:r="http://schemas.openxmlformats.org/officeDocument/2006/relationships" id="273" r:id="Rcb739f040c7a4d2f"/>
-    <p:sldId xmlns:r="http://schemas.openxmlformats.org/officeDocument/2006/relationships" id="274" r:id="Rb1ba30d9ef4c4c65"/>
-    <p:sldId xmlns:r="http://schemas.openxmlformats.org/officeDocument/2006/relationships" id="275" r:id="R83f1721680e14774"/>
-    <p:sldId xmlns:r="http://schemas.openxmlformats.org/officeDocument/2006/relationships" id="276" r:id="Rf9a83844fd2a41b3"/>
+    <p:sldId xmlns:r="http://schemas.openxmlformats.org/officeDocument/2006/relationships" id="256" r:id="R9649f99960e342b6"/>
+    <p:sldId xmlns:r="http://schemas.openxmlformats.org/officeDocument/2006/relationships" id="257" r:id="R7ab09648dcae4e2c"/>
+    <p:sldId xmlns:r="http://schemas.openxmlformats.org/officeDocument/2006/relationships" id="258" r:id="R35d158310f9341ea"/>
+    <p:sldId xmlns:r="http://schemas.openxmlformats.org/officeDocument/2006/relationships" id="259" r:id="R25143a4fe8f443f1"/>
+    <p:sldId xmlns:r="http://schemas.openxmlformats.org/officeDocument/2006/relationships" id="260" r:id="Rc142dc4e023a48ac"/>
+    <p:sldId xmlns:r="http://schemas.openxmlformats.org/officeDocument/2006/relationships" id="261" r:id="R71880d2e4c9646a6"/>
+    <p:sldId xmlns:r="http://schemas.openxmlformats.org/officeDocument/2006/relationships" id="262" r:id="Rcab6dcab731b4f2f"/>
+    <p:sldId xmlns:r="http://schemas.openxmlformats.org/officeDocument/2006/relationships" id="263" r:id="R53ede4fb4bd443bc"/>
+    <p:sldId xmlns:r="http://schemas.openxmlformats.org/officeDocument/2006/relationships" id="264" r:id="R7d1c3f40b9df40d5"/>
+    <p:sldId xmlns:r="http://schemas.openxmlformats.org/officeDocument/2006/relationships" id="265" r:id="R1637aae0e1e14b0e"/>
+    <p:sldId xmlns:r="http://schemas.openxmlformats.org/officeDocument/2006/relationships" id="266" r:id="R84bb2a8b08f84f22"/>
+    <p:sldId xmlns:r="http://schemas.openxmlformats.org/officeDocument/2006/relationships" id="267" r:id="Rfa01518a3d8f47bd"/>
+    <p:sldId xmlns:r="http://schemas.openxmlformats.org/officeDocument/2006/relationships" id="268" r:id="Ra15aba55139344a3"/>
+    <p:sldId xmlns:r="http://schemas.openxmlformats.org/officeDocument/2006/relationships" id="269" r:id="R91d3dba2af974f86"/>
+    <p:sldId xmlns:r="http://schemas.openxmlformats.org/officeDocument/2006/relationships" id="270" r:id="R349e12c8bd4047c4"/>
+    <p:sldId xmlns:r="http://schemas.openxmlformats.org/officeDocument/2006/relationships" id="271" r:id="Rd1c03b2e38e34342"/>
+    <p:sldId xmlns:r="http://schemas.openxmlformats.org/officeDocument/2006/relationships" id="272" r:id="R85dbad84e8b04cb4"/>
+    <p:sldId xmlns:r="http://schemas.openxmlformats.org/officeDocument/2006/relationships" id="273" r:id="R9e083a1a0d8c48fe"/>
+    <p:sldId xmlns:r="http://schemas.openxmlformats.org/officeDocument/2006/relationships" id="274" r:id="R18d168bbd7db4dd4"/>
+    <p:sldId xmlns:r="http://schemas.openxmlformats.org/officeDocument/2006/relationships" id="275" r:id="R8b92ca54731049af"/>
+    <p:sldId xmlns:r="http://schemas.openxmlformats.org/officeDocument/2006/relationships" id="276" r:id="R3dcd0e37bed646df"/>
   </p:sldIdLst>
   <p:sldSz cx="12192000" cy="6858000"/>
   <p:notesSz cx="6858000" cy="9144000"/>
@@ -408,7 +408,92 @@
           <a:lstStyle xmlns:a="http://schemas.openxmlformats.org/drawingml/2006/main"/>
           <a:p xmlns:a="http://schemas.openxmlformats.org/drawingml/2006/main">
             <a:r>
-              <a:t>页面标题：第5讲 综述、证据地图与研究空白识别</a:t>
+              <a:t>页面：P01 第5讲 综述、证据地图与研究空白识别</a:t>
+            </a:r>
+          </a:p>
+          <a:p xmlns:a="http://schemas.openxmlformats.org/drawingml/2006/main">
+            <a:r>
+              <a:t/>
+            </a:r>
+          </a:p>
+          <a:p xmlns:a="http://schemas.openxmlformats.org/drawingml/2006/main">
+            <a:r>
+              <a:t>讲义位置：本课讲义；见逐页母稿映射表</a:t>
+            </a:r>
+          </a:p>
+          <a:p xmlns:a="http://schemas.openxmlformats.org/drawingml/2006/main">
+            <a:r>
+              <a:t/>
+            </a:r>
+          </a:p>
+          <a:p xmlns:a="http://schemas.openxmlformats.org/drawingml/2006/main">
+            <a:r>
+              <a:t>屏显核对：</a:t>
+            </a:r>
+          </a:p>
+          <a:p xmlns:a="http://schemas.openxmlformats.org/drawingml/2006/main">
+            <a:r>
+              <a:t>第5讲 综述、证据地图与研究空白识别</a:t>
+            </a:r>
+          </a:p>
+          <a:p xmlns:a="http://schemas.openxmlformats.org/drawingml/2006/main">
+            <a:r>
+              <a:t/>
+            </a:r>
+          </a:p>
+          <a:p xmlns:a="http://schemas.openxmlformats.org/drawingml/2006/main">
+            <a:r>
+              <a:t>教师讲述：</a:t>
+            </a:r>
+          </a:p>
+          <a:p xmlns:a="http://schemas.openxmlformats.org/drawingml/2006/main">
+            <a:r>
+              <a:t>开场放下论文清单。本课要处理的是：当第 4 课已经完成了结构化阅读卡、每条主张都能定位到原文之后，把多篇阅读卡摆在一起时，研究者常犯的错误是按论文顺序拼接摘要，得到一份"读书报告"而不是综述。本课把阅读卡重组为按研究问题排列的证据地图，并向第 6 课问题门输出研究空白候选。</a:t>
+            </a:r>
+          </a:p>
+          <a:p xmlns:a="http://schemas.openxmlformats.org/drawingml/2006/main">
+            <a:r>
+              <a:t/>
+            </a:r>
+          </a:p>
+          <a:p xmlns:a="http://schemas.openxmlformats.org/drawingml/2006/main">
+            <a:r>
+              <a:t>学生动作：</a:t>
+            </a:r>
+          </a:p>
+          <a:p xmlns:a="http://schemas.openxmlformats.org/drawingml/2006/main">
+            <a:r>
+              <a:t>不展开课程行政信息，直接进入下一页回扣。</a:t>
+            </a:r>
+          </a:p>
+          <a:p xmlns:a="http://schemas.openxmlformats.org/drawingml/2006/main">
+            <a:r>
+              <a:t/>
+            </a:r>
+          </a:p>
+          <a:p xmlns:a="http://schemas.openxmlformats.org/drawingml/2006/main">
+            <a:r>
+              <a:t>来源与边界：</a:t>
+            </a:r>
+          </a:p>
+          <a:p xmlns:a="http://schemas.openxmlformats.org/drawingml/2006/main">
+            <a:r>
+              <a:t>课程定位以 [syllabus.md](../../course/syllabus.md) 与 [备课规划.md](../备课规划.md) 第 5 课段为准。</a:t>
+            </a:r>
+          </a:p>
+          <a:p xmlns:a="http://schemas.openxmlformats.org/drawingml/2006/main">
+            <a:r>
+              <a:t/>
+            </a:r>
+          </a:p>
+          <a:p xmlns:a="http://schemas.openxmlformats.org/drawingml/2006/main">
+            <a:r>
+              <a:t>---</a:t>
+            </a:r>
+          </a:p>
+          <a:p xmlns:a="http://schemas.openxmlformats.org/drawingml/2006/main">
+            <a:r>
+              <a:t/>
             </a:r>
           </a:p>
           <a:p xmlns:a="http://schemas.openxmlformats.org/drawingml/2006/main">
@@ -418,7 +503,17 @@
           </a:p>
           <a:p xmlns:a="http://schemas.openxmlformats.org/drawingml/2006/main">
             <a:r>
-              <a:t>- 本页仅使用课程内部规则与教学材料。</a:t>
+              <a:t/>
+            </a:r>
+          </a:p>
+          <a:p xmlns:a="http://schemas.openxmlformats.org/drawingml/2006/main">
+            <a:r>
+              <a:t>- 本课 handout.md 与 slides.md</a:t>
+            </a:r>
+          </a:p>
+          <a:p xmlns:a="http://schemas.openxmlformats.org/drawingml/2006/main">
+            <a:r>
+              <a:t/>
             </a:r>
           </a:p>
           <a:p xmlns:a="http://schemas.openxmlformats.org/drawingml/2006/main">
@@ -493,7 +588,122 @@
           <a:lstStyle xmlns:a="http://schemas.openxmlformats.org/drawingml/2006/main"/>
           <a:p xmlns:a="http://schemas.openxmlformats.org/drawingml/2006/main">
             <a:r>
-              <a:t>页面标题：三步检验：从证据空白到可检验问题</a:t>
+              <a:t>页面：P10 三步检验：从证据空白到可检验问题</a:t>
+            </a:r>
+          </a:p>
+          <a:p xmlns:a="http://schemas.openxmlformats.org/drawingml/2006/main">
+            <a:r>
+              <a:t/>
+            </a:r>
+          </a:p>
+          <a:p xmlns:a="http://schemas.openxmlformats.org/drawingml/2006/main">
+            <a:r>
+              <a:t>讲义位置：本课讲义；见逐页母稿映射表</a:t>
+            </a:r>
+          </a:p>
+          <a:p xmlns:a="http://schemas.openxmlformats.org/drawingml/2006/main">
+            <a:r>
+              <a:t/>
+            </a:r>
+          </a:p>
+          <a:p xmlns:a="http://schemas.openxmlformats.org/drawingml/2006/main">
+            <a:r>
+              <a:t>屏显核对：</a:t>
+            </a:r>
+          </a:p>
+          <a:p xmlns:a="http://schemas.openxmlformats.org/drawingml/2006/main">
+            <a:r>
+              <a:t>研究空白候选 → 三步检验 → 候选题池 → 问题门材料</a:t>
+            </a:r>
+          </a:p>
+          <a:p xmlns:a="http://schemas.openxmlformats.org/drawingml/2006/main">
+            <a:r>
+              <a:t/>
+            </a:r>
+          </a:p>
+          <a:p xmlns:a="http://schemas.openxmlformats.org/drawingml/2006/main">
+            <a:r>
+              <a:t>1. **真实性检验**：执行窄检索，确认不是"我没找到"而是"确实没有可直接对应的核验材料"。记录检索式、库、日期、命中数。</a:t>
+            </a:r>
+          </a:p>
+          <a:p xmlns:a="http://schemas.openxmlformats.org/drawingml/2006/main">
+            <a:r>
+              <a:t>2. **重要性检验**：这个空白不被回答，当前证据地图的哪条主张无法成立，或哪个机制假设无法被检验？</a:t>
+            </a:r>
+          </a:p>
+          <a:p xmlns:a="http://schemas.openxmlformats.org/drawingml/2006/main">
+            <a:r>
+              <a:t>3. **可行性检验**：课程周期内，是否能设计一个最小实验、最小对照或最小分析来部分回答它？</a:t>
+            </a:r>
+          </a:p>
+          <a:p xmlns:a="http://schemas.openxmlformats.org/drawingml/2006/main">
+            <a:r>
+              <a:t/>
+            </a:r>
+          </a:p>
+          <a:p xmlns:a="http://schemas.openxmlformats.org/drawingml/2006/main">
+            <a:r>
+              <a:t>通过三步 → 进入候选题池 → 第 6 课四维比较筛选、第一性原理推导为可证伪命题</a:t>
+            </a:r>
+          </a:p>
+          <a:p xmlns:a="http://schemas.openxmlformats.org/drawingml/2006/main">
+            <a:r>
+              <a:t/>
+            </a:r>
+          </a:p>
+          <a:p xmlns:a="http://schemas.openxmlformats.org/drawingml/2006/main">
+            <a:r>
+              <a:t>教师讲述：</a:t>
+            </a:r>
+          </a:p>
+          <a:p xmlns:a="http://schemas.openxmlformats.org/drawingml/2006/main">
+            <a:r>
+              <a:t>研究空白候选不直接进入问题门，要先经过三步检验。真实性检验用窄检索（沿用第 3 课检索式构造方法），记录检索式、库、日期和命中数。重要性来自空白在论证链上的位置，不是因为它"新"。可行性判断课程周期内能否最小验证——如果不能，它可能是真实空白但不是本课项目可做的空白。通过三步检验的候选，进入问题门材料的"研究空白候选"清单。</a:t>
+            </a:r>
+          </a:p>
+          <a:p xmlns:a="http://schemas.openxmlformats.org/drawingml/2006/main">
+            <a:r>
+              <a:t/>
+            </a:r>
+          </a:p>
+          <a:p xmlns:a="http://schemas.openxmlformats.org/drawingml/2006/main">
+            <a:r>
+              <a:t>学生动作：</a:t>
+            </a:r>
+          </a:p>
+          <a:p xmlns:a="http://schemas.openxmlformats.org/drawingml/2006/main">
+            <a:r>
+              <a:t>让学生用自己的一个空白候选，口头尝试三步检验。哪一步它最可能不通过？</a:t>
+            </a:r>
+          </a:p>
+          <a:p xmlns:a="http://schemas.openxmlformats.org/drawingml/2006/main">
+            <a:r>
+              <a:t/>
+            </a:r>
+          </a:p>
+          <a:p xmlns:a="http://schemas.openxmlformats.org/drawingml/2006/main">
+            <a:r>
+              <a:t>来源与边界：</a:t>
+            </a:r>
+          </a:p>
+          <a:p xmlns:a="http://schemas.openxmlformats.org/drawingml/2006/main">
+            <a:r>
+              <a:t>讲义 §四·3 三步检验；Qian, *How to Look for Ideas in CS Research*（课堂案例，"表格空位"不自动证明问题重要或真实）。</a:t>
+            </a:r>
+          </a:p>
+          <a:p xmlns:a="http://schemas.openxmlformats.org/drawingml/2006/main">
+            <a:r>
+              <a:t/>
+            </a:r>
+          </a:p>
+          <a:p xmlns:a="http://schemas.openxmlformats.org/drawingml/2006/main">
+            <a:r>
+              <a:t>---</a:t>
+            </a:r>
+          </a:p>
+          <a:p xmlns:a="http://schemas.openxmlformats.org/drawingml/2006/main">
+            <a:r>
+              <a:t/>
             </a:r>
           </a:p>
           <a:p xmlns:a="http://schemas.openxmlformats.org/drawingml/2006/main">
@@ -503,7 +713,17 @@
           </a:p>
           <a:p xmlns:a="http://schemas.openxmlformats.org/drawingml/2006/main">
             <a:r>
-              <a:t>- 本页仅使用课程内部规则与教学材料。</a:t>
+              <a:t/>
+            </a:r>
+          </a:p>
+          <a:p xmlns:a="http://schemas.openxmlformats.org/drawingml/2006/main">
+            <a:r>
+              <a:t>- 本课 handout.md 与 slides.md</a:t>
+            </a:r>
+          </a:p>
+          <a:p xmlns:a="http://schemas.openxmlformats.org/drawingml/2006/main">
+            <a:r>
+              <a:t/>
             </a:r>
           </a:p>
           <a:p xmlns:a="http://schemas.openxmlformats.org/drawingml/2006/main">
@@ -578,7 +798,127 @@
           <a:lstStyle xmlns:a="http://schemas.openxmlformats.org/drawingml/2006/main"/>
           <a:p xmlns:a="http://schemas.openxmlformats.org/drawingml/2006/main">
             <a:r>
-              <a:t>页面标题：不是空白的情况</a:t>
+              <a:t>页面：P11 不是空白的情况</a:t>
+            </a:r>
+          </a:p>
+          <a:p xmlns:a="http://schemas.openxmlformats.org/drawingml/2006/main">
+            <a:r>
+              <a:t/>
+            </a:r>
+          </a:p>
+          <a:p xmlns:a="http://schemas.openxmlformats.org/drawingml/2006/main">
+            <a:r>
+              <a:t>讲义位置：本课讲义；见逐页母稿映射表</a:t>
+            </a:r>
+          </a:p>
+          <a:p xmlns:a="http://schemas.openxmlformats.org/drawingml/2006/main">
+            <a:r>
+              <a:t/>
+            </a:r>
+          </a:p>
+          <a:p xmlns:a="http://schemas.openxmlformats.org/drawingml/2006/main">
+            <a:r>
+              <a:t>屏显核对：</a:t>
+            </a:r>
+          </a:p>
+          <a:p xmlns:a="http://schemas.openxmlformats.org/drawingml/2006/main">
+            <a:r>
+              <a:t>四种"看似空白但不是"：</a:t>
+            </a:r>
+          </a:p>
+          <a:p xmlns:a="http://schemas.openxmlformats.org/drawingml/2006/main">
+            <a:r>
+              <a:t/>
+            </a:r>
+          </a:p>
+          <a:p xmlns:a="http://schemas.openxmlformats.org/drawingml/2006/main">
+            <a:r>
+              <a:t>- **表述差异**：两篇用不同术语描述同一机制 → 回到操作定义判断</a:t>
+            </a:r>
+          </a:p>
+          <a:p xmlns:a="http://schemas.openxmlformats.org/drawingml/2006/main">
+            <a:r>
+              <a:t>- **范围差异**：限定于不同数据集，结论不可比 → 不是冲突，是不可比</a:t>
+            </a:r>
+          </a:p>
+          <a:p xmlns:a="http://schemas.openxmlformats.org/drawingml/2006/main">
+            <a:r>
+              <a:t>- **工程未做**：某产品/配置还没被评测 → 可能只是工程任务，回到机制层面</a:t>
+            </a:r>
+          </a:p>
+          <a:p xmlns:a="http://schemas.openxmlformats.org/drawingml/2006/main">
+            <a:r>
+              <a:t>- **新但不重要**：换数据集或换模型再跑一遍 → 没有机制假设更新，只是增量</a:t>
+            </a:r>
+          </a:p>
+          <a:p xmlns:a="http://schemas.openxmlformats.org/drawingml/2006/main">
+            <a:r>
+              <a:t/>
+            </a:r>
+          </a:p>
+          <a:p xmlns:a="http://schemas.openxmlformats.org/drawingml/2006/main">
+            <a:r>
+              <a:t>&gt; 真实空白要能被表述为：已有证据不能回答的具体问题。</a:t>
+            </a:r>
+          </a:p>
+          <a:p xmlns:a="http://schemas.openxmlformats.org/drawingml/2006/main">
+            <a:r>
+              <a:t/>
+            </a:r>
+          </a:p>
+          <a:p xmlns:a="http://schemas.openxmlformats.org/drawingml/2006/main">
+            <a:r>
+              <a:t>教师讲述：</a:t>
+            </a:r>
+          </a:p>
+          <a:p xmlns:a="http://schemas.openxmlformats.org/drawingml/2006/main">
+            <a:r>
+              <a:t>不是所有"还没人做过"都算研究空白。表述差异要回到操作定义判断；范围差异不是冲突而是不可比；工程未做要回到机制层面判断是否只是工程任务；新但不重要要有机制假设更新，否则只是增量。这一页防止学生把表述换新或工程未做误判为研究空白。</a:t>
+            </a:r>
+          </a:p>
+          <a:p xmlns:a="http://schemas.openxmlformats.org/drawingml/2006/main">
+            <a:r>
+              <a:t/>
+            </a:r>
+          </a:p>
+          <a:p xmlns:a="http://schemas.openxmlformats.org/drawingml/2006/main">
+            <a:r>
+              <a:t>学生动作：</a:t>
+            </a:r>
+          </a:p>
+          <a:p xmlns:a="http://schemas.openxmlformats.org/drawingml/2006/main">
+            <a:r>
+              <a:t>让学生举一个"看似空白但实际不是"的例子。</a:t>
+            </a:r>
+          </a:p>
+          <a:p xmlns:a="http://schemas.openxmlformats.org/drawingml/2006/main">
+            <a:r>
+              <a:t/>
+            </a:r>
+          </a:p>
+          <a:p xmlns:a="http://schemas.openxmlformats.org/drawingml/2006/main">
+            <a:r>
+              <a:t>来源与边界：</a:t>
+            </a:r>
+          </a:p>
+          <a:p xmlns:a="http://schemas.openxmlformats.org/drawingml/2006/main">
+            <a:r>
+              <a:t>讲义 §四·5 不是空白的情况。</a:t>
+            </a:r>
+          </a:p>
+          <a:p xmlns:a="http://schemas.openxmlformats.org/drawingml/2006/main">
+            <a:r>
+              <a:t/>
+            </a:r>
+          </a:p>
+          <a:p xmlns:a="http://schemas.openxmlformats.org/drawingml/2006/main">
+            <a:r>
+              <a:t>---</a:t>
+            </a:r>
+          </a:p>
+          <a:p xmlns:a="http://schemas.openxmlformats.org/drawingml/2006/main">
+            <a:r>
+              <a:t/>
             </a:r>
           </a:p>
           <a:p xmlns:a="http://schemas.openxmlformats.org/drawingml/2006/main">
@@ -588,7 +928,17 @@
           </a:p>
           <a:p xmlns:a="http://schemas.openxmlformats.org/drawingml/2006/main">
             <a:r>
-              <a:t>- 本页仅使用课程内部规则与教学材料。</a:t>
+              <a:t/>
+            </a:r>
+          </a:p>
+          <a:p xmlns:a="http://schemas.openxmlformats.org/drawingml/2006/main">
+            <a:r>
+              <a:t>- 本课 handout.md 与 slides.md</a:t>
+            </a:r>
+          </a:p>
+          <a:p xmlns:a="http://schemas.openxmlformats.org/drawingml/2006/main">
+            <a:r>
+              <a:t/>
             </a:r>
           </a:p>
           <a:p xmlns:a="http://schemas.openxmlformats.org/drawingml/2006/main">
@@ -663,7 +1013,132 @@
           <a:lstStyle xmlns:a="http://schemas.openxmlformats.org/drawingml/2006/main"/>
           <a:p xmlns:a="http://schemas.openxmlformats.org/drawingml/2006/main">
             <a:r>
-              <a:t>页面标题：AI 综述草稿核验清单</a:t>
+              <a:t>页面：P12 AI 综述草稿核验清单</a:t>
+            </a:r>
+          </a:p>
+          <a:p xmlns:a="http://schemas.openxmlformats.org/drawingml/2006/main">
+            <a:r>
+              <a:t/>
+            </a:r>
+          </a:p>
+          <a:p xmlns:a="http://schemas.openxmlformats.org/drawingml/2006/main">
+            <a:r>
+              <a:t>讲义位置：本课讲义；见逐页母稿映射表</a:t>
+            </a:r>
+          </a:p>
+          <a:p xmlns:a="http://schemas.openxmlformats.org/drawingml/2006/main">
+            <a:r>
+              <a:t/>
+            </a:r>
+          </a:p>
+          <a:p xmlns:a="http://schemas.openxmlformats.org/drawingml/2006/main">
+            <a:r>
+              <a:t>屏显核对：</a:t>
+            </a:r>
+          </a:p>
+          <a:p xmlns:a="http://schemas.openxmlformats.org/drawingml/2006/main">
+            <a:r>
+              <a:t>对 AI 给出的综述草稿、矩阵草稿或空白候选，至少检查：</a:t>
+            </a:r>
+          </a:p>
+          <a:p xmlns:a="http://schemas.openxmlformats.org/drawingml/2006/main">
+            <a:r>
+              <a:t/>
+            </a:r>
+          </a:p>
+          <a:p xmlns:a="http://schemas.openxmlformats.org/drawingml/2006/main">
+            <a:r>
+              <a:t>1. 每条引文是否真实存在？题名/作者/年份/DOI 与原文一致？</a:t>
+            </a:r>
+          </a:p>
+          <a:p xmlns:a="http://schemas.openxmlformats.org/drawingml/2006/main">
+            <a:r>
+              <a:t>2. AI 归纳的"共同主张"是否真的出现在每条引用的原文中，还是从其中一篇外推？</a:t>
+            </a:r>
+          </a:p>
+          <a:p xmlns:a="http://schemas.openxmlformats.org/drawingml/2006/main">
+            <a:r>
+              <a:t>3. AI 标注的"冲突"是否来自原文不同结论，还是任务设置不同导致的表面分歧？</a:t>
+            </a:r>
+          </a:p>
+          <a:p xmlns:a="http://schemas.openxmlformats.org/drawingml/2006/main">
+            <a:r>
+              <a:t>4. AI 提示的"缺角"是否经过窄检索确认？</a:t>
+            </a:r>
+          </a:p>
+          <a:p xmlns:a="http://schemas.openxmlformats.org/drawingml/2006/main">
+            <a:r>
+              <a:t>5. AI 草拟的综述段落是否把模型推断写成原文结论，是否丢失限定条件？</a:t>
+            </a:r>
+          </a:p>
+          <a:p xmlns:a="http://schemas.openxmlformats.org/drawingml/2006/main">
+            <a:r>
+              <a:t/>
+            </a:r>
+          </a:p>
+          <a:p xmlns:a="http://schemas.openxmlformats.org/drawingml/2006/main">
+            <a:r>
+              <a:t>未完成前 → AI 产出保留在探索线索区，不进入证据地图主格或问题门材料。</a:t>
+            </a:r>
+          </a:p>
+          <a:p xmlns:a="http://schemas.openxmlformats.org/drawingml/2006/main">
+            <a:r>
+              <a:t/>
+            </a:r>
+          </a:p>
+          <a:p xmlns:a="http://schemas.openxmlformats.org/drawingml/2006/main">
+            <a:r>
+              <a:t>教师讲述：</a:t>
+            </a:r>
+          </a:p>
+          <a:p xmlns:a="http://schemas.openxmlformats.org/drawingml/2006/main">
+            <a:r>
+              <a:t>核验清单逐条讲，不留作"课后自学"。AI 可以在综述阶段抽取共同主张、聚类子问题、提示冲突或缺角、草拟段落，但所有产出只能作为草稿或线索。AI 不能替代研究者判断哪条主张属于主证据，不能自动判定冲突是否实质，不能把"我没找到"升级为"领域空白"，不能给出未经核验的引文和页码。状态标签是证据地图的字段，不是课后才学。</a:t>
+            </a:r>
+          </a:p>
+          <a:p xmlns:a="http://schemas.openxmlformats.org/drawingml/2006/main">
+            <a:r>
+              <a:t/>
+            </a:r>
+          </a:p>
+          <a:p xmlns:a="http://schemas.openxmlformats.org/drawingml/2006/main">
+            <a:r>
+              <a:t>学生动作：</a:t>
+            </a:r>
+          </a:p>
+          <a:p xmlns:a="http://schemas.openxmlformats.org/drawingml/2006/main">
+            <a:r>
+              <a:t>无。直接进入演示。</a:t>
+            </a:r>
+          </a:p>
+          <a:p xmlns:a="http://schemas.openxmlformats.org/drawingml/2006/main">
+            <a:r>
+              <a:t/>
+            </a:r>
+          </a:p>
+          <a:p xmlns:a="http://schemas.openxmlformats.org/drawingml/2006/main">
+            <a:r>
+              <a:t>来源与边界：</a:t>
+            </a:r>
+          </a:p>
+          <a:p xmlns:a="http://schemas.openxmlformats.org/drawingml/2006/main">
+            <a:r>
+              <a:t>讲义 §五 AI 辅助归纳的核验；AI 输出不构成证据（[AGENTS.md](../../AGENTS.md)）；沿用第 3 课来源审计清单。</a:t>
+            </a:r>
+          </a:p>
+          <a:p xmlns:a="http://schemas.openxmlformats.org/drawingml/2006/main">
+            <a:r>
+              <a:t/>
+            </a:r>
+          </a:p>
+          <a:p xmlns:a="http://schemas.openxmlformats.org/drawingml/2006/main">
+            <a:r>
+              <a:t>---</a:t>
+            </a:r>
+          </a:p>
+          <a:p xmlns:a="http://schemas.openxmlformats.org/drawingml/2006/main">
+            <a:r>
+              <a:t/>
             </a:r>
           </a:p>
           <a:p xmlns:a="http://schemas.openxmlformats.org/drawingml/2006/main">
@@ -673,7 +1148,17 @@
           </a:p>
           <a:p xmlns:a="http://schemas.openxmlformats.org/drawingml/2006/main">
             <a:r>
-              <a:t>- 本页仅使用课程内部规则与教学材料。</a:t>
+              <a:t/>
+            </a:r>
+          </a:p>
+          <a:p xmlns:a="http://schemas.openxmlformats.org/drawingml/2006/main">
+            <a:r>
+              <a:t>- 本课 handout.md 与 slides.md</a:t>
+            </a:r>
+          </a:p>
+          <a:p xmlns:a="http://schemas.openxmlformats.org/drawingml/2006/main">
+            <a:r>
+              <a:t/>
             </a:r>
           </a:p>
           <a:p xmlns:a="http://schemas.openxmlformats.org/drawingml/2006/main">
@@ -748,7 +1233,142 @@
           <a:lstStyle xmlns:a="http://schemas.openxmlformats.org/drawingml/2006/main"/>
           <a:p xmlns:a="http://schemas.openxmlformats.org/drawingml/2006/main">
             <a:r>
-              <a:t>页面标题：MI 演示：5 条主张 → 相关工作矩阵</a:t>
+              <a:t>页面：P13 MI 演示：5 条主张 → 相关工作矩阵</a:t>
+            </a:r>
+          </a:p>
+          <a:p xmlns:a="http://schemas.openxmlformats.org/drawingml/2006/main">
+            <a:r>
+              <a:t/>
+            </a:r>
+          </a:p>
+          <a:p xmlns:a="http://schemas.openxmlformats.org/drawingml/2006/main">
+            <a:r>
+              <a:t>讲义位置：本课讲义；见逐页母稿映射表</a:t>
+            </a:r>
+          </a:p>
+          <a:p xmlns:a="http://schemas.openxmlformats.org/drawingml/2006/main">
+            <a:r>
+              <a:t/>
+            </a:r>
+          </a:p>
+          <a:p xmlns:a="http://schemas.openxmlformats.org/drawingml/2006/main">
+            <a:r>
+              <a:t>屏显核对：</a:t>
+            </a:r>
+          </a:p>
+          <a:p xmlns:a="http://schemas.openxmlformats.org/drawingml/2006/main">
+            <a:r>
+              <a:t>公开论文主张｜不含博士生未发表内容</a:t>
+            </a:r>
+          </a:p>
+          <a:p xmlns:a="http://schemas.openxmlformats.org/drawingml/2006/main">
+            <a:r>
+              <a:t/>
+            </a:r>
+          </a:p>
+          <a:p xmlns:a="http://schemas.openxmlformats.org/drawingml/2006/main">
+            <a:r>
+              <a:t>问题：SAE 是否比 PCA 更稀疏干预 IOI；何种证据才支持因果忠实？</a:t>
+            </a:r>
+          </a:p>
+          <a:p xmlns:a="http://schemas.openxmlformats.org/drawingml/2006/main">
+            <a:r>
+              <a:t/>
+            </a:r>
+          </a:p>
+          <a:p xmlns:a="http://schemas.openxmlformats.org/drawingml/2006/main">
+            <a:r>
+              <a:t>| 证据 | 子问题 | 角色 | 边界 |</a:t>
+            </a:r>
+          </a:p>
+          <a:p xmlns:a="http://schemas.openxmlformats.org/drawingml/2006/main">
+            <a:r>
+              <a:t>| --- | --- | --- | --- |</a:t>
+            </a:r>
+          </a:p>
+          <a:p xmlns:a="http://schemas.openxmlformats.org/drawingml/2006/main">
+            <a:r>
+              <a:t>| C02 | 干预效率 | 直接主证据 | Pythia-410M / IOI / layer 11 |</a:t>
+            </a:r>
+          </a:p>
+          <a:p xmlns:a="http://schemas.openxmlformats.org/drawingml/2006/main">
+            <a:r>
+              <a:t>| C16 | 稀疏控制 | 限制 | GPT-2 Small；非同设置反驳 |</a:t>
+            </a:r>
+          </a:p>
+          <a:p xmlns:a="http://schemas.openxmlformats.org/drawingml/2006/main">
+            <a:r>
+              <a:t>| C31 | patching 效度 | 效度威胁 | 一般子空间；含成功案例 |</a:t>
+            </a:r>
+          </a:p>
+          <a:p xmlns:a="http://schemas.openxmlformats.org/drawingml/2006/main">
+            <a:r>
+              <a:t>| C18 | 评价指标 | 补充 | 不单独证明忠实性 |</a:t>
+            </a:r>
+          </a:p>
+          <a:p xmlns:a="http://schemas.openxmlformats.org/drawingml/2006/main">
+            <a:r>
+              <a:t>| C05 | 下游 circuit | 外部支持 | 不同任务/模型 |</a:t>
+            </a:r>
+          </a:p>
+          <a:p xmlns:a="http://schemas.openxmlformats.org/drawingml/2006/main">
+            <a:r>
+              <a:t/>
+            </a:r>
+          </a:p>
+          <a:p xmlns:a="http://schemas.openxmlformats.org/drawingml/2006/main">
+            <a:r>
+              <a:t>教师讲述：</a:t>
+            </a:r>
+          </a:p>
+          <a:p xmlns:a="http://schemas.openxmlformats.org/drawingml/2006/main">
+            <a:r>
+              <a:t>五条均已完成 claim-level 核验，但来自不同设置。演示重点是按子问题分配角色，并携带 caveat，不把跨论文结果合成效应量。</a:t>
+            </a:r>
+          </a:p>
+          <a:p xmlns:a="http://schemas.openxmlformats.org/drawingml/2006/main">
+            <a:r>
+              <a:t/>
+            </a:r>
+          </a:p>
+          <a:p xmlns:a="http://schemas.openxmlformats.org/drawingml/2006/main">
+            <a:r>
+              <a:t>学生动作：</a:t>
+            </a:r>
+          </a:p>
+          <a:p xmlns:a="http://schemas.openxmlformats.org/drawingml/2006/main">
+            <a:r>
+              <a:t>请学生判断：C16 是 C02 的直接冲突，还是对“可解释→可控制”推断的限制？</a:t>
+            </a:r>
+          </a:p>
+          <a:p xmlns:a="http://schemas.openxmlformats.org/drawingml/2006/main">
+            <a:r>
+              <a:t/>
+            </a:r>
+          </a:p>
+          <a:p xmlns:a="http://schemas.openxmlformats.org/drawingml/2006/main">
+            <a:r>
+              <a:t>来源与边界：</a:t>
+            </a:r>
+          </a:p>
+          <a:p xmlns:a="http://schemas.openxmlformats.org/drawingml/2006/main">
+            <a:r>
+              <a:t>[mi-evidence-map-demo.md](./mi-evidence-map-demo.md)；MI-C02/C05/C16/C18/C31 原文位置见 [MI trace](../lesson-03/mi-search-trace-demo.md) §5。</a:t>
+            </a:r>
+          </a:p>
+          <a:p xmlns:a="http://schemas.openxmlformats.org/drawingml/2006/main">
+            <a:r>
+              <a:t/>
+            </a:r>
+          </a:p>
+          <a:p xmlns:a="http://schemas.openxmlformats.org/drawingml/2006/main">
+            <a:r>
+              <a:t>---</a:t>
+            </a:r>
+          </a:p>
+          <a:p xmlns:a="http://schemas.openxmlformats.org/drawingml/2006/main">
+            <a:r>
+              <a:t/>
             </a:r>
           </a:p>
           <a:p xmlns:a="http://schemas.openxmlformats.org/drawingml/2006/main">
@@ -758,7 +1378,17 @@
           </a:p>
           <a:p xmlns:a="http://schemas.openxmlformats.org/drawingml/2006/main">
             <a:r>
-              <a:t>- 本页仅使用课程内部规则与教学材料。</a:t>
+              <a:t/>
+            </a:r>
+          </a:p>
+          <a:p xmlns:a="http://schemas.openxmlformats.org/drawingml/2006/main">
+            <a:r>
+              <a:t>- 本课 handout.md 与 slides.md</a:t>
+            </a:r>
+          </a:p>
+          <a:p xmlns:a="http://schemas.openxmlformats.org/drawingml/2006/main">
+            <a:r>
+              <a:t/>
             </a:r>
           </a:p>
           <a:p xmlns:a="http://schemas.openxmlformats.org/drawingml/2006/main">
@@ -833,7 +1463,127 @@
           <a:lstStyle xmlns:a="http://schemas.openxmlformats.org/drawingml/2006/main"/>
           <a:p xmlns:a="http://schemas.openxmlformats.org/drawingml/2006/main">
             <a:r>
-              <a:t>页面标题：MI 演示：支持、限制、冲突与空白</a:t>
+              <a:t>页面：P14 MI 演示：支持、限制、冲突与空白</a:t>
+            </a:r>
+          </a:p>
+          <a:p xmlns:a="http://schemas.openxmlformats.org/drawingml/2006/main">
+            <a:r>
+              <a:t/>
+            </a:r>
+          </a:p>
+          <a:p xmlns:a="http://schemas.openxmlformats.org/drawingml/2006/main">
+            <a:r>
+              <a:t>讲义位置：本课讲义；见逐页母稿映射表</a:t>
+            </a:r>
+          </a:p>
+          <a:p xmlns:a="http://schemas.openxmlformats.org/drawingml/2006/main">
+            <a:r>
+              <a:t/>
+            </a:r>
+          </a:p>
+          <a:p xmlns:a="http://schemas.openxmlformats.org/drawingml/2006/main">
+            <a:r>
+              <a:t>屏显核对：</a:t>
+            </a:r>
+          </a:p>
+          <a:p xmlns:a="http://schemas.openxmlformats.org/drawingml/2006/main">
+            <a:r>
+              <a:t>![SAE 因果有效性证据地图](assets/mi-causal-evidence-map.svg)</a:t>
+            </a:r>
+          </a:p>
+          <a:p xmlns:a="http://schemas.openxmlformats.org/drawingml/2006/main">
+            <a:r>
+              <a:t/>
+            </a:r>
+          </a:p>
+          <a:p xmlns:a="http://schemas.openxmlformats.org/drawingml/2006/main">
+            <a:r>
+              <a:t>当前判断：</a:t>
+            </a:r>
+          </a:p>
+          <a:p xmlns:a="http://schemas.openxmlformats.org/drawingml/2006/main">
+            <a:r>
+              <a:t>- 支持：C02 足以启动同设置最小复现</a:t>
+            </a:r>
+          </a:p>
+          <a:p xmlns:a="http://schemas.openxmlformats.org/drawingml/2006/main">
+            <a:r>
+              <a:t>- 限制：C16 区分可解释与可控制</a:t>
+            </a:r>
+          </a:p>
+          <a:p xmlns:a="http://schemas.openxmlformats.org/drawingml/2006/main">
+            <a:r>
+              <a:t>- 效度威胁：C31 区分 patching success 与 causal faithfulness</a:t>
+            </a:r>
+          </a:p>
+          <a:p xmlns:a="http://schemas.openxmlformats.org/drawingml/2006/main">
+            <a:r>
+              <a:t>- 外部支持：C05/C18 说明 held-out circuit 与多指标评价可行</a:t>
+            </a:r>
+          </a:p>
+          <a:p xmlns:a="http://schemas.openxmlformats.org/drawingml/2006/main">
+            <a:r>
+              <a:t>- 空白：同设置重构敏感性、随机/监督方向、held-out、dormant-pathway 排除</a:t>
+            </a:r>
+          </a:p>
+          <a:p xmlns:a="http://schemas.openxmlformats.org/drawingml/2006/main">
+            <a:r>
+              <a:t/>
+            </a:r>
+          </a:p>
+          <a:p xmlns:a="http://schemas.openxmlformats.org/drawingml/2006/main">
+            <a:r>
+              <a:t>教师讲述：</a:t>
+            </a:r>
+          </a:p>
+          <a:p xmlns:a="http://schemas.openxmlformats.org/drawingml/2006/main">
+            <a:r>
+              <a:t>强调支持、限制和效度威胁可同时成立。C16/C31 不抹掉 C02 的观察结果，而是限制它能推出的结论。</a:t>
+            </a:r>
+          </a:p>
+          <a:p xmlns:a="http://schemas.openxmlformats.org/drawingml/2006/main">
+            <a:r>
+              <a:t/>
+            </a:r>
+          </a:p>
+          <a:p xmlns:a="http://schemas.openxmlformats.org/drawingml/2006/main">
+            <a:r>
+              <a:t>学生动作：</a:t>
+            </a:r>
+          </a:p>
+          <a:p xmlns:a="http://schemas.openxmlformats.org/drawingml/2006/main">
+            <a:r>
+              <a:t>让学生指出：哪一项缺失证据最直接对应 C31 的替代解释？</a:t>
+            </a:r>
+          </a:p>
+          <a:p xmlns:a="http://schemas.openxmlformats.org/drawingml/2006/main">
+            <a:r>
+              <a:t/>
+            </a:r>
+          </a:p>
+          <a:p xmlns:a="http://schemas.openxmlformats.org/drawingml/2006/main">
+            <a:r>
+              <a:t>来源与边界：</a:t>
+            </a:r>
+          </a:p>
+          <a:p xmlns:a="http://schemas.openxmlformats.org/drawingml/2006/main">
+            <a:r>
+              <a:t>[mi-evidence-map-demo.md](./mi-evidence-map-demo.md)；图源与许可见 [assets/README.md](./assets/README.md)。</a:t>
+            </a:r>
+          </a:p>
+          <a:p xmlns:a="http://schemas.openxmlformats.org/drawingml/2006/main">
+            <a:r>
+              <a:t/>
+            </a:r>
+          </a:p>
+          <a:p xmlns:a="http://schemas.openxmlformats.org/drawingml/2006/main">
+            <a:r>
+              <a:t>---</a:t>
+            </a:r>
+          </a:p>
+          <a:p xmlns:a="http://schemas.openxmlformats.org/drawingml/2006/main">
+            <a:r>
+              <a:t/>
             </a:r>
           </a:p>
           <a:p xmlns:a="http://schemas.openxmlformats.org/drawingml/2006/main">
@@ -843,7 +1593,17 @@
           </a:p>
           <a:p xmlns:a="http://schemas.openxmlformats.org/drawingml/2006/main">
             <a:r>
-              <a:t>- 本页仅使用课程内部规则与教学材料。</a:t>
+              <a:t/>
+            </a:r>
+          </a:p>
+          <a:p xmlns:a="http://schemas.openxmlformats.org/drawingml/2006/main">
+            <a:r>
+              <a:t>- 本课 handout.md 与 slides.md</a:t>
+            </a:r>
+          </a:p>
+          <a:p xmlns:a="http://schemas.openxmlformats.org/drawingml/2006/main">
+            <a:r>
+              <a:t/>
             </a:r>
           </a:p>
           <a:p xmlns:a="http://schemas.openxmlformats.org/drawingml/2006/main">
@@ -918,7 +1678,107 @@
           <a:lstStyle xmlns:a="http://schemas.openxmlformats.org/drawingml/2006/main"/>
           <a:p xmlns:a="http://schemas.openxmlformats.org/drawingml/2006/main">
             <a:r>
-              <a:t>页面标题：MI 演示：四句受限 mini review</a:t>
+              <a:t>页面：P15 MI 演示：四句受限 mini review</a:t>
+            </a:r>
+          </a:p>
+          <a:p xmlns:a="http://schemas.openxmlformats.org/drawingml/2006/main">
+            <a:r>
+              <a:t/>
+            </a:r>
+          </a:p>
+          <a:p xmlns:a="http://schemas.openxmlformats.org/drawingml/2006/main">
+            <a:r>
+              <a:t>讲义位置：本课讲义；见逐页母稿映射表</a:t>
+            </a:r>
+          </a:p>
+          <a:p xmlns:a="http://schemas.openxmlformats.org/drawingml/2006/main">
+            <a:r>
+              <a:t/>
+            </a:r>
+          </a:p>
+          <a:p xmlns:a="http://schemas.openxmlformats.org/drawingml/2006/main">
+            <a:r>
+              <a:t>屏显核对：</a:t>
+            </a:r>
+          </a:p>
+          <a:p xmlns:a="http://schemas.openxmlformats.org/drawingml/2006/main">
+            <a:r>
+              <a:t>1. 在 Pythia-410M layer 11 的 IOI 设置中，C02 报告 SAE patching 比 PCA 以更少 patch 与更小 edit 达到目标 KL。</a:t>
+            </a:r>
+          </a:p>
+          <a:p xmlns:a="http://schemas.openxmlformats.org/drawingml/2006/main">
+            <a:r>
+              <a:t>2. 该结果直接支持“干预效率”主张，但重构误差与跨任务泛化仍有限制。</a:t>
+            </a:r>
+          </a:p>
+          <a:p xmlns:a="http://schemas.openxmlformats.org/drawingml/2006/main">
+            <a:r>
+              <a:t>3. C16 表明可解释特征未必足够可控制；C31 表明子空间 patching 可能激活 dormant pathway——两者限制因果解释，但不是同设置直接反驳。</a:t>
+            </a:r>
+          </a:p>
+          <a:p xmlns:a="http://schemas.openxmlformats.org/drawingml/2006/main">
+            <a:r>
+              <a:t>4. 因此可启动 SAE-vs-PCA baseline；因果忠实仍需同设置对照、held-out 与正常路径证据，综合状态为 `review`。</a:t>
+            </a:r>
+          </a:p>
+          <a:p xmlns:a="http://schemas.openxmlformats.org/drawingml/2006/main">
+            <a:r>
+              <a:t/>
+            </a:r>
+          </a:p>
+          <a:p xmlns:a="http://schemas.openxmlformats.org/drawingml/2006/main">
+            <a:r>
+              <a:t>教师讲述：</a:t>
+            </a:r>
+          </a:p>
+          <a:p xmlns:a="http://schemas.openxmlformats.org/drawingml/2006/main">
+            <a:r>
+              <a:t>逐句检查范围是否随主张移动。尤其不能把 C16/C31 的方法论限制改写成“C02 失败”，也不能把 C05 的外部支持写成同任务复现。</a:t>
+            </a:r>
+          </a:p>
+          <a:p xmlns:a="http://schemas.openxmlformats.org/drawingml/2006/main">
+            <a:r>
+              <a:t/>
+            </a:r>
+          </a:p>
+          <a:p xmlns:a="http://schemas.openxmlformats.org/drawingml/2006/main">
+            <a:r>
+              <a:t>学生动作：</a:t>
+            </a:r>
+          </a:p>
+          <a:p xmlns:a="http://schemas.openxmlformats.org/drawingml/2006/main">
+            <a:r>
+              <a:t>让学生指出：哪一句若删掉模型/任务限定，会发生最大程度的过度概括？</a:t>
+            </a:r>
+          </a:p>
+          <a:p xmlns:a="http://schemas.openxmlformats.org/drawingml/2006/main">
+            <a:r>
+              <a:t/>
+            </a:r>
+          </a:p>
+          <a:p xmlns:a="http://schemas.openxmlformats.org/drawingml/2006/main">
+            <a:r>
+              <a:t>来源与边界：</a:t>
+            </a:r>
+          </a:p>
+          <a:p xmlns:a="http://schemas.openxmlformats.org/drawingml/2006/main">
+            <a:r>
+              <a:t>[mi-evidence-map-demo.md](./mi-evidence-map-demo.md)；状态判定见 [material-contracts.md](../../references/material-contracts.md)。</a:t>
+            </a:r>
+          </a:p>
+          <a:p xmlns:a="http://schemas.openxmlformats.org/drawingml/2006/main">
+            <a:r>
+              <a:t/>
+            </a:r>
+          </a:p>
+          <a:p xmlns:a="http://schemas.openxmlformats.org/drawingml/2006/main">
+            <a:r>
+              <a:t>---</a:t>
+            </a:r>
+          </a:p>
+          <a:p xmlns:a="http://schemas.openxmlformats.org/drawingml/2006/main">
+            <a:r>
+              <a:t/>
             </a:r>
           </a:p>
           <a:p xmlns:a="http://schemas.openxmlformats.org/drawingml/2006/main">
@@ -928,7 +1788,17 @@
           </a:p>
           <a:p xmlns:a="http://schemas.openxmlformats.org/drawingml/2006/main">
             <a:r>
-              <a:t>- 本页仅使用课程内部规则与教学材料。</a:t>
+              <a:t/>
+            </a:r>
+          </a:p>
+          <a:p xmlns:a="http://schemas.openxmlformats.org/drawingml/2006/main">
+            <a:r>
+              <a:t>- 本课 handout.md 与 slides.md</a:t>
+            </a:r>
+          </a:p>
+          <a:p xmlns:a="http://schemas.openxmlformats.org/drawingml/2006/main">
+            <a:r>
+              <a:t/>
             </a:r>
           </a:p>
           <a:p xmlns:a="http://schemas.openxmlformats.org/drawingml/2006/main">
@@ -1003,7 +1873,102 @@
           <a:lstStyle xmlns:a="http://schemas.openxmlformats.org/drawingml/2006/main"/>
           <a:p xmlns:a="http://schemas.openxmlformats.org/drawingml/2006/main">
             <a:r>
-              <a:t>页面标题：真实失败：把 efficiency 写成 faithfulness</a:t>
+              <a:t>页面：P16 局限不等于论文之间发生冲突</a:t>
+            </a:r>
+          </a:p>
+          <a:p xmlns:a="http://schemas.openxmlformats.org/drawingml/2006/main">
+            <a:r>
+              <a:t/>
+            </a:r>
+          </a:p>
+          <a:p xmlns:a="http://schemas.openxmlformats.org/drawingml/2006/main">
+            <a:r>
+              <a:t>讲义位置：handout.md §七、贯穿案例：从阅读卡到证据地图</a:t>
+            </a:r>
+          </a:p>
+          <a:p xmlns:a="http://schemas.openxmlformats.org/drawingml/2006/main">
+            <a:r>
+              <a:t/>
+            </a:r>
+          </a:p>
+          <a:p xmlns:a="http://schemas.openxmlformats.org/drawingml/2006/main">
+            <a:r>
+              <a:t>屏显核对：</a:t>
+            </a:r>
+          </a:p>
+          <a:p xmlns:a="http://schemas.openxmlformats.org/drawingml/2006/main">
+            <a:r>
+              <a:t>原文讨论效率 → 可以支持效率判断</a:t>
+            </a:r>
+          </a:p>
+          <a:p xmlns:a="http://schemas.openxmlformats.org/drawingml/2006/main">
+            <a:r>
+              <a:t>原文未检验 faithfulness → 这项结论仍未获得检验</a:t>
+            </a:r>
+          </a:p>
+          <a:p xmlns:a="http://schemas.openxmlformats.org/drawingml/2006/main">
+            <a:r>
+              <a:t>把效率写成 faithfulness → 我们的推断越界</a:t>
+            </a:r>
+          </a:p>
+          <a:p xmlns:a="http://schemas.openxmlformats.org/drawingml/2006/main">
+            <a:r>
+              <a:t/>
+            </a:r>
+          </a:p>
+          <a:p xmlns:a="http://schemas.openxmlformats.org/drawingml/2006/main">
+            <a:r>
+              <a:t>只有针对可比命题的相反证据，才进入冲突格。</a:t>
+            </a:r>
+          </a:p>
+          <a:p xmlns:a="http://schemas.openxmlformats.org/drawingml/2006/main">
+            <a:r>
+              <a:t/>
+            </a:r>
+          </a:p>
+          <a:p xmlns:a="http://schemas.openxmlformats.org/drawingml/2006/main">
+            <a:r>
+              <a:t>教师讲述：</a:t>
+            </a:r>
+          </a:p>
+          <a:p xmlns:a="http://schemas.openxmlformats.org/drawingml/2006/main">
+            <a:r>
+              <a:t>不要把自己的误读包装成文献冲突。用本课现有原文定位逐句对照，分开原文结果、未测量项和我们的越界推断。若学生认为“没有验证就是反驳”，追问原文是否真的观察到了相反结果。</a:t>
+            </a:r>
+          </a:p>
+          <a:p xmlns:a="http://schemas.openxmlformats.org/drawingml/2006/main">
+            <a:r>
+              <a:t/>
+            </a:r>
+          </a:p>
+          <a:p xmlns:a="http://schemas.openxmlformats.org/drawingml/2006/main">
+            <a:r>
+              <a:t>学生动作：</a:t>
+            </a:r>
+          </a:p>
+          <a:p xmlns:a="http://schemas.openxmlformats.org/drawingml/2006/main">
+            <a:r>
+              <a:t>把原误写句移到局限或待验证栏，保留原文位置。</a:t>
+            </a:r>
+          </a:p>
+          <a:p xmlns:a="http://schemas.openxmlformats.org/drawingml/2006/main">
+            <a:r>
+              <a:t/>
+            </a:r>
+          </a:p>
+          <a:p xmlns:a="http://schemas.openxmlformats.org/drawingml/2006/main">
+            <a:r>
+              <a:t>来源与边界：</a:t>
+            </a:r>
+          </a:p>
+          <a:p xmlns:a="http://schemas.openxmlformats.org/drawingml/2006/main">
+            <a:r>
+              <a:t>./handout.md；本页课堂判断示例不作实证结论</a:t>
+            </a:r>
+          </a:p>
+          <a:p xmlns:a="http://schemas.openxmlformats.org/drawingml/2006/main">
+            <a:r>
+              <a:t/>
             </a:r>
           </a:p>
           <a:p xmlns:a="http://schemas.openxmlformats.org/drawingml/2006/main">
@@ -1013,7 +1978,17 @@
           </a:p>
           <a:p xmlns:a="http://schemas.openxmlformats.org/drawingml/2006/main">
             <a:r>
-              <a:t>- 本页仅使用课程内部规则与教学材料。</a:t>
+              <a:t/>
+            </a:r>
+          </a:p>
+          <a:p xmlns:a="http://schemas.openxmlformats.org/drawingml/2006/main">
+            <a:r>
+              <a:t>- 本课 handout.md 与 slides.md</a:t>
+            </a:r>
+          </a:p>
+          <a:p xmlns:a="http://schemas.openxmlformats.org/drawingml/2006/main">
+            <a:r>
+              <a:t/>
             </a:r>
           </a:p>
           <a:p xmlns:a="http://schemas.openxmlformats.org/drawingml/2006/main">
@@ -1088,7 +2063,137 @@
           <a:lstStyle xmlns:a="http://schemas.openxmlformats.org/drawingml/2006/main"/>
           <a:p xmlns:a="http://schemas.openxmlformats.org/drawingml/2006/main">
             <a:r>
-              <a:t>页面标题：个人实践：跑通一次综述结构重组</a:t>
+              <a:t>页面：P17 个人实践：跑通一次综述结构重组</a:t>
+            </a:r>
+          </a:p>
+          <a:p xmlns:a="http://schemas.openxmlformats.org/drawingml/2006/main">
+            <a:r>
+              <a:t/>
+            </a:r>
+          </a:p>
+          <a:p xmlns:a="http://schemas.openxmlformats.org/drawingml/2006/main">
+            <a:r>
+              <a:t>讲义位置：本课讲义；见逐页母稿映射表</a:t>
+            </a:r>
+          </a:p>
+          <a:p xmlns:a="http://schemas.openxmlformats.org/drawingml/2006/main">
+            <a:r>
+              <a:t/>
+            </a:r>
+          </a:p>
+          <a:p xmlns:a="http://schemas.openxmlformats.org/drawingml/2006/main">
+            <a:r>
+              <a:t>屏显核对：</a:t>
+            </a:r>
+          </a:p>
+          <a:p xmlns:a="http://schemas.openxmlformats.org/drawingml/2006/main">
+            <a:r>
+              <a:t>本轮完成：</a:t>
+            </a:r>
+          </a:p>
+          <a:p xmlns:a="http://schemas.openxmlformats.org/drawingml/2006/main">
+            <a:r>
+              <a:t>1. 只选 1 个子问题</a:t>
+            </a:r>
+          </a:p>
+          <a:p xmlns:a="http://schemas.openxmlformats.org/drawingml/2006/main">
+            <a:r>
+              <a:t>2. 选 2 张 verified / verified-with-caveat 阅读卡</a:t>
+            </a:r>
+          </a:p>
+          <a:p xmlns:a="http://schemas.openxmlformats.org/drawingml/2006/main">
+            <a:r>
+              <a:t>3. 填 1 个窄矩阵，抽取 2 条证据主格</a:t>
+            </a:r>
+          </a:p>
+          <a:p xmlns:a="http://schemas.openxmlformats.org/drawingml/2006/main">
+            <a:r>
+              <a:t>4. 写 4 句 mini literature review</a:t>
+            </a:r>
+          </a:p>
+          <a:p xmlns:a="http://schemas.openxmlformats.org/drawingml/2006/main">
+            <a:r>
+              <a:t>5. 核验 1 条 AI 归纳并记日志</a:t>
+            </a:r>
+          </a:p>
+          <a:p xmlns:a="http://schemas.openxmlformats.org/drawingml/2006/main">
+            <a:r>
+              <a:t>6. 如出现空白：只记类型 + pending + 下一步窄检索 + 1 个候选题（表述 + 生成路径标签）</a:t>
+            </a:r>
+          </a:p>
+          <a:p xmlns:a="http://schemas.openxmlformats.org/drawingml/2006/main">
+            <a:r>
+              <a:t/>
+            </a:r>
+          </a:p>
+          <a:p xmlns:a="http://schemas.openxmlformats.org/drawingml/2006/main">
+            <a:r>
+              <a:t>选择顺序：本人真实问题 → 导师组公开问题 → 课程贯穿案例</a:t>
+            </a:r>
+          </a:p>
+          <a:p xmlns:a="http://schemas.openxmlformats.org/drawingml/2006/main">
+            <a:r>
+              <a:t>候选题池 ≥3 个（≥2 条路径、≥1 非文献空白路径）在第 6 课前补齐</a:t>
+            </a:r>
+          </a:p>
+          <a:p xmlns:a="http://schemas.openxmlformats.org/drawingml/2006/main">
+            <a:r>
+              <a:t/>
+            </a:r>
+          </a:p>
+          <a:p xmlns:a="http://schemas.openxmlformats.org/drawingml/2006/main">
+            <a:r>
+              <a:t>教师讲述：</a:t>
+            </a:r>
+          </a:p>
+          <a:p xmlns:a="http://schemas.openxmlformats.org/drawingml/2006/main">
+            <a:r>
+              <a:t>没有真实课题的学生可沿用虚构教学样例。第一段先完成两张卡的可比性/冲突判断和窄矩阵；教师插入“不可比不等于冲突”共性点评；第二段复用同一组记录生成地图视图、四句草稿和 AI 记录。空白完整三步检验与 ≥3 候选题池在第 6 课前补齐。</a:t>
+            </a:r>
+          </a:p>
+          <a:p xmlns:a="http://schemas.openxmlformats.org/drawingml/2006/main">
+            <a:r>
+              <a:t/>
+            </a:r>
+          </a:p>
+          <a:p xmlns:a="http://schemas.openxmlformats.org/drawingml/2006/main">
+            <a:r>
+              <a:t>学生动作：</a:t>
+            </a:r>
+          </a:p>
+          <a:p xmlns:a="http://schemas.openxmlformats.org/drawingml/2006/main">
+            <a:r>
+              <a:t>说明任务后切换到 P18 模板停留页。教师巡视只处理共同卡点，不逐台排障。库访问故障者使用纸面或 Markdown 模板完成。</a:t>
+            </a:r>
+          </a:p>
+          <a:p xmlns:a="http://schemas.openxmlformats.org/drawingml/2006/main">
+            <a:r>
+              <a:t/>
+            </a:r>
+          </a:p>
+          <a:p xmlns:a="http://schemas.openxmlformats.org/drawingml/2006/main">
+            <a:r>
+              <a:t>来源与边界：</a:t>
+            </a:r>
+          </a:p>
+          <a:p xmlns:a="http://schemas.openxmlformats.org/drawingml/2006/main">
+            <a:r>
+              <a:t>[starter-template.md](../../course/starter-template.md) 最小文件结构；第 3-4 课项目工件。</a:t>
+            </a:r>
+          </a:p>
+          <a:p xmlns:a="http://schemas.openxmlformats.org/drawingml/2006/main">
+            <a:r>
+              <a:t/>
+            </a:r>
+          </a:p>
+          <a:p xmlns:a="http://schemas.openxmlformats.org/drawingml/2006/main">
+            <a:r>
+              <a:t>---</a:t>
+            </a:r>
+          </a:p>
+          <a:p xmlns:a="http://schemas.openxmlformats.org/drawingml/2006/main">
+            <a:r>
+              <a:t/>
             </a:r>
           </a:p>
           <a:p xmlns:a="http://schemas.openxmlformats.org/drawingml/2006/main">
@@ -1098,7 +2203,17 @@
           </a:p>
           <a:p xmlns:a="http://schemas.openxmlformats.org/drawingml/2006/main">
             <a:r>
-              <a:t>- 本页仅使用课程内部规则与教学材料。</a:t>
+              <a:t/>
+            </a:r>
+          </a:p>
+          <a:p xmlns:a="http://schemas.openxmlformats.org/drawingml/2006/main">
+            <a:r>
+              <a:t>- 本课 handout.md 与 slides.md</a:t>
+            </a:r>
+          </a:p>
+          <a:p xmlns:a="http://schemas.openxmlformats.org/drawingml/2006/main">
+            <a:r>
+              <a:t/>
             </a:r>
           </a:p>
           <a:p xmlns:a="http://schemas.openxmlformats.org/drawingml/2006/main">
@@ -1173,7 +2288,207 @@
           <a:lstStyle xmlns:a="http://schemas.openxmlformats.org/drawingml/2006/main"/>
           <a:p xmlns:a="http://schemas.openxmlformats.org/drawingml/2006/main">
             <a:r>
-              <a:t>页面标题：实践停留页：模板</a:t>
+              <a:t>页面：P18 实践停留页：模板</a:t>
+            </a:r>
+          </a:p>
+          <a:p xmlns:a="http://schemas.openxmlformats.org/drawingml/2006/main">
+            <a:r>
+              <a:t/>
+            </a:r>
+          </a:p>
+          <a:p xmlns:a="http://schemas.openxmlformats.org/drawingml/2006/main">
+            <a:r>
+              <a:t>讲义位置：本课讲义；见逐页母稿映射表</a:t>
+            </a:r>
+          </a:p>
+          <a:p xmlns:a="http://schemas.openxmlformats.org/drawingml/2006/main">
+            <a:r>
+              <a:t/>
+            </a:r>
+          </a:p>
+          <a:p xmlns:a="http://schemas.openxmlformats.org/drawingml/2006/main">
+            <a:r>
+              <a:t>屏显核对：</a:t>
+            </a:r>
+          </a:p>
+          <a:p xmlns:a="http://schemas.openxmlformats.org/drawingml/2006/main">
+            <a:r>
+              <a:t>当堂只完成 1 个子问题：</a:t>
+            </a:r>
+          </a:p>
+          <a:p xmlns:a="http://schemas.openxmlformats.org/drawingml/2006/main">
+            <a:r>
+              <a:t/>
+            </a:r>
+          </a:p>
+          <a:p xmlns:a="http://schemas.openxmlformats.org/drawingml/2006/main">
+            <a:r>
+              <a:t>```text</a:t>
+            </a:r>
+          </a:p>
+          <a:p xmlns:a="http://schemas.openxmlformats.org/drawingml/2006/main">
+            <a:r>
+              <a:t>| 文献（核验后） | 子问题 a | 证据角色 | 核验状态 |</a:t>
+            </a:r>
+          </a:p>
+          <a:p xmlns:a="http://schemas.openxmlformats.org/drawingml/2006/main">
+            <a:r>
+              <a:t>```</a:t>
+            </a:r>
+          </a:p>
+          <a:p xmlns:a="http://schemas.openxmlformats.org/drawingml/2006/main">
+            <a:r>
+              <a:t/>
+            </a:r>
+          </a:p>
+          <a:p xmlns:a="http://schemas.openxmlformats.org/drawingml/2006/main">
+            <a:r>
+              <a:t>证据地图（当堂 2 条主格）：</a:t>
+            </a:r>
+          </a:p>
+          <a:p xmlns:a="http://schemas.openxmlformats.org/drawingml/2006/main">
+            <a:r>
+              <a:t/>
+            </a:r>
+          </a:p>
+          <a:p xmlns:a="http://schemas.openxmlformats.org/drawingml/2006/main">
+            <a:r>
+              <a:t>```text</a:t>
+            </a:r>
+          </a:p>
+          <a:p xmlns:a="http://schemas.openxmlformats.org/drawingml/2006/main">
+            <a:r>
+              <a:t>| 编号 | 子问题 | 文献 | 原文位置 | 主张 | 证据角色 | 冲突/局限 | 核验状态 |</a:t>
+            </a:r>
+          </a:p>
+          <a:p xmlns:a="http://schemas.openxmlformats.org/drawingml/2006/main">
+            <a:r>
+              <a:t>```</a:t>
+            </a:r>
+          </a:p>
+          <a:p xmlns:a="http://schemas.openxmlformats.org/drawingml/2006/main">
+            <a:r>
+              <a:t/>
+            </a:r>
+          </a:p>
+          <a:p xmlns:a="http://schemas.openxmlformats.org/drawingml/2006/main">
+            <a:r>
+              <a:t>四句 mini literature review：</a:t>
+            </a:r>
+          </a:p>
+          <a:p xmlns:a="http://schemas.openxmlformats.org/drawingml/2006/main">
+            <a:r>
+              <a:t/>
+            </a:r>
+          </a:p>
+          <a:p xmlns:a="http://schemas.openxmlformats.org/drawingml/2006/main">
+            <a:r>
+              <a:t>```text</a:t>
+            </a:r>
+          </a:p>
+          <a:p xmlns:a="http://schemas.openxmlformats.org/drawingml/2006/main">
+            <a:r>
+              <a:t>1 范围与子问题｜2 直接证据｜3 补充/对比/冲突｜4 空白与下一步核验</a:t>
+            </a:r>
+          </a:p>
+          <a:p xmlns:a="http://schemas.openxmlformats.org/drawingml/2006/main">
+            <a:r>
+              <a:t>```</a:t>
+            </a:r>
+          </a:p>
+          <a:p xmlns:a="http://schemas.openxmlformats.org/drawingml/2006/main">
+            <a:r>
+              <a:t/>
+            </a:r>
+          </a:p>
+          <a:p xmlns:a="http://schemas.openxmlformats.org/drawingml/2006/main">
+            <a:r>
+              <a:t>AI 使用记录最小字段：工具/模型｜用途｜Context｜输出用途｜人工核验方式｜问题</a:t>
+            </a:r>
+          </a:p>
+          <a:p xmlns:a="http://schemas.openxmlformats.org/drawingml/2006/main">
+            <a:r>
+              <a:t/>
+            </a:r>
+          </a:p>
+          <a:p xmlns:a="http://schemas.openxmlformats.org/drawingml/2006/main">
+            <a:r>
+              <a:t>空白候选（如有）：类型｜pending｜下一步窄检索</a:t>
+            </a:r>
+          </a:p>
+          <a:p xmlns:a="http://schemas.openxmlformats.org/drawingml/2006/main">
+            <a:r>
+              <a:t>候选题（如有）：一句话表述｜生成路径标签｜当前证据｜pending</a:t>
+            </a:r>
+          </a:p>
+          <a:p xmlns:a="http://schemas.openxmlformats.org/drawingml/2006/main">
+            <a:r>
+              <a:t/>
+            </a:r>
+          </a:p>
+          <a:p xmlns:a="http://schemas.openxmlformats.org/drawingml/2006/main">
+            <a:r>
+              <a:t>写入位置：`evidence-map.md` 或 `notes/`</a:t>
+            </a:r>
+          </a:p>
+          <a:p xmlns:a="http://schemas.openxmlformats.org/drawingml/2006/main">
+            <a:r>
+              <a:t/>
+            </a:r>
+          </a:p>
+          <a:p xmlns:a="http://schemas.openxmlformats.org/drawingml/2006/main">
+            <a:r>
+              <a:t>教师讲述：</a:t>
+            </a:r>
+          </a:p>
+          <a:p xmlns:a="http://schemas.openxmlformats.org/drawingml/2006/main">
+            <a:r>
+              <a:t>模板投屏停留。学生当堂完成窄矩阵、2 条主格、4 句草稿和 1 条 AI 记录。空白候选只记类型、pending 和下一步；候选题只记表述与路径标签，三步完整检验与 ≥3 候选题池课后补齐。</a:t>
+            </a:r>
+          </a:p>
+          <a:p xmlns:a="http://schemas.openxmlformats.org/drawingml/2006/main">
+            <a:r>
+              <a:t/>
+            </a:r>
+          </a:p>
+          <a:p xmlns:a="http://schemas.openxmlformats.org/drawingml/2006/main">
+            <a:r>
+              <a:t>学生动作：</a:t>
+            </a:r>
+          </a:p>
+          <a:p xmlns:a="http://schemas.openxmlformats.org/drawingml/2006/main">
+            <a:r>
+              <a:t>完成两段个人实践与中点点评；学生只输入一次共享记录，矩阵和地图不重复搬写。</a:t>
+            </a:r>
+          </a:p>
+          <a:p xmlns:a="http://schemas.openxmlformats.org/drawingml/2006/main">
+            <a:r>
+              <a:t/>
+            </a:r>
+          </a:p>
+          <a:p xmlns:a="http://schemas.openxmlformats.org/drawingml/2006/main">
+            <a:r>
+              <a:t>来源与边界：</a:t>
+            </a:r>
+          </a:p>
+          <a:p xmlns:a="http://schemas.openxmlformats.org/drawingml/2006/main">
+            <a:r>
+              <a:t>讲义 §二·3 矩阵；§三·2 证据地图；§四·3 三步检验；§四·4 候选题池；§五·3 AI 使用记录字段。</a:t>
+            </a:r>
+          </a:p>
+          <a:p xmlns:a="http://schemas.openxmlformats.org/drawingml/2006/main">
+            <a:r>
+              <a:t/>
+            </a:r>
+          </a:p>
+          <a:p xmlns:a="http://schemas.openxmlformats.org/drawingml/2006/main">
+            <a:r>
+              <a:t>---</a:t>
+            </a:r>
+          </a:p>
+          <a:p xmlns:a="http://schemas.openxmlformats.org/drawingml/2006/main">
+            <a:r>
+              <a:t/>
             </a:r>
           </a:p>
           <a:p xmlns:a="http://schemas.openxmlformats.org/drawingml/2006/main">
@@ -1183,7 +2498,17 @@
           </a:p>
           <a:p xmlns:a="http://schemas.openxmlformats.org/drawingml/2006/main">
             <a:r>
-              <a:t>- 本页仅使用课程内部规则与教学材料。</a:t>
+              <a:t/>
+            </a:r>
+          </a:p>
+          <a:p xmlns:a="http://schemas.openxmlformats.org/drawingml/2006/main">
+            <a:r>
+              <a:t>- 本课 handout.md 与 slides.md</a:t>
+            </a:r>
+          </a:p>
+          <a:p xmlns:a="http://schemas.openxmlformats.org/drawingml/2006/main">
+            <a:r>
+              <a:t/>
             </a:r>
           </a:p>
           <a:p xmlns:a="http://schemas.openxmlformats.org/drawingml/2006/main">
@@ -1258,7 +2583,132 @@
           <a:lstStyle xmlns:a="http://schemas.openxmlformats.org/drawingml/2006/main"/>
           <a:p xmlns:a="http://schemas.openxmlformats.org/drawingml/2006/main">
             <a:r>
-              <a:t>页面标题：同伴互查四问</a:t>
+              <a:t>页面：P19 同伴互查四问</a:t>
+            </a:r>
+          </a:p>
+          <a:p xmlns:a="http://schemas.openxmlformats.org/drawingml/2006/main">
+            <a:r>
+              <a:t/>
+            </a:r>
+          </a:p>
+          <a:p xmlns:a="http://schemas.openxmlformats.org/drawingml/2006/main">
+            <a:r>
+              <a:t>讲义位置：本课讲义；见逐页母稿映射表</a:t>
+            </a:r>
+          </a:p>
+          <a:p xmlns:a="http://schemas.openxmlformats.org/drawingml/2006/main">
+            <a:r>
+              <a:t/>
+            </a:r>
+          </a:p>
+          <a:p xmlns:a="http://schemas.openxmlformats.org/drawingml/2006/main">
+            <a:r>
+              <a:t>屏显核对：</a:t>
+            </a:r>
+          </a:p>
+          <a:p xmlns:a="http://schemas.openxmlformats.org/drawingml/2006/main">
+            <a:r>
+              <a:t>两人互查四问：</a:t>
+            </a:r>
+          </a:p>
+          <a:p xmlns:a="http://schemas.openxmlformats.org/drawingml/2006/main">
+            <a:r>
+              <a:t>1. 按问题组织了吗？矩阵列来自问题分解，还是从论文关键词反推？</a:t>
+            </a:r>
+          </a:p>
+          <a:p xmlns:a="http://schemas.openxmlformats.org/drawingml/2006/main">
+            <a:r>
+              <a:t>2. 对比和冲突分开了吗？任务不可比是否被误写成相反结论？</a:t>
+            </a:r>
+          </a:p>
+          <a:p xmlns:a="http://schemas.openxmlformats.org/drawingml/2006/main">
+            <a:r>
+              <a:t>3. 空白和候选题记录诚实吗？已完成真实检索，还是明确标注待核验？候选题标了生成路径吗？</a:t>
+            </a:r>
+          </a:p>
+          <a:p xmlns:a="http://schemas.openxmlformats.org/drawingml/2006/main">
+            <a:r>
+              <a:t>4. 四句话能回指已核验条目吗？verified-with-caveat 是否保留限定，pending/rejected 是否没有被写成结论？</a:t>
+            </a:r>
+          </a:p>
+          <a:p xmlns:a="http://schemas.openxmlformats.org/drawingml/2006/main">
+            <a:r>
+              <a:t/>
+            </a:r>
+          </a:p>
+          <a:p xmlns:a="http://schemas.openxmlformats.org/drawingml/2006/main">
+            <a:r>
+              <a:t>作者记录：采纳／暂不采纳／待核验</a:t>
+            </a:r>
+          </a:p>
+          <a:p xmlns:a="http://schemas.openxmlformats.org/drawingml/2006/main">
+            <a:r>
+              <a:t/>
+            </a:r>
+          </a:p>
+          <a:p xmlns:a="http://schemas.openxmlformats.org/drawingml/2006/main">
+            <a:r>
+              <a:t>&gt; 同伴反馈限于提问，作者保留最终决定权。</a:t>
+            </a:r>
+          </a:p>
+          <a:p xmlns:a="http://schemas.openxmlformats.org/drawingml/2006/main">
+            <a:r>
+              <a:t/>
+            </a:r>
+          </a:p>
+          <a:p xmlns:a="http://schemas.openxmlformats.org/drawingml/2006/main">
+            <a:r>
+              <a:t>教师讲述：</a:t>
+            </a:r>
+          </a:p>
+          <a:p xmlns:a="http://schemas.openxmlformats.org/drawingml/2006/main">
+            <a:r>
+              <a:t>每人约 3-5 分钟：一人用 45 秒说明问题、矩阵和四句草稿；同伴按四问反馈；作者记录处理决定。反馈者不替代作者修改，不形成共同提交。</a:t>
+            </a:r>
+          </a:p>
+          <a:p xmlns:a="http://schemas.openxmlformats.org/drawingml/2006/main">
+            <a:r>
+              <a:t/>
+            </a:r>
+          </a:p>
+          <a:p xmlns:a="http://schemas.openxmlformats.org/drawingml/2006/main">
+            <a:r>
+              <a:t>学生动作：</a:t>
+            </a:r>
+          </a:p>
+          <a:p xmlns:a="http://schemas.openxmlformats.org/drawingml/2006/main">
+            <a:r>
+              <a:t>两人互查。</a:t>
+            </a:r>
+          </a:p>
+          <a:p xmlns:a="http://schemas.openxmlformats.org/drawingml/2006/main">
+            <a:r>
+              <a:t/>
+            </a:r>
+          </a:p>
+          <a:p xmlns:a="http://schemas.openxmlformats.org/drawingml/2006/main">
+            <a:r>
+              <a:t>来源与边界：</a:t>
+            </a:r>
+          </a:p>
+          <a:p xmlns:a="http://schemas.openxmlformats.org/drawingml/2006/main">
+            <a:r>
+              <a:t>同伴反馈为形成性活动，不单独计分，不共同提交（[assignments.md](../../course/assignments.md)）。</a:t>
+            </a:r>
+          </a:p>
+          <a:p xmlns:a="http://schemas.openxmlformats.org/drawingml/2006/main">
+            <a:r>
+              <a:t/>
+            </a:r>
+          </a:p>
+          <a:p xmlns:a="http://schemas.openxmlformats.org/drawingml/2006/main">
+            <a:r>
+              <a:t>---</a:t>
+            </a:r>
+          </a:p>
+          <a:p xmlns:a="http://schemas.openxmlformats.org/drawingml/2006/main">
+            <a:r>
+              <a:t/>
             </a:r>
           </a:p>
           <a:p xmlns:a="http://schemas.openxmlformats.org/drawingml/2006/main">
@@ -1268,7 +2718,17 @@
           </a:p>
           <a:p xmlns:a="http://schemas.openxmlformats.org/drawingml/2006/main">
             <a:r>
-              <a:t>- 本页仅使用课程内部规则与教学材料。</a:t>
+              <a:t/>
+            </a:r>
+          </a:p>
+          <a:p xmlns:a="http://schemas.openxmlformats.org/drawingml/2006/main">
+            <a:r>
+              <a:t>- 本课 handout.md 与 slides.md</a:t>
+            </a:r>
+          </a:p>
+          <a:p xmlns:a="http://schemas.openxmlformats.org/drawingml/2006/main">
+            <a:r>
+              <a:t/>
             </a:r>
           </a:p>
           <a:p xmlns:a="http://schemas.openxmlformats.org/drawingml/2006/main">
@@ -1343,7 +2803,192 @@
           <a:lstStyle xmlns:a="http://schemas.openxmlformats.org/drawingml/2006/main"/>
           <a:p xmlns:a="http://schemas.openxmlformats.org/drawingml/2006/main">
             <a:r>
-              <a:t>页面标题：第 4 课之后，阅读卡为什么仍不算综述</a:t>
+              <a:t>页面：P02 第 4 课之后，阅读卡为什么仍不算综述</a:t>
+            </a:r>
+          </a:p>
+          <a:p xmlns:a="http://schemas.openxmlformats.org/drawingml/2006/main">
+            <a:r>
+              <a:t/>
+            </a:r>
+          </a:p>
+          <a:p xmlns:a="http://schemas.openxmlformats.org/drawingml/2006/main">
+            <a:r>
+              <a:t>讲义位置：本课讲义；见逐页母稿映射表</a:t>
+            </a:r>
+          </a:p>
+          <a:p xmlns:a="http://schemas.openxmlformats.org/drawingml/2006/main">
+            <a:r>
+              <a:t/>
+            </a:r>
+          </a:p>
+          <a:p xmlns:a="http://schemas.openxmlformats.org/drawingml/2006/main">
+            <a:r>
+              <a:t>屏显核对：</a:t>
+            </a:r>
+          </a:p>
+          <a:p xmlns:a="http://schemas.openxmlformats.org/drawingml/2006/main">
+            <a:r>
+              <a:t>第 4 课已建立：</a:t>
+            </a:r>
+          </a:p>
+          <a:p xmlns:a="http://schemas.openxmlformats.org/drawingml/2006/main">
+            <a:r>
+              <a:t>- 阅读卡（问题、方法、设置、结果、局限、原文位置）</a:t>
+            </a:r>
+          </a:p>
+          <a:p xmlns:a="http://schemas.openxmlformats.org/drawingml/2006/main">
+            <a:r>
+              <a:t>- AI 摘要错读审计记录</a:t>
+            </a:r>
+          </a:p>
+          <a:p xmlns:a="http://schemas.openxmlformats.org/drawingml/2006/main">
+            <a:r>
+              <a:t/>
+            </a:r>
+          </a:p>
+          <a:p xmlns:a="http://schemas.openxmlformats.org/drawingml/2006/main">
+            <a:r>
+              <a:t>仍未解决：</a:t>
+            </a:r>
+          </a:p>
+          <a:p xmlns:a="http://schemas.openxmlformats.org/drawingml/2006/main">
+            <a:r>
+              <a:t>- 5 篇文献摆在一起，按论文顺序还是按问题组织？</a:t>
+            </a:r>
+          </a:p>
+          <a:p xmlns:a="http://schemas.openxmlformats.org/drawingml/2006/main">
+            <a:r>
+              <a:t>- 哪些主张相互冲突、哪些不可比？</a:t>
+            </a:r>
+          </a:p>
+          <a:p xmlns:a="http://schemas.openxmlformats.org/drawingml/2006/main">
+            <a:r>
+              <a:t>- 哪个子问题整列空白，是"没找到"还是"没人做过"？</a:t>
+            </a:r>
+          </a:p>
+          <a:p xmlns:a="http://schemas.openxmlformats.org/drawingml/2006/main">
+            <a:r>
+              <a:t/>
+            </a:r>
+          </a:p>
+          <a:p xmlns:a="http://schemas.openxmlformats.org/drawingml/2006/main">
+            <a:r>
+              <a:t>&gt; 阅读卡回答"这篇说了什么"，不回答"它们一起说明了什么"。</a:t>
+            </a:r>
+          </a:p>
+          <a:p xmlns:a="http://schemas.openxmlformats.org/drawingml/2006/main">
+            <a:r>
+              <a:t/>
+            </a:r>
+          </a:p>
+          <a:p xmlns:a="http://schemas.openxmlformats.org/drawingml/2006/main">
+            <a:r>
+              <a:t>教师讲述：</a:t>
+            </a:r>
+          </a:p>
+          <a:p xmlns:a="http://schemas.openxmlformats.org/drawingml/2006/main">
+            <a:r>
+              <a:t>回扣第 4 课：阅读卡让每条主张可定位、可核验，但没有解决多篇文献之间的关系问题。本课进入阶段五，处理"材料一起说明了什么、缺了什么"。</a:t>
+            </a:r>
+          </a:p>
+          <a:p xmlns:a="http://schemas.openxmlformats.org/drawingml/2006/main">
+            <a:r>
+              <a:t/>
+            </a:r>
+          </a:p>
+          <a:p xmlns:a="http://schemas.openxmlformats.org/drawingml/2006/main">
+            <a:r>
+              <a:t>学生动作：</a:t>
+            </a:r>
+          </a:p>
+          <a:p xmlns:a="http://schemas.openxmlformats.org/drawingml/2006/main">
+            <a:r>
+              <a:t>快问：你目前有几张完整阅读卡？把它们按论文顺序排列时，能否一眼看出冲突和缺口？只听回答，不评价。</a:t>
+            </a:r>
+          </a:p>
+          <a:p xmlns:a="http://schemas.openxmlformats.org/drawingml/2006/main">
+            <a:r>
+              <a:t/>
+            </a:r>
+          </a:p>
+          <a:p xmlns:a="http://schemas.openxmlformats.org/drawingml/2006/main">
+            <a:r>
+              <a:t>本课板书、诊断与串词：</a:t>
+            </a:r>
+          </a:p>
+          <a:p xmlns:a="http://schemas.openxmlformats.org/drawingml/2006/main">
+            <a:r>
+              <a:t>本节替换同类口头提示，不增加既有时段。开场诊断嵌入现有开场/回顾，后续再沿原实践时段操作。</a:t>
+            </a:r>
+          </a:p>
+          <a:p xmlns:a="http://schemas.openxmlformats.org/drawingml/2006/main">
+            <a:r>
+              <a:t/>
+            </a:r>
+          </a:p>
+          <a:p xmlns:a="http://schemas.openxmlformats.org/drawingml/2006/main">
+            <a:r>
+              <a:t>- **板书主线**：矩阵空格 ≠ 已证空白；效率 ≠ 忠实性。</a:t>
+            </a:r>
+          </a:p>
+          <a:p xmlns:a="http://schemas.openxmlformats.org/drawingml/2006/main">
+            <a:r>
+              <a:t>- **诊断问题**：空格证明没人研究了吗？未测量等于反驳吗？</a:t>
+            </a:r>
+          </a:p>
+          <a:p xmlns:a="http://schemas.openxmlformats.org/drawingml/2006/main">
+            <a:r>
+              <a:t>- **预期回答**：都不能；需检索覆盖或直接相反证据。</a:t>
+            </a:r>
+          </a:p>
+          <a:p xmlns:a="http://schemas.openxmlformats.org/drawingml/2006/main">
+            <a:r>
+              <a:t>- **常见误答后的追问**：将误读移到局限/推断栏，真实冲突才放冲突格。</a:t>
+            </a:r>
+          </a:p>
+          <a:p xmlns:a="http://schemas.openxmlformats.org/drawingml/2006/main">
+            <a:r>
+              <a:t>- **过渡串词**：“现在把有依据的缺口改成一个能检验的问题。”</a:t>
+            </a:r>
+          </a:p>
+          <a:p xmlns:a="http://schemas.openxmlformats.org/drawingml/2006/main">
+            <a:r>
+              <a:t>- **当堂最小产出**：一项矩阵修订和一个带证据边界的候选问题。</a:t>
+            </a:r>
+          </a:p>
+          <a:p xmlns:a="http://schemas.openxmlformats.org/drawingml/2006/main">
+            <a:r>
+              <a:t>- **退出记录**：写“已完成的动作、本人项目仍缺的证据/工件、下次补齐位置”。使用教师包时标明课堂方法练习，不能据此宣称本人研究门通过；正式提交课次仍为第 6、9、13、16 课。</a:t>
+            </a:r>
+          </a:p>
+          <a:p xmlns:a="http://schemas.openxmlformats.org/drawingml/2006/main">
+            <a:r>
+              <a:t/>
+            </a:r>
+          </a:p>
+          <a:p xmlns:a="http://schemas.openxmlformats.org/drawingml/2006/main">
+            <a:r>
+              <a:t>来源与边界：</a:t>
+            </a:r>
+          </a:p>
+          <a:p xmlns:a="http://schemas.openxmlformats.org/drawingml/2006/main">
+            <a:r>
+              <a:t>回扣第 3-4 课讲义与 [AGENTS.md](../../AGENTS.md) 证据标准。</a:t>
+            </a:r>
+          </a:p>
+          <a:p xmlns:a="http://schemas.openxmlformats.org/drawingml/2006/main">
+            <a:r>
+              <a:t/>
+            </a:r>
+          </a:p>
+          <a:p xmlns:a="http://schemas.openxmlformats.org/drawingml/2006/main">
+            <a:r>
+              <a:t>---</a:t>
+            </a:r>
+          </a:p>
+          <a:p xmlns:a="http://schemas.openxmlformats.org/drawingml/2006/main">
+            <a:r>
+              <a:t/>
             </a:r>
           </a:p>
           <a:p xmlns:a="http://schemas.openxmlformats.org/drawingml/2006/main">
@@ -1353,7 +2998,17 @@
           </a:p>
           <a:p xmlns:a="http://schemas.openxmlformats.org/drawingml/2006/main">
             <a:r>
-              <a:t>- 本页仅使用课程内部规则与教学材料。</a:t>
+              <a:t/>
+            </a:r>
+          </a:p>
+          <a:p xmlns:a="http://schemas.openxmlformats.org/drawingml/2006/main">
+            <a:r>
+              <a:t>- 本课 handout.md 与 slides.md</a:t>
+            </a:r>
+          </a:p>
+          <a:p xmlns:a="http://schemas.openxmlformats.org/drawingml/2006/main">
+            <a:r>
+              <a:t/>
             </a:r>
           </a:p>
           <a:p xmlns:a="http://schemas.openxmlformats.org/drawingml/2006/main">
@@ -1428,7 +3083,127 @@
           <a:lstStyle xmlns:a="http://schemas.openxmlformats.org/drawingml/2006/main"/>
           <a:p xmlns:a="http://schemas.openxmlformats.org/drawingml/2006/main">
             <a:r>
-              <a:t>页面标题：本讲知识点总结</a:t>
+              <a:t>页面：P20 本讲知识点总结</a:t>
+            </a:r>
+          </a:p>
+          <a:p xmlns:a="http://schemas.openxmlformats.org/drawingml/2006/main">
+            <a:r>
+              <a:t/>
+            </a:r>
+          </a:p>
+          <a:p xmlns:a="http://schemas.openxmlformats.org/drawingml/2006/main">
+            <a:r>
+              <a:t>讲义位置：本课讲义；见逐页母稿映射表</a:t>
+            </a:r>
+          </a:p>
+          <a:p xmlns:a="http://schemas.openxmlformats.org/drawingml/2006/main">
+            <a:r>
+              <a:t/>
+            </a:r>
+          </a:p>
+          <a:p xmlns:a="http://schemas.openxmlformats.org/drawingml/2006/main">
+            <a:r>
+              <a:t>屏显核对：</a:t>
+            </a:r>
+          </a:p>
+          <a:p xmlns:a="http://schemas.openxmlformats.org/drawingml/2006/main">
+            <a:r>
+              <a:t>按问题组织 → 证据地图 → 受限综合 → 候选题生成</a:t>
+            </a:r>
+          </a:p>
+          <a:p xmlns:a="http://schemas.openxmlformats.org/drawingml/2006/main">
+            <a:r>
+              <a:t/>
+            </a:r>
+          </a:p>
+          <a:p xmlns:a="http://schemas.openxmlformats.org/drawingml/2006/main">
+            <a:r>
+              <a:t>1. **按问题组织**：矩阵列来自问题分解，不按论文逐篇堆叠。</a:t>
+            </a:r>
+          </a:p>
+          <a:p xmlns:a="http://schemas.openxmlformats.org/drawingml/2006/main">
+            <a:r>
+              <a:t>2. **证据地图**：保留直接证据、补充证据、冲突和空白四种视图。</a:t>
+            </a:r>
+          </a:p>
+          <a:p xmlns:a="http://schemas.openxmlformats.org/drawingml/2006/main">
+            <a:r>
+              <a:t>3. **受限综合**：mini review 只使用已核验条目，并保留任务与方法限定。</a:t>
+            </a:r>
+          </a:p>
+          <a:p xmlns:a="http://schemas.openxmlformats.org/drawingml/2006/main">
+            <a:r>
+              <a:t>4. **候选题生成**：空白先检验，再进入候选题池和问题门。</a:t>
+            </a:r>
+          </a:p>
+          <a:p xmlns:a="http://schemas.openxmlformats.org/drawingml/2006/main">
+            <a:r>
+              <a:t/>
+            </a:r>
+          </a:p>
+          <a:p xmlns:a="http://schemas.openxmlformats.org/drawingml/2006/main">
+            <a:r>
+              <a:t>&gt; 关键边界：“我没找到”不等于领域空白；对比证据不自动等于冲突，AI 归纳也不能替代原文核验。</a:t>
+            </a:r>
+          </a:p>
+          <a:p xmlns:a="http://schemas.openxmlformats.org/drawingml/2006/main">
+            <a:r>
+              <a:t/>
+            </a:r>
+          </a:p>
+          <a:p xmlns:a="http://schemas.openxmlformats.org/drawingml/2006/main">
+            <a:r>
+              <a:t>教师讲述：</a:t>
+            </a:r>
+          </a:p>
+          <a:p xmlns:a="http://schemas.openxmlformats.org/drawingml/2006/main">
+            <a:r>
+              <a:t>回收本讲主链：从按问题组织材料开始，经证据地图显式保留支持、限制和空白，再写受限综合并形成待检验候选题。本页不重复作业说明，也不引入新内容。</a:t>
+            </a:r>
+          </a:p>
+          <a:p xmlns:a="http://schemas.openxmlformats.org/drawingml/2006/main">
+            <a:r>
+              <a:t/>
+            </a:r>
+          </a:p>
+          <a:p xmlns:a="http://schemas.openxmlformats.org/drawingml/2006/main">
+            <a:r>
+              <a:t>学生动作：</a:t>
+            </a:r>
+          </a:p>
+          <a:p xmlns:a="http://schemas.openxmlformats.org/drawingml/2006/main">
+            <a:r>
+              <a:t>学生用一句话指出自己的材料目前停在矩阵、证据地图、mini review 还是候选题。</a:t>
+            </a:r>
+          </a:p>
+          <a:p xmlns:a="http://schemas.openxmlformats.org/drawingml/2006/main">
+            <a:r>
+              <a:t/>
+            </a:r>
+          </a:p>
+          <a:p xmlns:a="http://schemas.openxmlformats.org/drawingml/2006/main">
+            <a:r>
+              <a:t>来源与边界：</a:t>
+            </a:r>
+          </a:p>
+          <a:p xmlns:a="http://schemas.openxmlformats.org/drawingml/2006/main">
+            <a:r>
+              <a:t>讲义 §二-§五；[AGENTS.md](../../AGENTS.md) 证据标准。</a:t>
+            </a:r>
+          </a:p>
+          <a:p xmlns:a="http://schemas.openxmlformats.org/drawingml/2006/main">
+            <a:r>
+              <a:t/>
+            </a:r>
+          </a:p>
+          <a:p xmlns:a="http://schemas.openxmlformats.org/drawingml/2006/main">
+            <a:r>
+              <a:t>---</a:t>
+            </a:r>
+          </a:p>
+          <a:p xmlns:a="http://schemas.openxmlformats.org/drawingml/2006/main">
+            <a:r>
+              <a:t/>
             </a:r>
           </a:p>
           <a:p xmlns:a="http://schemas.openxmlformats.org/drawingml/2006/main">
@@ -1438,7 +3213,17 @@
           </a:p>
           <a:p xmlns:a="http://schemas.openxmlformats.org/drawingml/2006/main">
             <a:r>
-              <a:t>- 本页仅使用课程内部规则与教学材料。</a:t>
+              <a:t/>
+            </a:r>
+          </a:p>
+          <a:p xmlns:a="http://schemas.openxmlformats.org/drawingml/2006/main">
+            <a:r>
+              <a:t>- 本课 handout.md 与 slides.md</a:t>
+            </a:r>
+          </a:p>
+          <a:p xmlns:a="http://schemas.openxmlformats.org/drawingml/2006/main">
+            <a:r>
+              <a:t/>
             </a:r>
           </a:p>
           <a:p xmlns:a="http://schemas.openxmlformats.org/drawingml/2006/main">
@@ -1513,7 +3298,187 @@
           <a:lstStyle xmlns:a="http://schemas.openxmlformats.org/drawingml/2006/main"/>
           <a:p xmlns:a="http://schemas.openxmlformats.org/drawingml/2006/main">
             <a:r>
-              <a:t>页面标题：退出卡与第 6 课预告</a:t>
+              <a:t>页面：P21 退出卡与第 6 课预告</a:t>
+            </a:r>
+          </a:p>
+          <a:p xmlns:a="http://schemas.openxmlformats.org/drawingml/2006/main">
+            <a:r>
+              <a:t/>
+            </a:r>
+          </a:p>
+          <a:p xmlns:a="http://schemas.openxmlformats.org/drawingml/2006/main">
+            <a:r>
+              <a:t>讲义位置：本课讲义；见逐页母稿映射表</a:t>
+            </a:r>
+          </a:p>
+          <a:p xmlns:a="http://schemas.openxmlformats.org/drawingml/2006/main">
+            <a:r>
+              <a:t/>
+            </a:r>
+          </a:p>
+          <a:p xmlns:a="http://schemas.openxmlformats.org/drawingml/2006/main">
+            <a:r>
+              <a:t>屏显核对：</a:t>
+            </a:r>
+          </a:p>
+          <a:p xmlns:a="http://schemas.openxmlformats.org/drawingml/2006/main">
+            <a:r>
+              <a:t>退出卡：</a:t>
+            </a:r>
+          </a:p>
+          <a:p xmlns:a="http://schemas.openxmlformats.org/drawingml/2006/main">
+            <a:r>
+              <a:t>- 今天最清楚的一点；</a:t>
+            </a:r>
+          </a:p>
+          <a:p xmlns:a="http://schemas.openxmlformats.org/drawingml/2006/main">
+            <a:r>
+              <a:t>- 仍然困惑的一点；</a:t>
+            </a:r>
+          </a:p>
+          <a:p xmlns:a="http://schemas.openxmlformats.org/drawingml/2006/main">
+            <a:r>
+              <a:t>- 矩阵列是否来自问题分解；</a:t>
+            </a:r>
+          </a:p>
+          <a:p xmlns:a="http://schemas.openxmlformats.org/drawingml/2006/main">
+            <a:r>
+              <a:t>- 证据地图当前含直接证据/补充证据/冲突/空白各几条；</a:t>
+            </a:r>
+          </a:p>
+          <a:p xmlns:a="http://schemas.openxmlformats.org/drawingml/2006/main">
+            <a:r>
+              <a:t>- 一个研究空白候选及其类型，以及 1 个候选题与其生成路径；</a:t>
+            </a:r>
+          </a:p>
+          <a:p xmlns:a="http://schemas.openxmlformats.org/drawingml/2006/main">
+            <a:r>
+              <a:t>- 四句 mini review 中哪一句仍缺直接证据；</a:t>
+            </a:r>
+          </a:p>
+          <a:p xmlns:a="http://schemas.openxmlformats.org/drawingml/2006/main">
+            <a:r>
+              <a:t>- 第 6 课问题门需要补的环节。</a:t>
+            </a:r>
+          </a:p>
+          <a:p xmlns:a="http://schemas.openxmlformats.org/drawingml/2006/main">
+            <a:r>
+              <a:t/>
+            </a:r>
+          </a:p>
+          <a:p xmlns:a="http://schemas.openxmlformats.org/drawingml/2006/main">
+            <a:r>
+              <a:t>第 6 课预告：问题定义、第一性原理与问题门</a:t>
+            </a:r>
+          </a:p>
+          <a:p xmlns:a="http://schemas.openxmlformats.org/drawingml/2006/main">
+            <a:r>
+              <a:t/>
+            </a:r>
+          </a:p>
+          <a:p xmlns:a="http://schemas.openxmlformats.org/drawingml/2006/main">
+            <a:r>
+              <a:t>&gt; 本课产出（四句 mini review + 证据地图初版 + 研究空白候选）是问题门直接输入。不新增课后正式作业。</a:t>
+            </a:r>
+          </a:p>
+          <a:p xmlns:a="http://schemas.openxmlformats.org/drawingml/2006/main">
+            <a:r>
+              <a:t/>
+            </a:r>
+          </a:p>
+          <a:p xmlns:a="http://schemas.openxmlformats.org/drawingml/2006/main">
+            <a:r>
+              <a:t>教师讲述：</a:t>
+            </a:r>
+          </a:p>
+          <a:p xmlns:a="http://schemas.openxmlformats.org/drawingml/2006/main">
+            <a:r>
+              <a:t>回扣本课目标：学生不需要在 90 分钟内完成完整综述，只要项目里有窄矩阵、四视图证据地图、一个空白候选的首轮检验、候选题记录、四句 mini review 和一条 AI 核验记录，就形成可继续扩展的起点。第 6 课把候选题池比较筛选、收敛为问题，并按权威门条件检查证据地图。</a:t>
+            </a:r>
+          </a:p>
+          <a:p xmlns:a="http://schemas.openxmlformats.org/drawingml/2006/main">
+            <a:r>
+              <a:t/>
+            </a:r>
+          </a:p>
+          <a:p xmlns:a="http://schemas.openxmlformats.org/drawingml/2006/main">
+            <a:r>
+              <a:t>课后引导阅读（采用 AI 导航→原文核验→AI 质疑→偏差审计→人工定稿流程）：</a:t>
+            </a:r>
+          </a:p>
+          <a:p xmlns:a="http://schemas.openxmlformats.org/drawingml/2006/main">
+            <a:r>
+              <a:t>- Kitchenham &amp; Charters *SLR Guidelines* 选段（study quality assessment、data extraction、synthesis），约 30 分钟，核心阅读；</a:t>
+            </a:r>
+          </a:p>
+          <a:p xmlns:a="http://schemas.openxmlformats.org/drawingml/2006/main">
+            <a:r>
+              <a:t>- Booth et al. *The Craft of Research*, 5th ed., 4.3–4.5，任选，约 20 分钟；</a:t>
+            </a:r>
+          </a:p>
+          <a:p xmlns:a="http://schemas.openxmlformats.org/drawingml/2006/main">
+            <a:r>
+              <a:t>- Pautasso, "Ten Simple Rules for Writing a Literature Review"，任选，约 20 分钟。</a:t>
+            </a:r>
+          </a:p>
+          <a:p xmlns:a="http://schemas.openxmlformats.org/drawingml/2006/main">
+            <a:r>
+              <a:t/>
+            </a:r>
+          </a:p>
+          <a:p xmlns:a="http://schemas.openxmlformats.org/drawingml/2006/main">
+            <a:r>
+              <a:t>阅读卡持续保存在个人项目 `notes/`，不逐周正式提交。第 6 课问题门统一检查至少 3 张与个人项目直接相关的完整精读卡和一份证据地图初版。</a:t>
+            </a:r>
+          </a:p>
+          <a:p xmlns:a="http://schemas.openxmlformats.org/drawingml/2006/main">
+            <a:r>
+              <a:t/>
+            </a:r>
+          </a:p>
+          <a:p xmlns:a="http://schemas.openxmlformats.org/drawingml/2006/main">
+            <a:r>
+              <a:t>学生动作：</a:t>
+            </a:r>
+          </a:p>
+          <a:p xmlns:a="http://schemas.openxmlformats.org/drawingml/2006/main">
+            <a:r>
+              <a:t>学生提交退出卡或保存在个人项目。教师收集共性问题，用于第 6 课前调整。</a:t>
+            </a:r>
+          </a:p>
+          <a:p xmlns:a="http://schemas.openxmlformats.org/drawingml/2006/main">
+            <a:r>
+              <a:t/>
+            </a:r>
+          </a:p>
+          <a:p xmlns:a="http://schemas.openxmlformats.org/drawingml/2006/main">
+            <a:r>
+              <a:t>来源与边界：</a:t>
+            </a:r>
+          </a:p>
+          <a:p xmlns:a="http://schemas.openxmlformats.org/drawingml/2006/main">
+            <a:r>
+              <a:t>- Kitchenham, B., &amp; Charters, S. EBSE-2007-01, 2007. [机构索引](https://ebse.webspace.durham.ac.uk/ebse-bibliography/guidelines-for-performing-systematic-literature-reviews-in-software-engineering/)。</a:t>
+            </a:r>
+          </a:p>
+          <a:p xmlns:a="http://schemas.openxmlformats.org/drawingml/2006/main">
+            <a:r>
+              <a:t>- Booth, W. C. et al. *The Craft of Research*, 5th ed. [出版社页面](https://press.uchicago.edu/ucp/books/book/chicago/C/bo215874008)。</a:t>
+            </a:r>
+          </a:p>
+          <a:p xmlns:a="http://schemas.openxmlformats.org/drawingml/2006/main">
+            <a:r>
+              <a:t>- Pautasso, M. *PLOS Comput Biol* 9(7):e1003149 (2013). DOI: [10.1371/journal.pcbi.1003149](https://journals.plos.org/ploscompbiol/article?id=10.1371/journal.pcbi.1003149)。</a:t>
+            </a:r>
+          </a:p>
+          <a:p xmlns:a="http://schemas.openxmlformats.org/drawingml/2006/main">
+            <a:r>
+              <a:t>- 阅读规则见 [reading-list.md](../../course/reading-list.md)。</a:t>
+            </a:r>
+          </a:p>
+          <a:p xmlns:a="http://schemas.openxmlformats.org/drawingml/2006/main">
+            <a:r>
+              <a:t/>
             </a:r>
           </a:p>
           <a:p xmlns:a="http://schemas.openxmlformats.org/drawingml/2006/main">
@@ -1523,7 +3488,17 @@
           </a:p>
           <a:p xmlns:a="http://schemas.openxmlformats.org/drawingml/2006/main">
             <a:r>
-              <a:t>- 本页仅使用课程内部规则与教学材料。</a:t>
+              <a:t/>
+            </a:r>
+          </a:p>
+          <a:p xmlns:a="http://schemas.openxmlformats.org/drawingml/2006/main">
+            <a:r>
+              <a:t>- 本课 handout.md 与 slides.md</a:t>
+            </a:r>
+          </a:p>
+          <a:p xmlns:a="http://schemas.openxmlformats.org/drawingml/2006/main">
+            <a:r>
+              <a:t/>
             </a:r>
           </a:p>
           <a:p xmlns:a="http://schemas.openxmlformats.org/drawingml/2006/main">
@@ -1598,7 +3573,142 @@
           <a:lstStyle xmlns:a="http://schemas.openxmlformats.org/drawingml/2006/main"/>
           <a:p xmlns:a="http://schemas.openxmlformats.org/drawingml/2006/main">
             <a:r>
-              <a:t>页面标题：本课目标与课堂产出</a:t>
+              <a:t>页面：P03 本课目标与课堂产出</a:t>
+            </a:r>
+          </a:p>
+          <a:p xmlns:a="http://schemas.openxmlformats.org/drawingml/2006/main">
+            <a:r>
+              <a:t/>
+            </a:r>
+          </a:p>
+          <a:p xmlns:a="http://schemas.openxmlformats.org/drawingml/2006/main">
+            <a:r>
+              <a:t>讲义位置：本课讲义；见逐页母稿映射表</a:t>
+            </a:r>
+          </a:p>
+          <a:p xmlns:a="http://schemas.openxmlformats.org/drawingml/2006/main">
+            <a:r>
+              <a:t/>
+            </a:r>
+          </a:p>
+          <a:p xmlns:a="http://schemas.openxmlformats.org/drawingml/2006/main">
+            <a:r>
+              <a:t>屏显核对：</a:t>
+            </a:r>
+          </a:p>
+          <a:p xmlns:a="http://schemas.openxmlformats.org/drawingml/2006/main">
+            <a:r>
+              <a:t>完成本课后，你能：</a:t>
+            </a:r>
+          </a:p>
+          <a:p xmlns:a="http://schemas.openxmlformats.org/drawingml/2006/main">
+            <a:r>
+              <a:t/>
+            </a:r>
+          </a:p>
+          <a:p xmlns:a="http://schemas.openxmlformats.org/drawingml/2006/main">
+            <a:r>
+              <a:t>1. 区分叙事性综述与系统性综述的差别与适用边界；</a:t>
+            </a:r>
+          </a:p>
+          <a:p xmlns:a="http://schemas.openxmlformats.org/drawingml/2006/main">
+            <a:r>
+              <a:t>2. 把多篇阅读卡重组为按研究问题排列的相关工作矩阵；</a:t>
+            </a:r>
+          </a:p>
+          <a:p xmlns:a="http://schemas.openxmlformats.org/drawingml/2006/main">
+            <a:r>
+              <a:t>3. 绘制证据地图，显式区分直接证据、补充证据、冲突和空白；</a:t>
+            </a:r>
+          </a:p>
+          <a:p xmlns:a="http://schemas.openxmlformats.org/drawingml/2006/main">
+            <a:r>
+              <a:t>4. 识别冲突空白、缺角空白和新问题空白，并执行三步检验；</a:t>
+            </a:r>
+          </a:p>
+          <a:p xmlns:a="http://schemas.openxmlformats.org/drawingml/2006/main">
+            <a:r>
+              <a:t>5. 用已核验条目写四句 mini literature review，并核验 AI 综述草稿。</a:t>
+            </a:r>
+          </a:p>
+          <a:p xmlns:a="http://schemas.openxmlformats.org/drawingml/2006/main">
+            <a:r>
+              <a:t/>
+            </a:r>
+          </a:p>
+          <a:p xmlns:a="http://schemas.openxmlformats.org/drawingml/2006/main">
+            <a:r>
+              <a:t>课堂产出：窄矩阵 + 证据地图初版 + 空白首轮检验 + 候选题记录（表述 + 路径标签）+ 四句 mini review + 一条 AI 核验记录</a:t>
+            </a:r>
+          </a:p>
+          <a:p xmlns:a="http://schemas.openxmlformats.org/drawingml/2006/main">
+            <a:r>
+              <a:t/>
+            </a:r>
+          </a:p>
+          <a:p xmlns:a="http://schemas.openxmlformats.org/drawingml/2006/main">
+            <a:r>
+              <a:t>&gt; 本课不正式提交，产出是第 6 课问题门的直接输入。</a:t>
+            </a:r>
+          </a:p>
+          <a:p xmlns:a="http://schemas.openxmlformats.org/drawingml/2006/main">
+            <a:r>
+              <a:t/>
+            </a:r>
+          </a:p>
+          <a:p xmlns:a="http://schemas.openxmlformats.org/drawingml/2006/main">
+            <a:r>
+              <a:t>教师讲述：</a:t>
+            </a:r>
+          </a:p>
+          <a:p xmlns:a="http://schemas.openxmlformats.org/drawingml/2006/main">
+            <a:r>
+              <a:t>明确边界：本课目标是建立可复盘的综述结构，不是完成论文 related work 段。证据地图初版只要形成直接证据、补充/对比条目、冲突检查和空白候选的最小视图，重点是流程跑通。四句 mini review 只使用已核验条目；研究空白候选不直接进入问题门，须先通过三步检验。</a:t>
+            </a:r>
+          </a:p>
+          <a:p xmlns:a="http://schemas.openxmlformats.org/drawingml/2006/main">
+            <a:r>
+              <a:t/>
+            </a:r>
+          </a:p>
+          <a:p xmlns:a="http://schemas.openxmlformats.org/drawingml/2006/main">
+            <a:r>
+              <a:t>学生动作：</a:t>
+            </a:r>
+          </a:p>
+          <a:p xmlns:a="http://schemas.openxmlformats.org/drawingml/2006/main">
+            <a:r>
+              <a:t>无。</a:t>
+            </a:r>
+          </a:p>
+          <a:p xmlns:a="http://schemas.openxmlformats.org/drawingml/2006/main">
+            <a:r>
+              <a:t/>
+            </a:r>
+          </a:p>
+          <a:p xmlns:a="http://schemas.openxmlformats.org/drawingml/2006/main">
+            <a:r>
+              <a:t>来源与边界：</a:t>
+            </a:r>
+          </a:p>
+          <a:p xmlns:a="http://schemas.openxmlformats.org/drawingml/2006/main">
+            <a:r>
+              <a:t>[备课规划.md](../备课规划.md) 第 5 课目标段；[assignments.md](../../course/assignments.md) 第 6 课问题门条件。</a:t>
+            </a:r>
+          </a:p>
+          <a:p xmlns:a="http://schemas.openxmlformats.org/drawingml/2006/main">
+            <a:r>
+              <a:t/>
+            </a:r>
+          </a:p>
+          <a:p xmlns:a="http://schemas.openxmlformats.org/drawingml/2006/main">
+            <a:r>
+              <a:t>---</a:t>
+            </a:r>
+          </a:p>
+          <a:p xmlns:a="http://schemas.openxmlformats.org/drawingml/2006/main">
+            <a:r>
+              <a:t/>
             </a:r>
           </a:p>
           <a:p xmlns:a="http://schemas.openxmlformats.org/drawingml/2006/main">
@@ -1608,7 +3718,17 @@
           </a:p>
           <a:p xmlns:a="http://schemas.openxmlformats.org/drawingml/2006/main">
             <a:r>
-              <a:t>- 本页仅使用课程内部规则与教学材料。</a:t>
+              <a:t/>
+            </a:r>
+          </a:p>
+          <a:p xmlns:a="http://schemas.openxmlformats.org/drawingml/2006/main">
+            <a:r>
+              <a:t>- 本课 handout.md 与 slides.md</a:t>
+            </a:r>
+          </a:p>
+          <a:p xmlns:a="http://schemas.openxmlformats.org/drawingml/2006/main">
+            <a:r>
+              <a:t/>
             </a:r>
           </a:p>
           <a:p xmlns:a="http://schemas.openxmlformats.org/drawingml/2006/main">
@@ -1683,7 +3803,147 @@
           <a:lstStyle xmlns:a="http://schemas.openxmlformats.org/drawingml/2006/main"/>
           <a:p xmlns:a="http://schemas.openxmlformats.org/drawingml/2006/main">
             <a:r>
-              <a:t>页面标题：摘要堆叠为什么不算综述</a:t>
+              <a:t>页面：P04 摘要堆叠为什么不算综述</a:t>
+            </a:r>
+          </a:p>
+          <a:p xmlns:a="http://schemas.openxmlformats.org/drawingml/2006/main">
+            <a:r>
+              <a:t/>
+            </a:r>
+          </a:p>
+          <a:p xmlns:a="http://schemas.openxmlformats.org/drawingml/2006/main">
+            <a:r>
+              <a:t>讲义位置：本课讲义；见逐页母稿映射表</a:t>
+            </a:r>
+          </a:p>
+          <a:p xmlns:a="http://schemas.openxmlformats.org/drawingml/2006/main">
+            <a:r>
+              <a:t/>
+            </a:r>
+          </a:p>
+          <a:p xmlns:a="http://schemas.openxmlformats.org/drawingml/2006/main">
+            <a:r>
+              <a:t>屏显核对：</a:t>
+            </a:r>
+          </a:p>
+          <a:p xmlns:a="http://schemas.openxmlformats.org/drawingml/2006/main">
+            <a:r>
+              <a:t>一份失败综述：</a:t>
+            </a:r>
+          </a:p>
+          <a:p xmlns:a="http://schemas.openxmlformats.org/drawingml/2006/main">
+            <a:r>
+              <a:t/>
+            </a:r>
+          </a:p>
+          <a:p xmlns:a="http://schemas.openxmlformats.org/drawingml/2006/main">
+            <a:r>
+              <a:t>&gt; 论文 A 提出方法 X；论文 B 提出方法 Y；论文 C 比较了 X 和 Y；论文 D 指出 X 的局限。因此 Y 较优。</a:t>
+            </a:r>
+          </a:p>
+          <a:p xmlns:a="http://schemas.openxmlformats.org/drawingml/2006/main">
+            <a:r>
+              <a:t/>
+            </a:r>
+          </a:p>
+          <a:p xmlns:a="http://schemas.openxmlformats.org/drawingml/2006/main">
+            <a:r>
+              <a:t>它没说明：</a:t>
+            </a:r>
+          </a:p>
+          <a:p xmlns:a="http://schemas.openxmlformats.org/drawingml/2006/main">
+            <a:r>
+              <a:t>- 各自主张在什么条件下成立</a:t>
+            </a:r>
+          </a:p>
+          <a:p xmlns:a="http://schemas.openxmlformats.org/drawingml/2006/main">
+            <a:r>
+              <a:t>- 比较的对象、指标和设置是否一致</a:t>
+            </a:r>
+          </a:p>
+          <a:p xmlns:a="http://schemas.openxmlformats.org/drawingml/2006/main">
+            <a:r>
+              <a:t>- "较优"在哪个维度上、相对什么 baseline</a:t>
+            </a:r>
+          </a:p>
+          <a:p xmlns:a="http://schemas.openxmlformats.org/drawingml/2006/main">
+            <a:r>
+              <a:t>- 哪些主张冲突、加强或不可比</a:t>
+            </a:r>
+          </a:p>
+          <a:p xmlns:a="http://schemas.openxmlformats.org/drawingml/2006/main">
+            <a:r>
+              <a:t>- 综述本身要回答什么研究问题</a:t>
+            </a:r>
+          </a:p>
+          <a:p xmlns:a="http://schemas.openxmlformats.org/drawingml/2006/main">
+            <a:r>
+              <a:t/>
+            </a:r>
+          </a:p>
+          <a:p xmlns:a="http://schemas.openxmlformats.org/drawingml/2006/main">
+            <a:r>
+              <a:t>&gt; 没有问题，就无法判断证据支持什么、反驳什么、缺失什么。</a:t>
+            </a:r>
+          </a:p>
+          <a:p xmlns:a="http://schemas.openxmlformats.org/drawingml/2006/main">
+            <a:r>
+              <a:t/>
+            </a:r>
+          </a:p>
+          <a:p xmlns:a="http://schemas.openxmlformats.org/drawingml/2006/main">
+            <a:r>
+              <a:t>教师讲述：</a:t>
+            </a:r>
+          </a:p>
+          <a:p xmlns:a="http://schemas.openxmlformats.org/drawingml/2006/main">
+            <a:r>
+              <a:t>暴露常见错误。摘要堆叠的根本原因是没有把综述组织在一个研究问题周围。没有问题，就无法判断哪条证据支持什么、反驳什么、缺失什么。下面几页来看怎样从研究问题出发重组阅读卡。</a:t>
+            </a:r>
+          </a:p>
+          <a:p xmlns:a="http://schemas.openxmlformats.org/drawingml/2006/main">
+            <a:r>
+              <a:t/>
+            </a:r>
+          </a:p>
+          <a:p xmlns:a="http://schemas.openxmlformats.org/drawingml/2006/main">
+            <a:r>
+              <a:t>学生动作：</a:t>
+            </a:r>
+          </a:p>
+          <a:p xmlns:a="http://schemas.openxmlformats.org/drawingml/2006/main">
+            <a:r>
+              <a:t>请学生举手：你是否曾经把多篇阅读卡摘要按顺序拼接成"综述"？只统计，不点名。</a:t>
+            </a:r>
+          </a:p>
+          <a:p xmlns:a="http://schemas.openxmlformats.org/drawingml/2006/main">
+            <a:r>
+              <a:t/>
+            </a:r>
+          </a:p>
+          <a:p xmlns:a="http://schemas.openxmlformats.org/drawingml/2006/main">
+            <a:r>
+              <a:t>来源与边界：</a:t>
+            </a:r>
+          </a:p>
+          <a:p xmlns:a="http://schemas.openxmlformats.org/drawingml/2006/main">
+            <a:r>
+              <a:t>讲义 §二·1 与 §六 常见错误；[AGENTS.md](../../AGENTS.md) 证据标准。</a:t>
+            </a:r>
+          </a:p>
+          <a:p xmlns:a="http://schemas.openxmlformats.org/drawingml/2006/main">
+            <a:r>
+              <a:t/>
+            </a:r>
+          </a:p>
+          <a:p xmlns:a="http://schemas.openxmlformats.org/drawingml/2006/main">
+            <a:r>
+              <a:t>---</a:t>
+            </a:r>
+          </a:p>
+          <a:p xmlns:a="http://schemas.openxmlformats.org/drawingml/2006/main">
+            <a:r>
+              <a:t/>
             </a:r>
           </a:p>
           <a:p xmlns:a="http://schemas.openxmlformats.org/drawingml/2006/main">
@@ -1693,7 +3953,17 @@
           </a:p>
           <a:p xmlns:a="http://schemas.openxmlformats.org/drawingml/2006/main">
             <a:r>
-              <a:t>- 本页仅使用课程内部规则与教学材料。</a:t>
+              <a:t/>
+            </a:r>
+          </a:p>
+          <a:p xmlns:a="http://schemas.openxmlformats.org/drawingml/2006/main">
+            <a:r>
+              <a:t>- 本课 handout.md 与 slides.md</a:t>
+            </a:r>
+          </a:p>
+          <a:p xmlns:a="http://schemas.openxmlformats.org/drawingml/2006/main">
+            <a:r>
+              <a:t/>
             </a:r>
           </a:p>
           <a:p xmlns:a="http://schemas.openxmlformats.org/drawingml/2006/main">
@@ -1768,7 +4038,132 @@
           <a:lstStyle xmlns:a="http://schemas.openxmlformats.org/drawingml/2006/main"/>
           <a:p xmlns:a="http://schemas.openxmlformats.org/drawingml/2006/main">
             <a:r>
-              <a:t>页面标题：叙事性综述与系统性综述</a:t>
+              <a:t>页面：P05 叙事性综述与系统性综述</a:t>
+            </a:r>
+          </a:p>
+          <a:p xmlns:a="http://schemas.openxmlformats.org/drawingml/2006/main">
+            <a:r>
+              <a:t/>
+            </a:r>
+          </a:p>
+          <a:p xmlns:a="http://schemas.openxmlformats.org/drawingml/2006/main">
+            <a:r>
+              <a:t>讲义位置：本课讲义；见逐页母稿映射表</a:t>
+            </a:r>
+          </a:p>
+          <a:p xmlns:a="http://schemas.openxmlformats.org/drawingml/2006/main">
+            <a:r>
+              <a:t/>
+            </a:r>
+          </a:p>
+          <a:p xmlns:a="http://schemas.openxmlformats.org/drawingml/2006/main">
+            <a:r>
+              <a:t>屏显核对：</a:t>
+            </a:r>
+          </a:p>
+          <a:p xmlns:a="http://schemas.openxmlformats.org/drawingml/2006/main">
+            <a:r>
+              <a:t>| 维度 | 叙事性综述 | 系统性综述 |</a:t>
+            </a:r>
+          </a:p>
+          <a:p xmlns:a="http://schemas.openxmlformats.org/drawingml/2006/main">
+            <a:r>
+              <a:t>| --- | --- | --- |</a:t>
+            </a:r>
+          </a:p>
+          <a:p xmlns:a="http://schemas.openxmlformats.org/drawingml/2006/main">
+            <a:r>
+              <a:t>| 范围 | 研究者选取，可调整 | 预先定义检索式与纳入排除 |</a:t>
+            </a:r>
+          </a:p>
+          <a:p xmlns:a="http://schemas.openxmlformats.org/drawingml/2006/main">
+            <a:r>
+              <a:t>| 综合 | 按主题、机制或冲突 | 按固定字段提取，结构化合成 |</a:t>
+            </a:r>
+          </a:p>
+          <a:p xmlns:a="http://schemas.openxmlformats.org/drawingml/2006/main">
+            <a:r>
+              <a:t>| 可复现 | 取决于过程记录 | 高；他人可重现 |</a:t>
+            </a:r>
+          </a:p>
+          <a:p xmlns:a="http://schemas.openxmlformats.org/drawingml/2006/main">
+            <a:r>
+              <a:t>| 适用 | 概念厘清、方法谱系 | 实证研究证据合成 |</a:t>
+            </a:r>
+          </a:p>
+          <a:p xmlns:a="http://schemas.openxmlformats.org/drawingml/2006/main">
+            <a:r>
+              <a:t>| 风险 | 选择性引用、忽视冲突 | 机械套用、强行合并不可比研究 |</a:t>
+            </a:r>
+          </a:p>
+          <a:p xmlns:a="http://schemas.openxmlformats.org/drawingml/2006/main">
+            <a:r>
+              <a:t/>
+            </a:r>
+          </a:p>
+          <a:p xmlns:a="http://schemas.openxmlformats.org/drawingml/2006/main">
+            <a:r>
+              <a:t>&gt; CS/AI 常用叙事性综述，但系统性综述的可复盘逻辑可降低选择性偏倚。</a:t>
+            </a:r>
+          </a:p>
+          <a:p xmlns:a="http://schemas.openxmlformats.org/drawingml/2006/main">
+            <a:r>
+              <a:t/>
+            </a:r>
+          </a:p>
+          <a:p xmlns:a="http://schemas.openxmlformats.org/drawingml/2006/main">
+            <a:r>
+              <a:t>教师讲述：</a:t>
+            </a:r>
+          </a:p>
+          <a:p xmlns:a="http://schemas.openxmlformats.org/drawingml/2006/main">
+            <a:r>
+              <a:t>计算机与 AI 研究中叙事性综述更常见，但系统性综述的方法约束（预先写检索式、记录命中数、显式纳入排除）可以显著降低选择性偏倚。本课不要求做完整 SLR，但要求借鉴其可复盘逻辑：综述的纳入、排除和组织方式必须能让同伴复盘你为什么这样组织。</a:t>
+            </a:r>
+          </a:p>
+          <a:p xmlns:a="http://schemas.openxmlformats.org/drawingml/2006/main">
+            <a:r>
+              <a:t/>
+            </a:r>
+          </a:p>
+          <a:p xmlns:a="http://schemas.openxmlformats.org/drawingml/2006/main">
+            <a:r>
+              <a:t>学生动作：</a:t>
+            </a:r>
+          </a:p>
+          <a:p xmlns:a="http://schemas.openxmlformats.org/drawingml/2006/main">
+            <a:r>
+              <a:t>让学生指出：你之前写的综述更接近哪一种？它过程可复盘吗？</a:t>
+            </a:r>
+          </a:p>
+          <a:p xmlns:a="http://schemas.openxmlformats.org/drawingml/2006/main">
+            <a:r>
+              <a:t/>
+            </a:r>
+          </a:p>
+          <a:p xmlns:a="http://schemas.openxmlformats.org/drawingml/2006/main">
+            <a:r>
+              <a:t>来源与边界：</a:t>
+            </a:r>
+          </a:p>
+          <a:p xmlns:a="http://schemas.openxmlformats.org/drawingml/2006/main">
+            <a:r>
+              <a:t>Kitchenham &amp; Charters, *SLR Guidelines*, EBSE-2007-01, 2007. 选读 study quality assessment、data extraction 和 synthesis（[reading-list.md](../../course/reading-list.md) 第 5 课）。</a:t>
+            </a:r>
+          </a:p>
+          <a:p xmlns:a="http://schemas.openxmlformats.org/drawingml/2006/main">
+            <a:r>
+              <a:t/>
+            </a:r>
+          </a:p>
+          <a:p xmlns:a="http://schemas.openxmlformats.org/drawingml/2006/main">
+            <a:r>
+              <a:t>---</a:t>
+            </a:r>
+          </a:p>
+          <a:p xmlns:a="http://schemas.openxmlformats.org/drawingml/2006/main">
+            <a:r>
+              <a:t/>
             </a:r>
           </a:p>
           <a:p xmlns:a="http://schemas.openxmlformats.org/drawingml/2006/main">
@@ -1778,7 +4173,17 @@
           </a:p>
           <a:p xmlns:a="http://schemas.openxmlformats.org/drawingml/2006/main">
             <a:r>
-              <a:t>- 本页仅使用课程内部规则与教学材料。</a:t>
+              <a:t/>
+            </a:r>
+          </a:p>
+          <a:p xmlns:a="http://schemas.openxmlformats.org/drawingml/2006/main">
+            <a:r>
+              <a:t>- 本课 handout.md 与 slides.md</a:t>
+            </a:r>
+          </a:p>
+          <a:p xmlns:a="http://schemas.openxmlformats.org/drawingml/2006/main">
+            <a:r>
+              <a:t/>
             </a:r>
           </a:p>
           <a:p xmlns:a="http://schemas.openxmlformats.org/drawingml/2006/main">
@@ -1853,7 +4258,107 @@
           <a:lstStyle xmlns:a="http://schemas.openxmlformats.org/drawingml/2006/main"/>
           <a:p xmlns:a="http://schemas.openxmlformats.org/drawingml/2006/main">
             <a:r>
-              <a:t>页面标题：相关工作矩阵：从按论文排列到按问题排列</a:t>
+              <a:t>页面：P06 空白单元格还不是研究空白</a:t>
+            </a:r>
+          </a:p>
+          <a:p xmlns:a="http://schemas.openxmlformats.org/drawingml/2006/main">
+            <a:r>
+              <a:t/>
+            </a:r>
+          </a:p>
+          <a:p xmlns:a="http://schemas.openxmlformats.org/drawingml/2006/main">
+            <a:r>
+              <a:t>讲义位置：handout.md §七、贯穿案例：从阅读卡到证据地图</a:t>
+            </a:r>
+          </a:p>
+          <a:p xmlns:a="http://schemas.openxmlformats.org/drawingml/2006/main">
+            <a:r>
+              <a:t/>
+            </a:r>
+          </a:p>
+          <a:p xmlns:a="http://schemas.openxmlformats.org/drawingml/2006/main">
+            <a:r>
+              <a:t>屏显核对：</a:t>
+            </a:r>
+          </a:p>
+          <a:p xmlns:a="http://schemas.openxmlformats.org/drawingml/2006/main">
+            <a:r>
+              <a:t>矩阵单元格为空，至少有三种可能：</a:t>
+            </a:r>
+          </a:p>
+          <a:p xmlns:a="http://schemas.openxmlformats.org/drawingml/2006/main">
+            <a:r>
+              <a:t>- 尚未检索到；</a:t>
+            </a:r>
+          </a:p>
+          <a:p xmlns:a="http://schemas.openxmlformats.org/drawingml/2006/main">
+            <a:r>
+              <a:t>- 已检索但材料不适用；</a:t>
+            </a:r>
+          </a:p>
+          <a:p xmlns:a="http://schemas.openxmlformats.org/drawingml/2006/main">
+            <a:r>
+              <a:t>- 有覆盖证据，确实缺少这一比较。</a:t>
+            </a:r>
+          </a:p>
+          <a:p xmlns:a="http://schemas.openxmlformats.org/drawingml/2006/main">
+            <a:r>
+              <a:t/>
+            </a:r>
+          </a:p>
+          <a:p xmlns:a="http://schemas.openxmlformats.org/drawingml/2006/main">
+            <a:r>
+              <a:t>先写覆盖范围和来源，再提出空白候选。</a:t>
+            </a:r>
+          </a:p>
+          <a:p xmlns:a="http://schemas.openxmlformats.org/drawingml/2006/main">
+            <a:r>
+              <a:t/>
+            </a:r>
+          </a:p>
+          <a:p xmlns:a="http://schemas.openxmlformats.org/drawingml/2006/main">
+            <a:r>
+              <a:t>教师讲述：</a:t>
+            </a:r>
+          </a:p>
+          <a:p xmlns:a="http://schemas.openxmlformats.org/drawingml/2006/main">
+            <a:r>
+              <a:t>先让学生判断“空格能否证明没人做”。预期回答是不能，需要检索范围与筛选依据。若答“直接生成选题”，让其指出支持不存在的证据。转入候选问题前，先补一条可复盘的检索动作。</a:t>
+            </a:r>
+          </a:p>
+          <a:p xmlns:a="http://schemas.openxmlformats.org/drawingml/2006/main">
+            <a:r>
+              <a:t/>
+            </a:r>
+          </a:p>
+          <a:p xmlns:a="http://schemas.openxmlformats.org/drawingml/2006/main">
+            <a:r>
+              <a:t>学生动作：</a:t>
+            </a:r>
+          </a:p>
+          <a:p xmlns:a="http://schemas.openxmlformats.org/drawingml/2006/main">
+            <a:r>
+              <a:t>在一个空格旁写：已查什么、还缺什么。</a:t>
+            </a:r>
+          </a:p>
+          <a:p xmlns:a="http://schemas.openxmlformats.org/drawingml/2006/main">
+            <a:r>
+              <a:t/>
+            </a:r>
+          </a:p>
+          <a:p xmlns:a="http://schemas.openxmlformats.org/drawingml/2006/main">
+            <a:r>
+              <a:t>来源与边界：</a:t>
+            </a:r>
+          </a:p>
+          <a:p xmlns:a="http://schemas.openxmlformats.org/drawingml/2006/main">
+            <a:r>
+              <a:t>./handout.md；本页课堂判断示例不作实证结论</a:t>
+            </a:r>
+          </a:p>
+          <a:p xmlns:a="http://schemas.openxmlformats.org/drawingml/2006/main">
+            <a:r>
+              <a:t/>
             </a:r>
           </a:p>
           <a:p xmlns:a="http://schemas.openxmlformats.org/drawingml/2006/main">
@@ -1863,7 +4368,17 @@
           </a:p>
           <a:p xmlns:a="http://schemas.openxmlformats.org/drawingml/2006/main">
             <a:r>
-              <a:t>- 本页仅使用课程内部规则与教学材料。</a:t>
+              <a:t/>
+            </a:r>
+          </a:p>
+          <a:p xmlns:a="http://schemas.openxmlformats.org/drawingml/2006/main">
+            <a:r>
+              <a:t>- 本课 handout.md 与 slides.md</a:t>
+            </a:r>
+          </a:p>
+          <a:p xmlns:a="http://schemas.openxmlformats.org/drawingml/2006/main">
+            <a:r>
+              <a:t/>
             </a:r>
           </a:p>
           <a:p xmlns:a="http://schemas.openxmlformats.org/drawingml/2006/main">
@@ -1938,7 +4453,157 @@
           <a:lstStyle xmlns:a="http://schemas.openxmlformats.org/drawingml/2006/main"/>
           <a:p xmlns:a="http://schemas.openxmlformats.org/drawingml/2006/main">
             <a:r>
-              <a:t>页面标题：证据地图：从文献角色到问题门四视图</a:t>
+              <a:t>页面：P07 证据地图：从文献角色到问题门四视图</a:t>
+            </a:r>
+          </a:p>
+          <a:p xmlns:a="http://schemas.openxmlformats.org/drawingml/2006/main">
+            <a:r>
+              <a:t/>
+            </a:r>
+          </a:p>
+          <a:p xmlns:a="http://schemas.openxmlformats.org/drawingml/2006/main">
+            <a:r>
+              <a:t>讲义位置：本课讲义；见逐页母稿映射表</a:t>
+            </a:r>
+          </a:p>
+          <a:p xmlns:a="http://schemas.openxmlformats.org/drawingml/2006/main">
+            <a:r>
+              <a:t/>
+            </a:r>
+          </a:p>
+          <a:p xmlns:a="http://schemas.openxmlformats.org/drawingml/2006/main">
+            <a:r>
+              <a:t>屏显核对：</a:t>
+            </a:r>
+          </a:p>
+          <a:p xmlns:a="http://schemas.openxmlformats.org/drawingml/2006/main">
+            <a:r>
+              <a:t>| 视图 | 从哪里来 | 不能做 |</a:t>
+            </a:r>
+          </a:p>
+          <a:p xmlns:a="http://schemas.openxmlformats.org/drawingml/2006/main">
+            <a:r>
+              <a:t>| --- | --- | --- |</a:t>
+            </a:r>
+          </a:p>
+          <a:p xmlns:a="http://schemas.openxmlformats.org/drawingml/2006/main">
+            <a:r>
+              <a:t>| 直接证据 | 已核验主证据，直接回答当前子问题 | 不能单独支撑外推 |</a:t>
+            </a:r>
+          </a:p>
+          <a:p xmlns:a="http://schemas.openxmlformats.org/drawingml/2006/main">
+            <a:r>
+              <a:t>| 补充证据 | 不同来源、测量或路径的补充支持 | 不能替代直接证据回答核心问题 |</a:t>
+            </a:r>
+          </a:p>
+          <a:p xmlns:a="http://schemas.openxmlformats.org/drawingml/2006/main">
+            <a:r>
+              <a:t>| 冲突 | 可比条件下，对同一子问题给出相反结论 | 不能把任务/指标不同误写成冲突 |</a:t>
+            </a:r>
+          </a:p>
+          <a:p xmlns:a="http://schemas.openxmlformats.org/drawingml/2006/main">
+            <a:r>
+              <a:t>| 空白 | 当前地图没有直接回答该子问题的核验材料 | 不能直接写成"领域没人做过" |</a:t>
+            </a:r>
+          </a:p>
+          <a:p xmlns:a="http://schemas.openxmlformats.org/drawingml/2006/main">
+            <a:r>
+              <a:t/>
+            </a:r>
+          </a:p>
+          <a:p xmlns:a="http://schemas.openxmlformats.org/drawingml/2006/main">
+            <a:r>
+              <a:t>对比证据先保留替代解释或不可比边界；只有条件可比且结论相反时才形成冲突。探索线索不进入主格。</a:t>
+            </a:r>
+          </a:p>
+          <a:p xmlns:a="http://schemas.openxmlformats.org/drawingml/2006/main">
+            <a:r>
+              <a:t/>
+            </a:r>
+          </a:p>
+          <a:p xmlns:a="http://schemas.openxmlformats.org/drawingml/2006/main">
+            <a:r>
+              <a:t>最小字段：`编号 | 子问题 | 文献 | 原文位置 | 主张 | 证据角色 | 冲突/局限 | 核验状态`</a:t>
+            </a:r>
+          </a:p>
+          <a:p xmlns:a="http://schemas.openxmlformats.org/drawingml/2006/main">
+            <a:r>
+              <a:t/>
+            </a:r>
+          </a:p>
+          <a:p xmlns:a="http://schemas.openxmlformats.org/drawingml/2006/main">
+            <a:r>
+              <a:t>&gt; 证据地图是研究者内部工件，服务于问题判断与问题门检查。</a:t>
+            </a:r>
+          </a:p>
+          <a:p xmlns:a="http://schemas.openxmlformats.org/drawingml/2006/main">
+            <a:r>
+              <a:t/>
+            </a:r>
+          </a:p>
+          <a:p xmlns:a="http://schemas.openxmlformats.org/drawingml/2006/main">
+            <a:r>
+              <a:t>教师讲述：</a:t>
+            </a:r>
+          </a:p>
+          <a:p xmlns:a="http://schemas.openxmlformats.org/drawingml/2006/main">
+            <a:r>
+              <a:t>第 3 课给了候选文献角色（主证据/补充/对比/探索线索）；问题门检查的是证据地图能否区分直接证据、补充证据、冲突和空白。主证据只有直接回答当前子问题时才进入直接证据视图。对比证据先记录替代解释、反例或不可比边界；只有问题、条件和指标可比且结论相反时才形成冲突。探索线索（含 AI 综述草稿、博客、issue）不进入主格。</a:t>
+            </a:r>
+          </a:p>
+          <a:p xmlns:a="http://schemas.openxmlformats.org/drawingml/2006/main">
+            <a:r>
+              <a:t/>
+            </a:r>
+          </a:p>
+          <a:p xmlns:a="http://schemas.openxmlformats.org/drawingml/2006/main">
+            <a:r>
+              <a:t>字段说明（压备注，不上屏显）：原文位置沿用第 4 课阅读卡的定位要求；`pending` 只留线索区；`verified` 可进主格；`verified-with-caveat` 可进主格，但必须保留限定且不得单独支撑 `stable`；`rejected` 仅留审计记录。</a:t>
+            </a:r>
+          </a:p>
+          <a:p xmlns:a="http://schemas.openxmlformats.org/drawingml/2006/main">
+            <a:r>
+              <a:t/>
+            </a:r>
+          </a:p>
+          <a:p xmlns:a="http://schemas.openxmlformats.org/drawingml/2006/main">
+            <a:r>
+              <a:t>学生动作：</a:t>
+            </a:r>
+          </a:p>
+          <a:p xmlns:a="http://schemas.openxmlformats.org/drawingml/2006/main">
+            <a:r>
+              <a:t>让学生指出：你目前的材料里，哪条是主证据？哪条是对比证据？有没有冲突被你悄悄取舍过？</a:t>
+            </a:r>
+          </a:p>
+          <a:p xmlns:a="http://schemas.openxmlformats.org/drawingml/2006/main">
+            <a:r>
+              <a:t/>
+            </a:r>
+          </a:p>
+          <a:p xmlns:a="http://schemas.openxmlformats.org/drawingml/2006/main">
+            <a:r>
+              <a:t>来源与边界：</a:t>
+            </a:r>
+          </a:p>
+          <a:p xmlns:a="http://schemas.openxmlformats.org/drawingml/2006/main">
+            <a:r>
+              <a:t>讲义 §三·1 证据地图四视图、§三·2 最小字段、§三·3；[assignments.md](../../course/assignments.md) Checkpoint 1；[AGENTS.md](../../AGENTS.md) 证据标准；第 4 课阅读卡定位要求。</a:t>
+            </a:r>
+          </a:p>
+          <a:p xmlns:a="http://schemas.openxmlformats.org/drawingml/2006/main">
+            <a:r>
+              <a:t/>
+            </a:r>
+          </a:p>
+          <a:p xmlns:a="http://schemas.openxmlformats.org/drawingml/2006/main">
+            <a:r>
+              <a:t>---</a:t>
+            </a:r>
+          </a:p>
+          <a:p xmlns:a="http://schemas.openxmlformats.org/drawingml/2006/main">
+            <a:r>
+              <a:t/>
             </a:r>
           </a:p>
           <a:p xmlns:a="http://schemas.openxmlformats.org/drawingml/2006/main">
@@ -1948,7 +4613,17 @@
           </a:p>
           <a:p xmlns:a="http://schemas.openxmlformats.org/drawingml/2006/main">
             <a:r>
-              <a:t>- 本页仅使用课程内部规则与教学材料。</a:t>
+              <a:t/>
+            </a:r>
+          </a:p>
+          <a:p xmlns:a="http://schemas.openxmlformats.org/drawingml/2006/main">
+            <a:r>
+              <a:t>- 本课 handout.md 与 slides.md</a:t>
+            </a:r>
+          </a:p>
+          <a:p xmlns:a="http://schemas.openxmlformats.org/drawingml/2006/main">
+            <a:r>
+              <a:t/>
             </a:r>
           </a:p>
           <a:p xmlns:a="http://schemas.openxmlformats.org/drawingml/2006/main">
@@ -2023,7 +4698,122 @@
           <a:lstStyle xmlns:a="http://schemas.openxmlformats.org/drawingml/2006/main"/>
           <a:p xmlns:a="http://schemas.openxmlformats.org/drawingml/2006/main">
             <a:r>
-              <a:t>页面标题：研究空白三类</a:t>
+              <a:t>页面：P08 研究空白三类</a:t>
+            </a:r>
+          </a:p>
+          <a:p xmlns:a="http://schemas.openxmlformats.org/drawingml/2006/main">
+            <a:r>
+              <a:t/>
+            </a:r>
+          </a:p>
+          <a:p xmlns:a="http://schemas.openxmlformats.org/drawingml/2006/main">
+            <a:r>
+              <a:t>讲义位置：本课讲义；见逐页母稿映射表</a:t>
+            </a:r>
+          </a:p>
+          <a:p xmlns:a="http://schemas.openxmlformats.org/drawingml/2006/main">
+            <a:r>
+              <a:t/>
+            </a:r>
+          </a:p>
+          <a:p xmlns:a="http://schemas.openxmlformats.org/drawingml/2006/main">
+            <a:r>
+              <a:t>屏显核对：</a:t>
+            </a:r>
+          </a:p>
+          <a:p xmlns:a="http://schemas.openxmlformats.org/drawingml/2006/main">
+            <a:r>
+              <a:t>| 类型 | 定义 | 识别方法 |</a:t>
+            </a:r>
+          </a:p>
+          <a:p xmlns:a="http://schemas.openxmlformats.org/drawingml/2006/main">
+            <a:r>
+              <a:t>| --- | --- | --- |</a:t>
+            </a:r>
+          </a:p>
+          <a:p xmlns:a="http://schemas.openxmlformats.org/drawingml/2006/main">
+            <a:r>
+              <a:t>| 冲突空白 | 已有证据对同一问题给出相反结论，且差异未被解释 | 地图中主证据与对比证据对同一子问题给出不同回答 |</a:t>
+            </a:r>
+          </a:p>
+          <a:p xmlns:a="http://schemas.openxmlformats.org/drawingml/2006/main">
+            <a:r>
+              <a:t>| 缺角空白 | 某子问题整列空白，但相关条件已具备 | 相关工作矩阵整列空白，相邻子问题已有材料 |</a:t>
+            </a:r>
+          </a:p>
+          <a:p xmlns:a="http://schemas.openxmlformats.org/drawingml/2006/main">
+            <a:r>
+              <a:t>| 新问题空白 | 由新场景、新条件或新机制衍生 | 从对比证据的局限、新数据条件或第一性原理反推 |</a:t>
+            </a:r>
+          </a:p>
+          <a:p xmlns:a="http://schemas.openxmlformats.org/drawingml/2006/main">
+            <a:r>
+              <a:t/>
+            </a:r>
+          </a:p>
+          <a:p xmlns:a="http://schemas.openxmlformats.org/drawingml/2006/main">
+            <a:r>
+              <a:t>&gt; "还没有论文写过"不等于"这是一个真实的研究空白"。</a:t>
+            </a:r>
+          </a:p>
+          <a:p xmlns:a="http://schemas.openxmlformats.org/drawingml/2006/main">
+            <a:r>
+              <a:t/>
+            </a:r>
+          </a:p>
+          <a:p xmlns:a="http://schemas.openxmlformats.org/drawingml/2006/main">
+            <a:r>
+              <a:t>教师讲述：</a:t>
+            </a:r>
+          </a:p>
+          <a:p xmlns:a="http://schemas.openxmlformats.org/drawingml/2006/main">
+            <a:r>
+              <a:t>研究空白必须能被表述为：在某个具体条件、对照或机制下，已有证据不能回答的问题，并且这个问题值得回答、能在课程周期内做出最小验证。三类空白的识别方法不同：冲突空白看地图里同一子问题是否有相反回答；缺角空白看矩阵是否有整列空白；新问题空白从对比证据的局限或第一性原理反推。</a:t>
+            </a:r>
+          </a:p>
+          <a:p xmlns:a="http://schemas.openxmlformats.org/drawingml/2006/main">
+            <a:r>
+              <a:t/>
+            </a:r>
+          </a:p>
+          <a:p xmlns:a="http://schemas.openxmlformats.org/drawingml/2006/main">
+            <a:r>
+              <a:t>学生动作：</a:t>
+            </a:r>
+          </a:p>
+          <a:p xmlns:a="http://schemas.openxmlformats.org/drawingml/2006/main">
+            <a:r>
+              <a:t>让学生指出：你目前的矩阵里，哪一列最可能是空白候选？属于哪一类？</a:t>
+            </a:r>
+          </a:p>
+          <a:p xmlns:a="http://schemas.openxmlformats.org/drawingml/2006/main">
+            <a:r>
+              <a:t/>
+            </a:r>
+          </a:p>
+          <a:p xmlns:a="http://schemas.openxmlformats.org/drawingml/2006/main">
+            <a:r>
+              <a:t>来源与边界：</a:t>
+            </a:r>
+          </a:p>
+          <a:p xmlns:a="http://schemas.openxmlformats.org/drawingml/2006/main">
+            <a:r>
+              <a:t>讲义 §四·2 三类研究空白。</a:t>
+            </a:r>
+          </a:p>
+          <a:p xmlns:a="http://schemas.openxmlformats.org/drawingml/2006/main">
+            <a:r>
+              <a:t/>
+            </a:r>
+          </a:p>
+          <a:p xmlns:a="http://schemas.openxmlformats.org/drawingml/2006/main">
+            <a:r>
+              <a:t>---</a:t>
+            </a:r>
+          </a:p>
+          <a:p xmlns:a="http://schemas.openxmlformats.org/drawingml/2006/main">
+            <a:r>
+              <a:t/>
             </a:r>
           </a:p>
           <a:p xmlns:a="http://schemas.openxmlformats.org/drawingml/2006/main">
@@ -2033,7 +4823,17 @@
           </a:p>
           <a:p xmlns:a="http://schemas.openxmlformats.org/drawingml/2006/main">
             <a:r>
-              <a:t>- 本页仅使用课程内部规则与教学材料。</a:t>
+              <a:t/>
+            </a:r>
+          </a:p>
+          <a:p xmlns:a="http://schemas.openxmlformats.org/drawingml/2006/main">
+            <a:r>
+              <a:t>- 本课 handout.md 与 slides.md</a:t>
+            </a:r>
+          </a:p>
+          <a:p xmlns:a="http://schemas.openxmlformats.org/drawingml/2006/main">
+            <a:r>
+              <a:t/>
             </a:r>
           </a:p>
           <a:p xmlns:a="http://schemas.openxmlformats.org/drawingml/2006/main">
@@ -2108,7 +4908,157 @@
           <a:lstStyle xmlns:a="http://schemas.openxmlformats.org/drawingml/2006/main"/>
           <a:p xmlns:a="http://schemas.openxmlformats.org/drawingml/2006/main">
             <a:r>
-              <a:t>页面标题：问题生成路径与候选题池：不要停在文献空白</a:t>
+              <a:t>页面：P09 问题生成路径与候选题池：不要停在文献空白</a:t>
+            </a:r>
+          </a:p>
+          <a:p xmlns:a="http://schemas.openxmlformats.org/drawingml/2006/main">
+            <a:r>
+              <a:t/>
+            </a:r>
+          </a:p>
+          <a:p xmlns:a="http://schemas.openxmlformats.org/drawingml/2006/main">
+            <a:r>
+              <a:t>讲义位置：本课讲义；见逐页母稿映射表</a:t>
+            </a:r>
+          </a:p>
+          <a:p xmlns:a="http://schemas.openxmlformats.org/drawingml/2006/main">
+            <a:r>
+              <a:t/>
+            </a:r>
+          </a:p>
+          <a:p xmlns:a="http://schemas.openxmlformats.org/drawingml/2006/main">
+            <a:r>
+              <a:t>屏显核对：</a:t>
+            </a:r>
+          </a:p>
+          <a:p xmlns:a="http://schemas.openxmlformats.org/drawingml/2006/main">
+            <a:r>
+              <a:t>三类空白是文献路径的产物；问题还可以来自文献之外：</a:t>
+            </a:r>
+          </a:p>
+          <a:p xmlns:a="http://schemas.openxmlformats.org/drawingml/2006/main">
+            <a:r>
+              <a:t/>
+            </a:r>
+          </a:p>
+          <a:p xmlns:a="http://schemas.openxmlformats.org/drawingml/2006/main">
+            <a:r>
+              <a:t>| 生成路径 | 典型形态 | 检索的角色 |</a:t>
+            </a:r>
+          </a:p>
+          <a:p xmlns:a="http://schemas.openxmlformats.org/drawingml/2006/main">
+            <a:r>
+              <a:t>| --- | --- | --- |</a:t>
+            </a:r>
+          </a:p>
+          <a:p xmlns:a="http://schemas.openxmlformats.org/drawingml/2006/main">
+            <a:r>
+              <a:t>| 文献冲突/缺口 | 证据矛盾或无回答 | 确认空白真实 |</a:t>
+            </a:r>
+          </a:p>
+          <a:p xmlns:a="http://schemas.openxmlformats.org/drawingml/2006/main">
+            <a:r>
+              <a:t>| 异常观察 | 观察与预期不符 | 检验是否已被解释 |</a:t>
+            </a:r>
+          </a:p>
+          <a:p xmlns:a="http://schemas.openxmlformats.org/drawingml/2006/main">
+            <a:r>
+              <a:t>| 实践痛点 | 自己遇到的一手问题 | 检验是否已有解法 |</a:t>
+            </a:r>
+          </a:p>
+          <a:p xmlns:a="http://schemas.openxmlformats.org/drawingml/2006/main">
+            <a:r>
+              <a:t>| 新条件失效 | 新能力/数据使旧假设失效 | 检验旧结论的假设 |</a:t>
+            </a:r>
+          </a:p>
+          <a:p xmlns:a="http://schemas.openxmlformats.org/drawingml/2006/main">
+            <a:r>
+              <a:t>| 第一性原理反推 | 必要条件与现状对照 | 检验推导前提 |</a:t>
+            </a:r>
+          </a:p>
+          <a:p xmlns:a="http://schemas.openxmlformats.org/drawingml/2006/main">
+            <a:r>
+              <a:t>| 重构/迁移 | 换问法、移植机制 | 检验新提法是否真新 |</a:t>
+            </a:r>
+          </a:p>
+          <a:p xmlns:a="http://schemas.openxmlformats.org/drawingml/2006/main">
+            <a:r>
+              <a:t/>
+            </a:r>
+          </a:p>
+          <a:p xmlns:a="http://schemas.openxmlformats.org/drawingml/2006/main">
+            <a:r>
+              <a:t>候选题池（第 6 课前补齐）：≥3 个候选题，每个记表述 + 路径标签 + 当前证据；覆盖 ≥2 条路径，其中 ≥1 个非文献空白路径。当堂先记 1 个候选题的表述与路径标签。</a:t>
+            </a:r>
+          </a:p>
+          <a:p xmlns:a="http://schemas.openxmlformats.org/drawingml/2006/main">
+            <a:r>
+              <a:t/>
+            </a:r>
+          </a:p>
+          <a:p xmlns:a="http://schemas.openxmlformats.org/drawingml/2006/main">
+            <a:r>
+              <a:t>&gt; 检索用来检验问题，不是生成问题。</a:t>
+            </a:r>
+          </a:p>
+          <a:p xmlns:a="http://schemas.openxmlformats.org/drawingml/2006/main">
+            <a:r>
+              <a:t/>
+            </a:r>
+          </a:p>
+          <a:p xmlns:a="http://schemas.openxmlformats.org/drawingml/2006/main">
+            <a:r>
+              <a:t>教师讲述：</a:t>
+            </a:r>
+          </a:p>
+          <a:p xmlns:a="http://schemas.openxmlformats.org/drawingml/2006/main">
+            <a:r>
+              <a:t>上一页的三类空白都是文献驱动路径的产物。如果问题只从"关键词 → 找论文 → 找空白"产生，项目容易在文献既有框架里打转。Qian 总结的六种构思模式（填空、扩展、造锤找钉、小处泛化、复现前作、外部来源）里，"表格空位"只是其中一种。本课结束前把空白候选与非文献路径候选集中为候选题池：≥3 个候选、覆盖 ≥2 条路径、≥1 个来自异常观察或实践痛点；当堂最低只记 1 个候选题的表述与路径标签，完整题池与三步检验一样第 6 课前补齐，第 6 课用四维选题标准卡比较筛选。</a:t>
+            </a:r>
+          </a:p>
+          <a:p xmlns:a="http://schemas.openxmlformats.org/drawingml/2006/main">
+            <a:r>
+              <a:t/>
+            </a:r>
+          </a:p>
+          <a:p xmlns:a="http://schemas.openxmlformats.org/drawingml/2006/main">
+            <a:r>
+              <a:t>学生动作：</a:t>
+            </a:r>
+          </a:p>
+          <a:p xmlns:a="http://schemas.openxmlformats.org/drawingml/2006/main">
+            <a:r>
+              <a:t>请学生回答：除文献空白外，你见过的问题来自哪条生成路径？只听回答，不评价。</a:t>
+            </a:r>
+          </a:p>
+          <a:p xmlns:a="http://schemas.openxmlformats.org/drawingml/2006/main">
+            <a:r>
+              <a:t/>
+            </a:r>
+          </a:p>
+          <a:p xmlns:a="http://schemas.openxmlformats.org/drawingml/2006/main">
+            <a:r>
+              <a:t>来源与边界：</a:t>
+            </a:r>
+          </a:p>
+          <a:p xmlns:a="http://schemas.openxmlformats.org/drawingml/2006/main">
+            <a:r>
+              <a:t>讲义 §四·1、§四·4；Qian, Z. *How to Look for Ideas in Computer Science Research*（第 5 课课堂案例，六种构思模式）。</a:t>
+            </a:r>
+          </a:p>
+          <a:p xmlns:a="http://schemas.openxmlformats.org/drawingml/2006/main">
+            <a:r>
+              <a:t/>
+            </a:r>
+          </a:p>
+          <a:p xmlns:a="http://schemas.openxmlformats.org/drawingml/2006/main">
+            <a:r>
+              <a:t>---</a:t>
+            </a:r>
+          </a:p>
+          <a:p xmlns:a="http://schemas.openxmlformats.org/drawingml/2006/main">
+            <a:r>
+              <a:t/>
             </a:r>
           </a:p>
           <a:p xmlns:a="http://schemas.openxmlformats.org/drawingml/2006/main">
@@ -2118,7 +5068,17 @@
           </a:p>
           <a:p xmlns:a="http://schemas.openxmlformats.org/drawingml/2006/main">
             <a:r>
-              <a:t>- 本页仅使用课程内部规则与教学材料。</a:t>
+              <a:t/>
+            </a:r>
+          </a:p>
+          <a:p xmlns:a="http://schemas.openxmlformats.org/drawingml/2006/main">
+            <a:r>
+              <a:t>- 本课 handout.md 与 slides.md</a:t>
+            </a:r>
+          </a:p>
+          <a:p xmlns:a="http://schemas.openxmlformats.org/drawingml/2006/main">
+            <a:r>
+              <a:t/>
             </a:r>
           </a:p>
           <a:p xmlns:a="http://schemas.openxmlformats.org/drawingml/2006/main">
@@ -2174,7 +5134,7 @@
           <p:nvPr/>
         </p:nvPicPr>
         <p:blipFill>
-          <a:blip xmlns:r="http://schemas.openxmlformats.org/officeDocument/2006/relationships" xmlns:a="http://schemas.openxmlformats.org/drawingml/2006/main" r:embed="R8eb22636d7a6438d">
+          <a:blip xmlns:r="http://schemas.openxmlformats.org/officeDocument/2006/relationships" xmlns:a="http://schemas.openxmlformats.org/drawingml/2006/main" r:embed="R69d4c682c8da404a">
             <a:duotone>
               <a:prstClr val="black"/>
               <a:schemeClr val="accent1">
@@ -2352,7 +5312,7 @@
           <p:nvPr/>
         </p:nvPicPr>
         <p:blipFill rotWithShape="1">
-          <a:blip xmlns:r="http://schemas.openxmlformats.org/officeDocument/2006/relationships" xmlns:a="http://schemas.openxmlformats.org/drawingml/2006/main" r:embed="Rdf241d9603484c5b"/>
+          <a:blip xmlns:r="http://schemas.openxmlformats.org/officeDocument/2006/relationships" xmlns:a="http://schemas.openxmlformats.org/drawingml/2006/main" r:embed="R265d9c6200d445fc"/>
           <a:srcRect xmlns:a="http://schemas.openxmlformats.org/drawingml/2006/main" l="74359" t="0" r="1346" b="0"/>
           <a:stretch xmlns:a="http://schemas.openxmlformats.org/drawingml/2006/main"/>
         </p:blipFill>
@@ -2375,7 +5335,7 @@
           <p:nvPr/>
         </p:nvPicPr>
         <p:blipFill rotWithShape="1">
-          <a:blip xmlns:r="http://schemas.openxmlformats.org/officeDocument/2006/relationships" xmlns:a="http://schemas.openxmlformats.org/drawingml/2006/main" r:embed="R250d7a3589f54851">
+          <a:blip xmlns:r="http://schemas.openxmlformats.org/officeDocument/2006/relationships" xmlns:a="http://schemas.openxmlformats.org/drawingml/2006/main" r:embed="Raa7c2c4409a544e5">
             <a:alphaModFix amt="35000"/>
           </a:blip>
           <a:srcRect xmlns:a="http://schemas.openxmlformats.org/drawingml/2006/main" l="0" t="9831" r="0" b="36385"/>
@@ -2637,7 +5597,7 @@
           <p:nvPr/>
         </p:nvPicPr>
         <p:blipFill>
-          <a:blip xmlns:r="http://schemas.openxmlformats.org/officeDocument/2006/relationships" xmlns:a="http://schemas.openxmlformats.org/drawingml/2006/main" r:embed="Rf985f96ed3c14b8d"/>
+          <a:blip xmlns:r="http://schemas.openxmlformats.org/officeDocument/2006/relationships" xmlns:a="http://schemas.openxmlformats.org/drawingml/2006/main" r:embed="R856949d433d649c9"/>
           <a:srcRect xmlns:a="http://schemas.openxmlformats.org/drawingml/2006/main" l="0" t="0" r="54251" b="0"/>
           <a:stretch xmlns:a="http://schemas.openxmlformats.org/drawingml/2006/main"/>
         </p:blipFill>
@@ -2894,7 +5854,7 @@
           <p:nvPr/>
         </p:nvPicPr>
         <p:blipFill rotWithShape="1">
-          <a:blip xmlns:r="http://schemas.openxmlformats.org/officeDocument/2006/relationships" xmlns:a="http://schemas.openxmlformats.org/drawingml/2006/main" r:embed="R97fc952d3c4a4bc7"/>
+          <a:blip xmlns:r="http://schemas.openxmlformats.org/officeDocument/2006/relationships" xmlns:a="http://schemas.openxmlformats.org/drawingml/2006/main" r:embed="R2a2cf430bb6d4a5f"/>
           <a:srcRect xmlns:a="http://schemas.openxmlformats.org/drawingml/2006/main" l="0" t="0" r="1346" b="0"/>
           <a:stretch xmlns:a="http://schemas.openxmlformats.org/drawingml/2006/main"/>
         </p:blipFill>
@@ -3077,7 +6037,7 @@
           <p:nvPr/>
         </p:nvPicPr>
         <p:blipFill>
-          <a:blip xmlns:r="http://schemas.openxmlformats.org/officeDocument/2006/relationships" xmlns:a="http://schemas.openxmlformats.org/drawingml/2006/main" r:embed="R114927c4343f4ebf"/>
+          <a:blip xmlns:r="http://schemas.openxmlformats.org/officeDocument/2006/relationships" xmlns:a="http://schemas.openxmlformats.org/drawingml/2006/main" r:embed="R2d29836b858f4453"/>
           <a:stretch xmlns:a="http://schemas.openxmlformats.org/drawingml/2006/main">
             <a:fillRect l="0" t="0" r="0" b="0"/>
           </a:stretch>
@@ -3173,7 +6133,7 @@
           <p:nvPr/>
         </p:nvPicPr>
         <p:blipFill>
-          <a:blip xmlns:r="http://schemas.openxmlformats.org/officeDocument/2006/relationships" xmlns:a="http://schemas.openxmlformats.org/drawingml/2006/main" r:embed="Rffd6ac68172c4da6">
+          <a:blip xmlns:r="http://schemas.openxmlformats.org/officeDocument/2006/relationships" xmlns:a="http://schemas.openxmlformats.org/drawingml/2006/main" r:embed="R633f70afbc4a490c">
             <a:duotone>
               <a:prstClr val="black"/>
               <a:schemeClr val="accent1">
@@ -3340,7 +6300,7 @@
           <p:nvPr/>
         </p:nvPicPr>
         <p:blipFill rotWithShape="1">
-          <a:blip xmlns:r="http://schemas.openxmlformats.org/officeDocument/2006/relationships" xmlns:a="http://schemas.openxmlformats.org/drawingml/2006/main" r:embed="Rbccb60dca4db41a9">
+          <a:blip xmlns:r="http://schemas.openxmlformats.org/officeDocument/2006/relationships" xmlns:a="http://schemas.openxmlformats.org/drawingml/2006/main" r:embed="Rf7736d28d4bb45ea">
             <a:alphaModFix amt="20000"/>
             <a:duotone>
               <a:schemeClr val="accent4">
@@ -3438,10 +6398,10 @@
   </p:cSld>
   <p:clrMap bg1="lt1" tx1="dk1" bg2="lt2" tx2="dk2" accent1="accent1" accent2="accent2" accent3="accent3" accent4="accent4" accent5="accent5" accent6="accent6" hlink="hlink" folHlink="folHlink"/>
   <p:sldLayoutIdLst>
-    <p:sldLayoutId xmlns:r="http://schemas.openxmlformats.org/officeDocument/2006/relationships" id="2147483649" r:id="Re59a8a74ae0c4501"/>
-    <p:sldLayoutId xmlns:r="http://schemas.openxmlformats.org/officeDocument/2006/relationships" id="2147483650" r:id="R23794260edcb416a"/>
-    <p:sldLayoutId xmlns:r="http://schemas.openxmlformats.org/officeDocument/2006/relationships" id="2147483651" r:id="R22b61f63b30844e6"/>
-    <p:sldLayoutId xmlns:r="http://schemas.openxmlformats.org/officeDocument/2006/relationships" id="2147483652" r:id="R352c51c21148437e"/>
+    <p:sldLayoutId xmlns:r="http://schemas.openxmlformats.org/officeDocument/2006/relationships" id="2147483649" r:id="R567bd35a258449af"/>
+    <p:sldLayoutId xmlns:r="http://schemas.openxmlformats.org/officeDocument/2006/relationships" id="2147483650" r:id="R3f906c55c3de48ce"/>
+    <p:sldLayoutId xmlns:r="http://schemas.openxmlformats.org/officeDocument/2006/relationships" id="2147483651" r:id="Recd79a9cad694fcb"/>
+    <p:sldLayoutId xmlns:r="http://schemas.openxmlformats.org/officeDocument/2006/relationships" id="2147483652" r:id="Rfc01da84f7c649f2"/>
   </p:sldLayoutIdLst>
   <p:hf hdr="0" ftr="0" dt="0"/>
   <p:txStyles>
@@ -8889,14 +11849,14 @@
       </p:sp>
       <p:pic>
         <p:nvPicPr>
-          <p:cNvPr id="25" name="p14-mi-map"/>
+          <p:cNvPr id="26" name="p14-mi-map"/>
           <p:cNvPicPr>
             <a:picLocks xmlns:a="http://schemas.openxmlformats.org/drawingml/2006/main" noChangeAspect="1"/>
           </p:cNvPicPr>
           <p:nvPr/>
         </p:nvPicPr>
         <p:blipFill>
-          <a:blip xmlns:r="http://schemas.openxmlformats.org/officeDocument/2006/relationships" xmlns:a="http://schemas.openxmlformats.org/drawingml/2006/main" r:embed="R5262f418bd344490"/>
+          <a:blip xmlns:r="http://schemas.openxmlformats.org/officeDocument/2006/relationships" xmlns:a="http://schemas.openxmlformats.org/drawingml/2006/main" r:embed="R58535f58afec485d"/>
           <a:stretch xmlns:a="http://schemas.openxmlformats.org/drawingml/2006/main"/>
         </p:blipFill>
         <p:spPr>
@@ -10355,8 +13315,8 @@
         </p:nvSpPr>
         <p:spPr>
           <a:xfrm xmlns:a="http://schemas.openxmlformats.org/drawingml/2006/main">
-            <a:off x="1028700" y="28575"/>
-            <a:ext cx="10668000" cy="628650"/>
+            <a:off x="1028700" y="57150"/>
+            <a:ext cx="10668000" cy="571500"/>
           </a:xfrm>
         </p:spPr>
         <p:txBody>
@@ -10366,6 +13326,9 @@
           <a:lstStyle xmlns:a="http://schemas.openxmlformats.org/drawingml/2006/main"/>
           <a:p xmlns:a="http://schemas.openxmlformats.org/drawingml/2006/main">
             <a:pPr algn="l">
+              <a:lnSpc>
+                <a:spcPct val="118000"/>
+              </a:lnSpc>
               <a:buNone/>
             </a:pPr>
             <a:r>
@@ -10377,7 +13340,7 @@
                 <a:ea typeface="微软雅黑"/>
                 <a:cs typeface="微软雅黑"/>
               </a:rPr>
-              <a:t>MI 演示：把失败写回证据地图</a:t>
+              <a:t>局限不等于论文之间发生冲突</a:t>
             </a:r>
             <a:endParaRPr/>
           </a:p>
@@ -10413,101 +13376,38 @@
       </p:sp>
       <p:sp>
         <p:nvSpPr>
-          <p:cNvPr id="6" name="visual-16-0-p16-h0">
-            <a:extLst xmlns:a="http://schemas.openxmlformats.org/drawingml/2006/main">
-              <a:ext uri="{FF2B5EF4-FFF2-40B4-BE49-F238E27FC236}">
-                <a16:creationId xmlns:a16="http://schemas.microsoft.com/office/drawing/2014/main" id="{78432763-7B0F-44EC-8BC3-6CF2F3576BC1}"/>
-              </a:ext>
-            </a:extLst>
-          </p:cNvPr>
-          <p:cNvSpPr>
-            <a:spLocks xmlns:a="http://schemas.openxmlformats.org/drawingml/2006/main" noGrp="1"/>
-          </p:cNvSpPr>
-          <p:nvPr/>
-        </p:nvSpPr>
-        <p:spPr>
-          <a:xfrm xmlns:a="http://schemas.openxmlformats.org/drawingml/2006/main">
-            <a:off x="666750" y="1095375"/>
-            <a:ext cx="1905000" cy="590550"/>
-          </a:xfrm>
-          <a:prstGeom xmlns:a="http://schemas.openxmlformats.org/drawingml/2006/main" prst="rect">
-            <a:avLst/>
-          </a:prstGeom>
-          <a:noFill xmlns:a="http://schemas.openxmlformats.org/drawingml/2006/main"/>
-          <a:ln xmlns:a="http://schemas.openxmlformats.org/drawingml/2006/main" w="0">
-            <a:noFill/>
-          </a:ln>
-        </p:spPr>
-        <p:txBody>
-          <a:bodyPr xmlns:a="http://schemas.openxmlformats.org/drawingml/2006/main" lIns="0" tIns="0" rIns="0" bIns="0" anchor="t">
-            <a:noAutofit/>
-          </a:bodyPr>
-          <a:lstStyle xmlns:a="http://schemas.openxmlformats.org/drawingml/2006/main"/>
-          <a:p xmlns:a="http://schemas.openxmlformats.org/drawingml/2006/main">
-            <a:pPr algn="l">
-              <a:lnSpc>
-                <a:spcPct val="114000"/>
-              </a:lnSpc>
-              <a:buNone/>
-              <a:defRPr sz="2200" b="1">
-                <a:solidFill>
-                  <a:srgbClr val="1F4D78"/>
-                </a:solidFill>
-                <a:latin typeface="微软雅黑"/>
-                <a:ea typeface="微软雅黑"/>
-                <a:cs typeface="微软雅黑"/>
-              </a:defRPr>
-            </a:pPr>
-            <a:r>
-              <a:rPr sz="2200" b="1">
-                <a:solidFill>
-                  <a:srgbClr val="1F4D78"/>
-                </a:solidFill>
-                <a:latin typeface="微软雅黑"/>
-                <a:ea typeface="微软雅黑"/>
-                <a:cs typeface="微软雅黑"/>
-              </a:rPr>
-              <a:t>失败 / 死路</a:t>
-            </a:r>
-          </a:p>
-        </p:txBody>
-      </p:sp>
-      <p:sp>
-        <p:nvSpPr>
-          <p:cNvPr id="7" name="visual-16-1-p16-b0">
-            <a:extLst xmlns:a="http://schemas.openxmlformats.org/drawingml/2006/main">
-              <a:ext uri="{FF2B5EF4-FFF2-40B4-BE49-F238E27FC236}">
-                <a16:creationId xmlns:a16="http://schemas.microsoft.com/office/drawing/2014/main" id="{FD4B8253-978E-4BCF-BE7E-18264B7FF535}"/>
-              </a:ext>
-            </a:extLst>
-          </p:cNvPr>
-          <p:cNvSpPr>
-            <a:spLocks xmlns:a="http://schemas.openxmlformats.org/drawingml/2006/main" noGrp="1"/>
-          </p:cNvSpPr>
-          <p:nvPr/>
-        </p:nvSpPr>
-        <p:spPr>
-          <a:xfrm xmlns:a="http://schemas.openxmlformats.org/drawingml/2006/main">
-            <a:off x="2809875" y="1095375"/>
-            <a:ext cx="8572500" cy="590550"/>
-          </a:xfrm>
-          <a:prstGeom xmlns:a="http://schemas.openxmlformats.org/drawingml/2006/main" prst="rect">
-            <a:avLst/>
-          </a:prstGeom>
-          <a:noFill xmlns:a="http://schemas.openxmlformats.org/drawingml/2006/main"/>
-          <a:ln xmlns:a="http://schemas.openxmlformats.org/drawingml/2006/main" w="0">
-            <a:noFill/>
-          </a:ln>
-        </p:spPr>
-        <p:txBody>
-          <a:bodyPr xmlns:a="http://schemas.openxmlformats.org/drawingml/2006/main" lIns="0" tIns="0" rIns="0" bIns="0" anchor="t">
-            <a:noAutofit/>
-          </a:bodyPr>
-          <a:lstStyle xmlns:a="http://schemas.openxmlformats.org/drawingml/2006/main"/>
-          <a:p xmlns:a="http://schemas.openxmlformats.org/drawingml/2006/main">
-            <a:pPr algn="l">
-              <a:lnSpc>
-                <a:spcPct val="114000"/>
+          <p:cNvPr id="6" name="content-184">
+            <a:extLst xmlns:a="http://schemas.openxmlformats.org/drawingml/2006/main">
+              <a:ext uri="{FF2B5EF4-FFF2-40B4-BE49-F238E27FC236}">
+                <a16:creationId xmlns:a16="http://schemas.microsoft.com/office/drawing/2014/main" id="{60305358-9ACC-4FF5-9DB1-03824D6E18C3}"/>
+              </a:ext>
+            </a:extLst>
+          </p:cNvPr>
+          <p:cNvSpPr>
+            <a:spLocks xmlns:a="http://schemas.openxmlformats.org/drawingml/2006/main" noGrp="1"/>
+          </p:cNvSpPr>
+          <p:nvPr/>
+        </p:nvSpPr>
+        <p:spPr>
+          <a:xfrm xmlns:a="http://schemas.openxmlformats.org/drawingml/2006/main">
+            <a:off x="609600" y="1571625"/>
+            <a:ext cx="10972800" cy="432435"/>
+          </a:xfrm>
+          <a:prstGeom xmlns:a="http://schemas.openxmlformats.org/drawingml/2006/main" prst="rect">
+            <a:avLst/>
+          </a:prstGeom>
+          <a:noFill xmlns:a="http://schemas.openxmlformats.org/drawingml/2006/main"/>
+          <a:ln xmlns:a="http://schemas.openxmlformats.org/drawingml/2006/main" w="0">
+            <a:noFill/>
+          </a:ln>
+        </p:spPr>
+        <p:txBody>
+          <a:bodyPr xmlns:a="http://schemas.openxmlformats.org/drawingml/2006/main" lIns="0" tIns="0" rIns="0" bIns="0" anchor="t"/>
+          <a:lstStyle xmlns:a="http://schemas.openxmlformats.org/drawingml/2006/main"/>
+          <a:p xmlns:a="http://schemas.openxmlformats.org/drawingml/2006/main">
+            <a:pPr algn="l">
+              <a:lnSpc>
+                <a:spcPct val="118000"/>
               </a:lnSpc>
               <a:buNone/>
               <a:defRPr sz="2400" b="0">
@@ -10528,111 +13428,48 @@
                 <a:ea typeface="微软雅黑"/>
                 <a:cs typeface="微软雅黑"/>
               </a:rPr>
-              <a:t>把 patching 成功直接写成因果忠实</a:t>
-            </a:r>
-          </a:p>
-        </p:txBody>
-      </p:sp>
-      <p:sp>
-        <p:nvSpPr>
-          <p:cNvPr id="8" name="visual-16-2-p16-h1">
-            <a:extLst xmlns:a="http://schemas.openxmlformats.org/drawingml/2006/main">
-              <a:ext uri="{FF2B5EF4-FFF2-40B4-BE49-F238E27FC236}">
-                <a16:creationId xmlns:a16="http://schemas.microsoft.com/office/drawing/2014/main" id="{47F421DF-02C4-4FBC-BDAF-1A9F6F5F6042}"/>
-              </a:ext>
-            </a:extLst>
-          </p:cNvPr>
-          <p:cNvSpPr>
-            <a:spLocks xmlns:a="http://schemas.openxmlformats.org/drawingml/2006/main" noGrp="1"/>
-          </p:cNvSpPr>
-          <p:nvPr/>
-        </p:nvSpPr>
-        <p:spPr>
-          <a:xfrm xmlns:a="http://schemas.openxmlformats.org/drawingml/2006/main">
-            <a:off x="666750" y="2076450"/>
-            <a:ext cx="1905000" cy="590550"/>
-          </a:xfrm>
-          <a:prstGeom xmlns:a="http://schemas.openxmlformats.org/drawingml/2006/main" prst="rect">
-            <a:avLst/>
-          </a:prstGeom>
-          <a:noFill xmlns:a="http://schemas.openxmlformats.org/drawingml/2006/main"/>
-          <a:ln xmlns:a="http://schemas.openxmlformats.org/drawingml/2006/main" w="0">
-            <a:noFill/>
-          </a:ln>
-        </p:spPr>
-        <p:txBody>
-          <a:bodyPr xmlns:a="http://schemas.openxmlformats.org/drawingml/2006/main" lIns="0" tIns="0" rIns="0" bIns="0" anchor="t">
-            <a:noAutofit/>
-          </a:bodyPr>
-          <a:lstStyle xmlns:a="http://schemas.openxmlformats.org/drawingml/2006/main"/>
-          <a:p xmlns:a="http://schemas.openxmlformats.org/drawingml/2006/main">
-            <a:pPr algn="l">
-              <a:lnSpc>
-                <a:spcPct val="114000"/>
-              </a:lnSpc>
-              <a:buNone/>
-              <a:defRPr sz="2200" b="1">
-                <a:solidFill>
-                  <a:srgbClr val="1F4D78"/>
-                </a:solidFill>
-                <a:latin typeface="微软雅黑"/>
-                <a:ea typeface="微软雅黑"/>
-                <a:cs typeface="微软雅黑"/>
-              </a:defRPr>
-            </a:pPr>
-            <a:r>
-              <a:rPr sz="2200" b="1">
-                <a:solidFill>
-                  <a:srgbClr val="1F4D78"/>
-                </a:solidFill>
-                <a:latin typeface="微软雅黑"/>
-                <a:ea typeface="微软雅黑"/>
-                <a:cs typeface="微软雅黑"/>
-              </a:rPr>
-              <a:t>原因</a:t>
-            </a:r>
-          </a:p>
-        </p:txBody>
-      </p:sp>
-      <p:sp>
-        <p:nvSpPr>
-          <p:cNvPr id="9" name="visual-16-3-p16-b1">
-            <a:extLst xmlns:a="http://schemas.openxmlformats.org/drawingml/2006/main">
-              <a:ext uri="{FF2B5EF4-FFF2-40B4-BE49-F238E27FC236}">
-                <a16:creationId xmlns:a16="http://schemas.microsoft.com/office/drawing/2014/main" id="{3F59C0CE-5D88-4A17-B0F0-A37BCE4C40A0}"/>
-              </a:ext>
-            </a:extLst>
-          </p:cNvPr>
-          <p:cNvSpPr>
-            <a:spLocks xmlns:a="http://schemas.openxmlformats.org/drawingml/2006/main" noGrp="1"/>
-          </p:cNvSpPr>
-          <p:nvPr/>
-        </p:nvSpPr>
-        <p:spPr>
-          <a:xfrm xmlns:a="http://schemas.openxmlformats.org/drawingml/2006/main">
-            <a:off x="2809875" y="2076450"/>
-            <a:ext cx="8572500" cy="590550"/>
-          </a:xfrm>
-          <a:prstGeom xmlns:a="http://schemas.openxmlformats.org/drawingml/2006/main" prst="rect">
-            <a:avLst/>
-          </a:prstGeom>
-          <a:noFill xmlns:a="http://schemas.openxmlformats.org/drawingml/2006/main"/>
-          <a:ln xmlns:a="http://schemas.openxmlformats.org/drawingml/2006/main" w="0">
-            <a:noFill/>
-          </a:ln>
-        </p:spPr>
-        <p:txBody>
-          <a:bodyPr xmlns:a="http://schemas.openxmlformats.org/drawingml/2006/main" lIns="0" tIns="0" rIns="0" bIns="0" anchor="t">
-            <a:noAutofit/>
-          </a:bodyPr>
-          <a:lstStyle xmlns:a="http://schemas.openxmlformats.org/drawingml/2006/main"/>
-          <a:p xmlns:a="http://schemas.openxmlformats.org/drawingml/2006/main">
-            <a:pPr algn="l">
-              <a:lnSpc>
-                <a:spcPct val="114000"/>
-              </a:lnSpc>
-              <a:buNone/>
-              <a:defRPr sz="2200" b="0">
+              <a:t>原文讨论效率 → 可以支持效率判断</a:t>
+            </a:r>
+          </a:p>
+        </p:txBody>
+      </p:sp>
+      <p:sp>
+        <p:nvSpPr>
+          <p:cNvPr id="7" name="content-185">
+            <a:extLst xmlns:a="http://schemas.openxmlformats.org/drawingml/2006/main">
+              <a:ext uri="{FF2B5EF4-FFF2-40B4-BE49-F238E27FC236}">
+                <a16:creationId xmlns:a16="http://schemas.microsoft.com/office/drawing/2014/main" id="{E85E93A0-B768-4889-B01D-AD1D076056CC}"/>
+              </a:ext>
+            </a:extLst>
+          </p:cNvPr>
+          <p:cNvSpPr>
+            <a:spLocks xmlns:a="http://schemas.openxmlformats.org/drawingml/2006/main" noGrp="1"/>
+          </p:cNvSpPr>
+          <p:nvPr/>
+        </p:nvSpPr>
+        <p:spPr>
+          <a:xfrm xmlns:a="http://schemas.openxmlformats.org/drawingml/2006/main">
+            <a:off x="609600" y="2261235"/>
+            <a:ext cx="10972800" cy="432435"/>
+          </a:xfrm>
+          <a:prstGeom xmlns:a="http://schemas.openxmlformats.org/drawingml/2006/main" prst="rect">
+            <a:avLst/>
+          </a:prstGeom>
+          <a:noFill xmlns:a="http://schemas.openxmlformats.org/drawingml/2006/main"/>
+          <a:ln xmlns:a="http://schemas.openxmlformats.org/drawingml/2006/main" w="0">
+            <a:noFill/>
+          </a:ln>
+        </p:spPr>
+        <p:txBody>
+          <a:bodyPr xmlns:a="http://schemas.openxmlformats.org/drawingml/2006/main" lIns="0" tIns="0" rIns="0" bIns="0" anchor="t"/>
+          <a:lstStyle xmlns:a="http://schemas.openxmlformats.org/drawingml/2006/main"/>
+          <a:p xmlns:a="http://schemas.openxmlformats.org/drawingml/2006/main">
+            <a:pPr algn="l">
+              <a:lnSpc>
+                <a:spcPct val="118000"/>
+              </a:lnSpc>
+              <a:buNone/>
+              <a:defRPr sz="2400" b="0">
                 <a:solidFill>
                   <a:srgbClr val="27333D"/>
                 </a:solidFill>
@@ -10642,7 +13479,7 @@
               </a:defRPr>
             </a:pPr>
             <a:r>
-              <a:rPr sz="2200" b="0">
+              <a:rPr sz="2400" b="0">
                 <a:solidFill>
                   <a:srgbClr val="27333D"/>
                 </a:solidFill>
@@ -10650,111 +13487,48 @@
                 <a:ea typeface="微软雅黑"/>
                 <a:cs typeface="微软雅黑"/>
               </a:rPr>
-              <a:t>行为差异可能来自重构误差、控制性不足或 dormant pathway</a:t>
-            </a:r>
-          </a:p>
-        </p:txBody>
-      </p:sp>
-      <p:sp>
-        <p:nvSpPr>
-          <p:cNvPr id="10" name="visual-16-4-p16-h2">
-            <a:extLst xmlns:a="http://schemas.openxmlformats.org/drawingml/2006/main">
-              <a:ext uri="{FF2B5EF4-FFF2-40B4-BE49-F238E27FC236}">
-                <a16:creationId xmlns:a16="http://schemas.microsoft.com/office/drawing/2014/main" id="{3D66532F-EE8B-4000-80B0-720DF6EE1D57}"/>
-              </a:ext>
-            </a:extLst>
-          </p:cNvPr>
-          <p:cNvSpPr>
-            <a:spLocks xmlns:a="http://schemas.openxmlformats.org/drawingml/2006/main" noGrp="1"/>
-          </p:cNvSpPr>
-          <p:nvPr/>
-        </p:nvSpPr>
-        <p:spPr>
-          <a:xfrm xmlns:a="http://schemas.openxmlformats.org/drawingml/2006/main">
-            <a:off x="666750" y="3057525"/>
-            <a:ext cx="1905000" cy="590550"/>
-          </a:xfrm>
-          <a:prstGeom xmlns:a="http://schemas.openxmlformats.org/drawingml/2006/main" prst="rect">
-            <a:avLst/>
-          </a:prstGeom>
-          <a:noFill xmlns:a="http://schemas.openxmlformats.org/drawingml/2006/main"/>
-          <a:ln xmlns:a="http://schemas.openxmlformats.org/drawingml/2006/main" w="0">
-            <a:noFill/>
-          </a:ln>
-        </p:spPr>
-        <p:txBody>
-          <a:bodyPr xmlns:a="http://schemas.openxmlformats.org/drawingml/2006/main" lIns="0" tIns="0" rIns="0" bIns="0" anchor="t">
-            <a:noAutofit/>
-          </a:bodyPr>
-          <a:lstStyle xmlns:a="http://schemas.openxmlformats.org/drawingml/2006/main"/>
-          <a:p xmlns:a="http://schemas.openxmlformats.org/drawingml/2006/main">
-            <a:pPr algn="l">
-              <a:lnSpc>
-                <a:spcPct val="114000"/>
-              </a:lnSpc>
-              <a:buNone/>
-              <a:defRPr sz="2200" b="1">
-                <a:solidFill>
-                  <a:srgbClr val="1F4D78"/>
-                </a:solidFill>
-                <a:latin typeface="微软雅黑"/>
-                <a:ea typeface="微软雅黑"/>
-                <a:cs typeface="微软雅黑"/>
-              </a:defRPr>
-            </a:pPr>
-            <a:r>
-              <a:rPr sz="2200" b="1">
-                <a:solidFill>
-                  <a:srgbClr val="1F4D78"/>
-                </a:solidFill>
-                <a:latin typeface="微软雅黑"/>
-                <a:ea typeface="微软雅黑"/>
-                <a:cs typeface="微软雅黑"/>
-              </a:rPr>
-              <a:t>处理</a:t>
-            </a:r>
-          </a:p>
-        </p:txBody>
-      </p:sp>
-      <p:sp>
-        <p:nvSpPr>
-          <p:cNvPr id="11" name="visual-16-5-p16-b2">
-            <a:extLst xmlns:a="http://schemas.openxmlformats.org/drawingml/2006/main">
-              <a:ext uri="{FF2B5EF4-FFF2-40B4-BE49-F238E27FC236}">
-                <a16:creationId xmlns:a16="http://schemas.microsoft.com/office/drawing/2014/main" id="{A41A3BF3-3721-4ABD-A5B1-0C7FB1CDFB73}"/>
-              </a:ext>
-            </a:extLst>
-          </p:cNvPr>
-          <p:cNvSpPr>
-            <a:spLocks xmlns:a="http://schemas.openxmlformats.org/drawingml/2006/main" noGrp="1"/>
-          </p:cNvSpPr>
-          <p:nvPr/>
-        </p:nvSpPr>
-        <p:spPr>
-          <a:xfrm xmlns:a="http://schemas.openxmlformats.org/drawingml/2006/main">
-            <a:off x="2809875" y="3057525"/>
-            <a:ext cx="8572500" cy="590550"/>
-          </a:xfrm>
-          <a:prstGeom xmlns:a="http://schemas.openxmlformats.org/drawingml/2006/main" prst="rect">
-            <a:avLst/>
-          </a:prstGeom>
-          <a:noFill xmlns:a="http://schemas.openxmlformats.org/drawingml/2006/main"/>
-          <a:ln xmlns:a="http://schemas.openxmlformats.org/drawingml/2006/main" w="0">
-            <a:noFill/>
-          </a:ln>
-        </p:spPr>
-        <p:txBody>
-          <a:bodyPr xmlns:a="http://schemas.openxmlformats.org/drawingml/2006/main" lIns="0" tIns="0" rIns="0" bIns="0" anchor="t">
-            <a:noAutofit/>
-          </a:bodyPr>
-          <a:lstStyle xmlns:a="http://schemas.openxmlformats.org/drawingml/2006/main"/>
-          <a:p xmlns:a="http://schemas.openxmlformats.org/drawingml/2006/main">
-            <a:pPr algn="l">
-              <a:lnSpc>
-                <a:spcPct val="114000"/>
-              </a:lnSpc>
-              <a:buNone/>
-              <a:defRPr sz="2000" b="0">
+              <a:t>原文未检验 faithfulness → 这项结论仍未获得检验</a:t>
+            </a:r>
+          </a:p>
+        </p:txBody>
+      </p:sp>
+      <p:sp>
+        <p:nvSpPr>
+          <p:cNvPr id="8" name="content-186">
+            <a:extLst xmlns:a="http://schemas.openxmlformats.org/drawingml/2006/main">
+              <a:ext uri="{FF2B5EF4-FFF2-40B4-BE49-F238E27FC236}">
+                <a16:creationId xmlns:a16="http://schemas.microsoft.com/office/drawing/2014/main" id="{FDAB3778-89A7-4E47-9026-281576C19BBA}"/>
+              </a:ext>
+            </a:extLst>
+          </p:cNvPr>
+          <p:cNvSpPr>
+            <a:spLocks xmlns:a="http://schemas.openxmlformats.org/drawingml/2006/main" noGrp="1"/>
+          </p:cNvSpPr>
+          <p:nvPr/>
+        </p:nvSpPr>
+        <p:spPr>
+          <a:xfrm xmlns:a="http://schemas.openxmlformats.org/drawingml/2006/main">
+            <a:off x="609600" y="2950845"/>
+            <a:ext cx="10972800" cy="432435"/>
+          </a:xfrm>
+          <a:prstGeom xmlns:a="http://schemas.openxmlformats.org/drawingml/2006/main" prst="rect">
+            <a:avLst/>
+          </a:prstGeom>
+          <a:noFill xmlns:a="http://schemas.openxmlformats.org/drawingml/2006/main"/>
+          <a:ln xmlns:a="http://schemas.openxmlformats.org/drawingml/2006/main" w="0">
+            <a:noFill/>
+          </a:ln>
+        </p:spPr>
+        <p:txBody>
+          <a:bodyPr xmlns:a="http://schemas.openxmlformats.org/drawingml/2006/main" lIns="0" tIns="0" rIns="0" bIns="0" anchor="t"/>
+          <a:lstStyle xmlns:a="http://schemas.openxmlformats.org/drawingml/2006/main"/>
+          <a:p xmlns:a="http://schemas.openxmlformats.org/drawingml/2006/main">
+            <a:pPr algn="l">
+              <a:lnSpc>
+                <a:spcPct val="118000"/>
+              </a:lnSpc>
+              <a:buNone/>
+              <a:defRPr sz="2400" b="0">
                 <a:solidFill>
                   <a:srgbClr val="27333D"/>
                 </a:solidFill>
@@ -10764,7 +13538,7 @@
               </a:defRPr>
             </a:pPr>
             <a:r>
-              <a:rPr sz="2000" b="0">
+              <a:rPr sz="2400" b="0">
                 <a:solidFill>
                   <a:srgbClr val="27333D"/>
                 </a:solidFill>
@@ -10772,190 +13546,66 @@
                 <a:ea typeface="微软雅黑"/>
                 <a:cs typeface="微软雅黑"/>
               </a:rPr>
-              <a:t>结论降级为 review；增加 PCA / 监督字典 / random feature 与 reconstruction checks</a:t>
-            </a:r>
-          </a:p>
-        </p:txBody>
-      </p:sp>
-      <p:sp>
-        <p:nvSpPr>
-          <p:cNvPr id="12" name="visual-16-6-p16-h3">
-            <a:extLst xmlns:a="http://schemas.openxmlformats.org/drawingml/2006/main">
-              <a:ext uri="{FF2B5EF4-FFF2-40B4-BE49-F238E27FC236}">
-                <a16:creationId xmlns:a16="http://schemas.microsoft.com/office/drawing/2014/main" id="{62AC1E0C-A219-4981-A91B-8FD7054898D2}"/>
-              </a:ext>
-            </a:extLst>
-          </p:cNvPr>
-          <p:cNvSpPr>
-            <a:spLocks xmlns:a="http://schemas.openxmlformats.org/drawingml/2006/main" noGrp="1"/>
-          </p:cNvSpPr>
-          <p:nvPr/>
-        </p:nvSpPr>
-        <p:spPr>
-          <a:xfrm xmlns:a="http://schemas.openxmlformats.org/drawingml/2006/main">
-            <a:off x="666750" y="4038600"/>
-            <a:ext cx="1905000" cy="590550"/>
-          </a:xfrm>
-          <a:prstGeom xmlns:a="http://schemas.openxmlformats.org/drawingml/2006/main" prst="rect">
-            <a:avLst/>
-          </a:prstGeom>
-          <a:noFill xmlns:a="http://schemas.openxmlformats.org/drawingml/2006/main"/>
-          <a:ln xmlns:a="http://schemas.openxmlformats.org/drawingml/2006/main" w="0">
-            <a:noFill/>
-          </a:ln>
-        </p:spPr>
-        <p:txBody>
-          <a:bodyPr xmlns:a="http://schemas.openxmlformats.org/drawingml/2006/main" lIns="0" tIns="0" rIns="0" bIns="0" anchor="t">
-            <a:noAutofit/>
-          </a:bodyPr>
-          <a:lstStyle xmlns:a="http://schemas.openxmlformats.org/drawingml/2006/main"/>
-          <a:p xmlns:a="http://schemas.openxmlformats.org/drawingml/2006/main">
-            <a:pPr algn="l">
-              <a:lnSpc>
-                <a:spcPct val="114000"/>
-              </a:lnSpc>
-              <a:buNone/>
-              <a:defRPr sz="2200" b="1">
-                <a:solidFill>
-                  <a:srgbClr val="1F4D78"/>
-                </a:solidFill>
-                <a:latin typeface="微软雅黑"/>
-                <a:ea typeface="微软雅黑"/>
-                <a:cs typeface="微软雅黑"/>
-              </a:defRPr>
-            </a:pPr>
-            <a:r>
-              <a:rPr sz="2200" b="1">
-                <a:solidFill>
-                  <a:srgbClr val="1F4D78"/>
-                </a:solidFill>
-                <a:latin typeface="微软雅黑"/>
-                <a:ea typeface="微软雅黑"/>
-                <a:cs typeface="微软雅黑"/>
-              </a:rPr>
-              <a:t>回写</a:t>
-            </a:r>
-          </a:p>
-        </p:txBody>
-      </p:sp>
-      <p:sp>
-        <p:nvSpPr>
-          <p:cNvPr id="13" name="visual-16-7-p16-b3">
-            <a:extLst xmlns:a="http://schemas.openxmlformats.org/drawingml/2006/main">
-              <a:ext uri="{FF2B5EF4-FFF2-40B4-BE49-F238E27FC236}">
-                <a16:creationId xmlns:a16="http://schemas.microsoft.com/office/drawing/2014/main" id="{FABEA243-952E-4AE5-AB1D-6EEB3D64A789}"/>
-              </a:ext>
-            </a:extLst>
-          </p:cNvPr>
-          <p:cNvSpPr>
-            <a:spLocks xmlns:a="http://schemas.openxmlformats.org/drawingml/2006/main" noGrp="1"/>
-          </p:cNvSpPr>
-          <p:nvPr/>
-        </p:nvSpPr>
-        <p:spPr>
-          <a:xfrm xmlns:a="http://schemas.openxmlformats.org/drawingml/2006/main">
-            <a:off x="2809875" y="4038600"/>
-            <a:ext cx="8572500" cy="590550"/>
-          </a:xfrm>
-          <a:prstGeom xmlns:a="http://schemas.openxmlformats.org/drawingml/2006/main" prst="rect">
-            <a:avLst/>
-          </a:prstGeom>
-          <a:noFill xmlns:a="http://schemas.openxmlformats.org/drawingml/2006/main"/>
-          <a:ln xmlns:a="http://schemas.openxmlformats.org/drawingml/2006/main" w="0">
-            <a:noFill/>
-          </a:ln>
-        </p:spPr>
-        <p:txBody>
-          <a:bodyPr xmlns:a="http://schemas.openxmlformats.org/drawingml/2006/main" lIns="0" tIns="0" rIns="0" bIns="0" anchor="t">
-            <a:noAutofit/>
-          </a:bodyPr>
-          <a:lstStyle xmlns:a="http://schemas.openxmlformats.org/drawingml/2006/main"/>
-          <a:p xmlns:a="http://schemas.openxmlformats.org/drawingml/2006/main">
-            <a:pPr algn="l">
-              <a:lnSpc>
-                <a:spcPct val="105000"/>
-              </a:lnSpc>
-              <a:buNone/>
-              <a:defRPr sz="1800" b="0">
-                <a:solidFill>
-                  <a:srgbClr val="27333D"/>
-                </a:solidFill>
-                <a:latin typeface="Consolas"/>
-                <a:ea typeface="Consolas"/>
-                <a:cs typeface="Consolas"/>
-              </a:defRPr>
-            </a:pPr>
-            <a:r>
-              <a:rPr sz="1800" b="0">
-                <a:solidFill>
-                  <a:srgbClr val="27333D"/>
-                </a:solidFill>
-                <a:latin typeface="Consolas"/>
-                <a:ea typeface="Consolas"/>
-                <a:cs typeface="Consolas"/>
-              </a:rPr>
-              <a:t>evidence-map.md + failure-log.md + problem-definition.md</a:t>
-            </a:r>
-          </a:p>
-        </p:txBody>
-      </p:sp>
-      <p:sp>
-        <p:nvSpPr>
-          <p:cNvPr id="14" name="visual-16-8-p16-bottom">
-            <a:extLst xmlns:a="http://schemas.openxmlformats.org/drawingml/2006/main">
-              <a:ext uri="{FF2B5EF4-FFF2-40B4-BE49-F238E27FC236}">
-                <a16:creationId xmlns:a16="http://schemas.microsoft.com/office/drawing/2014/main" id="{AFC23E25-85EA-47E0-B018-EC504C572754}"/>
-              </a:ext>
-            </a:extLst>
-          </p:cNvPr>
-          <p:cNvSpPr>
-            <a:spLocks xmlns:a="http://schemas.openxmlformats.org/drawingml/2006/main" noGrp="1"/>
-          </p:cNvSpPr>
-          <p:nvPr/>
-        </p:nvSpPr>
-        <p:spPr>
-          <a:xfrm xmlns:a="http://schemas.openxmlformats.org/drawingml/2006/main">
-            <a:off x="1190625" y="5257800"/>
-            <a:ext cx="9810750" cy="438150"/>
-          </a:xfrm>
-          <a:prstGeom xmlns:a="http://schemas.openxmlformats.org/drawingml/2006/main" prst="rect">
-            <a:avLst/>
-          </a:prstGeom>
-          <a:noFill xmlns:a="http://schemas.openxmlformats.org/drawingml/2006/main"/>
-          <a:ln xmlns:a="http://schemas.openxmlformats.org/drawingml/2006/main" w="0">
-            <a:noFill/>
-          </a:ln>
-        </p:spPr>
-        <p:txBody>
-          <a:bodyPr xmlns:a="http://schemas.openxmlformats.org/drawingml/2006/main" lIns="0" tIns="0" rIns="0" bIns="0" anchor="ctr">
-            <a:noAutofit/>
-          </a:bodyPr>
-          <a:lstStyle xmlns:a="http://schemas.openxmlformats.org/drawingml/2006/main"/>
-          <a:p xmlns:a="http://schemas.openxmlformats.org/drawingml/2006/main">
-            <a:pPr algn="l">
-              <a:lnSpc>
-                <a:spcPct val="114000"/>
-              </a:lnSpc>
-              <a:buNone/>
-              <a:defRPr sz="2000" b="0">
-                <a:solidFill>
-                  <a:srgbClr val="1F4D78"/>
-                </a:solidFill>
-                <a:latin typeface="微软雅黑"/>
-                <a:ea typeface="微软雅黑"/>
-                <a:cs typeface="微软雅黑"/>
-              </a:defRPr>
-            </a:pPr>
-            <a:r>
-              <a:rPr sz="2000" b="0">
-                <a:solidFill>
-                  <a:srgbClr val="1F4D78"/>
-                </a:solidFill>
-                <a:latin typeface="微软雅黑"/>
-                <a:ea typeface="微软雅黑"/>
-                <a:cs typeface="微软雅黑"/>
-              </a:rPr>
-              <a:t>CP1 要求真实发生的失败或被放弃方向；前瞻性的“如果失败就重试”不能替代。</a:t>
+              <a:t>把效率写成 faithfulness → 我们的推断越界</a:t>
+            </a:r>
+          </a:p>
+        </p:txBody>
+      </p:sp>
+      <p:sp>
+        <p:nvSpPr>
+          <p:cNvPr id="9" name="content-187">
+            <a:extLst xmlns:a="http://schemas.openxmlformats.org/drawingml/2006/main">
+              <a:ext uri="{FF2B5EF4-FFF2-40B4-BE49-F238E27FC236}">
+                <a16:creationId xmlns:a16="http://schemas.microsoft.com/office/drawing/2014/main" id="{DD0417B9-F884-43CB-888E-1509278EC663}"/>
+              </a:ext>
+            </a:extLst>
+          </p:cNvPr>
+          <p:cNvSpPr>
+            <a:spLocks xmlns:a="http://schemas.openxmlformats.org/drawingml/2006/main" noGrp="1"/>
+          </p:cNvSpPr>
+          <p:nvPr/>
+        </p:nvSpPr>
+        <p:spPr>
+          <a:xfrm xmlns:a="http://schemas.openxmlformats.org/drawingml/2006/main">
+            <a:off x="609600" y="3640455"/>
+            <a:ext cx="10972800" cy="432435"/>
+          </a:xfrm>
+          <a:prstGeom xmlns:a="http://schemas.openxmlformats.org/drawingml/2006/main" prst="rect">
+            <a:avLst/>
+          </a:prstGeom>
+          <a:noFill xmlns:a="http://schemas.openxmlformats.org/drawingml/2006/main"/>
+          <a:ln xmlns:a="http://schemas.openxmlformats.org/drawingml/2006/main" w="0">
+            <a:noFill/>
+          </a:ln>
+        </p:spPr>
+        <p:txBody>
+          <a:bodyPr xmlns:a="http://schemas.openxmlformats.org/drawingml/2006/main" lIns="0" tIns="0" rIns="0" bIns="0" anchor="t"/>
+          <a:lstStyle xmlns:a="http://schemas.openxmlformats.org/drawingml/2006/main"/>
+          <a:p xmlns:a="http://schemas.openxmlformats.org/drawingml/2006/main">
+            <a:pPr algn="l">
+              <a:lnSpc>
+                <a:spcPct val="118000"/>
+              </a:lnSpc>
+              <a:buNone/>
+              <a:defRPr sz="2400" b="0">
+                <a:solidFill>
+                  <a:srgbClr val="1F4D78"/>
+                </a:solidFill>
+                <a:latin typeface="微软雅黑"/>
+                <a:ea typeface="微软雅黑"/>
+                <a:cs typeface="微软雅黑"/>
+              </a:defRPr>
+            </a:pPr>
+            <a:r>
+              <a:rPr sz="2400" b="0">
+                <a:solidFill>
+                  <a:srgbClr val="1F4D78"/>
+                </a:solidFill>
+                <a:latin typeface="微软雅黑"/>
+                <a:ea typeface="微软雅黑"/>
+                <a:cs typeface="微软雅黑"/>
+              </a:rPr>
+              <a:t>只有针对可比命题的相反证据，才进入冲突格。</a:t>
             </a:r>
           </a:p>
         </p:txBody>
@@ -19142,8 +21792,8 @@
         </p:nvSpPr>
         <p:spPr>
           <a:xfrm xmlns:a="http://schemas.openxmlformats.org/drawingml/2006/main">
-            <a:off x="1028700" y="28575"/>
-            <a:ext cx="10668000" cy="628650"/>
+            <a:off x="1028700" y="57150"/>
+            <a:ext cx="10668000" cy="571500"/>
           </a:xfrm>
         </p:spPr>
         <p:txBody>
@@ -19153,6 +21803,9 @@
           <a:lstStyle xmlns:a="http://schemas.openxmlformats.org/drawingml/2006/main"/>
           <a:p xmlns:a="http://schemas.openxmlformats.org/drawingml/2006/main">
             <a:pPr algn="l">
+              <a:lnSpc>
+                <a:spcPct val="118000"/>
+              </a:lnSpc>
               <a:buNone/>
             </a:pPr>
             <a:r>
@@ -19164,7 +21817,7 @@
                 <a:ea typeface="微软雅黑"/>
                 <a:cs typeface="微软雅黑"/>
               </a:rPr>
-              <a:t>相关工作矩阵：从按论文排列到按问题排列</a:t>
+              <a:t>空白单元格还不是研究空白</a:t>
             </a:r>
             <a:endParaRPr/>
           </a:p>
@@ -19200,40 +21853,38 @@
       </p:sp>
       <p:sp>
         <p:nvSpPr>
-          <p:cNvPr id="6" name="visual-6-0-p06-rule">
-            <a:extLst xmlns:a="http://schemas.openxmlformats.org/drawingml/2006/main">
-              <a:ext uri="{FF2B5EF4-FFF2-40B4-BE49-F238E27FC236}">
-                <a16:creationId xmlns:a16="http://schemas.microsoft.com/office/drawing/2014/main" id="{8BAE3B67-2DE1-4785-A395-524D482F9575}"/>
-              </a:ext>
-            </a:extLst>
-          </p:cNvPr>
-          <p:cNvSpPr>
-            <a:spLocks xmlns:a="http://schemas.openxmlformats.org/drawingml/2006/main" noGrp="1"/>
-          </p:cNvSpPr>
-          <p:nvPr/>
-        </p:nvSpPr>
-        <p:spPr>
-          <a:xfrm xmlns:a="http://schemas.openxmlformats.org/drawingml/2006/main">
-            <a:off x="1000125" y="971550"/>
-            <a:ext cx="10191750" cy="514350"/>
-          </a:xfrm>
-          <a:prstGeom xmlns:a="http://schemas.openxmlformats.org/drawingml/2006/main" prst="rect">
-            <a:avLst/>
-          </a:prstGeom>
-          <a:noFill xmlns:a="http://schemas.openxmlformats.org/drawingml/2006/main"/>
-          <a:ln xmlns:a="http://schemas.openxmlformats.org/drawingml/2006/main" w="0">
-            <a:noFill/>
-          </a:ln>
-        </p:spPr>
-        <p:txBody>
-          <a:bodyPr xmlns:a="http://schemas.openxmlformats.org/drawingml/2006/main" lIns="0" tIns="0" rIns="0" bIns="0" anchor="ctr">
-            <a:noAutofit/>
-          </a:bodyPr>
-          <a:lstStyle xmlns:a="http://schemas.openxmlformats.org/drawingml/2006/main"/>
-          <a:p xmlns:a="http://schemas.openxmlformats.org/drawingml/2006/main">
-            <a:pPr algn="l">
-              <a:lnSpc>
-                <a:spcPct val="114000"/>
+          <p:cNvPr id="6" name="content-179">
+            <a:extLst xmlns:a="http://schemas.openxmlformats.org/drawingml/2006/main">
+              <a:ext uri="{FF2B5EF4-FFF2-40B4-BE49-F238E27FC236}">
+                <a16:creationId xmlns:a16="http://schemas.microsoft.com/office/drawing/2014/main" id="{2C1663CC-B046-42EF-B456-599DF67278B1}"/>
+              </a:ext>
+            </a:extLst>
+          </p:cNvPr>
+          <p:cNvSpPr>
+            <a:spLocks xmlns:a="http://schemas.openxmlformats.org/drawingml/2006/main" noGrp="1"/>
+          </p:cNvSpPr>
+          <p:nvPr/>
+        </p:nvSpPr>
+        <p:spPr>
+          <a:xfrm xmlns:a="http://schemas.openxmlformats.org/drawingml/2006/main">
+            <a:off x="609600" y="1571625"/>
+            <a:ext cx="10972800" cy="432435"/>
+          </a:xfrm>
+          <a:prstGeom xmlns:a="http://schemas.openxmlformats.org/drawingml/2006/main" prst="rect">
+            <a:avLst/>
+          </a:prstGeom>
+          <a:noFill xmlns:a="http://schemas.openxmlformats.org/drawingml/2006/main"/>
+          <a:ln xmlns:a="http://schemas.openxmlformats.org/drawingml/2006/main" w="0">
+            <a:noFill/>
+          </a:ln>
+        </p:spPr>
+        <p:txBody>
+          <a:bodyPr xmlns:a="http://schemas.openxmlformats.org/drawingml/2006/main" lIns="0" tIns="0" rIns="0" bIns="0" anchor="t"/>
+          <a:lstStyle xmlns:a="http://schemas.openxmlformats.org/drawingml/2006/main"/>
+          <a:p xmlns:a="http://schemas.openxmlformats.org/drawingml/2006/main">
+            <a:pPr algn="l">
+              <a:lnSpc>
+                <a:spcPct val="118000"/>
               </a:lnSpc>
               <a:buNone/>
               <a:defRPr sz="2400" b="0">
@@ -19254,1877 +21905,45 @@
                 <a:ea typeface="微软雅黑"/>
                 <a:cs typeface="微软雅黑"/>
               </a:rPr>
-              <a:t>行 = 已核验材料　｜　列 = 从研究问题拆出的子问题</a:t>
-            </a:r>
-          </a:p>
-        </p:txBody>
-      </p:sp>
-      <p:sp>
-        <p:nvSpPr>
-          <p:cNvPr id="7" name="visual-6-1-p06-h-0">
-            <a:extLst xmlns:a="http://schemas.openxmlformats.org/drawingml/2006/main">
-              <a:ext uri="{FF2B5EF4-FFF2-40B4-BE49-F238E27FC236}">
-                <a16:creationId xmlns:a16="http://schemas.microsoft.com/office/drawing/2014/main" id="{FACC11BC-31EA-43B8-B909-E11D48CE6283}"/>
-              </a:ext>
-            </a:extLst>
-          </p:cNvPr>
-          <p:cNvSpPr>
-            <a:spLocks xmlns:a="http://schemas.openxmlformats.org/drawingml/2006/main" noGrp="1"/>
-          </p:cNvSpPr>
-          <p:nvPr/>
-        </p:nvSpPr>
-        <p:spPr>
-          <a:xfrm xmlns:a="http://schemas.openxmlformats.org/drawingml/2006/main">
-            <a:off x="857250" y="1714500"/>
-            <a:ext cx="1143000" cy="400050"/>
-          </a:xfrm>
-          <a:prstGeom xmlns:a="http://schemas.openxmlformats.org/drawingml/2006/main" prst="rect">
-            <a:avLst/>
-          </a:prstGeom>
-          <a:noFill xmlns:a="http://schemas.openxmlformats.org/drawingml/2006/main"/>
-          <a:ln xmlns:a="http://schemas.openxmlformats.org/drawingml/2006/main" w="0">
-            <a:noFill/>
-          </a:ln>
-        </p:spPr>
-        <p:txBody>
-          <a:bodyPr xmlns:a="http://schemas.openxmlformats.org/drawingml/2006/main" lIns="0" tIns="0" rIns="0" bIns="0" anchor="ctr">
-            <a:noAutofit/>
-          </a:bodyPr>
-          <a:lstStyle xmlns:a="http://schemas.openxmlformats.org/drawingml/2006/main"/>
-          <a:p xmlns:a="http://schemas.openxmlformats.org/drawingml/2006/main">
-            <a:pPr algn="l">
-              <a:lnSpc>
-                <a:spcPct val="114000"/>
-              </a:lnSpc>
-              <a:buNone/>
-              <a:defRPr sz="2200" b="1">
-                <a:solidFill>
-                  <a:srgbClr val="1F4D78"/>
-                </a:solidFill>
-                <a:latin typeface="微软雅黑"/>
-                <a:ea typeface="微软雅黑"/>
-                <a:cs typeface="微软雅黑"/>
-              </a:defRPr>
-            </a:pPr>
-            <a:r>
-              <a:rPr sz="2200" b="1">
-                <a:solidFill>
-                  <a:srgbClr val="1F4D78"/>
-                </a:solidFill>
-                <a:latin typeface="微软雅黑"/>
-                <a:ea typeface="微软雅黑"/>
-                <a:cs typeface="微软雅黑"/>
-              </a:rPr>
-              <a:t>材料</a:t>
-            </a:r>
-          </a:p>
-        </p:txBody>
-      </p:sp>
-      <p:sp>
-        <p:nvSpPr>
-          <p:cNvPr id="8" name="visual-6-2-p06-h-1">
-            <a:extLst xmlns:a="http://schemas.openxmlformats.org/drawingml/2006/main">
-              <a:ext uri="{FF2B5EF4-FFF2-40B4-BE49-F238E27FC236}">
-                <a16:creationId xmlns:a16="http://schemas.microsoft.com/office/drawing/2014/main" id="{F952525D-39B9-48B3-BFA9-F5511FF7E484}"/>
-              </a:ext>
-            </a:extLst>
-          </p:cNvPr>
-          <p:cNvSpPr>
-            <a:spLocks xmlns:a="http://schemas.openxmlformats.org/drawingml/2006/main" noGrp="1"/>
-          </p:cNvSpPr>
-          <p:nvPr/>
-        </p:nvSpPr>
-        <p:spPr>
-          <a:xfrm xmlns:a="http://schemas.openxmlformats.org/drawingml/2006/main">
-            <a:off x="2000250" y="1714500"/>
-            <a:ext cx="2286000" cy="400050"/>
-          </a:xfrm>
-          <a:prstGeom xmlns:a="http://schemas.openxmlformats.org/drawingml/2006/main" prst="rect">
-            <a:avLst/>
-          </a:prstGeom>
-          <a:noFill xmlns:a="http://schemas.openxmlformats.org/drawingml/2006/main"/>
-          <a:ln xmlns:a="http://schemas.openxmlformats.org/drawingml/2006/main" w="0">
-            <a:noFill/>
-          </a:ln>
-        </p:spPr>
-        <p:txBody>
-          <a:bodyPr xmlns:a="http://schemas.openxmlformats.org/drawingml/2006/main" lIns="0" tIns="0" rIns="0" bIns="0" anchor="ctr">
-            <a:noAutofit/>
-          </a:bodyPr>
-          <a:lstStyle xmlns:a="http://schemas.openxmlformats.org/drawingml/2006/main"/>
-          <a:p xmlns:a="http://schemas.openxmlformats.org/drawingml/2006/main">
-            <a:pPr algn="l">
-              <a:lnSpc>
-                <a:spcPct val="114000"/>
-              </a:lnSpc>
-              <a:buNone/>
-              <a:defRPr sz="2200" b="1">
-                <a:solidFill>
-                  <a:srgbClr val="1F4D78"/>
-                </a:solidFill>
-                <a:latin typeface="微软雅黑"/>
-                <a:ea typeface="微软雅黑"/>
-                <a:cs typeface="微软雅黑"/>
-              </a:defRPr>
-            </a:pPr>
-            <a:r>
-              <a:rPr sz="2200" b="1">
-                <a:solidFill>
-                  <a:srgbClr val="1F4D78"/>
-                </a:solidFill>
-                <a:latin typeface="微软雅黑"/>
-                <a:ea typeface="微软雅黑"/>
-                <a:cs typeface="微软雅黑"/>
-              </a:rPr>
-              <a:t>a 定位原文</a:t>
-            </a:r>
-          </a:p>
-        </p:txBody>
-      </p:sp>
-      <p:sp>
-        <p:nvSpPr>
-          <p:cNvPr id="9" name="visual-6-3-p06-h-2">
-            <a:extLst xmlns:a="http://schemas.openxmlformats.org/drawingml/2006/main">
-              <a:ext uri="{FF2B5EF4-FFF2-40B4-BE49-F238E27FC236}">
-                <a16:creationId xmlns:a16="http://schemas.microsoft.com/office/drawing/2014/main" id="{F881DEDF-CCB0-49FB-866F-815A78D01FEC}"/>
-              </a:ext>
-            </a:extLst>
-          </p:cNvPr>
-          <p:cNvSpPr>
-            <a:spLocks xmlns:a="http://schemas.openxmlformats.org/drawingml/2006/main" noGrp="1"/>
-          </p:cNvSpPr>
-          <p:nvPr/>
-        </p:nvSpPr>
-        <p:spPr>
-          <a:xfrm xmlns:a="http://schemas.openxmlformats.org/drawingml/2006/main">
-            <a:off x="4286250" y="1714500"/>
-            <a:ext cx="2286000" cy="400050"/>
-          </a:xfrm>
-          <a:prstGeom xmlns:a="http://schemas.openxmlformats.org/drawingml/2006/main" prst="rect">
-            <a:avLst/>
-          </a:prstGeom>
-          <a:noFill xmlns:a="http://schemas.openxmlformats.org/drawingml/2006/main"/>
-          <a:ln xmlns:a="http://schemas.openxmlformats.org/drawingml/2006/main" w="0">
-            <a:noFill/>
-          </a:ln>
-        </p:spPr>
-        <p:txBody>
-          <a:bodyPr xmlns:a="http://schemas.openxmlformats.org/drawingml/2006/main" lIns="0" tIns="0" rIns="0" bIns="0" anchor="ctr">
-            <a:noAutofit/>
-          </a:bodyPr>
-          <a:lstStyle xmlns:a="http://schemas.openxmlformats.org/drawingml/2006/main"/>
-          <a:p xmlns:a="http://schemas.openxmlformats.org/drawingml/2006/main">
-            <a:pPr algn="l">
-              <a:lnSpc>
-                <a:spcPct val="114000"/>
-              </a:lnSpc>
-              <a:buNone/>
-              <a:defRPr sz="2200" b="1">
-                <a:solidFill>
-                  <a:srgbClr val="1F4D78"/>
-                </a:solidFill>
-                <a:latin typeface="微软雅黑"/>
-                <a:ea typeface="微软雅黑"/>
-                <a:cs typeface="微软雅黑"/>
-              </a:defRPr>
-            </a:pPr>
-            <a:r>
-              <a:rPr sz="2200" b="1">
-                <a:solidFill>
-                  <a:srgbClr val="1F4D78"/>
-                </a:solidFill>
-                <a:latin typeface="微软雅黑"/>
-                <a:ea typeface="微软雅黑"/>
-                <a:cs typeface="微软雅黑"/>
-              </a:rPr>
-              <a:t>b 定义遗漏</a:t>
-            </a:r>
-          </a:p>
-        </p:txBody>
-      </p:sp>
-      <p:sp>
-        <p:nvSpPr>
-          <p:cNvPr id="10" name="visual-6-4-p06-h-3">
-            <a:extLst xmlns:a="http://schemas.openxmlformats.org/drawingml/2006/main">
-              <a:ext uri="{FF2B5EF4-FFF2-40B4-BE49-F238E27FC236}">
-                <a16:creationId xmlns:a16="http://schemas.microsoft.com/office/drawing/2014/main" id="{6C9778DD-9B56-4CDD-9BD1-A9D7C1295DBF}"/>
-              </a:ext>
-            </a:extLst>
-          </p:cNvPr>
-          <p:cNvSpPr>
-            <a:spLocks xmlns:a="http://schemas.openxmlformats.org/drawingml/2006/main" noGrp="1"/>
-          </p:cNvSpPr>
-          <p:nvPr/>
-        </p:nvSpPr>
-        <p:spPr>
-          <a:xfrm xmlns:a="http://schemas.openxmlformats.org/drawingml/2006/main">
-            <a:off x="6572250" y="1714500"/>
-            <a:ext cx="2286000" cy="400050"/>
-          </a:xfrm>
-          <a:prstGeom xmlns:a="http://schemas.openxmlformats.org/drawingml/2006/main" prst="rect">
-            <a:avLst/>
-          </a:prstGeom>
-          <a:noFill xmlns:a="http://schemas.openxmlformats.org/drawingml/2006/main"/>
-          <a:ln xmlns:a="http://schemas.openxmlformats.org/drawingml/2006/main" w="0">
-            <a:noFill/>
-          </a:ln>
-        </p:spPr>
-        <p:txBody>
-          <a:bodyPr xmlns:a="http://schemas.openxmlformats.org/drawingml/2006/main" lIns="0" tIns="0" rIns="0" bIns="0" anchor="ctr">
-            <a:noAutofit/>
-          </a:bodyPr>
-          <a:lstStyle xmlns:a="http://schemas.openxmlformats.org/drawingml/2006/main"/>
-          <a:p xmlns:a="http://schemas.openxmlformats.org/drawingml/2006/main">
-            <a:pPr algn="l">
-              <a:lnSpc>
-                <a:spcPct val="114000"/>
-              </a:lnSpc>
-              <a:buNone/>
-              <a:defRPr sz="2200" b="1">
-                <a:solidFill>
-                  <a:srgbClr val="1F4D78"/>
-                </a:solidFill>
-                <a:latin typeface="微软雅黑"/>
-                <a:ea typeface="微软雅黑"/>
-                <a:cs typeface="微软雅黑"/>
-              </a:defRPr>
-            </a:pPr>
-            <a:r>
-              <a:rPr sz="2200" b="1">
-                <a:solidFill>
-                  <a:srgbClr val="1F4D78"/>
-                </a:solidFill>
-                <a:latin typeface="微软雅黑"/>
-                <a:ea typeface="微软雅黑"/>
-                <a:cs typeface="微软雅黑"/>
-              </a:rPr>
-              <a:t>c 设置对照</a:t>
-            </a:r>
-          </a:p>
-        </p:txBody>
-      </p:sp>
-      <p:sp>
-        <p:nvSpPr>
-          <p:cNvPr id="11" name="visual-6-5-p06-h-4">
-            <a:extLst xmlns:a="http://schemas.openxmlformats.org/drawingml/2006/main">
-              <a:ext uri="{FF2B5EF4-FFF2-40B4-BE49-F238E27FC236}">
-                <a16:creationId xmlns:a16="http://schemas.microsoft.com/office/drawing/2014/main" id="{54A0CCD9-DBF6-428D-B87D-8A649E9E90E1}"/>
-              </a:ext>
-            </a:extLst>
-          </p:cNvPr>
-          <p:cNvSpPr>
-            <a:spLocks xmlns:a="http://schemas.openxmlformats.org/drawingml/2006/main" noGrp="1"/>
-          </p:cNvSpPr>
-          <p:nvPr/>
-        </p:nvSpPr>
-        <p:spPr>
-          <a:xfrm xmlns:a="http://schemas.openxmlformats.org/drawingml/2006/main">
-            <a:off x="8858250" y="1714500"/>
-            <a:ext cx="2476500" cy="400050"/>
-          </a:xfrm>
-          <a:prstGeom xmlns:a="http://schemas.openxmlformats.org/drawingml/2006/main" prst="rect">
-            <a:avLst/>
-          </a:prstGeom>
-          <a:noFill xmlns:a="http://schemas.openxmlformats.org/drawingml/2006/main"/>
-          <a:ln xmlns:a="http://schemas.openxmlformats.org/drawingml/2006/main" w="0">
-            <a:noFill/>
-          </a:ln>
-        </p:spPr>
-        <p:txBody>
-          <a:bodyPr xmlns:a="http://schemas.openxmlformats.org/drawingml/2006/main" lIns="0" tIns="0" rIns="0" bIns="0" anchor="ctr">
-            <a:noAutofit/>
-          </a:bodyPr>
-          <a:lstStyle xmlns:a="http://schemas.openxmlformats.org/drawingml/2006/main"/>
-          <a:p xmlns:a="http://schemas.openxmlformats.org/drawingml/2006/main">
-            <a:pPr algn="l">
-              <a:lnSpc>
-                <a:spcPct val="114000"/>
-              </a:lnSpc>
-              <a:buNone/>
-              <a:defRPr sz="2200" b="1">
-                <a:solidFill>
-                  <a:srgbClr val="1F4D78"/>
-                </a:solidFill>
-                <a:latin typeface="微软雅黑"/>
-                <a:ea typeface="微软雅黑"/>
-                <a:cs typeface="微软雅黑"/>
-              </a:defRPr>
-            </a:pPr>
-            <a:r>
-              <a:rPr sz="2200" b="1">
-                <a:solidFill>
-                  <a:srgbClr val="1F4D78"/>
-                </a:solidFill>
-                <a:latin typeface="微软雅黑"/>
-                <a:ea typeface="微软雅黑"/>
-                <a:cs typeface="微软雅黑"/>
-              </a:rPr>
-              <a:t>候选角色</a:t>
-            </a:r>
-          </a:p>
-        </p:txBody>
-      </p:sp>
-      <p:sp>
-        <p:nvSpPr>
-          <p:cNvPr id="12" name="visual-6-6-p06-r0-0">
-            <a:extLst xmlns:a="http://schemas.openxmlformats.org/drawingml/2006/main">
-              <a:ext uri="{FF2B5EF4-FFF2-40B4-BE49-F238E27FC236}">
-                <a16:creationId xmlns:a16="http://schemas.microsoft.com/office/drawing/2014/main" id="{C4F19579-FB5E-424B-9431-0B3E78F1718F}"/>
-              </a:ext>
-            </a:extLst>
-          </p:cNvPr>
-          <p:cNvSpPr>
-            <a:spLocks xmlns:a="http://schemas.openxmlformats.org/drawingml/2006/main" noGrp="1"/>
-          </p:cNvSpPr>
-          <p:nvPr/>
-        </p:nvSpPr>
-        <p:spPr>
-          <a:xfrm xmlns:a="http://schemas.openxmlformats.org/drawingml/2006/main">
-            <a:off x="857250" y="2114550"/>
-            <a:ext cx="1143000" cy="571500"/>
-          </a:xfrm>
-          <a:prstGeom xmlns:a="http://schemas.openxmlformats.org/drawingml/2006/main" prst="rect">
-            <a:avLst/>
-          </a:prstGeom>
-          <a:noFill xmlns:a="http://schemas.openxmlformats.org/drawingml/2006/main"/>
-          <a:ln xmlns:a="http://schemas.openxmlformats.org/drawingml/2006/main" w="0">
-            <a:noFill/>
-          </a:ln>
-        </p:spPr>
-        <p:txBody>
-          <a:bodyPr xmlns:a="http://schemas.openxmlformats.org/drawingml/2006/main" lIns="0" tIns="0" rIns="0" bIns="0" anchor="ctr">
-            <a:noAutofit/>
-          </a:bodyPr>
-          <a:lstStyle xmlns:a="http://schemas.openxmlformats.org/drawingml/2006/main"/>
-          <a:p xmlns:a="http://schemas.openxmlformats.org/drawingml/2006/main">
-            <a:pPr algn="l">
-              <a:lnSpc>
-                <a:spcPct val="114000"/>
-              </a:lnSpc>
-              <a:buNone/>
-              <a:defRPr sz="2200" b="1">
-                <a:solidFill>
-                  <a:srgbClr val="1F4D78"/>
-                </a:solidFill>
-                <a:latin typeface="微软雅黑"/>
-                <a:ea typeface="微软雅黑"/>
-                <a:cs typeface="微软雅黑"/>
-              </a:defRPr>
-            </a:pPr>
-            <a:r>
-              <a:rPr sz="2200" b="1">
-                <a:solidFill>
-                  <a:srgbClr val="1F4D78"/>
-                </a:solidFill>
-                <a:latin typeface="微软雅黑"/>
-                <a:ea typeface="微软雅黑"/>
-                <a:cs typeface="微软雅黑"/>
-              </a:rPr>
-              <a:t>A</a:t>
-            </a:r>
-          </a:p>
-        </p:txBody>
-      </p:sp>
-      <p:sp>
-        <p:nvSpPr>
-          <p:cNvPr id="13" name="visual-6-7-p06-r0-1">
-            <a:extLst xmlns:a="http://schemas.openxmlformats.org/drawingml/2006/main">
-              <a:ext uri="{FF2B5EF4-FFF2-40B4-BE49-F238E27FC236}">
-                <a16:creationId xmlns:a16="http://schemas.microsoft.com/office/drawing/2014/main" id="{2573AA16-709B-43B8-B94E-6C6F7B9D38A3}"/>
-              </a:ext>
-            </a:extLst>
-          </p:cNvPr>
-          <p:cNvSpPr>
-            <a:spLocks xmlns:a="http://schemas.openxmlformats.org/drawingml/2006/main" noGrp="1"/>
-          </p:cNvSpPr>
-          <p:nvPr/>
-        </p:nvSpPr>
-        <p:spPr>
-          <a:xfrm xmlns:a="http://schemas.openxmlformats.org/drawingml/2006/main">
-            <a:off x="2000250" y="2114550"/>
-            <a:ext cx="2286000" cy="571500"/>
-          </a:xfrm>
-          <a:prstGeom xmlns:a="http://schemas.openxmlformats.org/drawingml/2006/main" prst="rect">
-            <a:avLst/>
-          </a:prstGeom>
-          <a:noFill xmlns:a="http://schemas.openxmlformats.org/drawingml/2006/main"/>
-          <a:ln xmlns:a="http://schemas.openxmlformats.org/drawingml/2006/main" w="0">
-            <a:noFill/>
-          </a:ln>
-        </p:spPr>
-        <p:txBody>
-          <a:bodyPr xmlns:a="http://schemas.openxmlformats.org/drawingml/2006/main" lIns="0" tIns="0" rIns="0" bIns="0" anchor="ctr">
-            <a:noAutofit/>
-          </a:bodyPr>
-          <a:lstStyle xmlns:a="http://schemas.openxmlformats.org/drawingml/2006/main"/>
-          <a:p xmlns:a="http://schemas.openxmlformats.org/drawingml/2006/main">
-            <a:pPr algn="l">
-              <a:lnSpc>
-                <a:spcPct val="114000"/>
-              </a:lnSpc>
-              <a:buNone/>
-              <a:defRPr sz="2200" b="1">
-                <a:solidFill>
-                  <a:srgbClr val="1F4D78"/>
-                </a:solidFill>
-                <a:latin typeface="微软雅黑"/>
-                <a:ea typeface="微软雅黑"/>
-                <a:cs typeface="微软雅黑"/>
-              </a:defRPr>
-            </a:pPr>
-            <a:r>
-              <a:rPr sz="2200" b="1">
-                <a:solidFill>
-                  <a:srgbClr val="1F4D78"/>
-                </a:solidFill>
-                <a:latin typeface="微软雅黑"/>
-                <a:ea typeface="微软雅黑"/>
-                <a:cs typeface="微软雅黑"/>
-              </a:rPr>
-              <a:t>是</a:t>
-            </a:r>
-          </a:p>
-        </p:txBody>
-      </p:sp>
-      <p:sp>
-        <p:nvSpPr>
-          <p:cNvPr id="14" name="visual-6-8-p06-r0-2">
-            <a:extLst xmlns:a="http://schemas.openxmlformats.org/drawingml/2006/main">
-              <a:ext uri="{FF2B5EF4-FFF2-40B4-BE49-F238E27FC236}">
-                <a16:creationId xmlns:a16="http://schemas.microsoft.com/office/drawing/2014/main" id="{FC228DA6-0FF5-4114-B7DC-9B215A49C045}"/>
-              </a:ext>
-            </a:extLst>
-          </p:cNvPr>
-          <p:cNvSpPr>
-            <a:spLocks xmlns:a="http://schemas.openxmlformats.org/drawingml/2006/main" noGrp="1"/>
-          </p:cNvSpPr>
-          <p:nvPr/>
-        </p:nvSpPr>
-        <p:spPr>
-          <a:xfrm xmlns:a="http://schemas.openxmlformats.org/drawingml/2006/main">
-            <a:off x="4286250" y="2114550"/>
-            <a:ext cx="2286000" cy="571500"/>
-          </a:xfrm>
-          <a:prstGeom xmlns:a="http://schemas.openxmlformats.org/drawingml/2006/main" prst="rect">
-            <a:avLst/>
-          </a:prstGeom>
-          <a:noFill xmlns:a="http://schemas.openxmlformats.org/drawingml/2006/main"/>
-          <a:ln xmlns:a="http://schemas.openxmlformats.org/drawingml/2006/main" w="0">
-            <a:noFill/>
-          </a:ln>
-        </p:spPr>
-        <p:txBody>
-          <a:bodyPr xmlns:a="http://schemas.openxmlformats.org/drawingml/2006/main" lIns="0" tIns="0" rIns="0" bIns="0" anchor="ctr">
-            <a:noAutofit/>
-          </a:bodyPr>
-          <a:lstStyle xmlns:a="http://schemas.openxmlformats.org/drawingml/2006/main"/>
-          <a:p xmlns:a="http://schemas.openxmlformats.org/drawingml/2006/main">
-            <a:pPr algn="l">
-              <a:lnSpc>
-                <a:spcPct val="114000"/>
-              </a:lnSpc>
-              <a:buNone/>
-              <a:defRPr sz="2200" b="1">
-                <a:solidFill>
-                  <a:srgbClr val="1F4D78"/>
-                </a:solidFill>
-                <a:latin typeface="微软雅黑"/>
-                <a:ea typeface="微软雅黑"/>
-                <a:cs typeface="微软雅黑"/>
-              </a:defRPr>
-            </a:pPr>
-            <a:r>
-              <a:rPr sz="2200" b="1">
-                <a:solidFill>
-                  <a:srgbClr val="1F4D78"/>
-                </a:solidFill>
-                <a:latin typeface="微软雅黑"/>
-                <a:ea typeface="微软雅黑"/>
-                <a:cs typeface="微软雅黑"/>
-              </a:rPr>
-              <a:t>是</a:t>
-            </a:r>
-          </a:p>
-        </p:txBody>
-      </p:sp>
-      <p:sp>
-        <p:nvSpPr>
-          <p:cNvPr id="15" name="visual-6-9-p06-r0-3">
-            <a:extLst xmlns:a="http://schemas.openxmlformats.org/drawingml/2006/main">
-              <a:ext uri="{FF2B5EF4-FFF2-40B4-BE49-F238E27FC236}">
-                <a16:creationId xmlns:a16="http://schemas.microsoft.com/office/drawing/2014/main" id="{6B93E7C9-1BAD-4C7A-8A60-8CC612811E6B}"/>
-              </a:ext>
-            </a:extLst>
-          </p:cNvPr>
-          <p:cNvSpPr>
-            <a:spLocks xmlns:a="http://schemas.openxmlformats.org/drawingml/2006/main" noGrp="1"/>
-          </p:cNvSpPr>
-          <p:nvPr/>
-        </p:nvSpPr>
-        <p:spPr>
-          <a:xfrm xmlns:a="http://schemas.openxmlformats.org/drawingml/2006/main">
-            <a:off x="6572250" y="2114550"/>
-            <a:ext cx="2286000" cy="571500"/>
-          </a:xfrm>
-          <a:prstGeom xmlns:a="http://schemas.openxmlformats.org/drawingml/2006/main" prst="rect">
-            <a:avLst/>
-          </a:prstGeom>
-          <a:noFill xmlns:a="http://schemas.openxmlformats.org/drawingml/2006/main"/>
-          <a:ln xmlns:a="http://schemas.openxmlformats.org/drawingml/2006/main" w="0">
-            <a:noFill/>
-          </a:ln>
-        </p:spPr>
-        <p:txBody>
-          <a:bodyPr xmlns:a="http://schemas.openxmlformats.org/drawingml/2006/main" lIns="0" tIns="0" rIns="0" bIns="0" anchor="ctr">
-            <a:noAutofit/>
-          </a:bodyPr>
-          <a:lstStyle xmlns:a="http://schemas.openxmlformats.org/drawingml/2006/main"/>
-          <a:p xmlns:a="http://schemas.openxmlformats.org/drawingml/2006/main">
-            <a:pPr algn="l">
-              <a:lnSpc>
-                <a:spcPct val="114000"/>
-              </a:lnSpc>
-              <a:buNone/>
-              <a:defRPr sz="2200" b="1">
-                <a:solidFill>
-                  <a:srgbClr val="1F4D78"/>
-                </a:solidFill>
-                <a:latin typeface="微软雅黑"/>
-                <a:ea typeface="微软雅黑"/>
-                <a:cs typeface="微软雅黑"/>
-              </a:defRPr>
-            </a:pPr>
-            <a:r>
-              <a:rPr sz="2200" b="1">
-                <a:solidFill>
-                  <a:srgbClr val="1F4D78"/>
-                </a:solidFill>
-                <a:latin typeface="微软雅黑"/>
-                <a:ea typeface="微软雅黑"/>
-                <a:cs typeface="微软雅黑"/>
-              </a:rPr>
-              <a:t>是</a:t>
-            </a:r>
-          </a:p>
-        </p:txBody>
-      </p:sp>
-      <p:sp>
-        <p:nvSpPr>
-          <p:cNvPr id="16" name="visual-6-10-p06-r0-4">
-            <a:extLst xmlns:a="http://schemas.openxmlformats.org/drawingml/2006/main">
-              <a:ext uri="{FF2B5EF4-FFF2-40B4-BE49-F238E27FC236}">
-                <a16:creationId xmlns:a16="http://schemas.microsoft.com/office/drawing/2014/main" id="{E8F9B5B4-BD85-4D44-81BB-05989AA80FBE}"/>
-              </a:ext>
-            </a:extLst>
-          </p:cNvPr>
-          <p:cNvSpPr>
-            <a:spLocks xmlns:a="http://schemas.openxmlformats.org/drawingml/2006/main" noGrp="1"/>
-          </p:cNvSpPr>
-          <p:nvPr/>
-        </p:nvSpPr>
-        <p:spPr>
-          <a:xfrm xmlns:a="http://schemas.openxmlformats.org/drawingml/2006/main">
-            <a:off x="8858250" y="2114550"/>
-            <a:ext cx="2476500" cy="571500"/>
-          </a:xfrm>
-          <a:prstGeom xmlns:a="http://schemas.openxmlformats.org/drawingml/2006/main" prst="rect">
-            <a:avLst/>
-          </a:prstGeom>
-          <a:noFill xmlns:a="http://schemas.openxmlformats.org/drawingml/2006/main"/>
-          <a:ln xmlns:a="http://schemas.openxmlformats.org/drawingml/2006/main" w="0">
-            <a:noFill/>
-          </a:ln>
-        </p:spPr>
-        <p:txBody>
-          <a:bodyPr xmlns:a="http://schemas.openxmlformats.org/drawingml/2006/main" lIns="0" tIns="0" rIns="0" bIns="0" anchor="ctr">
-            <a:noAutofit/>
-          </a:bodyPr>
-          <a:lstStyle xmlns:a="http://schemas.openxmlformats.org/drawingml/2006/main"/>
-          <a:p xmlns:a="http://schemas.openxmlformats.org/drawingml/2006/main">
-            <a:pPr algn="l">
-              <a:lnSpc>
-                <a:spcPct val="114000"/>
-              </a:lnSpc>
-              <a:buNone/>
-              <a:defRPr sz="2200" b="1">
-                <a:solidFill>
-                  <a:srgbClr val="1F4D78"/>
-                </a:solidFill>
-                <a:latin typeface="微软雅黑"/>
-                <a:ea typeface="微软雅黑"/>
-                <a:cs typeface="微软雅黑"/>
-              </a:defRPr>
-            </a:pPr>
-            <a:r>
-              <a:rPr sz="2200" b="1">
-                <a:solidFill>
-                  <a:srgbClr val="1F4D78"/>
-                </a:solidFill>
-                <a:latin typeface="微软雅黑"/>
-                <a:ea typeface="微软雅黑"/>
-                <a:cs typeface="微软雅黑"/>
-              </a:rPr>
-              <a:t>主证据</a:t>
-            </a:r>
-          </a:p>
-        </p:txBody>
-      </p:sp>
-      <p:sp>
-        <p:nvSpPr>
-          <p:cNvPr id="17" name="visual-6-11-p06-r1-0">
-            <a:extLst xmlns:a="http://schemas.openxmlformats.org/drawingml/2006/main">
-              <a:ext uri="{FF2B5EF4-FFF2-40B4-BE49-F238E27FC236}">
-                <a16:creationId xmlns:a16="http://schemas.microsoft.com/office/drawing/2014/main" id="{150652F0-FF33-4D99-BFCD-6E641FF47EB9}"/>
-              </a:ext>
-            </a:extLst>
-          </p:cNvPr>
-          <p:cNvSpPr>
-            <a:spLocks xmlns:a="http://schemas.openxmlformats.org/drawingml/2006/main" noGrp="1"/>
-          </p:cNvSpPr>
-          <p:nvPr/>
-        </p:nvSpPr>
-        <p:spPr>
-          <a:xfrm xmlns:a="http://schemas.openxmlformats.org/drawingml/2006/main">
-            <a:off x="857250" y="2686050"/>
-            <a:ext cx="1143000" cy="571500"/>
-          </a:xfrm>
-          <a:prstGeom xmlns:a="http://schemas.openxmlformats.org/drawingml/2006/main" prst="rect">
-            <a:avLst/>
-          </a:prstGeom>
-          <a:noFill xmlns:a="http://schemas.openxmlformats.org/drawingml/2006/main"/>
-          <a:ln xmlns:a="http://schemas.openxmlformats.org/drawingml/2006/main" w="0">
-            <a:noFill/>
-          </a:ln>
-        </p:spPr>
-        <p:txBody>
-          <a:bodyPr xmlns:a="http://schemas.openxmlformats.org/drawingml/2006/main" lIns="0" tIns="0" rIns="0" bIns="0" anchor="ctr">
-            <a:noAutofit/>
-          </a:bodyPr>
-          <a:lstStyle xmlns:a="http://schemas.openxmlformats.org/drawingml/2006/main"/>
-          <a:p xmlns:a="http://schemas.openxmlformats.org/drawingml/2006/main">
-            <a:pPr algn="l">
-              <a:lnSpc>
-                <a:spcPct val="114000"/>
-              </a:lnSpc>
-              <a:buNone/>
-              <a:defRPr sz="2200" b="1">
-                <a:solidFill>
-                  <a:srgbClr val="1F4D78"/>
-                </a:solidFill>
-                <a:latin typeface="微软雅黑"/>
-                <a:ea typeface="微软雅黑"/>
-                <a:cs typeface="微软雅黑"/>
-              </a:defRPr>
-            </a:pPr>
-            <a:r>
-              <a:rPr sz="2200" b="1">
-                <a:solidFill>
-                  <a:srgbClr val="1F4D78"/>
-                </a:solidFill>
-                <a:latin typeface="微软雅黑"/>
-                <a:ea typeface="微软雅黑"/>
-                <a:cs typeface="微软雅黑"/>
-              </a:rPr>
-              <a:t>B</a:t>
-            </a:r>
-          </a:p>
-        </p:txBody>
-      </p:sp>
-      <p:sp>
-        <p:nvSpPr>
-          <p:cNvPr id="18" name="visual-6-12-p06-r1-1">
-            <a:extLst xmlns:a="http://schemas.openxmlformats.org/drawingml/2006/main">
-              <a:ext uri="{FF2B5EF4-FFF2-40B4-BE49-F238E27FC236}">
-                <a16:creationId xmlns:a16="http://schemas.microsoft.com/office/drawing/2014/main" id="{C9B1807A-29E8-48FA-8ED2-EC2A668AF450}"/>
-              </a:ext>
-            </a:extLst>
-          </p:cNvPr>
-          <p:cNvSpPr>
-            <a:spLocks xmlns:a="http://schemas.openxmlformats.org/drawingml/2006/main" noGrp="1"/>
-          </p:cNvSpPr>
-          <p:nvPr/>
-        </p:nvSpPr>
-        <p:spPr>
-          <a:xfrm xmlns:a="http://schemas.openxmlformats.org/drawingml/2006/main">
-            <a:off x="2000250" y="2686050"/>
-            <a:ext cx="2286000" cy="571500"/>
-          </a:xfrm>
-          <a:prstGeom xmlns:a="http://schemas.openxmlformats.org/drawingml/2006/main" prst="rect">
-            <a:avLst/>
-          </a:prstGeom>
-          <a:noFill xmlns:a="http://schemas.openxmlformats.org/drawingml/2006/main"/>
-          <a:ln xmlns:a="http://schemas.openxmlformats.org/drawingml/2006/main" w="0">
-            <a:noFill/>
-          </a:ln>
-        </p:spPr>
-        <p:txBody>
-          <a:bodyPr xmlns:a="http://schemas.openxmlformats.org/drawingml/2006/main" lIns="0" tIns="0" rIns="0" bIns="0" anchor="ctr">
-            <a:noAutofit/>
-          </a:bodyPr>
-          <a:lstStyle xmlns:a="http://schemas.openxmlformats.org/drawingml/2006/main"/>
-          <a:p xmlns:a="http://schemas.openxmlformats.org/drawingml/2006/main">
-            <a:pPr algn="l">
-              <a:lnSpc>
-                <a:spcPct val="114000"/>
-              </a:lnSpc>
-              <a:buNone/>
-              <a:defRPr sz="2200" b="1">
-                <a:solidFill>
-                  <a:srgbClr val="1F4D78"/>
-                </a:solidFill>
-                <a:latin typeface="微软雅黑"/>
-                <a:ea typeface="微软雅黑"/>
-                <a:cs typeface="微软雅黑"/>
-              </a:defRPr>
-            </a:pPr>
-            <a:r>
-              <a:rPr sz="2200" b="1">
-                <a:solidFill>
-                  <a:srgbClr val="1F4D78"/>
-                </a:solidFill>
-                <a:latin typeface="微软雅黑"/>
-                <a:ea typeface="微软雅黑"/>
-                <a:cs typeface="微软雅黑"/>
-              </a:rPr>
-              <a:t>部分</a:t>
-            </a:r>
-          </a:p>
-        </p:txBody>
-      </p:sp>
-      <p:sp>
-        <p:nvSpPr>
-          <p:cNvPr id="19" name="visual-6-13-p06-r1-2">
-            <a:extLst xmlns:a="http://schemas.openxmlformats.org/drawingml/2006/main">
-              <a:ext uri="{FF2B5EF4-FFF2-40B4-BE49-F238E27FC236}">
-                <a16:creationId xmlns:a16="http://schemas.microsoft.com/office/drawing/2014/main" id="{DA914407-E116-4BCC-AABE-7375272E7305}"/>
-              </a:ext>
-            </a:extLst>
-          </p:cNvPr>
-          <p:cNvSpPr>
-            <a:spLocks xmlns:a="http://schemas.openxmlformats.org/drawingml/2006/main" noGrp="1"/>
-          </p:cNvSpPr>
-          <p:nvPr/>
-        </p:nvSpPr>
-        <p:spPr>
-          <a:xfrm xmlns:a="http://schemas.openxmlformats.org/drawingml/2006/main">
-            <a:off x="4286250" y="2686050"/>
-            <a:ext cx="2286000" cy="571500"/>
-          </a:xfrm>
-          <a:prstGeom xmlns:a="http://schemas.openxmlformats.org/drawingml/2006/main" prst="rect">
-            <a:avLst/>
-          </a:prstGeom>
-          <a:noFill xmlns:a="http://schemas.openxmlformats.org/drawingml/2006/main"/>
-          <a:ln xmlns:a="http://schemas.openxmlformats.org/drawingml/2006/main" w="0">
-            <a:noFill/>
-          </a:ln>
-        </p:spPr>
-        <p:txBody>
-          <a:bodyPr xmlns:a="http://schemas.openxmlformats.org/drawingml/2006/main" lIns="0" tIns="0" rIns="0" bIns="0" anchor="ctr">
-            <a:noAutofit/>
-          </a:bodyPr>
-          <a:lstStyle xmlns:a="http://schemas.openxmlformats.org/drawingml/2006/main"/>
-          <a:p xmlns:a="http://schemas.openxmlformats.org/drawingml/2006/main">
-            <a:pPr algn="l">
-              <a:lnSpc>
-                <a:spcPct val="114000"/>
-              </a:lnSpc>
-              <a:buNone/>
-              <a:defRPr sz="2200" b="1">
-                <a:solidFill>
-                  <a:srgbClr val="1F4D78"/>
-                </a:solidFill>
-                <a:latin typeface="微软雅黑"/>
-                <a:ea typeface="微软雅黑"/>
-                <a:cs typeface="微软雅黑"/>
-              </a:defRPr>
-            </a:pPr>
-            <a:r>
-              <a:rPr sz="2200" b="1">
-                <a:solidFill>
-                  <a:srgbClr val="1F4D78"/>
-                </a:solidFill>
-                <a:latin typeface="微软雅黑"/>
-                <a:ea typeface="微软雅黑"/>
-                <a:cs typeface="微软雅黑"/>
-              </a:rPr>
-              <a:t>—</a:t>
-            </a:r>
-          </a:p>
-        </p:txBody>
-      </p:sp>
-      <p:sp>
-        <p:nvSpPr>
-          <p:cNvPr id="20" name="visual-6-14-p06-r1-3">
-            <a:extLst xmlns:a="http://schemas.openxmlformats.org/drawingml/2006/main">
-              <a:ext uri="{FF2B5EF4-FFF2-40B4-BE49-F238E27FC236}">
-                <a16:creationId xmlns:a16="http://schemas.microsoft.com/office/drawing/2014/main" id="{67CDB90B-5F9B-473F-BF69-0A107A2A8283}"/>
-              </a:ext>
-            </a:extLst>
-          </p:cNvPr>
-          <p:cNvSpPr>
-            <a:spLocks xmlns:a="http://schemas.openxmlformats.org/drawingml/2006/main" noGrp="1"/>
-          </p:cNvSpPr>
-          <p:nvPr/>
-        </p:nvSpPr>
-        <p:spPr>
-          <a:xfrm xmlns:a="http://schemas.openxmlformats.org/drawingml/2006/main">
-            <a:off x="6572250" y="2686050"/>
-            <a:ext cx="2286000" cy="571500"/>
-          </a:xfrm>
-          <a:prstGeom xmlns:a="http://schemas.openxmlformats.org/drawingml/2006/main" prst="rect">
-            <a:avLst/>
-          </a:prstGeom>
-          <a:noFill xmlns:a="http://schemas.openxmlformats.org/drawingml/2006/main"/>
-          <a:ln xmlns:a="http://schemas.openxmlformats.org/drawingml/2006/main" w="0">
-            <a:noFill/>
-          </a:ln>
-        </p:spPr>
-        <p:txBody>
-          <a:bodyPr xmlns:a="http://schemas.openxmlformats.org/drawingml/2006/main" lIns="0" tIns="0" rIns="0" bIns="0" anchor="ctr">
-            <a:noAutofit/>
-          </a:bodyPr>
-          <a:lstStyle xmlns:a="http://schemas.openxmlformats.org/drawingml/2006/main"/>
-          <a:p xmlns:a="http://schemas.openxmlformats.org/drawingml/2006/main">
-            <a:pPr algn="l">
-              <a:lnSpc>
-                <a:spcPct val="114000"/>
-              </a:lnSpc>
-              <a:buNone/>
-              <a:defRPr sz="2200" b="1">
-                <a:solidFill>
-                  <a:srgbClr val="1F4D78"/>
-                </a:solidFill>
-                <a:latin typeface="微软雅黑"/>
-                <a:ea typeface="微软雅黑"/>
-                <a:cs typeface="微软雅黑"/>
-              </a:defRPr>
-            </a:pPr>
-            <a:r>
-              <a:rPr sz="2200" b="1">
-                <a:solidFill>
-                  <a:srgbClr val="1F4D78"/>
-                </a:solidFill>
-                <a:latin typeface="微软雅黑"/>
-                <a:ea typeface="微软雅黑"/>
-                <a:cs typeface="微软雅黑"/>
-              </a:rPr>
-              <a:t>否</a:t>
-            </a:r>
-          </a:p>
-        </p:txBody>
-      </p:sp>
-      <p:sp>
-        <p:nvSpPr>
-          <p:cNvPr id="21" name="visual-6-15-p06-r1-4">
-            <a:extLst xmlns:a="http://schemas.openxmlformats.org/drawingml/2006/main">
-              <a:ext uri="{FF2B5EF4-FFF2-40B4-BE49-F238E27FC236}">
-                <a16:creationId xmlns:a16="http://schemas.microsoft.com/office/drawing/2014/main" id="{E5AB8D25-F758-4881-8743-3FF9DBD81BCB}"/>
-              </a:ext>
-            </a:extLst>
-          </p:cNvPr>
-          <p:cNvSpPr>
-            <a:spLocks xmlns:a="http://schemas.openxmlformats.org/drawingml/2006/main" noGrp="1"/>
-          </p:cNvSpPr>
-          <p:nvPr/>
-        </p:nvSpPr>
-        <p:spPr>
-          <a:xfrm xmlns:a="http://schemas.openxmlformats.org/drawingml/2006/main">
-            <a:off x="8858250" y="2686050"/>
-            <a:ext cx="2476500" cy="571500"/>
-          </a:xfrm>
-          <a:prstGeom xmlns:a="http://schemas.openxmlformats.org/drawingml/2006/main" prst="rect">
-            <a:avLst/>
-          </a:prstGeom>
-          <a:noFill xmlns:a="http://schemas.openxmlformats.org/drawingml/2006/main"/>
-          <a:ln xmlns:a="http://schemas.openxmlformats.org/drawingml/2006/main" w="0">
-            <a:noFill/>
-          </a:ln>
-        </p:spPr>
-        <p:txBody>
-          <a:bodyPr xmlns:a="http://schemas.openxmlformats.org/drawingml/2006/main" lIns="0" tIns="0" rIns="0" bIns="0" anchor="ctr">
-            <a:noAutofit/>
-          </a:bodyPr>
-          <a:lstStyle xmlns:a="http://schemas.openxmlformats.org/drawingml/2006/main"/>
-          <a:p xmlns:a="http://schemas.openxmlformats.org/drawingml/2006/main">
-            <a:pPr algn="l">
-              <a:lnSpc>
-                <a:spcPct val="114000"/>
-              </a:lnSpc>
-              <a:buNone/>
-              <a:defRPr sz="2200" b="1">
-                <a:solidFill>
-                  <a:srgbClr val="1F4D78"/>
-                </a:solidFill>
-                <a:latin typeface="微软雅黑"/>
-                <a:ea typeface="微软雅黑"/>
-                <a:cs typeface="微软雅黑"/>
-              </a:defRPr>
-            </a:pPr>
-            <a:r>
-              <a:rPr sz="2200" b="1">
-                <a:solidFill>
-                  <a:srgbClr val="1F4D78"/>
-                </a:solidFill>
-                <a:latin typeface="微软雅黑"/>
-                <a:ea typeface="微软雅黑"/>
-                <a:cs typeface="微软雅黑"/>
-              </a:rPr>
-              <a:t>补充</a:t>
-            </a:r>
-          </a:p>
-        </p:txBody>
-      </p:sp>
-      <p:sp>
-        <p:nvSpPr>
-          <p:cNvPr id="22" name="visual-6-16-p06-r2-0">
-            <a:extLst xmlns:a="http://schemas.openxmlformats.org/drawingml/2006/main">
-              <a:ext uri="{FF2B5EF4-FFF2-40B4-BE49-F238E27FC236}">
-                <a16:creationId xmlns:a16="http://schemas.microsoft.com/office/drawing/2014/main" id="{3F15284E-D091-47BB-A902-EDC71038B167}"/>
-              </a:ext>
-            </a:extLst>
-          </p:cNvPr>
-          <p:cNvSpPr>
-            <a:spLocks xmlns:a="http://schemas.openxmlformats.org/drawingml/2006/main" noGrp="1"/>
-          </p:cNvSpPr>
-          <p:nvPr/>
-        </p:nvSpPr>
-        <p:spPr>
-          <a:xfrm xmlns:a="http://schemas.openxmlformats.org/drawingml/2006/main">
-            <a:off x="857250" y="3257550"/>
-            <a:ext cx="1143000" cy="571500"/>
-          </a:xfrm>
-          <a:prstGeom xmlns:a="http://schemas.openxmlformats.org/drawingml/2006/main" prst="rect">
-            <a:avLst/>
-          </a:prstGeom>
-          <a:noFill xmlns:a="http://schemas.openxmlformats.org/drawingml/2006/main"/>
-          <a:ln xmlns:a="http://schemas.openxmlformats.org/drawingml/2006/main" w="0">
-            <a:noFill/>
-          </a:ln>
-        </p:spPr>
-        <p:txBody>
-          <a:bodyPr xmlns:a="http://schemas.openxmlformats.org/drawingml/2006/main" lIns="0" tIns="0" rIns="0" bIns="0" anchor="ctr">
-            <a:noAutofit/>
-          </a:bodyPr>
-          <a:lstStyle xmlns:a="http://schemas.openxmlformats.org/drawingml/2006/main"/>
-          <a:p xmlns:a="http://schemas.openxmlformats.org/drawingml/2006/main">
-            <a:pPr algn="l">
-              <a:lnSpc>
-                <a:spcPct val="114000"/>
-              </a:lnSpc>
-              <a:buNone/>
-              <a:defRPr sz="2200" b="1">
-                <a:solidFill>
-                  <a:srgbClr val="1F4D78"/>
-                </a:solidFill>
-                <a:latin typeface="微软雅黑"/>
-                <a:ea typeface="微软雅黑"/>
-                <a:cs typeface="微软雅黑"/>
-              </a:defRPr>
-            </a:pPr>
-            <a:r>
-              <a:rPr sz="2200" b="1">
-                <a:solidFill>
-                  <a:srgbClr val="1F4D78"/>
-                </a:solidFill>
-                <a:latin typeface="微软雅黑"/>
-                <a:ea typeface="微软雅黑"/>
-                <a:cs typeface="微软雅黑"/>
-              </a:rPr>
-              <a:t>C</a:t>
-            </a:r>
-          </a:p>
-        </p:txBody>
-      </p:sp>
-      <p:sp>
-        <p:nvSpPr>
-          <p:cNvPr id="23" name="visual-6-17-p06-r2-1">
-            <a:extLst xmlns:a="http://schemas.openxmlformats.org/drawingml/2006/main">
-              <a:ext uri="{FF2B5EF4-FFF2-40B4-BE49-F238E27FC236}">
-                <a16:creationId xmlns:a16="http://schemas.microsoft.com/office/drawing/2014/main" id="{15586A61-EA3B-41AB-B412-7FAC01CA8612}"/>
-              </a:ext>
-            </a:extLst>
-          </p:cNvPr>
-          <p:cNvSpPr>
-            <a:spLocks xmlns:a="http://schemas.openxmlformats.org/drawingml/2006/main" noGrp="1"/>
-          </p:cNvSpPr>
-          <p:nvPr/>
-        </p:nvSpPr>
-        <p:spPr>
-          <a:xfrm xmlns:a="http://schemas.openxmlformats.org/drawingml/2006/main">
-            <a:off x="2000250" y="3257550"/>
-            <a:ext cx="2286000" cy="571500"/>
-          </a:xfrm>
-          <a:prstGeom xmlns:a="http://schemas.openxmlformats.org/drawingml/2006/main" prst="rect">
-            <a:avLst/>
-          </a:prstGeom>
-          <a:noFill xmlns:a="http://schemas.openxmlformats.org/drawingml/2006/main"/>
-          <a:ln xmlns:a="http://schemas.openxmlformats.org/drawingml/2006/main" w="0">
-            <a:noFill/>
-          </a:ln>
-        </p:spPr>
-        <p:txBody>
-          <a:bodyPr xmlns:a="http://schemas.openxmlformats.org/drawingml/2006/main" lIns="0" tIns="0" rIns="0" bIns="0" anchor="ctr">
-            <a:noAutofit/>
-          </a:bodyPr>
-          <a:lstStyle xmlns:a="http://schemas.openxmlformats.org/drawingml/2006/main"/>
-          <a:p xmlns:a="http://schemas.openxmlformats.org/drawingml/2006/main">
-            <a:pPr algn="l">
-              <a:lnSpc>
-                <a:spcPct val="114000"/>
-              </a:lnSpc>
-              <a:buNone/>
-              <a:defRPr sz="2200" b="1">
-                <a:solidFill>
-                  <a:srgbClr val="1F4D78"/>
-                </a:solidFill>
-                <a:latin typeface="微软雅黑"/>
-                <a:ea typeface="微软雅黑"/>
-                <a:cs typeface="微软雅黑"/>
-              </a:defRPr>
-            </a:pPr>
-            <a:r>
-              <a:rPr sz="2200" b="1">
-                <a:solidFill>
-                  <a:srgbClr val="1F4D78"/>
-                </a:solidFill>
-                <a:latin typeface="微软雅黑"/>
-                <a:ea typeface="微软雅黑"/>
-                <a:cs typeface="微软雅黑"/>
-              </a:rPr>
-              <a:t>否</a:t>
-            </a:r>
-          </a:p>
-        </p:txBody>
-      </p:sp>
-      <p:sp>
-        <p:nvSpPr>
-          <p:cNvPr id="24" name="visual-6-18-p06-r2-2">
-            <a:extLst xmlns:a="http://schemas.openxmlformats.org/drawingml/2006/main">
-              <a:ext uri="{FF2B5EF4-FFF2-40B4-BE49-F238E27FC236}">
-                <a16:creationId xmlns:a16="http://schemas.microsoft.com/office/drawing/2014/main" id="{2C6D0EFF-BAF2-4EE0-82E8-4F93A46DEA7E}"/>
-              </a:ext>
-            </a:extLst>
-          </p:cNvPr>
-          <p:cNvSpPr>
-            <a:spLocks xmlns:a="http://schemas.openxmlformats.org/drawingml/2006/main" noGrp="1"/>
-          </p:cNvSpPr>
-          <p:nvPr/>
-        </p:nvSpPr>
-        <p:spPr>
-          <a:xfrm xmlns:a="http://schemas.openxmlformats.org/drawingml/2006/main">
-            <a:off x="4286250" y="3257550"/>
-            <a:ext cx="2286000" cy="571500"/>
-          </a:xfrm>
-          <a:prstGeom xmlns:a="http://schemas.openxmlformats.org/drawingml/2006/main" prst="rect">
-            <a:avLst/>
-          </a:prstGeom>
-          <a:noFill xmlns:a="http://schemas.openxmlformats.org/drawingml/2006/main"/>
-          <a:ln xmlns:a="http://schemas.openxmlformats.org/drawingml/2006/main" w="0">
-            <a:noFill/>
-          </a:ln>
-        </p:spPr>
-        <p:txBody>
-          <a:bodyPr xmlns:a="http://schemas.openxmlformats.org/drawingml/2006/main" lIns="0" tIns="0" rIns="0" bIns="0" anchor="ctr">
-            <a:noAutofit/>
-          </a:bodyPr>
-          <a:lstStyle xmlns:a="http://schemas.openxmlformats.org/drawingml/2006/main"/>
-          <a:p xmlns:a="http://schemas.openxmlformats.org/drawingml/2006/main">
-            <a:pPr algn="l">
-              <a:lnSpc>
-                <a:spcPct val="114000"/>
-              </a:lnSpc>
-              <a:buNone/>
-              <a:defRPr sz="2200" b="1">
-                <a:solidFill>
-                  <a:srgbClr val="1F4D78"/>
-                </a:solidFill>
-                <a:latin typeface="微软雅黑"/>
-                <a:ea typeface="微软雅黑"/>
-                <a:cs typeface="微软雅黑"/>
-              </a:defRPr>
-            </a:pPr>
-            <a:r>
-              <a:rPr sz="2200" b="1">
-                <a:solidFill>
-                  <a:srgbClr val="1F4D78"/>
-                </a:solidFill>
-                <a:latin typeface="微软雅黑"/>
-                <a:ea typeface="微软雅黑"/>
-                <a:cs typeface="微软雅黑"/>
-              </a:rPr>
-              <a:t>检索任务</a:t>
-            </a:r>
-          </a:p>
-        </p:txBody>
-      </p:sp>
-      <p:sp>
-        <p:nvSpPr>
-          <p:cNvPr id="25" name="visual-6-19-p06-r2-3">
-            <a:extLst xmlns:a="http://schemas.openxmlformats.org/drawingml/2006/main">
-              <a:ext uri="{FF2B5EF4-FFF2-40B4-BE49-F238E27FC236}">
-                <a16:creationId xmlns:a16="http://schemas.microsoft.com/office/drawing/2014/main" id="{580B5A5A-4C13-47D4-8630-5F960FE5DE13}"/>
-              </a:ext>
-            </a:extLst>
-          </p:cNvPr>
-          <p:cNvSpPr>
-            <a:spLocks xmlns:a="http://schemas.openxmlformats.org/drawingml/2006/main" noGrp="1"/>
-          </p:cNvSpPr>
-          <p:nvPr/>
-        </p:nvSpPr>
-        <p:spPr>
-          <a:xfrm xmlns:a="http://schemas.openxmlformats.org/drawingml/2006/main">
-            <a:off x="6572250" y="3257550"/>
-            <a:ext cx="2286000" cy="571500"/>
-          </a:xfrm>
-          <a:prstGeom xmlns:a="http://schemas.openxmlformats.org/drawingml/2006/main" prst="rect">
-            <a:avLst/>
-          </a:prstGeom>
-          <a:noFill xmlns:a="http://schemas.openxmlformats.org/drawingml/2006/main"/>
-          <a:ln xmlns:a="http://schemas.openxmlformats.org/drawingml/2006/main" w="0">
-            <a:noFill/>
-          </a:ln>
-        </p:spPr>
-        <p:txBody>
-          <a:bodyPr xmlns:a="http://schemas.openxmlformats.org/drawingml/2006/main" lIns="0" tIns="0" rIns="0" bIns="0" anchor="ctr">
-            <a:noAutofit/>
-          </a:bodyPr>
-          <a:lstStyle xmlns:a="http://schemas.openxmlformats.org/drawingml/2006/main"/>
-          <a:p xmlns:a="http://schemas.openxmlformats.org/drawingml/2006/main">
-            <a:pPr algn="l">
-              <a:lnSpc>
-                <a:spcPct val="114000"/>
-              </a:lnSpc>
-              <a:buNone/>
-              <a:defRPr sz="2200" b="1">
-                <a:solidFill>
-                  <a:srgbClr val="1F4D78"/>
-                </a:solidFill>
-                <a:latin typeface="微软雅黑"/>
-                <a:ea typeface="微软雅黑"/>
-                <a:cs typeface="微软雅黑"/>
-              </a:defRPr>
-            </a:pPr>
-            <a:r>
-              <a:rPr sz="2200" b="1">
-                <a:solidFill>
-                  <a:srgbClr val="1F4D78"/>
-                </a:solidFill>
-                <a:latin typeface="微软雅黑"/>
-                <a:ea typeface="微软雅黑"/>
-                <a:cs typeface="微软雅黑"/>
-              </a:rPr>
-              <a:t>有</a:t>
-            </a:r>
-          </a:p>
-        </p:txBody>
-      </p:sp>
-      <p:sp>
-        <p:nvSpPr>
-          <p:cNvPr id="26" name="visual-6-20-p06-r2-4">
-            <a:extLst xmlns:a="http://schemas.openxmlformats.org/drawingml/2006/main">
-              <a:ext uri="{FF2B5EF4-FFF2-40B4-BE49-F238E27FC236}">
-                <a16:creationId xmlns:a16="http://schemas.microsoft.com/office/drawing/2014/main" id="{F3385B59-5A8B-49F7-89D9-937C1341F8D0}"/>
-              </a:ext>
-            </a:extLst>
-          </p:cNvPr>
-          <p:cNvSpPr>
-            <a:spLocks xmlns:a="http://schemas.openxmlformats.org/drawingml/2006/main" noGrp="1"/>
-          </p:cNvSpPr>
-          <p:nvPr/>
-        </p:nvSpPr>
-        <p:spPr>
-          <a:xfrm xmlns:a="http://schemas.openxmlformats.org/drawingml/2006/main">
-            <a:off x="8858250" y="3257550"/>
-            <a:ext cx="2476500" cy="571500"/>
-          </a:xfrm>
-          <a:prstGeom xmlns:a="http://schemas.openxmlformats.org/drawingml/2006/main" prst="rect">
-            <a:avLst/>
-          </a:prstGeom>
-          <a:noFill xmlns:a="http://schemas.openxmlformats.org/drawingml/2006/main"/>
-          <a:ln xmlns:a="http://schemas.openxmlformats.org/drawingml/2006/main" w="0">
-            <a:noFill/>
-          </a:ln>
-        </p:spPr>
-        <p:txBody>
-          <a:bodyPr xmlns:a="http://schemas.openxmlformats.org/drawingml/2006/main" lIns="0" tIns="0" rIns="0" bIns="0" anchor="ctr">
-            <a:noAutofit/>
-          </a:bodyPr>
-          <a:lstStyle xmlns:a="http://schemas.openxmlformats.org/drawingml/2006/main"/>
-          <a:p xmlns:a="http://schemas.openxmlformats.org/drawingml/2006/main">
-            <a:pPr algn="l">
-              <a:lnSpc>
-                <a:spcPct val="114000"/>
-              </a:lnSpc>
-              <a:buNone/>
-              <a:defRPr sz="2200" b="1">
-                <a:solidFill>
-                  <a:srgbClr val="1F4D78"/>
-                </a:solidFill>
-                <a:latin typeface="微软雅黑"/>
-                <a:ea typeface="微软雅黑"/>
-                <a:cs typeface="微软雅黑"/>
-              </a:defRPr>
-            </a:pPr>
-            <a:r>
-              <a:rPr sz="2200" b="1">
-                <a:solidFill>
-                  <a:srgbClr val="1F4D78"/>
-                </a:solidFill>
-                <a:latin typeface="微软雅黑"/>
-                <a:ea typeface="微软雅黑"/>
-                <a:cs typeface="微软雅黑"/>
-              </a:rPr>
-              <a:t>对比</a:t>
-            </a:r>
-          </a:p>
-        </p:txBody>
-      </p:sp>
-      <p:sp>
-        <p:nvSpPr>
-          <p:cNvPr id="27" name="visual-6-21-p06-r3-0">
-            <a:extLst xmlns:a="http://schemas.openxmlformats.org/drawingml/2006/main">
-              <a:ext uri="{FF2B5EF4-FFF2-40B4-BE49-F238E27FC236}">
-                <a16:creationId xmlns:a16="http://schemas.microsoft.com/office/drawing/2014/main" id="{F075C457-DE28-48BE-8FAB-3828C571243C}"/>
-              </a:ext>
-            </a:extLst>
-          </p:cNvPr>
-          <p:cNvSpPr>
-            <a:spLocks xmlns:a="http://schemas.openxmlformats.org/drawingml/2006/main" noGrp="1"/>
-          </p:cNvSpPr>
-          <p:nvPr/>
-        </p:nvSpPr>
-        <p:spPr>
-          <a:xfrm xmlns:a="http://schemas.openxmlformats.org/drawingml/2006/main">
-            <a:off x="857250" y="3829050"/>
-            <a:ext cx="1143000" cy="571500"/>
-          </a:xfrm>
-          <a:prstGeom xmlns:a="http://schemas.openxmlformats.org/drawingml/2006/main" prst="rect">
-            <a:avLst/>
-          </a:prstGeom>
-          <a:noFill xmlns:a="http://schemas.openxmlformats.org/drawingml/2006/main"/>
-          <a:ln xmlns:a="http://schemas.openxmlformats.org/drawingml/2006/main" w="0">
-            <a:noFill/>
-          </a:ln>
-        </p:spPr>
-        <p:txBody>
-          <a:bodyPr xmlns:a="http://schemas.openxmlformats.org/drawingml/2006/main" lIns="0" tIns="0" rIns="0" bIns="0" anchor="ctr">
-            <a:noAutofit/>
-          </a:bodyPr>
-          <a:lstStyle xmlns:a="http://schemas.openxmlformats.org/drawingml/2006/main"/>
-          <a:p xmlns:a="http://schemas.openxmlformats.org/drawingml/2006/main">
-            <a:pPr algn="l">
-              <a:lnSpc>
-                <a:spcPct val="114000"/>
-              </a:lnSpc>
-              <a:buNone/>
-              <a:defRPr sz="2200" b="1">
-                <a:solidFill>
-                  <a:srgbClr val="1F4D78"/>
-                </a:solidFill>
-                <a:latin typeface="微软雅黑"/>
-                <a:ea typeface="微软雅黑"/>
-                <a:cs typeface="微软雅黑"/>
-              </a:defRPr>
-            </a:pPr>
-            <a:r>
-              <a:rPr sz="2200" b="1">
-                <a:solidFill>
-                  <a:srgbClr val="1F4D78"/>
-                </a:solidFill>
-                <a:latin typeface="微软雅黑"/>
-                <a:ea typeface="微软雅黑"/>
-                <a:cs typeface="微软雅黑"/>
-              </a:rPr>
-              <a:t>D</a:t>
-            </a:r>
-          </a:p>
-        </p:txBody>
-      </p:sp>
-      <p:sp>
-        <p:nvSpPr>
-          <p:cNvPr id="28" name="visual-6-22-p06-r3-1">
-            <a:extLst xmlns:a="http://schemas.openxmlformats.org/drawingml/2006/main">
-              <a:ext uri="{FF2B5EF4-FFF2-40B4-BE49-F238E27FC236}">
-                <a16:creationId xmlns:a16="http://schemas.microsoft.com/office/drawing/2014/main" id="{E92351E7-9303-41A0-9D35-F90CB4DB55F6}"/>
-              </a:ext>
-            </a:extLst>
-          </p:cNvPr>
-          <p:cNvSpPr>
-            <a:spLocks xmlns:a="http://schemas.openxmlformats.org/drawingml/2006/main" noGrp="1"/>
-          </p:cNvSpPr>
-          <p:nvPr/>
-        </p:nvSpPr>
-        <p:spPr>
-          <a:xfrm xmlns:a="http://schemas.openxmlformats.org/drawingml/2006/main">
-            <a:off x="2000250" y="3829050"/>
-            <a:ext cx="2286000" cy="571500"/>
-          </a:xfrm>
-          <a:prstGeom xmlns:a="http://schemas.openxmlformats.org/drawingml/2006/main" prst="rect">
-            <a:avLst/>
-          </a:prstGeom>
-          <a:noFill xmlns:a="http://schemas.openxmlformats.org/drawingml/2006/main"/>
-          <a:ln xmlns:a="http://schemas.openxmlformats.org/drawingml/2006/main" w="0">
-            <a:noFill/>
-          </a:ln>
-        </p:spPr>
-        <p:txBody>
-          <a:bodyPr xmlns:a="http://schemas.openxmlformats.org/drawingml/2006/main" lIns="0" tIns="0" rIns="0" bIns="0" anchor="ctr">
-            <a:noAutofit/>
-          </a:bodyPr>
-          <a:lstStyle xmlns:a="http://schemas.openxmlformats.org/drawingml/2006/main"/>
-          <a:p xmlns:a="http://schemas.openxmlformats.org/drawingml/2006/main">
-            <a:pPr algn="l">
-              <a:lnSpc>
-                <a:spcPct val="114000"/>
-              </a:lnSpc>
-              <a:buNone/>
-              <a:defRPr sz="2200" b="1">
-                <a:solidFill>
-                  <a:srgbClr val="1F4D78"/>
-                </a:solidFill>
-                <a:latin typeface="微软雅黑"/>
-                <a:ea typeface="微软雅黑"/>
-                <a:cs typeface="微软雅黑"/>
-              </a:defRPr>
-            </a:pPr>
-            <a:r>
-              <a:rPr sz="2200" b="1">
-                <a:solidFill>
-                  <a:srgbClr val="1F4D78"/>
-                </a:solidFill>
-                <a:latin typeface="微软雅黑"/>
-                <a:ea typeface="微软雅黑"/>
-                <a:cs typeface="微软雅黑"/>
-              </a:rPr>
-              <a:t>相反结论</a:t>
-            </a:r>
-          </a:p>
-        </p:txBody>
-      </p:sp>
-      <p:sp>
-        <p:nvSpPr>
-          <p:cNvPr id="29" name="visual-6-23-p06-r3-2">
-            <a:extLst xmlns:a="http://schemas.openxmlformats.org/drawingml/2006/main">
-              <a:ext uri="{FF2B5EF4-FFF2-40B4-BE49-F238E27FC236}">
-                <a16:creationId xmlns:a16="http://schemas.microsoft.com/office/drawing/2014/main" id="{D1F7FD6D-8AF3-4846-A732-B061F618243D}"/>
-              </a:ext>
-            </a:extLst>
-          </p:cNvPr>
-          <p:cNvSpPr>
-            <a:spLocks xmlns:a="http://schemas.openxmlformats.org/drawingml/2006/main" noGrp="1"/>
-          </p:cNvSpPr>
-          <p:nvPr/>
-        </p:nvSpPr>
-        <p:spPr>
-          <a:xfrm xmlns:a="http://schemas.openxmlformats.org/drawingml/2006/main">
-            <a:off x="4286250" y="3829050"/>
-            <a:ext cx="2286000" cy="571500"/>
-          </a:xfrm>
-          <a:prstGeom xmlns:a="http://schemas.openxmlformats.org/drawingml/2006/main" prst="rect">
-            <a:avLst/>
-          </a:prstGeom>
-          <a:noFill xmlns:a="http://schemas.openxmlformats.org/drawingml/2006/main"/>
-          <a:ln xmlns:a="http://schemas.openxmlformats.org/drawingml/2006/main" w="0">
-            <a:noFill/>
-          </a:ln>
-        </p:spPr>
-        <p:txBody>
-          <a:bodyPr xmlns:a="http://schemas.openxmlformats.org/drawingml/2006/main" lIns="0" tIns="0" rIns="0" bIns="0" anchor="ctr">
-            <a:noAutofit/>
-          </a:bodyPr>
-          <a:lstStyle xmlns:a="http://schemas.openxmlformats.org/drawingml/2006/main"/>
-          <a:p xmlns:a="http://schemas.openxmlformats.org/drawingml/2006/main">
-            <a:pPr algn="l">
-              <a:lnSpc>
-                <a:spcPct val="114000"/>
-              </a:lnSpc>
-              <a:buNone/>
-              <a:defRPr sz="2200" b="1">
-                <a:solidFill>
-                  <a:srgbClr val="1F4D78"/>
-                </a:solidFill>
-                <a:latin typeface="微软雅黑"/>
-                <a:ea typeface="微软雅黑"/>
-                <a:cs typeface="微软雅黑"/>
-              </a:defRPr>
-            </a:pPr>
-            <a:r>
-              <a:rPr sz="2200" b="1">
-                <a:solidFill>
-                  <a:srgbClr val="1F4D78"/>
-                </a:solidFill>
-                <a:latin typeface="微软雅黑"/>
-                <a:ea typeface="微软雅黑"/>
-                <a:cs typeface="微软雅黑"/>
-              </a:rPr>
-              <a:t>是</a:t>
-            </a:r>
-          </a:p>
-        </p:txBody>
-      </p:sp>
-      <p:sp>
-        <p:nvSpPr>
-          <p:cNvPr id="30" name="visual-6-24-p06-r3-3">
-            <a:extLst xmlns:a="http://schemas.openxmlformats.org/drawingml/2006/main">
-              <a:ext uri="{FF2B5EF4-FFF2-40B4-BE49-F238E27FC236}">
-                <a16:creationId xmlns:a16="http://schemas.microsoft.com/office/drawing/2014/main" id="{1DA168AE-D910-497B-8B37-E9E1D43BEB48}"/>
-              </a:ext>
-            </a:extLst>
-          </p:cNvPr>
-          <p:cNvSpPr>
-            <a:spLocks xmlns:a="http://schemas.openxmlformats.org/drawingml/2006/main" noGrp="1"/>
-          </p:cNvSpPr>
-          <p:nvPr/>
-        </p:nvSpPr>
-        <p:spPr>
-          <a:xfrm xmlns:a="http://schemas.openxmlformats.org/drawingml/2006/main">
-            <a:off x="6572250" y="3829050"/>
-            <a:ext cx="2286000" cy="571500"/>
-          </a:xfrm>
-          <a:prstGeom xmlns:a="http://schemas.openxmlformats.org/drawingml/2006/main" prst="rect">
-            <a:avLst/>
-          </a:prstGeom>
-          <a:noFill xmlns:a="http://schemas.openxmlformats.org/drawingml/2006/main"/>
-          <a:ln xmlns:a="http://schemas.openxmlformats.org/drawingml/2006/main" w="0">
-            <a:noFill/>
-          </a:ln>
-        </p:spPr>
-        <p:txBody>
-          <a:bodyPr xmlns:a="http://schemas.openxmlformats.org/drawingml/2006/main" lIns="0" tIns="0" rIns="0" bIns="0" anchor="ctr">
-            <a:noAutofit/>
-          </a:bodyPr>
-          <a:lstStyle xmlns:a="http://schemas.openxmlformats.org/drawingml/2006/main"/>
-          <a:p xmlns:a="http://schemas.openxmlformats.org/drawingml/2006/main">
-            <a:pPr algn="l">
-              <a:lnSpc>
-                <a:spcPct val="114000"/>
-              </a:lnSpc>
-              <a:buNone/>
-              <a:defRPr sz="2200" b="1">
-                <a:solidFill>
-                  <a:srgbClr val="1F4D78"/>
-                </a:solidFill>
-                <a:latin typeface="微软雅黑"/>
-                <a:ea typeface="微软雅黑"/>
-                <a:cs typeface="微软雅黑"/>
-              </a:defRPr>
-            </a:pPr>
-            <a:r>
-              <a:rPr sz="2200" b="1">
-                <a:solidFill>
-                  <a:srgbClr val="1F4D78"/>
-                </a:solidFill>
-                <a:latin typeface="微软雅黑"/>
-                <a:ea typeface="微软雅黑"/>
-                <a:cs typeface="微软雅黑"/>
-              </a:rPr>
-              <a:t>是</a:t>
-            </a:r>
-          </a:p>
-        </p:txBody>
-      </p:sp>
-      <p:sp>
-        <p:nvSpPr>
-          <p:cNvPr id="31" name="visual-6-25-p06-r3-4">
-            <a:extLst xmlns:a="http://schemas.openxmlformats.org/drawingml/2006/main">
-              <a:ext uri="{FF2B5EF4-FFF2-40B4-BE49-F238E27FC236}">
-                <a16:creationId xmlns:a16="http://schemas.microsoft.com/office/drawing/2014/main" id="{72CB3489-BCE0-40A9-B44A-B662E35B63E6}"/>
-              </a:ext>
-            </a:extLst>
-          </p:cNvPr>
-          <p:cNvSpPr>
-            <a:spLocks xmlns:a="http://schemas.openxmlformats.org/drawingml/2006/main" noGrp="1"/>
-          </p:cNvSpPr>
-          <p:nvPr/>
-        </p:nvSpPr>
-        <p:spPr>
-          <a:xfrm xmlns:a="http://schemas.openxmlformats.org/drawingml/2006/main">
-            <a:off x="8858250" y="3829050"/>
-            <a:ext cx="2476500" cy="571500"/>
-          </a:xfrm>
-          <a:prstGeom xmlns:a="http://schemas.openxmlformats.org/drawingml/2006/main" prst="rect">
-            <a:avLst/>
-          </a:prstGeom>
-          <a:noFill xmlns:a="http://schemas.openxmlformats.org/drawingml/2006/main"/>
-          <a:ln xmlns:a="http://schemas.openxmlformats.org/drawingml/2006/main" w="0">
-            <a:noFill/>
-          </a:ln>
-        </p:spPr>
-        <p:txBody>
-          <a:bodyPr xmlns:a="http://schemas.openxmlformats.org/drawingml/2006/main" lIns="0" tIns="0" rIns="0" bIns="0" anchor="ctr">
-            <a:noAutofit/>
-          </a:bodyPr>
-          <a:lstStyle xmlns:a="http://schemas.openxmlformats.org/drawingml/2006/main"/>
-          <a:p xmlns:a="http://schemas.openxmlformats.org/drawingml/2006/main">
-            <a:pPr algn="l">
-              <a:lnSpc>
-                <a:spcPct val="114000"/>
-              </a:lnSpc>
-              <a:buNone/>
-              <a:defRPr sz="2200" b="1">
-                <a:solidFill>
-                  <a:srgbClr val="1F4D78"/>
-                </a:solidFill>
-                <a:latin typeface="微软雅黑"/>
-                <a:ea typeface="微软雅黑"/>
-                <a:cs typeface="微软雅黑"/>
-              </a:defRPr>
-            </a:pPr>
-            <a:r>
-              <a:rPr sz="2200" b="1">
-                <a:solidFill>
-                  <a:srgbClr val="1F4D78"/>
-                </a:solidFill>
-                <a:latin typeface="微软雅黑"/>
-                <a:ea typeface="微软雅黑"/>
-                <a:cs typeface="微软雅黑"/>
-              </a:rPr>
-              <a:t>待核验</a:t>
-            </a:r>
-          </a:p>
-        </p:txBody>
-      </p:sp>
-      <p:sp>
-        <p:nvSpPr>
-          <p:cNvPr id="32" name="visual-6-26-p06-r4-0">
-            <a:extLst xmlns:a="http://schemas.openxmlformats.org/drawingml/2006/main">
-              <a:ext uri="{FF2B5EF4-FFF2-40B4-BE49-F238E27FC236}">
-                <a16:creationId xmlns:a16="http://schemas.microsoft.com/office/drawing/2014/main" id="{800291AA-21A2-4E90-912E-740FD285D467}"/>
-              </a:ext>
-            </a:extLst>
-          </p:cNvPr>
-          <p:cNvSpPr>
-            <a:spLocks xmlns:a="http://schemas.openxmlformats.org/drawingml/2006/main" noGrp="1"/>
-          </p:cNvSpPr>
-          <p:nvPr/>
-        </p:nvSpPr>
-        <p:spPr>
-          <a:xfrm xmlns:a="http://schemas.openxmlformats.org/drawingml/2006/main">
-            <a:off x="857250" y="4400550"/>
-            <a:ext cx="1143000" cy="571500"/>
-          </a:xfrm>
-          <a:prstGeom xmlns:a="http://schemas.openxmlformats.org/drawingml/2006/main" prst="rect">
-            <a:avLst/>
-          </a:prstGeom>
-          <a:noFill xmlns:a="http://schemas.openxmlformats.org/drawingml/2006/main"/>
-          <a:ln xmlns:a="http://schemas.openxmlformats.org/drawingml/2006/main" w="0">
-            <a:noFill/>
-          </a:ln>
-        </p:spPr>
-        <p:txBody>
-          <a:bodyPr xmlns:a="http://schemas.openxmlformats.org/drawingml/2006/main" lIns="0" tIns="0" rIns="0" bIns="0" anchor="ctr">
-            <a:noAutofit/>
-          </a:bodyPr>
-          <a:lstStyle xmlns:a="http://schemas.openxmlformats.org/drawingml/2006/main"/>
-          <a:p xmlns:a="http://schemas.openxmlformats.org/drawingml/2006/main">
-            <a:pPr algn="l">
-              <a:lnSpc>
-                <a:spcPct val="114000"/>
-              </a:lnSpc>
-              <a:buNone/>
-              <a:defRPr sz="2200" b="1">
-                <a:solidFill>
-                  <a:srgbClr val="1F4D78"/>
-                </a:solidFill>
-                <a:latin typeface="微软雅黑"/>
-                <a:ea typeface="微软雅黑"/>
-                <a:cs typeface="微软雅黑"/>
-              </a:defRPr>
-            </a:pPr>
-            <a:r>
-              <a:rPr sz="2200" b="1">
-                <a:solidFill>
-                  <a:srgbClr val="1F4D78"/>
-                </a:solidFill>
-                <a:latin typeface="微软雅黑"/>
-                <a:ea typeface="微软雅黑"/>
-                <a:cs typeface="微软雅黑"/>
-              </a:rPr>
-              <a:t>E</a:t>
-            </a:r>
-          </a:p>
-        </p:txBody>
-      </p:sp>
-      <p:sp>
-        <p:nvSpPr>
-          <p:cNvPr id="33" name="visual-6-27-p06-r4-1">
-            <a:extLst xmlns:a="http://schemas.openxmlformats.org/drawingml/2006/main">
-              <a:ext uri="{FF2B5EF4-FFF2-40B4-BE49-F238E27FC236}">
-                <a16:creationId xmlns:a16="http://schemas.microsoft.com/office/drawing/2014/main" id="{DF0E71FD-601F-482A-BB92-1B5288AC207E}"/>
-              </a:ext>
-            </a:extLst>
-          </p:cNvPr>
-          <p:cNvSpPr>
-            <a:spLocks xmlns:a="http://schemas.openxmlformats.org/drawingml/2006/main" noGrp="1"/>
-          </p:cNvSpPr>
-          <p:nvPr/>
-        </p:nvSpPr>
-        <p:spPr>
-          <a:xfrm xmlns:a="http://schemas.openxmlformats.org/drawingml/2006/main">
-            <a:off x="2000250" y="4400550"/>
-            <a:ext cx="2286000" cy="571500"/>
-          </a:xfrm>
-          <a:prstGeom xmlns:a="http://schemas.openxmlformats.org/drawingml/2006/main" prst="rect">
-            <a:avLst/>
-          </a:prstGeom>
-          <a:noFill xmlns:a="http://schemas.openxmlformats.org/drawingml/2006/main"/>
-          <a:ln xmlns:a="http://schemas.openxmlformats.org/drawingml/2006/main" w="0">
-            <a:noFill/>
-          </a:ln>
-        </p:spPr>
-        <p:txBody>
-          <a:bodyPr xmlns:a="http://schemas.openxmlformats.org/drawingml/2006/main" lIns="0" tIns="0" rIns="0" bIns="0" anchor="ctr">
-            <a:noAutofit/>
-          </a:bodyPr>
-          <a:lstStyle xmlns:a="http://schemas.openxmlformats.org/drawingml/2006/main"/>
-          <a:p xmlns:a="http://schemas.openxmlformats.org/drawingml/2006/main">
-            <a:pPr algn="l">
-              <a:lnSpc>
-                <a:spcPct val="114000"/>
-              </a:lnSpc>
-              <a:buNone/>
-              <a:defRPr sz="2200" b="1">
-                <a:solidFill>
-                  <a:srgbClr val="1F4D78"/>
-                </a:solidFill>
-                <a:latin typeface="微软雅黑"/>
-                <a:ea typeface="微软雅黑"/>
-                <a:cs typeface="微软雅黑"/>
-              </a:defRPr>
-            </a:pPr>
-            <a:r>
-              <a:rPr sz="2200" b="1">
-                <a:solidFill>
-                  <a:srgbClr val="1F4D78"/>
-                </a:solidFill>
-                <a:latin typeface="微软雅黑"/>
-                <a:ea typeface="微软雅黑"/>
-                <a:cs typeface="微软雅黑"/>
-              </a:rPr>
-              <a:t>—</a:t>
-            </a:r>
-          </a:p>
-        </p:txBody>
-      </p:sp>
-      <p:sp>
-        <p:nvSpPr>
-          <p:cNvPr id="34" name="visual-6-28-p06-r4-2">
-            <a:extLst xmlns:a="http://schemas.openxmlformats.org/drawingml/2006/main">
-              <a:ext uri="{FF2B5EF4-FFF2-40B4-BE49-F238E27FC236}">
-                <a16:creationId xmlns:a16="http://schemas.microsoft.com/office/drawing/2014/main" id="{AFF4FBF2-2AEB-477C-9FBC-3C29E7C6AFC7}"/>
-              </a:ext>
-            </a:extLst>
-          </p:cNvPr>
-          <p:cNvSpPr>
-            <a:spLocks xmlns:a="http://schemas.openxmlformats.org/drawingml/2006/main" noGrp="1"/>
-          </p:cNvSpPr>
-          <p:nvPr/>
-        </p:nvSpPr>
-        <p:spPr>
-          <a:xfrm xmlns:a="http://schemas.openxmlformats.org/drawingml/2006/main">
-            <a:off x="4286250" y="4400550"/>
-            <a:ext cx="2286000" cy="571500"/>
-          </a:xfrm>
-          <a:prstGeom xmlns:a="http://schemas.openxmlformats.org/drawingml/2006/main" prst="rect">
-            <a:avLst/>
-          </a:prstGeom>
-          <a:noFill xmlns:a="http://schemas.openxmlformats.org/drawingml/2006/main"/>
-          <a:ln xmlns:a="http://schemas.openxmlformats.org/drawingml/2006/main" w="0">
-            <a:noFill/>
-          </a:ln>
-        </p:spPr>
-        <p:txBody>
-          <a:bodyPr xmlns:a="http://schemas.openxmlformats.org/drawingml/2006/main" lIns="0" tIns="0" rIns="0" bIns="0" anchor="ctr">
-            <a:noAutofit/>
-          </a:bodyPr>
-          <a:lstStyle xmlns:a="http://schemas.openxmlformats.org/drawingml/2006/main"/>
-          <a:p xmlns:a="http://schemas.openxmlformats.org/drawingml/2006/main">
-            <a:pPr algn="l">
-              <a:lnSpc>
-                <a:spcPct val="114000"/>
-              </a:lnSpc>
-              <a:buNone/>
-              <a:defRPr sz="2200" b="1">
-                <a:solidFill>
-                  <a:srgbClr val="1F4D78"/>
-                </a:solidFill>
-                <a:latin typeface="微软雅黑"/>
-                <a:ea typeface="微软雅黑"/>
-                <a:cs typeface="微软雅黑"/>
-              </a:defRPr>
-            </a:pPr>
-            <a:r>
-              <a:rPr sz="2200" b="1">
-                <a:solidFill>
-                  <a:srgbClr val="1F4D78"/>
-                </a:solidFill>
-                <a:latin typeface="微软雅黑"/>
-                <a:ea typeface="微软雅黑"/>
-                <a:cs typeface="微软雅黑"/>
-              </a:rPr>
-              <a:t>—</a:t>
-            </a:r>
-          </a:p>
-        </p:txBody>
-      </p:sp>
-      <p:sp>
-        <p:nvSpPr>
-          <p:cNvPr id="35" name="visual-6-29-p06-r4-3">
-            <a:extLst xmlns:a="http://schemas.openxmlformats.org/drawingml/2006/main">
-              <a:ext uri="{FF2B5EF4-FFF2-40B4-BE49-F238E27FC236}">
-                <a16:creationId xmlns:a16="http://schemas.microsoft.com/office/drawing/2014/main" id="{7B174E9D-0B58-4B84-897A-0F96B7AD7EB8}"/>
-              </a:ext>
-            </a:extLst>
-          </p:cNvPr>
-          <p:cNvSpPr>
-            <a:spLocks xmlns:a="http://schemas.openxmlformats.org/drawingml/2006/main" noGrp="1"/>
-          </p:cNvSpPr>
-          <p:nvPr/>
-        </p:nvSpPr>
-        <p:spPr>
-          <a:xfrm xmlns:a="http://schemas.openxmlformats.org/drawingml/2006/main">
-            <a:off x="6572250" y="4400550"/>
-            <a:ext cx="2286000" cy="571500"/>
-          </a:xfrm>
-          <a:prstGeom xmlns:a="http://schemas.openxmlformats.org/drawingml/2006/main" prst="rect">
-            <a:avLst/>
-          </a:prstGeom>
-          <a:noFill xmlns:a="http://schemas.openxmlformats.org/drawingml/2006/main"/>
-          <a:ln xmlns:a="http://schemas.openxmlformats.org/drawingml/2006/main" w="0">
-            <a:noFill/>
-          </a:ln>
-        </p:spPr>
-        <p:txBody>
-          <a:bodyPr xmlns:a="http://schemas.openxmlformats.org/drawingml/2006/main" lIns="0" tIns="0" rIns="0" bIns="0" anchor="ctr">
-            <a:noAutofit/>
-          </a:bodyPr>
-          <a:lstStyle xmlns:a="http://schemas.openxmlformats.org/drawingml/2006/main"/>
-          <a:p xmlns:a="http://schemas.openxmlformats.org/drawingml/2006/main">
-            <a:pPr algn="l">
-              <a:lnSpc>
-                <a:spcPct val="114000"/>
-              </a:lnSpc>
-              <a:buNone/>
-              <a:defRPr sz="2200" b="1">
-                <a:solidFill>
-                  <a:srgbClr val="1F4D78"/>
-                </a:solidFill>
-                <a:latin typeface="微软雅黑"/>
-                <a:ea typeface="微软雅黑"/>
-                <a:cs typeface="微软雅黑"/>
-              </a:defRPr>
-            </a:pPr>
-            <a:r>
-              <a:rPr sz="2200" b="1">
-                <a:solidFill>
-                  <a:srgbClr val="1F4D78"/>
-                </a:solidFill>
-                <a:latin typeface="微软雅黑"/>
-                <a:ea typeface="微软雅黑"/>
-                <a:cs typeface="微软雅黑"/>
-              </a:rPr>
-              <a:t>—</a:t>
-            </a:r>
-          </a:p>
-        </p:txBody>
-      </p:sp>
-      <p:sp>
-        <p:nvSpPr>
-          <p:cNvPr id="36" name="visual-6-30-p06-r4-4">
-            <a:extLst xmlns:a="http://schemas.openxmlformats.org/drawingml/2006/main">
-              <a:ext uri="{FF2B5EF4-FFF2-40B4-BE49-F238E27FC236}">
-                <a16:creationId xmlns:a16="http://schemas.microsoft.com/office/drawing/2014/main" id="{E419E693-1DF1-4A6C-8ED5-C449A1AA2807}"/>
-              </a:ext>
-            </a:extLst>
-          </p:cNvPr>
-          <p:cNvSpPr>
-            <a:spLocks xmlns:a="http://schemas.openxmlformats.org/drawingml/2006/main" noGrp="1"/>
-          </p:cNvSpPr>
-          <p:nvPr/>
-        </p:nvSpPr>
-        <p:spPr>
-          <a:xfrm xmlns:a="http://schemas.openxmlformats.org/drawingml/2006/main">
-            <a:off x="8858250" y="4400550"/>
-            <a:ext cx="2476500" cy="571500"/>
-          </a:xfrm>
-          <a:prstGeom xmlns:a="http://schemas.openxmlformats.org/drawingml/2006/main" prst="rect">
-            <a:avLst/>
-          </a:prstGeom>
-          <a:noFill xmlns:a="http://schemas.openxmlformats.org/drawingml/2006/main"/>
-          <a:ln xmlns:a="http://schemas.openxmlformats.org/drawingml/2006/main" w="0">
-            <a:noFill/>
-          </a:ln>
-        </p:spPr>
-        <p:txBody>
-          <a:bodyPr xmlns:a="http://schemas.openxmlformats.org/drawingml/2006/main" lIns="0" tIns="0" rIns="0" bIns="0" anchor="ctr">
-            <a:noAutofit/>
-          </a:bodyPr>
-          <a:lstStyle xmlns:a="http://schemas.openxmlformats.org/drawingml/2006/main"/>
-          <a:p xmlns:a="http://schemas.openxmlformats.org/drawingml/2006/main">
-            <a:pPr algn="l">
-              <a:lnSpc>
-                <a:spcPct val="114000"/>
-              </a:lnSpc>
-              <a:buNone/>
-              <a:defRPr sz="2200" b="1">
-                <a:solidFill>
-                  <a:srgbClr val="1F4D78"/>
-                </a:solidFill>
-                <a:latin typeface="微软雅黑"/>
-                <a:ea typeface="微软雅黑"/>
-                <a:cs typeface="微软雅黑"/>
-              </a:defRPr>
-            </a:pPr>
-            <a:r>
-              <a:rPr sz="2200" b="1">
-                <a:solidFill>
-                  <a:srgbClr val="1F4D78"/>
-                </a:solidFill>
-                <a:latin typeface="微软雅黑"/>
-                <a:ea typeface="微软雅黑"/>
-                <a:cs typeface="微软雅黑"/>
-              </a:rPr>
-              <a:t>空白候选</a:t>
-            </a:r>
-          </a:p>
-        </p:txBody>
-      </p:sp>
-      <p:sp>
-        <p:nvSpPr>
-          <p:cNvPr id="37" name="visual-6-31-p06-bottom">
-            <a:extLst xmlns:a="http://schemas.openxmlformats.org/drawingml/2006/main">
-              <a:ext uri="{FF2B5EF4-FFF2-40B4-BE49-F238E27FC236}">
-                <a16:creationId xmlns:a16="http://schemas.microsoft.com/office/drawing/2014/main" id="{256823DA-456B-49DF-8DE4-5DB302784AC8}"/>
-              </a:ext>
-            </a:extLst>
-          </p:cNvPr>
-          <p:cNvSpPr>
-            <a:spLocks xmlns:a="http://schemas.openxmlformats.org/drawingml/2006/main" noGrp="1"/>
-          </p:cNvSpPr>
-          <p:nvPr/>
-        </p:nvSpPr>
-        <p:spPr>
-          <a:xfrm xmlns:a="http://schemas.openxmlformats.org/drawingml/2006/main">
-            <a:off x="1809750" y="5067300"/>
-            <a:ext cx="8572500" cy="495300"/>
-          </a:xfrm>
-          <a:prstGeom xmlns:a="http://schemas.openxmlformats.org/drawingml/2006/main" prst="rect">
-            <a:avLst/>
-          </a:prstGeom>
-          <a:noFill xmlns:a="http://schemas.openxmlformats.org/drawingml/2006/main"/>
-          <a:ln xmlns:a="http://schemas.openxmlformats.org/drawingml/2006/main" w="0">
-            <a:noFill/>
-          </a:ln>
-        </p:spPr>
-        <p:txBody>
-          <a:bodyPr xmlns:a="http://schemas.openxmlformats.org/drawingml/2006/main" lIns="0" tIns="0" rIns="0" bIns="0" anchor="ctr">
-            <a:noAutofit/>
-          </a:bodyPr>
-          <a:lstStyle xmlns:a="http://schemas.openxmlformats.org/drawingml/2006/main"/>
-          <a:p xmlns:a="http://schemas.openxmlformats.org/drawingml/2006/main">
-            <a:pPr algn="l">
-              <a:lnSpc>
-                <a:spcPct val="114000"/>
+              <a:t>矩阵单元格为空，至少有三种可能：</a:t>
+            </a:r>
+          </a:p>
+        </p:txBody>
+      </p:sp>
+      <p:sp>
+        <p:nvSpPr>
+          <p:cNvPr id="7" name="content-180">
+            <a:extLst xmlns:a="http://schemas.openxmlformats.org/drawingml/2006/main">
+              <a:ext uri="{FF2B5EF4-FFF2-40B4-BE49-F238E27FC236}">
+                <a16:creationId xmlns:a16="http://schemas.microsoft.com/office/drawing/2014/main" id="{078BFE9A-3D67-4273-B9D6-2BCB40936289}"/>
+              </a:ext>
+            </a:extLst>
+          </p:cNvPr>
+          <p:cNvSpPr>
+            <a:spLocks xmlns:a="http://schemas.openxmlformats.org/drawingml/2006/main" noGrp="1"/>
+          </p:cNvSpPr>
+          <p:nvPr/>
+        </p:nvSpPr>
+        <p:spPr>
+          <a:xfrm xmlns:a="http://schemas.openxmlformats.org/drawingml/2006/main">
+            <a:off x="609600" y="2261235"/>
+            <a:ext cx="10972800" cy="432435"/>
+          </a:xfrm>
+          <a:prstGeom xmlns:a="http://schemas.openxmlformats.org/drawingml/2006/main" prst="rect">
+            <a:avLst/>
+          </a:prstGeom>
+          <a:noFill xmlns:a="http://schemas.openxmlformats.org/drawingml/2006/main"/>
+          <a:ln xmlns:a="http://schemas.openxmlformats.org/drawingml/2006/main" w="0">
+            <a:noFill/>
+          </a:ln>
+        </p:spPr>
+        <p:txBody>
+          <a:bodyPr xmlns:a="http://schemas.openxmlformats.org/drawingml/2006/main" lIns="0" tIns="0" rIns="0" bIns="0" anchor="t"/>
+          <a:lstStyle xmlns:a="http://schemas.openxmlformats.org/drawingml/2006/main"/>
+          <a:p xmlns:a="http://schemas.openxmlformats.org/drawingml/2006/main">
+            <a:pPr algn="l">
+              <a:lnSpc>
+                <a:spcPct val="118000"/>
               </a:lnSpc>
               <a:buNone/>
               <a:defRPr sz="2400" b="0">
@@ -21145,7 +21964,184 @@
                 <a:ea typeface="微软雅黑"/>
                 <a:cs typeface="微软雅黑"/>
               </a:rPr>
-              <a:t>空格只说明“当前地图未回答”，不自动证明领域没人做过。</a:t>
+              <a:t>尚未检索到；</a:t>
+            </a:r>
+          </a:p>
+        </p:txBody>
+      </p:sp>
+      <p:sp>
+        <p:nvSpPr>
+          <p:cNvPr id="8" name="content-181">
+            <a:extLst xmlns:a="http://schemas.openxmlformats.org/drawingml/2006/main">
+              <a:ext uri="{FF2B5EF4-FFF2-40B4-BE49-F238E27FC236}">
+                <a16:creationId xmlns:a16="http://schemas.microsoft.com/office/drawing/2014/main" id="{5460DFCC-2200-4666-A332-7517DBDD92C9}"/>
+              </a:ext>
+            </a:extLst>
+          </p:cNvPr>
+          <p:cNvSpPr>
+            <a:spLocks xmlns:a="http://schemas.openxmlformats.org/drawingml/2006/main" noGrp="1"/>
+          </p:cNvSpPr>
+          <p:nvPr/>
+        </p:nvSpPr>
+        <p:spPr>
+          <a:xfrm xmlns:a="http://schemas.openxmlformats.org/drawingml/2006/main">
+            <a:off x="609600" y="2950845"/>
+            <a:ext cx="10972800" cy="432435"/>
+          </a:xfrm>
+          <a:prstGeom xmlns:a="http://schemas.openxmlformats.org/drawingml/2006/main" prst="rect">
+            <a:avLst/>
+          </a:prstGeom>
+          <a:noFill xmlns:a="http://schemas.openxmlformats.org/drawingml/2006/main"/>
+          <a:ln xmlns:a="http://schemas.openxmlformats.org/drawingml/2006/main" w="0">
+            <a:noFill/>
+          </a:ln>
+        </p:spPr>
+        <p:txBody>
+          <a:bodyPr xmlns:a="http://schemas.openxmlformats.org/drawingml/2006/main" lIns="0" tIns="0" rIns="0" bIns="0" anchor="t"/>
+          <a:lstStyle xmlns:a="http://schemas.openxmlformats.org/drawingml/2006/main"/>
+          <a:p xmlns:a="http://schemas.openxmlformats.org/drawingml/2006/main">
+            <a:pPr algn="l">
+              <a:lnSpc>
+                <a:spcPct val="118000"/>
+              </a:lnSpc>
+              <a:buNone/>
+              <a:defRPr sz="2400" b="0">
+                <a:solidFill>
+                  <a:srgbClr val="27333D"/>
+                </a:solidFill>
+                <a:latin typeface="微软雅黑"/>
+                <a:ea typeface="微软雅黑"/>
+                <a:cs typeface="微软雅黑"/>
+              </a:defRPr>
+            </a:pPr>
+            <a:r>
+              <a:rPr sz="2400" b="0">
+                <a:solidFill>
+                  <a:srgbClr val="27333D"/>
+                </a:solidFill>
+                <a:latin typeface="微软雅黑"/>
+                <a:ea typeface="微软雅黑"/>
+                <a:cs typeface="微软雅黑"/>
+              </a:rPr>
+              <a:t>已检索但材料不适用；</a:t>
+            </a:r>
+          </a:p>
+        </p:txBody>
+      </p:sp>
+      <p:sp>
+        <p:nvSpPr>
+          <p:cNvPr id="9" name="content-182">
+            <a:extLst xmlns:a="http://schemas.openxmlformats.org/drawingml/2006/main">
+              <a:ext uri="{FF2B5EF4-FFF2-40B4-BE49-F238E27FC236}">
+                <a16:creationId xmlns:a16="http://schemas.microsoft.com/office/drawing/2014/main" id="{C796BE2E-BA9E-4AFF-B7C1-A9B0F6DAA287}"/>
+              </a:ext>
+            </a:extLst>
+          </p:cNvPr>
+          <p:cNvSpPr>
+            <a:spLocks xmlns:a="http://schemas.openxmlformats.org/drawingml/2006/main" noGrp="1"/>
+          </p:cNvSpPr>
+          <p:nvPr/>
+        </p:nvSpPr>
+        <p:spPr>
+          <a:xfrm xmlns:a="http://schemas.openxmlformats.org/drawingml/2006/main">
+            <a:off x="609600" y="3640455"/>
+            <a:ext cx="10972800" cy="432435"/>
+          </a:xfrm>
+          <a:prstGeom xmlns:a="http://schemas.openxmlformats.org/drawingml/2006/main" prst="rect">
+            <a:avLst/>
+          </a:prstGeom>
+          <a:noFill xmlns:a="http://schemas.openxmlformats.org/drawingml/2006/main"/>
+          <a:ln xmlns:a="http://schemas.openxmlformats.org/drawingml/2006/main" w="0">
+            <a:noFill/>
+          </a:ln>
+        </p:spPr>
+        <p:txBody>
+          <a:bodyPr xmlns:a="http://schemas.openxmlformats.org/drawingml/2006/main" lIns="0" tIns="0" rIns="0" bIns="0" anchor="t"/>
+          <a:lstStyle xmlns:a="http://schemas.openxmlformats.org/drawingml/2006/main"/>
+          <a:p xmlns:a="http://schemas.openxmlformats.org/drawingml/2006/main">
+            <a:pPr algn="l">
+              <a:lnSpc>
+                <a:spcPct val="118000"/>
+              </a:lnSpc>
+              <a:buNone/>
+              <a:defRPr sz="2400" b="0">
+                <a:solidFill>
+                  <a:srgbClr val="27333D"/>
+                </a:solidFill>
+                <a:latin typeface="微软雅黑"/>
+                <a:ea typeface="微软雅黑"/>
+                <a:cs typeface="微软雅黑"/>
+              </a:defRPr>
+            </a:pPr>
+            <a:r>
+              <a:rPr sz="2400" b="0">
+                <a:solidFill>
+                  <a:srgbClr val="27333D"/>
+                </a:solidFill>
+                <a:latin typeface="微软雅黑"/>
+                <a:ea typeface="微软雅黑"/>
+                <a:cs typeface="微软雅黑"/>
+              </a:rPr>
+              <a:t>有覆盖证据，确实缺少这一比较。</a:t>
+            </a:r>
+          </a:p>
+        </p:txBody>
+      </p:sp>
+      <p:sp>
+        <p:nvSpPr>
+          <p:cNvPr id="10" name="content-183">
+            <a:extLst xmlns:a="http://schemas.openxmlformats.org/drawingml/2006/main">
+              <a:ext uri="{FF2B5EF4-FFF2-40B4-BE49-F238E27FC236}">
+                <a16:creationId xmlns:a16="http://schemas.microsoft.com/office/drawing/2014/main" id="{BF9CA012-DA5E-4D8B-8CE8-1A636D46E795}"/>
+              </a:ext>
+            </a:extLst>
+          </p:cNvPr>
+          <p:cNvSpPr>
+            <a:spLocks xmlns:a="http://schemas.openxmlformats.org/drawingml/2006/main" noGrp="1"/>
+          </p:cNvSpPr>
+          <p:nvPr/>
+        </p:nvSpPr>
+        <p:spPr>
+          <a:xfrm xmlns:a="http://schemas.openxmlformats.org/drawingml/2006/main">
+            <a:off x="609600" y="4330065"/>
+            <a:ext cx="10972800" cy="432435"/>
+          </a:xfrm>
+          <a:prstGeom xmlns:a="http://schemas.openxmlformats.org/drawingml/2006/main" prst="rect">
+            <a:avLst/>
+          </a:prstGeom>
+          <a:noFill xmlns:a="http://schemas.openxmlformats.org/drawingml/2006/main"/>
+          <a:ln xmlns:a="http://schemas.openxmlformats.org/drawingml/2006/main" w="0">
+            <a:noFill/>
+          </a:ln>
+        </p:spPr>
+        <p:txBody>
+          <a:bodyPr xmlns:a="http://schemas.openxmlformats.org/drawingml/2006/main" lIns="0" tIns="0" rIns="0" bIns="0" anchor="t"/>
+          <a:lstStyle xmlns:a="http://schemas.openxmlformats.org/drawingml/2006/main"/>
+          <a:p xmlns:a="http://schemas.openxmlformats.org/drawingml/2006/main">
+            <a:pPr algn="l">
+              <a:lnSpc>
+                <a:spcPct val="118000"/>
+              </a:lnSpc>
+              <a:buNone/>
+              <a:defRPr sz="2400" b="0">
+                <a:solidFill>
+                  <a:srgbClr val="1F4D78"/>
+                </a:solidFill>
+                <a:latin typeface="微软雅黑"/>
+                <a:ea typeface="微软雅黑"/>
+                <a:cs typeface="微软雅黑"/>
+              </a:defRPr>
+            </a:pPr>
+            <a:r>
+              <a:rPr sz="2400" b="0">
+                <a:solidFill>
+                  <a:srgbClr val="1F4D78"/>
+                </a:solidFill>
+                <a:latin typeface="微软雅黑"/>
+                <a:ea typeface="微软雅黑"/>
+                <a:cs typeface="微软雅黑"/>
+              </a:rPr>
+              <a:t>先写覆盖范围和来源，再提出空白候选。</a:t>
             </a:r>
           </a:p>
         </p:txBody>

--- a/lessons/lesson-05/slides.pptx
+++ b/lessons/lesson-05/slides.pptx
@@ -418,7 +418,12 @@
           </a:p>
           <a:p xmlns:a="http://schemas.openxmlformats.org/drawingml/2006/main">
             <a:r>
-              <a:t>讲义位置：本课讲义；见逐页母稿映射表</a:t>
+              <a:t>讲述与校准：</a:t>
+            </a:r>
+          </a:p>
+          <a:p xmlns:a="http://schemas.openxmlformats.org/drawingml/2006/main">
+            <a:r>
+              <a:t>开场放下论文清单。本课要处理的是：当第 4 课已经完成了结构化阅读卡、每条主张都能定位到原文之后，把多篇阅读卡摆在一起时，研究者常犯的错误是按论文顺序拼接摘要，得到一份"读书报告"而不是综述。本课把阅读卡重组为按研究问题排列的证据地图，并向第 6 课问题门输出研究空白候选。</a:t>
             </a:r>
           </a:p>
           <a:p xmlns:a="http://schemas.openxmlformats.org/drawingml/2006/main">
@@ -428,12 +433,12 @@
           </a:p>
           <a:p xmlns:a="http://schemas.openxmlformats.org/drawingml/2006/main">
             <a:r>
-              <a:t>屏显核对：</a:t>
-            </a:r>
-          </a:p>
-          <a:p xmlns:a="http://schemas.openxmlformats.org/drawingml/2006/main">
-            <a:r>
-              <a:t>第5讲 综述、证据地图与研究空白识别</a:t>
+              <a:t>学生动作：</a:t>
+            </a:r>
+          </a:p>
+          <a:p xmlns:a="http://schemas.openxmlformats.org/drawingml/2006/main">
+            <a:r>
+              <a:t>不展开课程行政信息，直接进入下一页回扣。</a:t>
             </a:r>
           </a:p>
           <a:p xmlns:a="http://schemas.openxmlformats.org/drawingml/2006/main">
@@ -443,12 +448,7 @@
           </a:p>
           <a:p xmlns:a="http://schemas.openxmlformats.org/drawingml/2006/main">
             <a:r>
-              <a:t>教师讲述：</a:t>
-            </a:r>
-          </a:p>
-          <a:p xmlns:a="http://schemas.openxmlformats.org/drawingml/2006/main">
-            <a:r>
-              <a:t>开场放下论文清单。本课要处理的是：当第 4 课已经完成了结构化阅读卡、每条主张都能定位到原文之后，把多篇阅读卡摆在一起时，研究者常犯的错误是按论文顺序拼接摘要，得到一份"读书报告"而不是综述。本课把阅读卡重组为按研究问题排列的证据地图，并向第 6 课问题门输出研究空白候选。</a:t>
+              <a:t>课堂安排：按本稿下方 90 分钟教学路由安排；此页不另占独立时段。</a:t>
             </a:r>
           </a:p>
           <a:p xmlns:a="http://schemas.openxmlformats.org/drawingml/2006/main">
@@ -458,12 +458,12 @@
           </a:p>
           <a:p xmlns:a="http://schemas.openxmlformats.org/drawingml/2006/main">
             <a:r>
-              <a:t>学生动作：</a:t>
-            </a:r>
-          </a:p>
-          <a:p xmlns:a="http://schemas.openxmlformats.org/drawingml/2006/main">
-            <a:r>
-              <a:t>不展开课程行政信息，直接进入下一页回扣。</a:t>
+              <a:t>[Sources]</a:t>
+            </a:r>
+          </a:p>
+          <a:p xmlns:a="http://schemas.openxmlformats.org/drawingml/2006/main">
+            <a:r>
+              <a:t>课程定位以 [syllabus.md](../../course/syllabus.md) 与 [备课规划.md](../备课规划.md) 第 5 课段为准。</a:t>
             </a:r>
           </a:p>
           <a:p xmlns:a="http://schemas.openxmlformats.org/drawingml/2006/main">
@@ -473,47 +473,7 @@
           </a:p>
           <a:p xmlns:a="http://schemas.openxmlformats.org/drawingml/2006/main">
             <a:r>
-              <a:t>来源与边界：</a:t>
-            </a:r>
-          </a:p>
-          <a:p xmlns:a="http://schemas.openxmlformats.org/drawingml/2006/main">
-            <a:r>
-              <a:t>课程定位以 [syllabus.md](../../course/syllabus.md) 与 [备课规划.md](../备课规划.md) 第 5 课段为准。</a:t>
-            </a:r>
-          </a:p>
-          <a:p xmlns:a="http://schemas.openxmlformats.org/drawingml/2006/main">
-            <a:r>
-              <a:t/>
-            </a:r>
-          </a:p>
-          <a:p xmlns:a="http://schemas.openxmlformats.org/drawingml/2006/main">
-            <a:r>
-              <a:t>---</a:t>
-            </a:r>
-          </a:p>
-          <a:p xmlns:a="http://schemas.openxmlformats.org/drawingml/2006/main">
-            <a:r>
-              <a:t/>
-            </a:r>
-          </a:p>
-          <a:p xmlns:a="http://schemas.openxmlformats.org/drawingml/2006/main">
-            <a:r>
-              <a:t>[Sources]</a:t>
-            </a:r>
-          </a:p>
-          <a:p xmlns:a="http://schemas.openxmlformats.org/drawingml/2006/main">
-            <a:r>
-              <a:t/>
-            </a:r>
-          </a:p>
-          <a:p xmlns:a="http://schemas.openxmlformats.org/drawingml/2006/main">
-            <a:r>
-              <a:t>- 本课 handout.md 与 slides.md</a:t>
-            </a:r>
-          </a:p>
-          <a:p xmlns:a="http://schemas.openxmlformats.org/drawingml/2006/main">
-            <a:r>
-              <a:t/>
+              <a:t>本课 handout.md、judgment-task.md；../../course/judgment-path.md。</a:t>
             </a:r>
           </a:p>
           <a:p xmlns:a="http://schemas.openxmlformats.org/drawingml/2006/main">
@@ -598,7 +558,12 @@
           </a:p>
           <a:p xmlns:a="http://schemas.openxmlformats.org/drawingml/2006/main">
             <a:r>
-              <a:t>讲义位置：本课讲义；见逐页母稿映射表</a:t>
+              <a:t>讲述与校准：</a:t>
+            </a:r>
+          </a:p>
+          <a:p xmlns:a="http://schemas.openxmlformats.org/drawingml/2006/main">
+            <a:r>
+              <a:t>研究空白候选不直接进入问题门，要先经过三步检验。真实性检验用窄检索（沿用第 3 课检索式构造方法），记录检索式、库、日期和命中数。重要性来自空白在论证链上的位置，不是因为它"新"。可行性判断课程周期内能否最小验证——如果不能，它可能是真实空白但不是本课项目可做的空白。通过三步检验的候选，进入问题门材料的"研究空白候选"清单。</a:t>
             </a:r>
           </a:p>
           <a:p xmlns:a="http://schemas.openxmlformats.org/drawingml/2006/main">
@@ -608,12 +573,12 @@
           </a:p>
           <a:p xmlns:a="http://schemas.openxmlformats.org/drawingml/2006/main">
             <a:r>
-              <a:t>屏显核对：</a:t>
-            </a:r>
-          </a:p>
-          <a:p xmlns:a="http://schemas.openxmlformats.org/drawingml/2006/main">
-            <a:r>
-              <a:t>研究空白候选 → 三步检验 → 候选题池 → 问题门材料</a:t>
+              <a:t>学生动作：</a:t>
+            </a:r>
+          </a:p>
+          <a:p xmlns:a="http://schemas.openxmlformats.org/drawingml/2006/main">
+            <a:r>
+              <a:t>让学生用自己的一个空白候选，口头尝试三步检验。哪一步它最可能不通过？</a:t>
             </a:r>
           </a:p>
           <a:p xmlns:a="http://schemas.openxmlformats.org/drawingml/2006/main">
@@ -623,17 +588,7 @@
           </a:p>
           <a:p xmlns:a="http://schemas.openxmlformats.org/drawingml/2006/main">
             <a:r>
-              <a:t>1. **真实性检验**：执行窄检索，确认不是"我没找到"而是"确实没有可直接对应的核验材料"。记录检索式、库、日期、命中数。</a:t>
-            </a:r>
-          </a:p>
-          <a:p xmlns:a="http://schemas.openxmlformats.org/drawingml/2006/main">
-            <a:r>
-              <a:t>2. **重要性检验**：这个空白不被回答，当前证据地图的哪条主张无法成立，或哪个机制假设无法被检验？</a:t>
-            </a:r>
-          </a:p>
-          <a:p xmlns:a="http://schemas.openxmlformats.org/drawingml/2006/main">
-            <a:r>
-              <a:t>3. **可行性检验**：课程周期内，是否能设计一个最小实验、最小对照或最小分析来部分回答它？</a:t>
+              <a:t>课堂安排：按本稿下方 90 分钟教学路由安排；此页不另占独立时段。</a:t>
             </a:r>
           </a:p>
           <a:p xmlns:a="http://schemas.openxmlformats.org/drawingml/2006/main">
@@ -643,7 +598,12 @@
           </a:p>
           <a:p xmlns:a="http://schemas.openxmlformats.org/drawingml/2006/main">
             <a:r>
-              <a:t>通过三步 → 进入候选题池 → 第 6 课四维比较筛选、第一性原理推导为可证伪命题</a:t>
+              <a:t>[Sources]</a:t>
+            </a:r>
+          </a:p>
+          <a:p xmlns:a="http://schemas.openxmlformats.org/drawingml/2006/main">
+            <a:r>
+              <a:t>讲义 §四·3 三步检验；Qian, *How to Look for Ideas in CS Research*（课堂案例，"表格空位"不自动证明问题重要或真实）。</a:t>
             </a:r>
           </a:p>
           <a:p xmlns:a="http://schemas.openxmlformats.org/drawingml/2006/main">
@@ -653,77 +613,7 @@
           </a:p>
           <a:p xmlns:a="http://schemas.openxmlformats.org/drawingml/2006/main">
             <a:r>
-              <a:t>教师讲述：</a:t>
-            </a:r>
-          </a:p>
-          <a:p xmlns:a="http://schemas.openxmlformats.org/drawingml/2006/main">
-            <a:r>
-              <a:t>研究空白候选不直接进入问题门，要先经过三步检验。真实性检验用窄检索（沿用第 3 课检索式构造方法），记录检索式、库、日期和命中数。重要性来自空白在论证链上的位置，不是因为它"新"。可行性判断课程周期内能否最小验证——如果不能，它可能是真实空白但不是本课项目可做的空白。通过三步检验的候选，进入问题门材料的"研究空白候选"清单。</a:t>
-            </a:r>
-          </a:p>
-          <a:p xmlns:a="http://schemas.openxmlformats.org/drawingml/2006/main">
-            <a:r>
-              <a:t/>
-            </a:r>
-          </a:p>
-          <a:p xmlns:a="http://schemas.openxmlformats.org/drawingml/2006/main">
-            <a:r>
-              <a:t>学生动作：</a:t>
-            </a:r>
-          </a:p>
-          <a:p xmlns:a="http://schemas.openxmlformats.org/drawingml/2006/main">
-            <a:r>
-              <a:t>让学生用自己的一个空白候选，口头尝试三步检验。哪一步它最可能不通过？</a:t>
-            </a:r>
-          </a:p>
-          <a:p xmlns:a="http://schemas.openxmlformats.org/drawingml/2006/main">
-            <a:r>
-              <a:t/>
-            </a:r>
-          </a:p>
-          <a:p xmlns:a="http://schemas.openxmlformats.org/drawingml/2006/main">
-            <a:r>
-              <a:t>来源与边界：</a:t>
-            </a:r>
-          </a:p>
-          <a:p xmlns:a="http://schemas.openxmlformats.org/drawingml/2006/main">
-            <a:r>
-              <a:t>讲义 §四·3 三步检验；Qian, *How to Look for Ideas in CS Research*（课堂案例，"表格空位"不自动证明问题重要或真实）。</a:t>
-            </a:r>
-          </a:p>
-          <a:p xmlns:a="http://schemas.openxmlformats.org/drawingml/2006/main">
-            <a:r>
-              <a:t/>
-            </a:r>
-          </a:p>
-          <a:p xmlns:a="http://schemas.openxmlformats.org/drawingml/2006/main">
-            <a:r>
-              <a:t>---</a:t>
-            </a:r>
-          </a:p>
-          <a:p xmlns:a="http://schemas.openxmlformats.org/drawingml/2006/main">
-            <a:r>
-              <a:t/>
-            </a:r>
-          </a:p>
-          <a:p xmlns:a="http://schemas.openxmlformats.org/drawingml/2006/main">
-            <a:r>
-              <a:t>[Sources]</a:t>
-            </a:r>
-          </a:p>
-          <a:p xmlns:a="http://schemas.openxmlformats.org/drawingml/2006/main">
-            <a:r>
-              <a:t/>
-            </a:r>
-          </a:p>
-          <a:p xmlns:a="http://schemas.openxmlformats.org/drawingml/2006/main">
-            <a:r>
-              <a:t>- 本课 handout.md 与 slides.md</a:t>
-            </a:r>
-          </a:p>
-          <a:p xmlns:a="http://schemas.openxmlformats.org/drawingml/2006/main">
-            <a:r>
-              <a:t/>
+              <a:t>本课 handout.md、judgment-task.md；../../course/judgment-path.md。</a:t>
             </a:r>
           </a:p>
           <a:p xmlns:a="http://schemas.openxmlformats.org/drawingml/2006/main">
@@ -808,7 +698,12 @@
           </a:p>
           <a:p xmlns:a="http://schemas.openxmlformats.org/drawingml/2006/main">
             <a:r>
-              <a:t>讲义位置：本课讲义；见逐页母稿映射表</a:t>
+              <a:t>讲述与校准：</a:t>
+            </a:r>
+          </a:p>
+          <a:p xmlns:a="http://schemas.openxmlformats.org/drawingml/2006/main">
+            <a:r>
+              <a:t>不是所有"还没人做过"都算研究空白。表述差异要回到操作定义判断；范围差异不是冲突而是不可比；工程未做要回到机制层面判断是否只是工程任务；新但不重要要有机制假设更新，否则只是增量。这一页防止学生把表述换新或工程未做误判为研究空白。</a:t>
             </a:r>
           </a:p>
           <a:p xmlns:a="http://schemas.openxmlformats.org/drawingml/2006/main">
@@ -818,12 +713,12 @@
           </a:p>
           <a:p xmlns:a="http://schemas.openxmlformats.org/drawingml/2006/main">
             <a:r>
-              <a:t>屏显核对：</a:t>
-            </a:r>
-          </a:p>
-          <a:p xmlns:a="http://schemas.openxmlformats.org/drawingml/2006/main">
-            <a:r>
-              <a:t>四种"看似空白但不是"：</a:t>
+              <a:t>学生动作：</a:t>
+            </a:r>
+          </a:p>
+          <a:p xmlns:a="http://schemas.openxmlformats.org/drawingml/2006/main">
+            <a:r>
+              <a:t>让学生举一个"看似空白但实际不是"的例子。</a:t>
             </a:r>
           </a:p>
           <a:p xmlns:a="http://schemas.openxmlformats.org/drawingml/2006/main">
@@ -833,22 +728,7 @@
           </a:p>
           <a:p xmlns:a="http://schemas.openxmlformats.org/drawingml/2006/main">
             <a:r>
-              <a:t>- **表述差异**：两篇用不同术语描述同一机制 → 回到操作定义判断</a:t>
-            </a:r>
-          </a:p>
-          <a:p xmlns:a="http://schemas.openxmlformats.org/drawingml/2006/main">
-            <a:r>
-              <a:t>- **范围差异**：限定于不同数据集，结论不可比 → 不是冲突，是不可比</a:t>
-            </a:r>
-          </a:p>
-          <a:p xmlns:a="http://schemas.openxmlformats.org/drawingml/2006/main">
-            <a:r>
-              <a:t>- **工程未做**：某产品/配置还没被评测 → 可能只是工程任务，回到机制层面</a:t>
-            </a:r>
-          </a:p>
-          <a:p xmlns:a="http://schemas.openxmlformats.org/drawingml/2006/main">
-            <a:r>
-              <a:t>- **新但不重要**：换数据集或换模型再跑一遍 → 没有机制假设更新，只是增量</a:t>
+              <a:t>课堂安排：按本稿下方 90 分钟教学路由安排；此页不另占独立时段。</a:t>
             </a:r>
           </a:p>
           <a:p xmlns:a="http://schemas.openxmlformats.org/drawingml/2006/main">
@@ -858,7 +738,12 @@
           </a:p>
           <a:p xmlns:a="http://schemas.openxmlformats.org/drawingml/2006/main">
             <a:r>
-              <a:t>&gt; 真实空白要能被表述为：已有证据不能回答的具体问题。</a:t>
+              <a:t>[Sources]</a:t>
+            </a:r>
+          </a:p>
+          <a:p xmlns:a="http://schemas.openxmlformats.org/drawingml/2006/main">
+            <a:r>
+              <a:t>讲义 §四·5 不是空白的情况。</a:t>
             </a:r>
           </a:p>
           <a:p xmlns:a="http://schemas.openxmlformats.org/drawingml/2006/main">
@@ -868,77 +753,7 @@
           </a:p>
           <a:p xmlns:a="http://schemas.openxmlformats.org/drawingml/2006/main">
             <a:r>
-              <a:t>教师讲述：</a:t>
-            </a:r>
-          </a:p>
-          <a:p xmlns:a="http://schemas.openxmlformats.org/drawingml/2006/main">
-            <a:r>
-              <a:t>不是所有"还没人做过"都算研究空白。表述差异要回到操作定义判断；范围差异不是冲突而是不可比；工程未做要回到机制层面判断是否只是工程任务；新但不重要要有机制假设更新，否则只是增量。这一页防止学生把表述换新或工程未做误判为研究空白。</a:t>
-            </a:r>
-          </a:p>
-          <a:p xmlns:a="http://schemas.openxmlformats.org/drawingml/2006/main">
-            <a:r>
-              <a:t/>
-            </a:r>
-          </a:p>
-          <a:p xmlns:a="http://schemas.openxmlformats.org/drawingml/2006/main">
-            <a:r>
-              <a:t>学生动作：</a:t>
-            </a:r>
-          </a:p>
-          <a:p xmlns:a="http://schemas.openxmlformats.org/drawingml/2006/main">
-            <a:r>
-              <a:t>让学生举一个"看似空白但实际不是"的例子。</a:t>
-            </a:r>
-          </a:p>
-          <a:p xmlns:a="http://schemas.openxmlformats.org/drawingml/2006/main">
-            <a:r>
-              <a:t/>
-            </a:r>
-          </a:p>
-          <a:p xmlns:a="http://schemas.openxmlformats.org/drawingml/2006/main">
-            <a:r>
-              <a:t>来源与边界：</a:t>
-            </a:r>
-          </a:p>
-          <a:p xmlns:a="http://schemas.openxmlformats.org/drawingml/2006/main">
-            <a:r>
-              <a:t>讲义 §四·5 不是空白的情况。</a:t>
-            </a:r>
-          </a:p>
-          <a:p xmlns:a="http://schemas.openxmlformats.org/drawingml/2006/main">
-            <a:r>
-              <a:t/>
-            </a:r>
-          </a:p>
-          <a:p xmlns:a="http://schemas.openxmlformats.org/drawingml/2006/main">
-            <a:r>
-              <a:t>---</a:t>
-            </a:r>
-          </a:p>
-          <a:p xmlns:a="http://schemas.openxmlformats.org/drawingml/2006/main">
-            <a:r>
-              <a:t/>
-            </a:r>
-          </a:p>
-          <a:p xmlns:a="http://schemas.openxmlformats.org/drawingml/2006/main">
-            <a:r>
-              <a:t>[Sources]</a:t>
-            </a:r>
-          </a:p>
-          <a:p xmlns:a="http://schemas.openxmlformats.org/drawingml/2006/main">
-            <a:r>
-              <a:t/>
-            </a:r>
-          </a:p>
-          <a:p xmlns:a="http://schemas.openxmlformats.org/drawingml/2006/main">
-            <a:r>
-              <a:t>- 本课 handout.md 与 slides.md</a:t>
-            </a:r>
-          </a:p>
-          <a:p xmlns:a="http://schemas.openxmlformats.org/drawingml/2006/main">
-            <a:r>
-              <a:t/>
+              <a:t>本课 handout.md、judgment-task.md；../../course/judgment-path.md。</a:t>
             </a:r>
           </a:p>
           <a:p xmlns:a="http://schemas.openxmlformats.org/drawingml/2006/main">
@@ -1023,7 +838,12 @@
           </a:p>
           <a:p xmlns:a="http://schemas.openxmlformats.org/drawingml/2006/main">
             <a:r>
-              <a:t>讲义位置：本课讲义；见逐页母稿映射表</a:t>
+              <a:t>讲述与校准：</a:t>
+            </a:r>
+          </a:p>
+          <a:p xmlns:a="http://schemas.openxmlformats.org/drawingml/2006/main">
+            <a:r>
+              <a:t>核验清单逐条讲，不留作"课后自学"。AI 可以在综述阶段抽取共同主张、聚类子问题、提示冲突或缺角、草拟段落，但所有产出只能作为草稿或线索。AI 不能替代研究者判断哪条主张属于主证据，不能自动判定冲突是否实质，不能把"我没找到"升级为"领域空白"，不能给出未经核验的引文和页码。状态标签是证据地图的字段，不是课后才学。</a:t>
             </a:r>
           </a:p>
           <a:p xmlns:a="http://schemas.openxmlformats.org/drawingml/2006/main">
@@ -1033,12 +853,12 @@
           </a:p>
           <a:p xmlns:a="http://schemas.openxmlformats.org/drawingml/2006/main">
             <a:r>
-              <a:t>屏显核对：</a:t>
-            </a:r>
-          </a:p>
-          <a:p xmlns:a="http://schemas.openxmlformats.org/drawingml/2006/main">
-            <a:r>
-              <a:t>对 AI 给出的综述草稿、矩阵草稿或空白候选，至少检查：</a:t>
+              <a:t>学生动作：</a:t>
+            </a:r>
+          </a:p>
+          <a:p xmlns:a="http://schemas.openxmlformats.org/drawingml/2006/main">
+            <a:r>
+              <a:t>无。直接进入演示。</a:t>
             </a:r>
           </a:p>
           <a:p xmlns:a="http://schemas.openxmlformats.org/drawingml/2006/main">
@@ -1048,27 +868,7 @@
           </a:p>
           <a:p xmlns:a="http://schemas.openxmlformats.org/drawingml/2006/main">
             <a:r>
-              <a:t>1. 每条引文是否真实存在？题名/作者/年份/DOI 与原文一致？</a:t>
-            </a:r>
-          </a:p>
-          <a:p xmlns:a="http://schemas.openxmlformats.org/drawingml/2006/main">
-            <a:r>
-              <a:t>2. AI 归纳的"共同主张"是否真的出现在每条引用的原文中，还是从其中一篇外推？</a:t>
-            </a:r>
-          </a:p>
-          <a:p xmlns:a="http://schemas.openxmlformats.org/drawingml/2006/main">
-            <a:r>
-              <a:t>3. AI 标注的"冲突"是否来自原文不同结论，还是任务设置不同导致的表面分歧？</a:t>
-            </a:r>
-          </a:p>
-          <a:p xmlns:a="http://schemas.openxmlformats.org/drawingml/2006/main">
-            <a:r>
-              <a:t>4. AI 提示的"缺角"是否经过窄检索确认？</a:t>
-            </a:r>
-          </a:p>
-          <a:p xmlns:a="http://schemas.openxmlformats.org/drawingml/2006/main">
-            <a:r>
-              <a:t>5. AI 草拟的综述段落是否把模型推断写成原文结论，是否丢失限定条件？</a:t>
+              <a:t>课堂安排：按本稿下方 90 分钟教学路由安排；此页不另占独立时段。</a:t>
             </a:r>
           </a:p>
           <a:p xmlns:a="http://schemas.openxmlformats.org/drawingml/2006/main">
@@ -1078,7 +878,12 @@
           </a:p>
           <a:p xmlns:a="http://schemas.openxmlformats.org/drawingml/2006/main">
             <a:r>
-              <a:t>未完成前 → AI 产出保留在探索线索区，不进入证据地图主格或问题门材料。</a:t>
+              <a:t>[Sources]</a:t>
+            </a:r>
+          </a:p>
+          <a:p xmlns:a="http://schemas.openxmlformats.org/drawingml/2006/main">
+            <a:r>
+              <a:t>讲义 §五 AI 辅助归纳的核验；AI 输出不构成证据（[AGENTS.md](../../AGENTS.md)）；沿用第 3 课来源审计清单。</a:t>
             </a:r>
           </a:p>
           <a:p xmlns:a="http://schemas.openxmlformats.org/drawingml/2006/main">
@@ -1088,77 +893,7 @@
           </a:p>
           <a:p xmlns:a="http://schemas.openxmlformats.org/drawingml/2006/main">
             <a:r>
-              <a:t>教师讲述：</a:t>
-            </a:r>
-          </a:p>
-          <a:p xmlns:a="http://schemas.openxmlformats.org/drawingml/2006/main">
-            <a:r>
-              <a:t>核验清单逐条讲，不留作"课后自学"。AI 可以在综述阶段抽取共同主张、聚类子问题、提示冲突或缺角、草拟段落，但所有产出只能作为草稿或线索。AI 不能替代研究者判断哪条主张属于主证据，不能自动判定冲突是否实质，不能把"我没找到"升级为"领域空白"，不能给出未经核验的引文和页码。状态标签是证据地图的字段，不是课后才学。</a:t>
-            </a:r>
-          </a:p>
-          <a:p xmlns:a="http://schemas.openxmlformats.org/drawingml/2006/main">
-            <a:r>
-              <a:t/>
-            </a:r>
-          </a:p>
-          <a:p xmlns:a="http://schemas.openxmlformats.org/drawingml/2006/main">
-            <a:r>
-              <a:t>学生动作：</a:t>
-            </a:r>
-          </a:p>
-          <a:p xmlns:a="http://schemas.openxmlformats.org/drawingml/2006/main">
-            <a:r>
-              <a:t>无。直接进入演示。</a:t>
-            </a:r>
-          </a:p>
-          <a:p xmlns:a="http://schemas.openxmlformats.org/drawingml/2006/main">
-            <a:r>
-              <a:t/>
-            </a:r>
-          </a:p>
-          <a:p xmlns:a="http://schemas.openxmlformats.org/drawingml/2006/main">
-            <a:r>
-              <a:t>来源与边界：</a:t>
-            </a:r>
-          </a:p>
-          <a:p xmlns:a="http://schemas.openxmlformats.org/drawingml/2006/main">
-            <a:r>
-              <a:t>讲义 §五 AI 辅助归纳的核验；AI 输出不构成证据（[AGENTS.md](../../AGENTS.md)）；沿用第 3 课来源审计清单。</a:t>
-            </a:r>
-          </a:p>
-          <a:p xmlns:a="http://schemas.openxmlformats.org/drawingml/2006/main">
-            <a:r>
-              <a:t/>
-            </a:r>
-          </a:p>
-          <a:p xmlns:a="http://schemas.openxmlformats.org/drawingml/2006/main">
-            <a:r>
-              <a:t>---</a:t>
-            </a:r>
-          </a:p>
-          <a:p xmlns:a="http://schemas.openxmlformats.org/drawingml/2006/main">
-            <a:r>
-              <a:t/>
-            </a:r>
-          </a:p>
-          <a:p xmlns:a="http://schemas.openxmlformats.org/drawingml/2006/main">
-            <a:r>
-              <a:t>[Sources]</a:t>
-            </a:r>
-          </a:p>
-          <a:p xmlns:a="http://schemas.openxmlformats.org/drawingml/2006/main">
-            <a:r>
-              <a:t/>
-            </a:r>
-          </a:p>
-          <a:p xmlns:a="http://schemas.openxmlformats.org/drawingml/2006/main">
-            <a:r>
-              <a:t>- 本课 handout.md 与 slides.md</a:t>
-            </a:r>
-          </a:p>
-          <a:p xmlns:a="http://schemas.openxmlformats.org/drawingml/2006/main">
-            <a:r>
-              <a:t/>
+              <a:t>本课 handout.md、judgment-task.md；../../course/judgment-path.md。</a:t>
             </a:r>
           </a:p>
           <a:p xmlns:a="http://schemas.openxmlformats.org/drawingml/2006/main">
@@ -1243,7 +978,12 @@
           </a:p>
           <a:p xmlns:a="http://schemas.openxmlformats.org/drawingml/2006/main">
             <a:r>
-              <a:t>讲义位置：本课讲义；见逐页母稿映射表</a:t>
+              <a:t>讲述与校准：</a:t>
+            </a:r>
+          </a:p>
+          <a:p xmlns:a="http://schemas.openxmlformats.org/drawingml/2006/main">
+            <a:r>
+              <a:t>五条均已完成 claim-level 核验，但来自不同设置。演示重点是按子问题分配角色，并携带 caveat，不把跨论文结果合成效应量。</a:t>
             </a:r>
           </a:p>
           <a:p xmlns:a="http://schemas.openxmlformats.org/drawingml/2006/main">
@@ -1253,12 +993,12 @@
           </a:p>
           <a:p xmlns:a="http://schemas.openxmlformats.org/drawingml/2006/main">
             <a:r>
-              <a:t>屏显核对：</a:t>
-            </a:r>
-          </a:p>
-          <a:p xmlns:a="http://schemas.openxmlformats.org/drawingml/2006/main">
-            <a:r>
-              <a:t>公开论文主张｜不含博士生未发表内容</a:t>
+              <a:t>学生动作：</a:t>
+            </a:r>
+          </a:p>
+          <a:p xmlns:a="http://schemas.openxmlformats.org/drawingml/2006/main">
+            <a:r>
+              <a:t>请学生判断：C16 是 C02 的直接冲突，还是对“可解释→可控制”推断的限制？</a:t>
             </a:r>
           </a:p>
           <a:p xmlns:a="http://schemas.openxmlformats.org/drawingml/2006/main">
@@ -1268,7 +1008,7 @@
           </a:p>
           <a:p xmlns:a="http://schemas.openxmlformats.org/drawingml/2006/main">
             <a:r>
-              <a:t>问题：SAE 是否比 PCA 更稀疏干预 IOI；何种证据才支持因果忠实？</a:t>
+              <a:t>课堂安排：按本稿下方 90 分钟教学路由安排；此页不另占独立时段。</a:t>
             </a:r>
           </a:p>
           <a:p xmlns:a="http://schemas.openxmlformats.org/drawingml/2006/main">
@@ -1278,37 +1018,12 @@
           </a:p>
           <a:p xmlns:a="http://schemas.openxmlformats.org/drawingml/2006/main">
             <a:r>
-              <a:t>| 证据 | 子问题 | 角色 | 边界 |</a:t>
-            </a:r>
-          </a:p>
-          <a:p xmlns:a="http://schemas.openxmlformats.org/drawingml/2006/main">
-            <a:r>
-              <a:t>| --- | --- | --- | --- |</a:t>
-            </a:r>
-          </a:p>
-          <a:p xmlns:a="http://schemas.openxmlformats.org/drawingml/2006/main">
-            <a:r>
-              <a:t>| C02 | 干预效率 | 直接主证据 | Pythia-410M / IOI / layer 11 |</a:t>
-            </a:r>
-          </a:p>
-          <a:p xmlns:a="http://schemas.openxmlformats.org/drawingml/2006/main">
-            <a:r>
-              <a:t>| C16 | 稀疏控制 | 限制 | GPT-2 Small；非同设置反驳 |</a:t>
-            </a:r>
-          </a:p>
-          <a:p xmlns:a="http://schemas.openxmlformats.org/drawingml/2006/main">
-            <a:r>
-              <a:t>| C31 | patching 效度 | 效度威胁 | 一般子空间；含成功案例 |</a:t>
-            </a:r>
-          </a:p>
-          <a:p xmlns:a="http://schemas.openxmlformats.org/drawingml/2006/main">
-            <a:r>
-              <a:t>| C18 | 评价指标 | 补充 | 不单独证明忠实性 |</a:t>
-            </a:r>
-          </a:p>
-          <a:p xmlns:a="http://schemas.openxmlformats.org/drawingml/2006/main">
-            <a:r>
-              <a:t>| C05 | 下游 circuit | 外部支持 | 不同任务/模型 |</a:t>
+              <a:t>[Sources]</a:t>
+            </a:r>
+          </a:p>
+          <a:p xmlns:a="http://schemas.openxmlformats.org/drawingml/2006/main">
+            <a:r>
+              <a:t>[mi-evidence-map-demo.md](./mi-evidence-map-demo.md)；MI-C02/C05/C16/C18/C31 原文位置见 [MI trace](../lesson-03/mi-search-trace-demo.md) §5。</a:t>
             </a:r>
           </a:p>
           <a:p xmlns:a="http://schemas.openxmlformats.org/drawingml/2006/main">
@@ -1318,77 +1033,7 @@
           </a:p>
           <a:p xmlns:a="http://schemas.openxmlformats.org/drawingml/2006/main">
             <a:r>
-              <a:t>教师讲述：</a:t>
-            </a:r>
-          </a:p>
-          <a:p xmlns:a="http://schemas.openxmlformats.org/drawingml/2006/main">
-            <a:r>
-              <a:t>五条均已完成 claim-level 核验，但来自不同设置。演示重点是按子问题分配角色，并携带 caveat，不把跨论文结果合成效应量。</a:t>
-            </a:r>
-          </a:p>
-          <a:p xmlns:a="http://schemas.openxmlformats.org/drawingml/2006/main">
-            <a:r>
-              <a:t/>
-            </a:r>
-          </a:p>
-          <a:p xmlns:a="http://schemas.openxmlformats.org/drawingml/2006/main">
-            <a:r>
-              <a:t>学生动作：</a:t>
-            </a:r>
-          </a:p>
-          <a:p xmlns:a="http://schemas.openxmlformats.org/drawingml/2006/main">
-            <a:r>
-              <a:t>请学生判断：C16 是 C02 的直接冲突，还是对“可解释→可控制”推断的限制？</a:t>
-            </a:r>
-          </a:p>
-          <a:p xmlns:a="http://schemas.openxmlformats.org/drawingml/2006/main">
-            <a:r>
-              <a:t/>
-            </a:r>
-          </a:p>
-          <a:p xmlns:a="http://schemas.openxmlformats.org/drawingml/2006/main">
-            <a:r>
-              <a:t>来源与边界：</a:t>
-            </a:r>
-          </a:p>
-          <a:p xmlns:a="http://schemas.openxmlformats.org/drawingml/2006/main">
-            <a:r>
-              <a:t>[mi-evidence-map-demo.md](./mi-evidence-map-demo.md)；MI-C02/C05/C16/C18/C31 原文位置见 [MI trace](../lesson-03/mi-search-trace-demo.md) §5。</a:t>
-            </a:r>
-          </a:p>
-          <a:p xmlns:a="http://schemas.openxmlformats.org/drawingml/2006/main">
-            <a:r>
-              <a:t/>
-            </a:r>
-          </a:p>
-          <a:p xmlns:a="http://schemas.openxmlformats.org/drawingml/2006/main">
-            <a:r>
-              <a:t>---</a:t>
-            </a:r>
-          </a:p>
-          <a:p xmlns:a="http://schemas.openxmlformats.org/drawingml/2006/main">
-            <a:r>
-              <a:t/>
-            </a:r>
-          </a:p>
-          <a:p xmlns:a="http://schemas.openxmlformats.org/drawingml/2006/main">
-            <a:r>
-              <a:t>[Sources]</a:t>
-            </a:r>
-          </a:p>
-          <a:p xmlns:a="http://schemas.openxmlformats.org/drawingml/2006/main">
-            <a:r>
-              <a:t/>
-            </a:r>
-          </a:p>
-          <a:p xmlns:a="http://schemas.openxmlformats.org/drawingml/2006/main">
-            <a:r>
-              <a:t>- 本课 handout.md 与 slides.md</a:t>
-            </a:r>
-          </a:p>
-          <a:p xmlns:a="http://schemas.openxmlformats.org/drawingml/2006/main">
-            <a:r>
-              <a:t/>
+              <a:t>本课 handout.md、judgment-task.md；../../course/judgment-path.md。</a:t>
             </a:r>
           </a:p>
           <a:p xmlns:a="http://schemas.openxmlformats.org/drawingml/2006/main">
@@ -1473,7 +1118,12 @@
           </a:p>
           <a:p xmlns:a="http://schemas.openxmlformats.org/drawingml/2006/main">
             <a:r>
-              <a:t>讲义位置：本课讲义；见逐页母稿映射表</a:t>
+              <a:t>讲述与校准：</a:t>
+            </a:r>
+          </a:p>
+          <a:p xmlns:a="http://schemas.openxmlformats.org/drawingml/2006/main">
+            <a:r>
+              <a:t>强调支持、限制和效度威胁可同时成立。C16/C31 不抹掉 C02 的观察结果，而是限制它能推出的结论。</a:t>
             </a:r>
           </a:p>
           <a:p xmlns:a="http://schemas.openxmlformats.org/drawingml/2006/main">
@@ -1483,12 +1133,12 @@
           </a:p>
           <a:p xmlns:a="http://schemas.openxmlformats.org/drawingml/2006/main">
             <a:r>
-              <a:t>屏显核对：</a:t>
-            </a:r>
-          </a:p>
-          <a:p xmlns:a="http://schemas.openxmlformats.org/drawingml/2006/main">
-            <a:r>
-              <a:t>![SAE 因果有效性证据地图](assets/mi-causal-evidence-map.svg)</a:t>
+              <a:t>学生动作：</a:t>
+            </a:r>
+          </a:p>
+          <a:p xmlns:a="http://schemas.openxmlformats.org/drawingml/2006/main">
+            <a:r>
+              <a:t>让学生指出：哪一项缺失证据最直接对应 C31 的替代解释？</a:t>
             </a:r>
           </a:p>
           <a:p xmlns:a="http://schemas.openxmlformats.org/drawingml/2006/main">
@@ -1498,32 +1148,7 @@
           </a:p>
           <a:p xmlns:a="http://schemas.openxmlformats.org/drawingml/2006/main">
             <a:r>
-              <a:t>当前判断：</a:t>
-            </a:r>
-          </a:p>
-          <a:p xmlns:a="http://schemas.openxmlformats.org/drawingml/2006/main">
-            <a:r>
-              <a:t>- 支持：C02 足以启动同设置最小复现</a:t>
-            </a:r>
-          </a:p>
-          <a:p xmlns:a="http://schemas.openxmlformats.org/drawingml/2006/main">
-            <a:r>
-              <a:t>- 限制：C16 区分可解释与可控制</a:t>
-            </a:r>
-          </a:p>
-          <a:p xmlns:a="http://schemas.openxmlformats.org/drawingml/2006/main">
-            <a:r>
-              <a:t>- 效度威胁：C31 区分 patching success 与 causal faithfulness</a:t>
-            </a:r>
-          </a:p>
-          <a:p xmlns:a="http://schemas.openxmlformats.org/drawingml/2006/main">
-            <a:r>
-              <a:t>- 外部支持：C05/C18 说明 held-out circuit 与多指标评价可行</a:t>
-            </a:r>
-          </a:p>
-          <a:p xmlns:a="http://schemas.openxmlformats.org/drawingml/2006/main">
-            <a:r>
-              <a:t>- 空白：同设置重构敏感性、随机/监督方向、held-out、dormant-pathway 排除</a:t>
+              <a:t>课堂安排：按本稿下方 90 分钟教学路由安排；此页不另占独立时段。</a:t>
             </a:r>
           </a:p>
           <a:p xmlns:a="http://schemas.openxmlformats.org/drawingml/2006/main">
@@ -1533,12 +1158,12 @@
           </a:p>
           <a:p xmlns:a="http://schemas.openxmlformats.org/drawingml/2006/main">
             <a:r>
-              <a:t>教师讲述：</a:t>
-            </a:r>
-          </a:p>
-          <a:p xmlns:a="http://schemas.openxmlformats.org/drawingml/2006/main">
-            <a:r>
-              <a:t>强调支持、限制和效度威胁可同时成立。C16/C31 不抹掉 C02 的观察结果，而是限制它能推出的结论。</a:t>
+              <a:t>[Sources]</a:t>
+            </a:r>
+          </a:p>
+          <a:p xmlns:a="http://schemas.openxmlformats.org/drawingml/2006/main">
+            <a:r>
+              <a:t>[mi-evidence-map-demo.md](./mi-evidence-map-demo.md)；图源与许可见 [assets/README.md](./assets/README.md)。</a:t>
             </a:r>
           </a:p>
           <a:p xmlns:a="http://schemas.openxmlformats.org/drawingml/2006/main">
@@ -1548,62 +1173,7 @@
           </a:p>
           <a:p xmlns:a="http://schemas.openxmlformats.org/drawingml/2006/main">
             <a:r>
-              <a:t>学生动作：</a:t>
-            </a:r>
-          </a:p>
-          <a:p xmlns:a="http://schemas.openxmlformats.org/drawingml/2006/main">
-            <a:r>
-              <a:t>让学生指出：哪一项缺失证据最直接对应 C31 的替代解释？</a:t>
-            </a:r>
-          </a:p>
-          <a:p xmlns:a="http://schemas.openxmlformats.org/drawingml/2006/main">
-            <a:r>
-              <a:t/>
-            </a:r>
-          </a:p>
-          <a:p xmlns:a="http://schemas.openxmlformats.org/drawingml/2006/main">
-            <a:r>
-              <a:t>来源与边界：</a:t>
-            </a:r>
-          </a:p>
-          <a:p xmlns:a="http://schemas.openxmlformats.org/drawingml/2006/main">
-            <a:r>
-              <a:t>[mi-evidence-map-demo.md](./mi-evidence-map-demo.md)；图源与许可见 [assets/README.md](./assets/README.md)。</a:t>
-            </a:r>
-          </a:p>
-          <a:p xmlns:a="http://schemas.openxmlformats.org/drawingml/2006/main">
-            <a:r>
-              <a:t/>
-            </a:r>
-          </a:p>
-          <a:p xmlns:a="http://schemas.openxmlformats.org/drawingml/2006/main">
-            <a:r>
-              <a:t>---</a:t>
-            </a:r>
-          </a:p>
-          <a:p xmlns:a="http://schemas.openxmlformats.org/drawingml/2006/main">
-            <a:r>
-              <a:t/>
-            </a:r>
-          </a:p>
-          <a:p xmlns:a="http://schemas.openxmlformats.org/drawingml/2006/main">
-            <a:r>
-              <a:t>[Sources]</a:t>
-            </a:r>
-          </a:p>
-          <a:p xmlns:a="http://schemas.openxmlformats.org/drawingml/2006/main">
-            <a:r>
-              <a:t/>
-            </a:r>
-          </a:p>
-          <a:p xmlns:a="http://schemas.openxmlformats.org/drawingml/2006/main">
-            <a:r>
-              <a:t>- 本课 handout.md 与 slides.md</a:t>
-            </a:r>
-          </a:p>
-          <a:p xmlns:a="http://schemas.openxmlformats.org/drawingml/2006/main">
-            <a:r>
-              <a:t/>
+              <a:t>本课 handout.md、judgment-task.md；../../course/judgment-path.md。</a:t>
             </a:r>
           </a:p>
           <a:p xmlns:a="http://schemas.openxmlformats.org/drawingml/2006/main">
@@ -1688,7 +1258,12 @@
           </a:p>
           <a:p xmlns:a="http://schemas.openxmlformats.org/drawingml/2006/main">
             <a:r>
-              <a:t>讲义位置：本课讲义；见逐页母稿映射表</a:t>
+              <a:t>讲述与校准：</a:t>
+            </a:r>
+          </a:p>
+          <a:p xmlns:a="http://schemas.openxmlformats.org/drawingml/2006/main">
+            <a:r>
+              <a:t>逐句检查范围是否随主张移动。尤其不能把 C16/C31 的方法论限制改写成“C02 失败”，也不能把 C05 的外部支持写成同任务复现。</a:t>
             </a:r>
           </a:p>
           <a:p xmlns:a="http://schemas.openxmlformats.org/drawingml/2006/main">
@@ -1698,27 +1273,12 @@
           </a:p>
           <a:p xmlns:a="http://schemas.openxmlformats.org/drawingml/2006/main">
             <a:r>
-              <a:t>屏显核对：</a:t>
-            </a:r>
-          </a:p>
-          <a:p xmlns:a="http://schemas.openxmlformats.org/drawingml/2006/main">
-            <a:r>
-              <a:t>1. 在 Pythia-410M layer 11 的 IOI 设置中，C02 报告 SAE patching 比 PCA 以更少 patch 与更小 edit 达到目标 KL。</a:t>
-            </a:r>
-          </a:p>
-          <a:p xmlns:a="http://schemas.openxmlformats.org/drawingml/2006/main">
-            <a:r>
-              <a:t>2. 该结果直接支持“干预效率”主张，但重构误差与跨任务泛化仍有限制。</a:t>
-            </a:r>
-          </a:p>
-          <a:p xmlns:a="http://schemas.openxmlformats.org/drawingml/2006/main">
-            <a:r>
-              <a:t>3. C16 表明可解释特征未必足够可控制；C31 表明子空间 patching 可能激活 dormant pathway——两者限制因果解释，但不是同设置直接反驳。</a:t>
-            </a:r>
-          </a:p>
-          <a:p xmlns:a="http://schemas.openxmlformats.org/drawingml/2006/main">
-            <a:r>
-              <a:t>4. 因此可启动 SAE-vs-PCA baseline；因果忠实仍需同设置对照、held-out 与正常路径证据，综合状态为 `review`。</a:t>
+              <a:t>学生动作：</a:t>
+            </a:r>
+          </a:p>
+          <a:p xmlns:a="http://schemas.openxmlformats.org/drawingml/2006/main">
+            <a:r>
+              <a:t>让学生指出：哪一句若删掉模型/任务限定，会发生最大程度的过度概括？</a:t>
             </a:r>
           </a:p>
           <a:p xmlns:a="http://schemas.openxmlformats.org/drawingml/2006/main">
@@ -1728,12 +1288,7 @@
           </a:p>
           <a:p xmlns:a="http://schemas.openxmlformats.org/drawingml/2006/main">
             <a:r>
-              <a:t>教师讲述：</a:t>
-            </a:r>
-          </a:p>
-          <a:p xmlns:a="http://schemas.openxmlformats.org/drawingml/2006/main">
-            <a:r>
-              <a:t>逐句检查范围是否随主张移动。尤其不能把 C16/C31 的方法论限制改写成“C02 失败”，也不能把 C05 的外部支持写成同任务复现。</a:t>
+              <a:t>课堂安排：按本稿下方 90 分钟教学路由安排；此页不另占独立时段。</a:t>
             </a:r>
           </a:p>
           <a:p xmlns:a="http://schemas.openxmlformats.org/drawingml/2006/main">
@@ -1743,12 +1298,12 @@
           </a:p>
           <a:p xmlns:a="http://schemas.openxmlformats.org/drawingml/2006/main">
             <a:r>
-              <a:t>学生动作：</a:t>
-            </a:r>
-          </a:p>
-          <a:p xmlns:a="http://schemas.openxmlformats.org/drawingml/2006/main">
-            <a:r>
-              <a:t>让学生指出：哪一句若删掉模型/任务限定，会发生最大程度的过度概括？</a:t>
+              <a:t>[Sources]</a:t>
+            </a:r>
+          </a:p>
+          <a:p xmlns:a="http://schemas.openxmlformats.org/drawingml/2006/main">
+            <a:r>
+              <a:t>[mi-evidence-map-demo.md](./mi-evidence-map-demo.md)；状态判定见 [material-contracts.md](../../references/material-contracts.md)。</a:t>
             </a:r>
           </a:p>
           <a:p xmlns:a="http://schemas.openxmlformats.org/drawingml/2006/main">
@@ -1758,47 +1313,7 @@
           </a:p>
           <a:p xmlns:a="http://schemas.openxmlformats.org/drawingml/2006/main">
             <a:r>
-              <a:t>来源与边界：</a:t>
-            </a:r>
-          </a:p>
-          <a:p xmlns:a="http://schemas.openxmlformats.org/drawingml/2006/main">
-            <a:r>
-              <a:t>[mi-evidence-map-demo.md](./mi-evidence-map-demo.md)；状态判定见 [material-contracts.md](../../references/material-contracts.md)。</a:t>
-            </a:r>
-          </a:p>
-          <a:p xmlns:a="http://schemas.openxmlformats.org/drawingml/2006/main">
-            <a:r>
-              <a:t/>
-            </a:r>
-          </a:p>
-          <a:p xmlns:a="http://schemas.openxmlformats.org/drawingml/2006/main">
-            <a:r>
-              <a:t>---</a:t>
-            </a:r>
-          </a:p>
-          <a:p xmlns:a="http://schemas.openxmlformats.org/drawingml/2006/main">
-            <a:r>
-              <a:t/>
-            </a:r>
-          </a:p>
-          <a:p xmlns:a="http://schemas.openxmlformats.org/drawingml/2006/main">
-            <a:r>
-              <a:t>[Sources]</a:t>
-            </a:r>
-          </a:p>
-          <a:p xmlns:a="http://schemas.openxmlformats.org/drawingml/2006/main">
-            <a:r>
-              <a:t/>
-            </a:r>
-          </a:p>
-          <a:p xmlns:a="http://schemas.openxmlformats.org/drawingml/2006/main">
-            <a:r>
-              <a:t>- 本课 handout.md 与 slides.md</a:t>
-            </a:r>
-          </a:p>
-          <a:p xmlns:a="http://schemas.openxmlformats.org/drawingml/2006/main">
-            <a:r>
-              <a:t/>
+              <a:t>本课 handout.md、judgment-task.md；../../course/judgment-path.md。</a:t>
             </a:r>
           </a:p>
           <a:p xmlns:a="http://schemas.openxmlformats.org/drawingml/2006/main">
@@ -1883,7 +1398,12 @@
           </a:p>
           <a:p xmlns:a="http://schemas.openxmlformats.org/drawingml/2006/main">
             <a:r>
-              <a:t>讲义位置：handout.md §七、贯穿案例：从阅读卡到证据地图</a:t>
+              <a:t>讲述与校准：</a:t>
+            </a:r>
+          </a:p>
+          <a:p xmlns:a="http://schemas.openxmlformats.org/drawingml/2006/main">
+            <a:r>
+              <a:t>不要把自己的误读包装成文献冲突。用本课现有原文定位逐句对照，分开原文结果、未测量项和我们的越界推断。若学生认为“没有验证就是反驳”，追问原文是否真的观察到了相反结果。</a:t>
             </a:r>
           </a:p>
           <a:p xmlns:a="http://schemas.openxmlformats.org/drawingml/2006/main">
@@ -1893,22 +1413,12 @@
           </a:p>
           <a:p xmlns:a="http://schemas.openxmlformats.org/drawingml/2006/main">
             <a:r>
-              <a:t>屏显核对：</a:t>
-            </a:r>
-          </a:p>
-          <a:p xmlns:a="http://schemas.openxmlformats.org/drawingml/2006/main">
-            <a:r>
-              <a:t>原文讨论效率 → 可以支持效率判断</a:t>
-            </a:r>
-          </a:p>
-          <a:p xmlns:a="http://schemas.openxmlformats.org/drawingml/2006/main">
-            <a:r>
-              <a:t>原文未检验 faithfulness → 这项结论仍未获得检验</a:t>
-            </a:r>
-          </a:p>
-          <a:p xmlns:a="http://schemas.openxmlformats.org/drawingml/2006/main">
-            <a:r>
-              <a:t>把效率写成 faithfulness → 我们的推断越界</a:t>
+              <a:t>学生动作：</a:t>
+            </a:r>
+          </a:p>
+          <a:p xmlns:a="http://schemas.openxmlformats.org/drawingml/2006/main">
+            <a:r>
+              <a:t>把原误写句移到局限或待验证栏，保留原文位置。</a:t>
             </a:r>
           </a:p>
           <a:p xmlns:a="http://schemas.openxmlformats.org/drawingml/2006/main">
@@ -1918,7 +1428,7 @@
           </a:p>
           <a:p xmlns:a="http://schemas.openxmlformats.org/drawingml/2006/main">
             <a:r>
-              <a:t>只有针对可比命题的相反证据，才进入冲突格。</a:t>
+              <a:t>课堂安排：按本稿下方 90 分钟教学路由安排；此页不另占独立时段。</a:t>
             </a:r>
           </a:p>
           <a:p xmlns:a="http://schemas.openxmlformats.org/drawingml/2006/main">
@@ -1928,12 +1438,12 @@
           </a:p>
           <a:p xmlns:a="http://schemas.openxmlformats.org/drawingml/2006/main">
             <a:r>
-              <a:t>教师讲述：</a:t>
-            </a:r>
-          </a:p>
-          <a:p xmlns:a="http://schemas.openxmlformats.org/drawingml/2006/main">
-            <a:r>
-              <a:t>不要把自己的误读包装成文献冲突。用本课现有原文定位逐句对照，分开原文结果、未测量项和我们的越界推断。若学生认为“没有验证就是反驳”，追问原文是否真的观察到了相反结果。</a:t>
+              <a:t>[Sources]</a:t>
+            </a:r>
+          </a:p>
+          <a:p xmlns:a="http://schemas.openxmlformats.org/drawingml/2006/main">
+            <a:r>
+              <a:t>./handout.md；本页课堂判断示例不作实证结论</a:t>
             </a:r>
           </a:p>
           <a:p xmlns:a="http://schemas.openxmlformats.org/drawingml/2006/main">
@@ -1943,52 +1453,7 @@
           </a:p>
           <a:p xmlns:a="http://schemas.openxmlformats.org/drawingml/2006/main">
             <a:r>
-              <a:t>学生动作：</a:t>
-            </a:r>
-          </a:p>
-          <a:p xmlns:a="http://schemas.openxmlformats.org/drawingml/2006/main">
-            <a:r>
-              <a:t>把原误写句移到局限或待验证栏，保留原文位置。</a:t>
-            </a:r>
-          </a:p>
-          <a:p xmlns:a="http://schemas.openxmlformats.org/drawingml/2006/main">
-            <a:r>
-              <a:t/>
-            </a:r>
-          </a:p>
-          <a:p xmlns:a="http://schemas.openxmlformats.org/drawingml/2006/main">
-            <a:r>
-              <a:t>来源与边界：</a:t>
-            </a:r>
-          </a:p>
-          <a:p xmlns:a="http://schemas.openxmlformats.org/drawingml/2006/main">
-            <a:r>
-              <a:t>./handout.md；本页课堂判断示例不作实证结论</a:t>
-            </a:r>
-          </a:p>
-          <a:p xmlns:a="http://schemas.openxmlformats.org/drawingml/2006/main">
-            <a:r>
-              <a:t/>
-            </a:r>
-          </a:p>
-          <a:p xmlns:a="http://schemas.openxmlformats.org/drawingml/2006/main">
-            <a:r>
-              <a:t>[Sources]</a:t>
-            </a:r>
-          </a:p>
-          <a:p xmlns:a="http://schemas.openxmlformats.org/drawingml/2006/main">
-            <a:r>
-              <a:t/>
-            </a:r>
-          </a:p>
-          <a:p xmlns:a="http://schemas.openxmlformats.org/drawingml/2006/main">
-            <a:r>
-              <a:t>- 本课 handout.md 与 slides.md</a:t>
-            </a:r>
-          </a:p>
-          <a:p xmlns:a="http://schemas.openxmlformats.org/drawingml/2006/main">
-            <a:r>
-              <a:t/>
+              <a:t>本课 handout.md、judgment-task.md；../../course/judgment-path.md。</a:t>
             </a:r>
           </a:p>
           <a:p xmlns:a="http://schemas.openxmlformats.org/drawingml/2006/main">
@@ -2063,7 +1528,7 @@
           <a:lstStyle xmlns:a="http://schemas.openxmlformats.org/drawingml/2006/main"/>
           <a:p xmlns:a="http://schemas.openxmlformats.org/drawingml/2006/main">
             <a:r>
-              <a:t>页面：P17 个人实践：跑通一次综述结构重组</a:t>
+              <a:t>页面：P17 本人项目：决定、核验与回写</a:t>
             </a:r>
           </a:p>
           <a:p xmlns:a="http://schemas.openxmlformats.org/drawingml/2006/main">
@@ -2073,7 +1538,12 @@
           </a:p>
           <a:p xmlns:a="http://schemas.openxmlformats.org/drawingml/2006/main">
             <a:r>
-              <a:t>讲义位置：本课讲义；见逐页母稿映射表</a:t>
+              <a:t>讲述与校准：</a:t>
+            </a:r>
+          </a:p>
+          <a:p xmlns:a="http://schemas.openxmlformats.org/drawingml/2006/main">
+            <a:r>
+              <a:t>第一段作决定并查证据；中点处理共性卡点；第二段实际回写并验证。A/B 方向不同但对象与评分条件不同，不能直接断言同条件冲突；可能是结构效应、测量偏差或二者共同作用。C 只证明一次窄检索无结果。好答案同时指出已见差异与未排除解释，给出能改变结论的最小证据，而不是一律回答证据不足。</a:t>
             </a:r>
           </a:p>
           <a:p xmlns:a="http://schemas.openxmlformats.org/drawingml/2006/main">
@@ -2083,42 +1553,12 @@
           </a:p>
           <a:p xmlns:a="http://schemas.openxmlformats.org/drawingml/2006/main">
             <a:r>
-              <a:t>屏显核对：</a:t>
-            </a:r>
-          </a:p>
-          <a:p xmlns:a="http://schemas.openxmlformats.org/drawingml/2006/main">
-            <a:r>
-              <a:t>本轮完成：</a:t>
-            </a:r>
-          </a:p>
-          <a:p xmlns:a="http://schemas.openxmlformats.org/drawingml/2006/main">
-            <a:r>
-              <a:t>1. 只选 1 个子问题</a:t>
-            </a:r>
-          </a:p>
-          <a:p xmlns:a="http://schemas.openxmlformats.org/drawingml/2006/main">
-            <a:r>
-              <a:t>2. 选 2 张 verified / verified-with-caveat 阅读卡</a:t>
-            </a:r>
-          </a:p>
-          <a:p xmlns:a="http://schemas.openxmlformats.org/drawingml/2006/main">
-            <a:r>
-              <a:t>3. 填 1 个窄矩阵，抽取 2 条证据主格</a:t>
-            </a:r>
-          </a:p>
-          <a:p xmlns:a="http://schemas.openxmlformats.org/drawingml/2006/main">
-            <a:r>
-              <a:t>4. 写 4 句 mini literature review</a:t>
-            </a:r>
-          </a:p>
-          <a:p xmlns:a="http://schemas.openxmlformats.org/drawingml/2006/main">
-            <a:r>
-              <a:t>5. 核验 1 条 AI 归纳并记日志</a:t>
-            </a:r>
-          </a:p>
-          <a:p xmlns:a="http://schemas.openxmlformats.org/drawingml/2006/main">
-            <a:r>
-              <a:t>6. 如出现空白：只记类型 + pending + 下一步窄检索 + 1 个候选题（表述 + 生成路径标签）</a:t>
+              <a:t>学生动作：</a:t>
+            </a:r>
+          </a:p>
+          <a:p xmlns:a="http://schemas.openxmlformats.org/drawingml/2006/main">
+            <a:r>
+              <a:t>把已有卡与第二项来源按相同主张对齐，完成第二张精读卡；在同一矩阵标条件差异、支持/冲突和缺证，写一段受限综合与候选问题。</a:t>
             </a:r>
           </a:p>
           <a:p xmlns:a="http://schemas.openxmlformats.org/drawingml/2006/main">
@@ -2128,12 +1568,7 @@
           </a:p>
           <a:p xmlns:a="http://schemas.openxmlformats.org/drawingml/2006/main">
             <a:r>
-              <a:t>选择顺序：本人真实问题 → 导师组公开问题 → 课程贯穿案例</a:t>
-            </a:r>
-          </a:p>
-          <a:p xmlns:a="http://schemas.openxmlformats.org/drawingml/2006/main">
-            <a:r>
-              <a:t>候选题池 ≥3 个（≥2 条路径、≥1 非文献空白路径）在第 6 课前补齐</a:t>
+              <a:t>课堂安排：按本稿下方 90 分钟教学路由安排；此页不另占独立时段。</a:t>
             </a:r>
           </a:p>
           <a:p xmlns:a="http://schemas.openxmlformats.org/drawingml/2006/main">
@@ -2143,12 +1578,12 @@
           </a:p>
           <a:p xmlns:a="http://schemas.openxmlformats.org/drawingml/2006/main">
             <a:r>
-              <a:t>教师讲述：</a:t>
-            </a:r>
-          </a:p>
-          <a:p xmlns:a="http://schemas.openxmlformats.org/drawingml/2006/main">
-            <a:r>
-              <a:t>没有真实课题的学生可沿用虚构教学样例。第一段先完成两张卡的可比性/冲突判断和窄矩阵；教师插入“不可比不等于冲突”共性点评；第二段复用同一组记录生成地图视图、四句草稿和 AI 记录。空白完整三步检验与 ≥3 候选题池在第 6 课前补齐。</a:t>
+              <a:t>[Sources]</a:t>
+            </a:r>
+          </a:p>
+          <a:p xmlns:a="http://schemas.openxmlformats.org/drawingml/2006/main">
+            <a:r>
+              <a:t>[starter-template.md](../../course/starter-template.md) 最小文件结构；第 3-4 课项目工件。</a:t>
             </a:r>
           </a:p>
           <a:p xmlns:a="http://schemas.openxmlformats.org/drawingml/2006/main">
@@ -2158,62 +1593,7 @@
           </a:p>
           <a:p xmlns:a="http://schemas.openxmlformats.org/drawingml/2006/main">
             <a:r>
-              <a:t>学生动作：</a:t>
-            </a:r>
-          </a:p>
-          <a:p xmlns:a="http://schemas.openxmlformats.org/drawingml/2006/main">
-            <a:r>
-              <a:t>说明任务后切换到 P18 模板停留页。教师巡视只处理共同卡点，不逐台排障。库访问故障者使用纸面或 Markdown 模板完成。</a:t>
-            </a:r>
-          </a:p>
-          <a:p xmlns:a="http://schemas.openxmlformats.org/drawingml/2006/main">
-            <a:r>
-              <a:t/>
-            </a:r>
-          </a:p>
-          <a:p xmlns:a="http://schemas.openxmlformats.org/drawingml/2006/main">
-            <a:r>
-              <a:t>来源与边界：</a:t>
-            </a:r>
-          </a:p>
-          <a:p xmlns:a="http://schemas.openxmlformats.org/drawingml/2006/main">
-            <a:r>
-              <a:t>[starter-template.md](../../course/starter-template.md) 最小文件结构；第 3-4 课项目工件。</a:t>
-            </a:r>
-          </a:p>
-          <a:p xmlns:a="http://schemas.openxmlformats.org/drawingml/2006/main">
-            <a:r>
-              <a:t/>
-            </a:r>
-          </a:p>
-          <a:p xmlns:a="http://schemas.openxmlformats.org/drawingml/2006/main">
-            <a:r>
-              <a:t>---</a:t>
-            </a:r>
-          </a:p>
-          <a:p xmlns:a="http://schemas.openxmlformats.org/drawingml/2006/main">
-            <a:r>
-              <a:t/>
-            </a:r>
-          </a:p>
-          <a:p xmlns:a="http://schemas.openxmlformats.org/drawingml/2006/main">
-            <a:r>
-              <a:t>[Sources]</a:t>
-            </a:r>
-          </a:p>
-          <a:p xmlns:a="http://schemas.openxmlformats.org/drawingml/2006/main">
-            <a:r>
-              <a:t/>
-            </a:r>
-          </a:p>
-          <a:p xmlns:a="http://schemas.openxmlformats.org/drawingml/2006/main">
-            <a:r>
-              <a:t>- 本课 handout.md 与 slides.md</a:t>
-            </a:r>
-          </a:p>
-          <a:p xmlns:a="http://schemas.openxmlformats.org/drawingml/2006/main">
-            <a:r>
-              <a:t/>
+              <a:t>本课 handout.md、judgment-task.md；../../course/judgment-path.md。教学构造仅用于方法判断；本人结果以实际记录为准。</a:t>
             </a:r>
           </a:p>
           <a:p xmlns:a="http://schemas.openxmlformats.org/drawingml/2006/main">
@@ -2298,7 +1678,12 @@
           </a:p>
           <a:p xmlns:a="http://schemas.openxmlformats.org/drawingml/2006/main">
             <a:r>
-              <a:t>讲义位置：本课讲义；见逐页母稿映射表</a:t>
+              <a:t>讲述与校准：</a:t>
+            </a:r>
+          </a:p>
+          <a:p xmlns:a="http://schemas.openxmlformats.org/drawingml/2006/main">
+            <a:r>
+              <a:t>模板投屏停留。学生当堂完成窄矩阵、2 条主格、4 句草稿和 1 条 AI 记录。空白候选只记类型、pending 和下一步；候选题只记表述与路径标签，三步完整检验与 ≥3 候选题池课后补齐。</a:t>
             </a:r>
           </a:p>
           <a:p xmlns:a="http://schemas.openxmlformats.org/drawingml/2006/main">
@@ -2308,12 +1693,12 @@
           </a:p>
           <a:p xmlns:a="http://schemas.openxmlformats.org/drawingml/2006/main">
             <a:r>
-              <a:t>屏显核对：</a:t>
-            </a:r>
-          </a:p>
-          <a:p xmlns:a="http://schemas.openxmlformats.org/drawingml/2006/main">
-            <a:r>
-              <a:t>当堂只完成 1 个子问题：</a:t>
+              <a:t>学生动作：</a:t>
+            </a:r>
+          </a:p>
+          <a:p xmlns:a="http://schemas.openxmlformats.org/drawingml/2006/main">
+            <a:r>
+              <a:t>完成两段个人实践与中点点评；学生只输入一次共享记录，矩阵和地图不重复搬写。</a:t>
             </a:r>
           </a:p>
           <a:p xmlns:a="http://schemas.openxmlformats.org/drawingml/2006/main">
@@ -2323,17 +1708,7 @@
           </a:p>
           <a:p xmlns:a="http://schemas.openxmlformats.org/drawingml/2006/main">
             <a:r>
-              <a:t>```text</a:t>
-            </a:r>
-          </a:p>
-          <a:p xmlns:a="http://schemas.openxmlformats.org/drawingml/2006/main">
-            <a:r>
-              <a:t>| 文献（核验后） | 子问题 a | 证据角色 | 核验状态 |</a:t>
-            </a:r>
-          </a:p>
-          <a:p xmlns:a="http://schemas.openxmlformats.org/drawingml/2006/main">
-            <a:r>
-              <a:t>```</a:t>
+              <a:t>课堂安排：按本稿下方 90 分钟教学路由安排；此页不另占独立时段。</a:t>
             </a:r>
           </a:p>
           <a:p xmlns:a="http://schemas.openxmlformats.org/drawingml/2006/main">
@@ -2343,7 +1718,12 @@
           </a:p>
           <a:p xmlns:a="http://schemas.openxmlformats.org/drawingml/2006/main">
             <a:r>
-              <a:t>证据地图（当堂 2 条主格）：</a:t>
+              <a:t>[Sources]</a:t>
+            </a:r>
+          </a:p>
+          <a:p xmlns:a="http://schemas.openxmlformats.org/drawingml/2006/main">
+            <a:r>
+              <a:t>讲义 §二·3 矩阵；§三·2 证据地图；§四·3 三步检验；§四·4 候选题池；§五·3 AI 使用记录字段。</a:t>
             </a:r>
           </a:p>
           <a:p xmlns:a="http://schemas.openxmlformats.org/drawingml/2006/main">
@@ -2353,162 +1733,7 @@
           </a:p>
           <a:p xmlns:a="http://schemas.openxmlformats.org/drawingml/2006/main">
             <a:r>
-              <a:t>```text</a:t>
-            </a:r>
-          </a:p>
-          <a:p xmlns:a="http://schemas.openxmlformats.org/drawingml/2006/main">
-            <a:r>
-              <a:t>| 编号 | 子问题 | 文献 | 原文位置 | 主张 | 证据角色 | 冲突/局限 | 核验状态 |</a:t>
-            </a:r>
-          </a:p>
-          <a:p xmlns:a="http://schemas.openxmlformats.org/drawingml/2006/main">
-            <a:r>
-              <a:t>```</a:t>
-            </a:r>
-          </a:p>
-          <a:p xmlns:a="http://schemas.openxmlformats.org/drawingml/2006/main">
-            <a:r>
-              <a:t/>
-            </a:r>
-          </a:p>
-          <a:p xmlns:a="http://schemas.openxmlformats.org/drawingml/2006/main">
-            <a:r>
-              <a:t>四句 mini literature review：</a:t>
-            </a:r>
-          </a:p>
-          <a:p xmlns:a="http://schemas.openxmlformats.org/drawingml/2006/main">
-            <a:r>
-              <a:t/>
-            </a:r>
-          </a:p>
-          <a:p xmlns:a="http://schemas.openxmlformats.org/drawingml/2006/main">
-            <a:r>
-              <a:t>```text</a:t>
-            </a:r>
-          </a:p>
-          <a:p xmlns:a="http://schemas.openxmlformats.org/drawingml/2006/main">
-            <a:r>
-              <a:t>1 范围与子问题｜2 直接证据｜3 补充/对比/冲突｜4 空白与下一步核验</a:t>
-            </a:r>
-          </a:p>
-          <a:p xmlns:a="http://schemas.openxmlformats.org/drawingml/2006/main">
-            <a:r>
-              <a:t>```</a:t>
-            </a:r>
-          </a:p>
-          <a:p xmlns:a="http://schemas.openxmlformats.org/drawingml/2006/main">
-            <a:r>
-              <a:t/>
-            </a:r>
-          </a:p>
-          <a:p xmlns:a="http://schemas.openxmlformats.org/drawingml/2006/main">
-            <a:r>
-              <a:t>AI 使用记录最小字段：工具/模型｜用途｜Context｜输出用途｜人工核验方式｜问题</a:t>
-            </a:r>
-          </a:p>
-          <a:p xmlns:a="http://schemas.openxmlformats.org/drawingml/2006/main">
-            <a:r>
-              <a:t/>
-            </a:r>
-          </a:p>
-          <a:p xmlns:a="http://schemas.openxmlformats.org/drawingml/2006/main">
-            <a:r>
-              <a:t>空白候选（如有）：类型｜pending｜下一步窄检索</a:t>
-            </a:r>
-          </a:p>
-          <a:p xmlns:a="http://schemas.openxmlformats.org/drawingml/2006/main">
-            <a:r>
-              <a:t>候选题（如有）：一句话表述｜生成路径标签｜当前证据｜pending</a:t>
-            </a:r>
-          </a:p>
-          <a:p xmlns:a="http://schemas.openxmlformats.org/drawingml/2006/main">
-            <a:r>
-              <a:t/>
-            </a:r>
-          </a:p>
-          <a:p xmlns:a="http://schemas.openxmlformats.org/drawingml/2006/main">
-            <a:r>
-              <a:t>写入位置：`evidence-map.md` 或 `notes/`</a:t>
-            </a:r>
-          </a:p>
-          <a:p xmlns:a="http://schemas.openxmlformats.org/drawingml/2006/main">
-            <a:r>
-              <a:t/>
-            </a:r>
-          </a:p>
-          <a:p xmlns:a="http://schemas.openxmlformats.org/drawingml/2006/main">
-            <a:r>
-              <a:t>教师讲述：</a:t>
-            </a:r>
-          </a:p>
-          <a:p xmlns:a="http://schemas.openxmlformats.org/drawingml/2006/main">
-            <a:r>
-              <a:t>模板投屏停留。学生当堂完成窄矩阵、2 条主格、4 句草稿和 1 条 AI 记录。空白候选只记类型、pending 和下一步；候选题只记表述与路径标签，三步完整检验与 ≥3 候选题池课后补齐。</a:t>
-            </a:r>
-          </a:p>
-          <a:p xmlns:a="http://schemas.openxmlformats.org/drawingml/2006/main">
-            <a:r>
-              <a:t/>
-            </a:r>
-          </a:p>
-          <a:p xmlns:a="http://schemas.openxmlformats.org/drawingml/2006/main">
-            <a:r>
-              <a:t>学生动作：</a:t>
-            </a:r>
-          </a:p>
-          <a:p xmlns:a="http://schemas.openxmlformats.org/drawingml/2006/main">
-            <a:r>
-              <a:t>完成两段个人实践与中点点评；学生只输入一次共享记录，矩阵和地图不重复搬写。</a:t>
-            </a:r>
-          </a:p>
-          <a:p xmlns:a="http://schemas.openxmlformats.org/drawingml/2006/main">
-            <a:r>
-              <a:t/>
-            </a:r>
-          </a:p>
-          <a:p xmlns:a="http://schemas.openxmlformats.org/drawingml/2006/main">
-            <a:r>
-              <a:t>来源与边界：</a:t>
-            </a:r>
-          </a:p>
-          <a:p xmlns:a="http://schemas.openxmlformats.org/drawingml/2006/main">
-            <a:r>
-              <a:t>讲义 §二·3 矩阵；§三·2 证据地图；§四·3 三步检验；§四·4 候选题池；§五·3 AI 使用记录字段。</a:t>
-            </a:r>
-          </a:p>
-          <a:p xmlns:a="http://schemas.openxmlformats.org/drawingml/2006/main">
-            <a:r>
-              <a:t/>
-            </a:r>
-          </a:p>
-          <a:p xmlns:a="http://schemas.openxmlformats.org/drawingml/2006/main">
-            <a:r>
-              <a:t>---</a:t>
-            </a:r>
-          </a:p>
-          <a:p xmlns:a="http://schemas.openxmlformats.org/drawingml/2006/main">
-            <a:r>
-              <a:t/>
-            </a:r>
-          </a:p>
-          <a:p xmlns:a="http://schemas.openxmlformats.org/drawingml/2006/main">
-            <a:r>
-              <a:t>[Sources]</a:t>
-            </a:r>
-          </a:p>
-          <a:p xmlns:a="http://schemas.openxmlformats.org/drawingml/2006/main">
-            <a:r>
-              <a:t/>
-            </a:r>
-          </a:p>
-          <a:p xmlns:a="http://schemas.openxmlformats.org/drawingml/2006/main">
-            <a:r>
-              <a:t>- 本课 handout.md 与 slides.md</a:t>
-            </a:r>
-          </a:p>
-          <a:p xmlns:a="http://schemas.openxmlformats.org/drawingml/2006/main">
-            <a:r>
-              <a:t/>
+              <a:t>本课 handout.md、judgment-task.md；../../course/judgment-path.md。</a:t>
             </a:r>
           </a:p>
           <a:p xmlns:a="http://schemas.openxmlformats.org/drawingml/2006/main">
@@ -2593,7 +1818,12 @@
           </a:p>
           <a:p xmlns:a="http://schemas.openxmlformats.org/drawingml/2006/main">
             <a:r>
-              <a:t>讲义位置：本课讲义；见逐页母稿映射表</a:t>
+              <a:t>讲述与校准：</a:t>
+            </a:r>
+          </a:p>
+          <a:p xmlns:a="http://schemas.openxmlformats.org/drawingml/2006/main">
+            <a:r>
+              <a:t>每人约 3-5 分钟：一人用 45 秒说明问题、矩阵和四句草稿；同伴按四问反馈；作者记录处理决定。反馈者不替代作者修改，不形成共同提交。</a:t>
             </a:r>
           </a:p>
           <a:p xmlns:a="http://schemas.openxmlformats.org/drawingml/2006/main">
@@ -2603,32 +1833,12 @@
           </a:p>
           <a:p xmlns:a="http://schemas.openxmlformats.org/drawingml/2006/main">
             <a:r>
-              <a:t>屏显核对：</a:t>
-            </a:r>
-          </a:p>
-          <a:p xmlns:a="http://schemas.openxmlformats.org/drawingml/2006/main">
-            <a:r>
-              <a:t>两人互查四问：</a:t>
-            </a:r>
-          </a:p>
-          <a:p xmlns:a="http://schemas.openxmlformats.org/drawingml/2006/main">
-            <a:r>
-              <a:t>1. 按问题组织了吗？矩阵列来自问题分解，还是从论文关键词反推？</a:t>
-            </a:r>
-          </a:p>
-          <a:p xmlns:a="http://schemas.openxmlformats.org/drawingml/2006/main">
-            <a:r>
-              <a:t>2. 对比和冲突分开了吗？任务不可比是否被误写成相反结论？</a:t>
-            </a:r>
-          </a:p>
-          <a:p xmlns:a="http://schemas.openxmlformats.org/drawingml/2006/main">
-            <a:r>
-              <a:t>3. 空白和候选题记录诚实吗？已完成真实检索，还是明确标注待核验？候选题标了生成路径吗？</a:t>
-            </a:r>
-          </a:p>
-          <a:p xmlns:a="http://schemas.openxmlformats.org/drawingml/2006/main">
-            <a:r>
-              <a:t>4. 四句话能回指已核验条目吗？verified-with-caveat 是否保留限定，pending/rejected 是否没有被写成结论？</a:t>
+              <a:t>学生动作：</a:t>
+            </a:r>
+          </a:p>
+          <a:p xmlns:a="http://schemas.openxmlformats.org/drawingml/2006/main">
+            <a:r>
+              <a:t>两人互查。</a:t>
             </a:r>
           </a:p>
           <a:p xmlns:a="http://schemas.openxmlformats.org/drawingml/2006/main">
@@ -2638,7 +1848,7 @@
           </a:p>
           <a:p xmlns:a="http://schemas.openxmlformats.org/drawingml/2006/main">
             <a:r>
-              <a:t>作者记录：采纳／暂不采纳／待核验</a:t>
+              <a:t>课堂安排：按本稿下方 90 分钟教学路由安排；此页不另占独立时段。</a:t>
             </a:r>
           </a:p>
           <a:p xmlns:a="http://schemas.openxmlformats.org/drawingml/2006/main">
@@ -2648,7 +1858,12 @@
           </a:p>
           <a:p xmlns:a="http://schemas.openxmlformats.org/drawingml/2006/main">
             <a:r>
-              <a:t>&gt; 同伴反馈限于提问，作者保留最终决定权。</a:t>
+              <a:t>[Sources]</a:t>
+            </a:r>
+          </a:p>
+          <a:p xmlns:a="http://schemas.openxmlformats.org/drawingml/2006/main">
+            <a:r>
+              <a:t>同伴反馈为形成性活动，不单独计分，不共同提交（[assignments.md](../../course/assignments.md)）。</a:t>
             </a:r>
           </a:p>
           <a:p xmlns:a="http://schemas.openxmlformats.org/drawingml/2006/main">
@@ -2658,77 +1873,7 @@
           </a:p>
           <a:p xmlns:a="http://schemas.openxmlformats.org/drawingml/2006/main">
             <a:r>
-              <a:t>教师讲述：</a:t>
-            </a:r>
-          </a:p>
-          <a:p xmlns:a="http://schemas.openxmlformats.org/drawingml/2006/main">
-            <a:r>
-              <a:t>每人约 3-5 分钟：一人用 45 秒说明问题、矩阵和四句草稿；同伴按四问反馈；作者记录处理决定。反馈者不替代作者修改，不形成共同提交。</a:t>
-            </a:r>
-          </a:p>
-          <a:p xmlns:a="http://schemas.openxmlformats.org/drawingml/2006/main">
-            <a:r>
-              <a:t/>
-            </a:r>
-          </a:p>
-          <a:p xmlns:a="http://schemas.openxmlformats.org/drawingml/2006/main">
-            <a:r>
-              <a:t>学生动作：</a:t>
-            </a:r>
-          </a:p>
-          <a:p xmlns:a="http://schemas.openxmlformats.org/drawingml/2006/main">
-            <a:r>
-              <a:t>两人互查。</a:t>
-            </a:r>
-          </a:p>
-          <a:p xmlns:a="http://schemas.openxmlformats.org/drawingml/2006/main">
-            <a:r>
-              <a:t/>
-            </a:r>
-          </a:p>
-          <a:p xmlns:a="http://schemas.openxmlformats.org/drawingml/2006/main">
-            <a:r>
-              <a:t>来源与边界：</a:t>
-            </a:r>
-          </a:p>
-          <a:p xmlns:a="http://schemas.openxmlformats.org/drawingml/2006/main">
-            <a:r>
-              <a:t>同伴反馈为形成性活动，不单独计分，不共同提交（[assignments.md](../../course/assignments.md)）。</a:t>
-            </a:r>
-          </a:p>
-          <a:p xmlns:a="http://schemas.openxmlformats.org/drawingml/2006/main">
-            <a:r>
-              <a:t/>
-            </a:r>
-          </a:p>
-          <a:p xmlns:a="http://schemas.openxmlformats.org/drawingml/2006/main">
-            <a:r>
-              <a:t>---</a:t>
-            </a:r>
-          </a:p>
-          <a:p xmlns:a="http://schemas.openxmlformats.org/drawingml/2006/main">
-            <a:r>
-              <a:t/>
-            </a:r>
-          </a:p>
-          <a:p xmlns:a="http://schemas.openxmlformats.org/drawingml/2006/main">
-            <a:r>
-              <a:t>[Sources]</a:t>
-            </a:r>
-          </a:p>
-          <a:p xmlns:a="http://schemas.openxmlformats.org/drawingml/2006/main">
-            <a:r>
-              <a:t/>
-            </a:r>
-          </a:p>
-          <a:p xmlns:a="http://schemas.openxmlformats.org/drawingml/2006/main">
-            <a:r>
-              <a:t>- 本课 handout.md 与 slides.md</a:t>
-            </a:r>
-          </a:p>
-          <a:p xmlns:a="http://schemas.openxmlformats.org/drawingml/2006/main">
-            <a:r>
-              <a:t/>
+              <a:t>本课 handout.md、judgment-task.md；../../course/judgment-path.md。</a:t>
             </a:r>
           </a:p>
           <a:p xmlns:a="http://schemas.openxmlformats.org/drawingml/2006/main">
@@ -2813,7 +1958,12 @@
           </a:p>
           <a:p xmlns:a="http://schemas.openxmlformats.org/drawingml/2006/main">
             <a:r>
-              <a:t>讲义位置：本课讲义；见逐页母稿映射表</a:t>
+              <a:t>讲述与校准：</a:t>
+            </a:r>
+          </a:p>
+          <a:p xmlns:a="http://schemas.openxmlformats.org/drawingml/2006/main">
+            <a:r>
+              <a:t>回扣第 4 课：阅读卡让每条主张可定位、可核验，但没有解决多篇文献之间的关系问题。本课进入阶段五，处理"材料一起说明了什么、缺了什么"。</a:t>
             </a:r>
           </a:p>
           <a:p xmlns:a="http://schemas.openxmlformats.org/drawingml/2006/main">
@@ -2823,22 +1973,12 @@
           </a:p>
           <a:p xmlns:a="http://schemas.openxmlformats.org/drawingml/2006/main">
             <a:r>
-              <a:t>屏显核对：</a:t>
-            </a:r>
-          </a:p>
-          <a:p xmlns:a="http://schemas.openxmlformats.org/drawingml/2006/main">
-            <a:r>
-              <a:t>第 4 课已建立：</a:t>
-            </a:r>
-          </a:p>
-          <a:p xmlns:a="http://schemas.openxmlformats.org/drawingml/2006/main">
-            <a:r>
-              <a:t>- 阅读卡（问题、方法、设置、结果、局限、原文位置）</a:t>
-            </a:r>
-          </a:p>
-          <a:p xmlns:a="http://schemas.openxmlformats.org/drawingml/2006/main">
-            <a:r>
-              <a:t>- AI 摘要错读审计记录</a:t>
+              <a:t>学生动作：</a:t>
+            </a:r>
+          </a:p>
+          <a:p xmlns:a="http://schemas.openxmlformats.org/drawingml/2006/main">
+            <a:r>
+              <a:t>快问：你目前有几张完整阅读卡？把它们按论文顺序排列时，能否一眼看出冲突和缺口？只听回答，不评价。</a:t>
             </a:r>
           </a:p>
           <a:p xmlns:a="http://schemas.openxmlformats.org/drawingml/2006/main">
@@ -2848,22 +1988,7 @@
           </a:p>
           <a:p xmlns:a="http://schemas.openxmlformats.org/drawingml/2006/main">
             <a:r>
-              <a:t>仍未解决：</a:t>
-            </a:r>
-          </a:p>
-          <a:p xmlns:a="http://schemas.openxmlformats.org/drawingml/2006/main">
-            <a:r>
-              <a:t>- 5 篇文献摆在一起，按论文顺序还是按问题组织？</a:t>
-            </a:r>
-          </a:p>
-          <a:p xmlns:a="http://schemas.openxmlformats.org/drawingml/2006/main">
-            <a:r>
-              <a:t>- 哪些主张相互冲突、哪些不可比？</a:t>
-            </a:r>
-          </a:p>
-          <a:p xmlns:a="http://schemas.openxmlformats.org/drawingml/2006/main">
-            <a:r>
-              <a:t>- 哪个子问题整列空白，是"没找到"还是"没人做过"？</a:t>
+              <a:t>课堂安排：按本稿下方 90 分钟教学路由安排；此页不另占独立时段。</a:t>
             </a:r>
           </a:p>
           <a:p xmlns:a="http://schemas.openxmlformats.org/drawingml/2006/main">
@@ -2873,7 +1998,12 @@
           </a:p>
           <a:p xmlns:a="http://schemas.openxmlformats.org/drawingml/2006/main">
             <a:r>
-              <a:t>&gt; 阅读卡回答"这篇说了什么"，不回答"它们一起说明了什么"。</a:t>
+              <a:t>[Sources]</a:t>
+            </a:r>
+          </a:p>
+          <a:p xmlns:a="http://schemas.openxmlformats.org/drawingml/2006/main">
+            <a:r>
+              <a:t>回扣第 3-4 课讲义与 [AGENTS.md](../../AGENTS.md) 证据标准。</a:t>
             </a:r>
           </a:p>
           <a:p xmlns:a="http://schemas.openxmlformats.org/drawingml/2006/main">
@@ -2883,132 +2013,7 @@
           </a:p>
           <a:p xmlns:a="http://schemas.openxmlformats.org/drawingml/2006/main">
             <a:r>
-              <a:t>教师讲述：</a:t>
-            </a:r>
-          </a:p>
-          <a:p xmlns:a="http://schemas.openxmlformats.org/drawingml/2006/main">
-            <a:r>
-              <a:t>回扣第 4 课：阅读卡让每条主张可定位、可核验，但没有解决多篇文献之间的关系问题。本课进入阶段五，处理"材料一起说明了什么、缺了什么"。</a:t>
-            </a:r>
-          </a:p>
-          <a:p xmlns:a="http://schemas.openxmlformats.org/drawingml/2006/main">
-            <a:r>
-              <a:t/>
-            </a:r>
-          </a:p>
-          <a:p xmlns:a="http://schemas.openxmlformats.org/drawingml/2006/main">
-            <a:r>
-              <a:t>学生动作：</a:t>
-            </a:r>
-          </a:p>
-          <a:p xmlns:a="http://schemas.openxmlformats.org/drawingml/2006/main">
-            <a:r>
-              <a:t>快问：你目前有几张完整阅读卡？把它们按论文顺序排列时，能否一眼看出冲突和缺口？只听回答，不评价。</a:t>
-            </a:r>
-          </a:p>
-          <a:p xmlns:a="http://schemas.openxmlformats.org/drawingml/2006/main">
-            <a:r>
-              <a:t/>
-            </a:r>
-          </a:p>
-          <a:p xmlns:a="http://schemas.openxmlformats.org/drawingml/2006/main">
-            <a:r>
-              <a:t>本课板书、诊断与串词：</a:t>
-            </a:r>
-          </a:p>
-          <a:p xmlns:a="http://schemas.openxmlformats.org/drawingml/2006/main">
-            <a:r>
-              <a:t>本节替换同类口头提示，不增加既有时段。开场诊断嵌入现有开场/回顾，后续再沿原实践时段操作。</a:t>
-            </a:r>
-          </a:p>
-          <a:p xmlns:a="http://schemas.openxmlformats.org/drawingml/2006/main">
-            <a:r>
-              <a:t/>
-            </a:r>
-          </a:p>
-          <a:p xmlns:a="http://schemas.openxmlformats.org/drawingml/2006/main">
-            <a:r>
-              <a:t>- **板书主线**：矩阵空格 ≠ 已证空白；效率 ≠ 忠实性。</a:t>
-            </a:r>
-          </a:p>
-          <a:p xmlns:a="http://schemas.openxmlformats.org/drawingml/2006/main">
-            <a:r>
-              <a:t>- **诊断问题**：空格证明没人研究了吗？未测量等于反驳吗？</a:t>
-            </a:r>
-          </a:p>
-          <a:p xmlns:a="http://schemas.openxmlformats.org/drawingml/2006/main">
-            <a:r>
-              <a:t>- **预期回答**：都不能；需检索覆盖或直接相反证据。</a:t>
-            </a:r>
-          </a:p>
-          <a:p xmlns:a="http://schemas.openxmlformats.org/drawingml/2006/main">
-            <a:r>
-              <a:t>- **常见误答后的追问**：将误读移到局限/推断栏，真实冲突才放冲突格。</a:t>
-            </a:r>
-          </a:p>
-          <a:p xmlns:a="http://schemas.openxmlformats.org/drawingml/2006/main">
-            <a:r>
-              <a:t>- **过渡串词**：“现在把有依据的缺口改成一个能检验的问题。”</a:t>
-            </a:r>
-          </a:p>
-          <a:p xmlns:a="http://schemas.openxmlformats.org/drawingml/2006/main">
-            <a:r>
-              <a:t>- **当堂最小产出**：一项矩阵修订和一个带证据边界的候选问题。</a:t>
-            </a:r>
-          </a:p>
-          <a:p xmlns:a="http://schemas.openxmlformats.org/drawingml/2006/main">
-            <a:r>
-              <a:t>- **退出记录**：写“已完成的动作、本人项目仍缺的证据/工件、下次补齐位置”。使用教师包时标明课堂方法练习，不能据此宣称本人研究门通过；正式提交课次仍为第 6、9、13、16 课。</a:t>
-            </a:r>
-          </a:p>
-          <a:p xmlns:a="http://schemas.openxmlformats.org/drawingml/2006/main">
-            <a:r>
-              <a:t/>
-            </a:r>
-          </a:p>
-          <a:p xmlns:a="http://schemas.openxmlformats.org/drawingml/2006/main">
-            <a:r>
-              <a:t>来源与边界：</a:t>
-            </a:r>
-          </a:p>
-          <a:p xmlns:a="http://schemas.openxmlformats.org/drawingml/2006/main">
-            <a:r>
-              <a:t>回扣第 3-4 课讲义与 [AGENTS.md](../../AGENTS.md) 证据标准。</a:t>
-            </a:r>
-          </a:p>
-          <a:p xmlns:a="http://schemas.openxmlformats.org/drawingml/2006/main">
-            <a:r>
-              <a:t/>
-            </a:r>
-          </a:p>
-          <a:p xmlns:a="http://schemas.openxmlformats.org/drawingml/2006/main">
-            <a:r>
-              <a:t>---</a:t>
-            </a:r>
-          </a:p>
-          <a:p xmlns:a="http://schemas.openxmlformats.org/drawingml/2006/main">
-            <a:r>
-              <a:t/>
-            </a:r>
-          </a:p>
-          <a:p xmlns:a="http://schemas.openxmlformats.org/drawingml/2006/main">
-            <a:r>
-              <a:t>[Sources]</a:t>
-            </a:r>
-          </a:p>
-          <a:p xmlns:a="http://schemas.openxmlformats.org/drawingml/2006/main">
-            <a:r>
-              <a:t/>
-            </a:r>
-          </a:p>
-          <a:p xmlns:a="http://schemas.openxmlformats.org/drawingml/2006/main">
-            <a:r>
-              <a:t>- 本课 handout.md 与 slides.md</a:t>
-            </a:r>
-          </a:p>
-          <a:p xmlns:a="http://schemas.openxmlformats.org/drawingml/2006/main">
-            <a:r>
-              <a:t/>
+              <a:t>本课 handout.md、judgment-task.md；../../course/judgment-path.md。</a:t>
             </a:r>
           </a:p>
           <a:p xmlns:a="http://schemas.openxmlformats.org/drawingml/2006/main">
@@ -3093,7 +2098,12 @@
           </a:p>
           <a:p xmlns:a="http://schemas.openxmlformats.org/drawingml/2006/main">
             <a:r>
-              <a:t>讲义位置：本课讲义；见逐页母稿映射表</a:t>
+              <a:t>讲述与校准：</a:t>
+            </a:r>
+          </a:p>
+          <a:p xmlns:a="http://schemas.openxmlformats.org/drawingml/2006/main">
+            <a:r>
+              <a:t>文献地图不能替代数据可用性检查。RSI 的 DASH 五轮 CSV 与工作表各 320 行，README 报告 258 次实验，映射未决；不要把行数当独立样本数。</a:t>
             </a:r>
           </a:p>
           <a:p xmlns:a="http://schemas.openxmlformats.org/drawingml/2006/main">
@@ -3103,12 +2113,7 @@
           </a:p>
           <a:p xmlns:a="http://schemas.openxmlformats.org/drawingml/2006/main">
             <a:r>
-              <a:t>屏显核对：</a:t>
-            </a:r>
-          </a:p>
-          <a:p xmlns:a="http://schemas.openxmlformats.org/drawingml/2006/main">
-            <a:r>
-              <a:t>按问题组织 → 证据地图 → 受限综合 → 候选题生成</a:t>
+              <a:t>回收本讲主链：从按问题组织材料开始，经证据地图显式保留支持、限制和空白，再写受限综合并形成待检验候选题。本页不重复作业说明，也不引入新内容。</a:t>
             </a:r>
           </a:p>
           <a:p xmlns:a="http://schemas.openxmlformats.org/drawingml/2006/main">
@@ -3118,22 +2123,12 @@
           </a:p>
           <a:p xmlns:a="http://schemas.openxmlformats.org/drawingml/2006/main">
             <a:r>
-              <a:t>1. **按问题组织**：矩阵列来自问题分解，不按论文逐篇堆叠。</a:t>
-            </a:r>
-          </a:p>
-          <a:p xmlns:a="http://schemas.openxmlformats.org/drawingml/2006/main">
-            <a:r>
-              <a:t>2. **证据地图**：保留直接证据、补充证据、冲突和空白四种视图。</a:t>
-            </a:r>
-          </a:p>
-          <a:p xmlns:a="http://schemas.openxmlformats.org/drawingml/2006/main">
-            <a:r>
-              <a:t>3. **受限综合**：mini review 只使用已核验条目，并保留任务与方法限定。</a:t>
-            </a:r>
-          </a:p>
-          <a:p xmlns:a="http://schemas.openxmlformats.org/drawingml/2006/main">
-            <a:r>
-              <a:t>4. **候选题生成**：空白先检验，再进入候选题池和问题门。</a:t>
+              <a:t>学生动作：</a:t>
+            </a:r>
+          </a:p>
+          <a:p xmlns:a="http://schemas.openxmlformats.org/drawingml/2006/main">
+            <a:r>
+              <a:t>学生用一句话指出自己的材料目前停在矩阵、证据地图、mini review 还是候选题。</a:t>
             </a:r>
           </a:p>
           <a:p xmlns:a="http://schemas.openxmlformats.org/drawingml/2006/main">
@@ -3143,7 +2138,7 @@
           </a:p>
           <a:p xmlns:a="http://schemas.openxmlformats.org/drawingml/2006/main">
             <a:r>
-              <a:t>&gt; 关键边界：“我没找到”不等于领域空白；对比证据不自动等于冲突，AI 归纳也不能替代原文核验。</a:t>
+              <a:t>课堂安排：按本稿下方 90 分钟教学路由安排；此页不另占独立时段。</a:t>
             </a:r>
           </a:p>
           <a:p xmlns:a="http://schemas.openxmlformats.org/drawingml/2006/main">
@@ -3153,12 +2148,12 @@
           </a:p>
           <a:p xmlns:a="http://schemas.openxmlformats.org/drawingml/2006/main">
             <a:r>
-              <a:t>教师讲述：</a:t>
-            </a:r>
-          </a:p>
-          <a:p xmlns:a="http://schemas.openxmlformats.org/drawingml/2006/main">
-            <a:r>
-              <a:t>回收本讲主链：从按问题组织材料开始，经证据地图显式保留支持、限制和空白，再写受限综合并形成待检验候选题。本页不重复作业说明，也不引入新内容。</a:t>
+              <a:t>[Sources]</a:t>
+            </a:r>
+          </a:p>
+          <a:p xmlns:a="http://schemas.openxmlformats.org/drawingml/2006/main">
+            <a:r>
+              <a:t>讲义 §二-§五；[AGENTS.md](../../AGENTS.md) 证据标准。</a:t>
             </a:r>
           </a:p>
           <a:p xmlns:a="http://schemas.openxmlformats.org/drawingml/2006/main">
@@ -3168,62 +2163,7 @@
           </a:p>
           <a:p xmlns:a="http://schemas.openxmlformats.org/drawingml/2006/main">
             <a:r>
-              <a:t>学生动作：</a:t>
-            </a:r>
-          </a:p>
-          <a:p xmlns:a="http://schemas.openxmlformats.org/drawingml/2006/main">
-            <a:r>
-              <a:t>学生用一句话指出自己的材料目前停在矩阵、证据地图、mini review 还是候选题。</a:t>
-            </a:r>
-          </a:p>
-          <a:p xmlns:a="http://schemas.openxmlformats.org/drawingml/2006/main">
-            <a:r>
-              <a:t/>
-            </a:r>
-          </a:p>
-          <a:p xmlns:a="http://schemas.openxmlformats.org/drawingml/2006/main">
-            <a:r>
-              <a:t>来源与边界：</a:t>
-            </a:r>
-          </a:p>
-          <a:p xmlns:a="http://schemas.openxmlformats.org/drawingml/2006/main">
-            <a:r>
-              <a:t>讲义 §二-§五；[AGENTS.md](../../AGENTS.md) 证据标准。</a:t>
-            </a:r>
-          </a:p>
-          <a:p xmlns:a="http://schemas.openxmlformats.org/drawingml/2006/main">
-            <a:r>
-              <a:t/>
-            </a:r>
-          </a:p>
-          <a:p xmlns:a="http://schemas.openxmlformats.org/drawingml/2006/main">
-            <a:r>
-              <a:t>---</a:t>
-            </a:r>
-          </a:p>
-          <a:p xmlns:a="http://schemas.openxmlformats.org/drawingml/2006/main">
-            <a:r>
-              <a:t/>
-            </a:r>
-          </a:p>
-          <a:p xmlns:a="http://schemas.openxmlformats.org/drawingml/2006/main">
-            <a:r>
-              <a:t>[Sources]</a:t>
-            </a:r>
-          </a:p>
-          <a:p xmlns:a="http://schemas.openxmlformats.org/drawingml/2006/main">
-            <a:r>
-              <a:t/>
-            </a:r>
-          </a:p>
-          <a:p xmlns:a="http://schemas.openxmlformats.org/drawingml/2006/main">
-            <a:r>
-              <a:t>- 本课 handout.md 与 slides.md</a:t>
-            </a:r>
-          </a:p>
-          <a:p xmlns:a="http://schemas.openxmlformats.org/drawingml/2006/main">
-            <a:r>
-              <a:t/>
+              <a:t>本课 handout.md、judgment-task.md；../../course/judgment-path.md。</a:t>
             </a:r>
           </a:p>
           <a:p xmlns:a="http://schemas.openxmlformats.org/drawingml/2006/main">
@@ -3298,7 +2238,7 @@
           <a:lstStyle xmlns:a="http://schemas.openxmlformats.org/drawingml/2006/main"/>
           <a:p xmlns:a="http://schemas.openxmlformats.org/drawingml/2006/main">
             <a:r>
-              <a:t>页面：P21 退出卡与第 6 课预告</a:t>
+              <a:t>页面：P21 保留本课决定，准备下一课输入</a:t>
             </a:r>
           </a:p>
           <a:p xmlns:a="http://schemas.openxmlformats.org/drawingml/2006/main">
@@ -3308,7 +2248,12 @@
           </a:p>
           <a:p xmlns:a="http://schemas.openxmlformats.org/drawingml/2006/main">
             <a:r>
-              <a:t>讲义位置：本课讲义；见逐页母稿映射表</a:t>
+              <a:t>讲述与校准：</a:t>
+            </a:r>
+          </a:p>
+          <a:p xmlns:a="http://schemas.openxmlformats.org/drawingml/2006/main">
+            <a:r>
+              <a:t>完善第二张卡、给第三项来源标两个原文位置；候选列表按同一筛选理由累计。 每课课外最多60分钟；详见讲义。</a:t>
             </a:r>
           </a:p>
           <a:p xmlns:a="http://schemas.openxmlformats.org/drawingml/2006/main">
@@ -3318,47 +2263,12 @@
           </a:p>
           <a:p xmlns:a="http://schemas.openxmlformats.org/drawingml/2006/main">
             <a:r>
-              <a:t>屏显核对：</a:t>
-            </a:r>
-          </a:p>
-          <a:p xmlns:a="http://schemas.openxmlformats.org/drawingml/2006/main">
-            <a:r>
-              <a:t>退出卡：</a:t>
-            </a:r>
-          </a:p>
-          <a:p xmlns:a="http://schemas.openxmlformats.org/drawingml/2006/main">
-            <a:r>
-              <a:t>- 今天最清楚的一点；</a:t>
-            </a:r>
-          </a:p>
-          <a:p xmlns:a="http://schemas.openxmlformats.org/drawingml/2006/main">
-            <a:r>
-              <a:t>- 仍然困惑的一点；</a:t>
-            </a:r>
-          </a:p>
-          <a:p xmlns:a="http://schemas.openxmlformats.org/drawingml/2006/main">
-            <a:r>
-              <a:t>- 矩阵列是否来自问题分解；</a:t>
-            </a:r>
-          </a:p>
-          <a:p xmlns:a="http://schemas.openxmlformats.org/drawingml/2006/main">
-            <a:r>
-              <a:t>- 证据地图当前含直接证据/补充证据/冲突/空白各几条；</a:t>
-            </a:r>
-          </a:p>
-          <a:p xmlns:a="http://schemas.openxmlformats.org/drawingml/2006/main">
-            <a:r>
-              <a:t>- 一个研究空白候选及其类型，以及 1 个候选题与其生成路径；</a:t>
-            </a:r>
-          </a:p>
-          <a:p xmlns:a="http://schemas.openxmlformats.org/drawingml/2006/main">
-            <a:r>
-              <a:t>- 四句 mini review 中哪一句仍缺直接证据；</a:t>
-            </a:r>
-          </a:p>
-          <a:p xmlns:a="http://schemas.openxmlformats.org/drawingml/2006/main">
-            <a:r>
-              <a:t>- 第 6 课问题门需要补的环节。</a:t>
+              <a:t>学生动作：</a:t>
+            </a:r>
+          </a:p>
+          <a:p xmlns:a="http://schemas.openxmlformats.org/drawingml/2006/main">
+            <a:r>
+              <a:t>定位实际工件与下一项动作；按既定预算收口。</a:t>
             </a:r>
           </a:p>
           <a:p xmlns:a="http://schemas.openxmlformats.org/drawingml/2006/main">
@@ -3368,7 +2278,7 @@
           </a:p>
           <a:p xmlns:a="http://schemas.openxmlformats.org/drawingml/2006/main">
             <a:r>
-              <a:t>第 6 课预告：问题定义、第一性原理与问题门</a:t>
+              <a:t>课堂安排：按本稿下方 90 分钟教学路由安排；此页不另占独立时段。</a:t>
             </a:r>
           </a:p>
           <a:p xmlns:a="http://schemas.openxmlformats.org/drawingml/2006/main">
@@ -3378,7 +2288,27 @@
           </a:p>
           <a:p xmlns:a="http://schemas.openxmlformats.org/drawingml/2006/main">
             <a:r>
-              <a:t>&gt; 本课产出（四句 mini review + 证据地图初版 + 研究空白候选）是问题门直接输入。不新增课后正式作业。</a:t>
+              <a:t>[Sources]</a:t>
+            </a:r>
+          </a:p>
+          <a:p xmlns:a="http://schemas.openxmlformats.org/drawingml/2006/main">
+            <a:r>
+              <a:t>- Kitchenham, B., &amp; Charters, S. EBSE-2007-01, 2007. [机构索引](https://ebse.webspace.durham.ac.uk/ebse-bibliography/guidelines-for-performing-systematic-literature-reviews-in-software-engineering/)。</a:t>
+            </a:r>
+          </a:p>
+          <a:p xmlns:a="http://schemas.openxmlformats.org/drawingml/2006/main">
+            <a:r>
+              <a:t>- Booth, W. C. et al. *The Craft of Research*, 5th ed. [出版社页面](https://press.uchicago.edu/ucp/books/book/chicago/C/bo215874008)。</a:t>
+            </a:r>
+          </a:p>
+          <a:p xmlns:a="http://schemas.openxmlformats.org/drawingml/2006/main">
+            <a:r>
+              <a:t>- Pautasso, M. *PLOS Comput Biol* 9(7):e1003149 (2013). DOI: [10.1371/journal.pcbi.1003149](https://journals.plos.org/ploscompbiol/article?id=10.1371/journal.pcbi.1003149)。</a:t>
+            </a:r>
+          </a:p>
+          <a:p xmlns:a="http://schemas.openxmlformats.org/drawingml/2006/main">
+            <a:r>
+              <a:t>- 阅读规则见 [reading-list.md](../../course/reading-list.md)。</a:t>
             </a:r>
           </a:p>
           <a:p xmlns:a="http://schemas.openxmlformats.org/drawingml/2006/main">
@@ -3388,117 +2318,7 @@
           </a:p>
           <a:p xmlns:a="http://schemas.openxmlformats.org/drawingml/2006/main">
             <a:r>
-              <a:t>教师讲述：</a:t>
-            </a:r>
-          </a:p>
-          <a:p xmlns:a="http://schemas.openxmlformats.org/drawingml/2006/main">
-            <a:r>
-              <a:t>回扣本课目标：学生不需要在 90 分钟内完成完整综述，只要项目里有窄矩阵、四视图证据地图、一个空白候选的首轮检验、候选题记录、四句 mini review 和一条 AI 核验记录，就形成可继续扩展的起点。第 6 课把候选题池比较筛选、收敛为问题，并按权威门条件检查证据地图。</a:t>
-            </a:r>
-          </a:p>
-          <a:p xmlns:a="http://schemas.openxmlformats.org/drawingml/2006/main">
-            <a:r>
-              <a:t/>
-            </a:r>
-          </a:p>
-          <a:p xmlns:a="http://schemas.openxmlformats.org/drawingml/2006/main">
-            <a:r>
-              <a:t>课后引导阅读（采用 AI 导航→原文核验→AI 质疑→偏差审计→人工定稿流程）：</a:t>
-            </a:r>
-          </a:p>
-          <a:p xmlns:a="http://schemas.openxmlformats.org/drawingml/2006/main">
-            <a:r>
-              <a:t>- Kitchenham &amp; Charters *SLR Guidelines* 选段（study quality assessment、data extraction、synthesis），约 30 分钟，核心阅读；</a:t>
-            </a:r>
-          </a:p>
-          <a:p xmlns:a="http://schemas.openxmlformats.org/drawingml/2006/main">
-            <a:r>
-              <a:t>- Booth et al. *The Craft of Research*, 5th ed., 4.3–4.5，任选，约 20 分钟；</a:t>
-            </a:r>
-          </a:p>
-          <a:p xmlns:a="http://schemas.openxmlformats.org/drawingml/2006/main">
-            <a:r>
-              <a:t>- Pautasso, "Ten Simple Rules for Writing a Literature Review"，任选，约 20 分钟。</a:t>
-            </a:r>
-          </a:p>
-          <a:p xmlns:a="http://schemas.openxmlformats.org/drawingml/2006/main">
-            <a:r>
-              <a:t/>
-            </a:r>
-          </a:p>
-          <a:p xmlns:a="http://schemas.openxmlformats.org/drawingml/2006/main">
-            <a:r>
-              <a:t>阅读卡持续保存在个人项目 `notes/`，不逐周正式提交。第 6 课问题门统一检查至少 3 张与个人项目直接相关的完整精读卡和一份证据地图初版。</a:t>
-            </a:r>
-          </a:p>
-          <a:p xmlns:a="http://schemas.openxmlformats.org/drawingml/2006/main">
-            <a:r>
-              <a:t/>
-            </a:r>
-          </a:p>
-          <a:p xmlns:a="http://schemas.openxmlformats.org/drawingml/2006/main">
-            <a:r>
-              <a:t>学生动作：</a:t>
-            </a:r>
-          </a:p>
-          <a:p xmlns:a="http://schemas.openxmlformats.org/drawingml/2006/main">
-            <a:r>
-              <a:t>学生提交退出卡或保存在个人项目。教师收集共性问题，用于第 6 课前调整。</a:t>
-            </a:r>
-          </a:p>
-          <a:p xmlns:a="http://schemas.openxmlformats.org/drawingml/2006/main">
-            <a:r>
-              <a:t/>
-            </a:r>
-          </a:p>
-          <a:p xmlns:a="http://schemas.openxmlformats.org/drawingml/2006/main">
-            <a:r>
-              <a:t>来源与边界：</a:t>
-            </a:r>
-          </a:p>
-          <a:p xmlns:a="http://schemas.openxmlformats.org/drawingml/2006/main">
-            <a:r>
-              <a:t>- Kitchenham, B., &amp; Charters, S. EBSE-2007-01, 2007. [机构索引](https://ebse.webspace.durham.ac.uk/ebse-bibliography/guidelines-for-performing-systematic-literature-reviews-in-software-engineering/)。</a:t>
-            </a:r>
-          </a:p>
-          <a:p xmlns:a="http://schemas.openxmlformats.org/drawingml/2006/main">
-            <a:r>
-              <a:t>- Booth, W. C. et al. *The Craft of Research*, 5th ed. [出版社页面](https://press.uchicago.edu/ucp/books/book/chicago/C/bo215874008)。</a:t>
-            </a:r>
-          </a:p>
-          <a:p xmlns:a="http://schemas.openxmlformats.org/drawingml/2006/main">
-            <a:r>
-              <a:t>- Pautasso, M. *PLOS Comput Biol* 9(7):e1003149 (2013). DOI: [10.1371/journal.pcbi.1003149](https://journals.plos.org/ploscompbiol/article?id=10.1371/journal.pcbi.1003149)。</a:t>
-            </a:r>
-          </a:p>
-          <a:p xmlns:a="http://schemas.openxmlformats.org/drawingml/2006/main">
-            <a:r>
-              <a:t>- 阅读规则见 [reading-list.md](../../course/reading-list.md)。</a:t>
-            </a:r>
-          </a:p>
-          <a:p xmlns:a="http://schemas.openxmlformats.org/drawingml/2006/main">
-            <a:r>
-              <a:t/>
-            </a:r>
-          </a:p>
-          <a:p xmlns:a="http://schemas.openxmlformats.org/drawingml/2006/main">
-            <a:r>
-              <a:t>[Sources]</a:t>
-            </a:r>
-          </a:p>
-          <a:p xmlns:a="http://schemas.openxmlformats.org/drawingml/2006/main">
-            <a:r>
-              <a:t/>
-            </a:r>
-          </a:p>
-          <a:p xmlns:a="http://schemas.openxmlformats.org/drawingml/2006/main">
-            <a:r>
-              <a:t>- 本课 handout.md 与 slides.md</a:t>
-            </a:r>
-          </a:p>
-          <a:p xmlns:a="http://schemas.openxmlformats.org/drawingml/2006/main">
-            <a:r>
-              <a:t/>
+              <a:t>本课 handout.md、judgment-task.md；../../course/judgment-path.md。教学构造仅用于方法判断；本人结果以实际记录为准。</a:t>
             </a:r>
           </a:p>
           <a:p xmlns:a="http://schemas.openxmlformats.org/drawingml/2006/main">
@@ -3573,7 +2393,7 @@
           <a:lstStyle xmlns:a="http://schemas.openxmlformats.org/drawingml/2006/main"/>
           <a:p xmlns:a="http://schemas.openxmlformats.org/drawingml/2006/main">
             <a:r>
-              <a:t>页面：P03 本课目标与课堂产出</a:t>
+              <a:t>页面：P03 结果相反，是否构成冲突</a:t>
             </a:r>
           </a:p>
           <a:p xmlns:a="http://schemas.openxmlformats.org/drawingml/2006/main">
@@ -3583,7 +2403,12 @@
           </a:p>
           <a:p xmlns:a="http://schemas.openxmlformats.org/drawingml/2006/main">
             <a:r>
-              <a:t>讲义位置：本课讲义；见逐页母稿映射表</a:t>
+              <a:t>讲述与校准：</a:t>
+            </a:r>
+          </a:p>
+          <a:p xmlns:a="http://schemas.openxmlformats.org/drawingml/2006/main">
+            <a:r>
+              <a:t>先独立作答，再同伴比较；以下依据只在校准时揭示。</a:t>
             </a:r>
           </a:p>
           <a:p xmlns:a="http://schemas.openxmlformats.org/drawingml/2006/main">
@@ -3593,12 +2418,7 @@
           </a:p>
           <a:p xmlns:a="http://schemas.openxmlformats.org/drawingml/2006/main">
             <a:r>
-              <a:t>屏显核对：</a:t>
-            </a:r>
-          </a:p>
-          <a:p xmlns:a="http://schemas.openxmlformats.org/drawingml/2006/main">
-            <a:r>
-              <a:t>完成本课后，你能：</a:t>
+              <a:t>A/B 方向不同但对象与评分条件不同，不能直接断言同条件冲突；可能是结构效应、测量偏差或二者共同作用。C 只证明一次窄检索无结果。好答案同时指出已见差异与未排除解释，给出能改变结论的最小证据，而不是一律回答证据不足。</a:t>
             </a:r>
           </a:p>
           <a:p xmlns:a="http://schemas.openxmlformats.org/drawingml/2006/main">
@@ -3608,27 +2428,12 @@
           </a:p>
           <a:p xmlns:a="http://schemas.openxmlformats.org/drawingml/2006/main">
             <a:r>
-              <a:t>1. 区分叙事性综述与系统性综述的差别与适用边界；</a:t>
-            </a:r>
-          </a:p>
-          <a:p xmlns:a="http://schemas.openxmlformats.org/drawingml/2006/main">
-            <a:r>
-              <a:t>2. 把多篇阅读卡重组为按研究问题排列的相关工作矩阵；</a:t>
-            </a:r>
-          </a:p>
-          <a:p xmlns:a="http://schemas.openxmlformats.org/drawingml/2006/main">
-            <a:r>
-              <a:t>3. 绘制证据地图，显式区分直接证据、补充证据、冲突和空白；</a:t>
-            </a:r>
-          </a:p>
-          <a:p xmlns:a="http://schemas.openxmlformats.org/drawingml/2006/main">
-            <a:r>
-              <a:t>4. 识别冲突空白、缺角空白和新问题空白，并执行三步检验；</a:t>
-            </a:r>
-          </a:p>
-          <a:p xmlns:a="http://schemas.openxmlformats.org/drawingml/2006/main">
-            <a:r>
-              <a:t>5. 用已核验条目写四句 mini literature review，并核验 AI 综述草稿。</a:t>
+              <a:t>学生动作：</a:t>
+            </a:r>
+          </a:p>
+          <a:p xmlns:a="http://schemas.openxmlformats.org/drawingml/2006/main">
+            <a:r>
+              <a:t>先独立写决定和证据，后同伴比较；校准后再回写。</a:t>
             </a:r>
           </a:p>
           <a:p xmlns:a="http://schemas.openxmlformats.org/drawingml/2006/main">
@@ -3638,7 +2443,7 @@
           </a:p>
           <a:p xmlns:a="http://schemas.openxmlformats.org/drawingml/2006/main">
             <a:r>
-              <a:t>课堂产出：窄矩阵 + 证据地图初版 + 空白首轮检验 + 候选题记录（表述 + 路径标签）+ 四句 mini review + 一条 AI 核验记录</a:t>
+              <a:t>课堂安排：按本稿下方 90 分钟教学路由安排；此页不另占独立时段。</a:t>
             </a:r>
           </a:p>
           <a:p xmlns:a="http://schemas.openxmlformats.org/drawingml/2006/main">
@@ -3648,7 +2453,12 @@
           </a:p>
           <a:p xmlns:a="http://schemas.openxmlformats.org/drawingml/2006/main">
             <a:r>
-              <a:t>&gt; 本课不正式提交，产出是第 6 课问题门的直接输入。</a:t>
+              <a:t>[Sources]</a:t>
+            </a:r>
+          </a:p>
+          <a:p xmlns:a="http://schemas.openxmlformats.org/drawingml/2006/main">
+            <a:r>
+              <a:t>[备课规划.md](../备课规划.md) 第 5 课目标段；[assignments.md](../../course/assignments.md) 第 6 课问题门条件。</a:t>
             </a:r>
           </a:p>
           <a:p xmlns:a="http://schemas.openxmlformats.org/drawingml/2006/main">
@@ -3658,77 +2468,7 @@
           </a:p>
           <a:p xmlns:a="http://schemas.openxmlformats.org/drawingml/2006/main">
             <a:r>
-              <a:t>教师讲述：</a:t>
-            </a:r>
-          </a:p>
-          <a:p xmlns:a="http://schemas.openxmlformats.org/drawingml/2006/main">
-            <a:r>
-              <a:t>明确边界：本课目标是建立可复盘的综述结构，不是完成论文 related work 段。证据地图初版只要形成直接证据、补充/对比条目、冲突检查和空白候选的最小视图，重点是流程跑通。四句 mini review 只使用已核验条目；研究空白候选不直接进入问题门，须先通过三步检验。</a:t>
-            </a:r>
-          </a:p>
-          <a:p xmlns:a="http://schemas.openxmlformats.org/drawingml/2006/main">
-            <a:r>
-              <a:t/>
-            </a:r>
-          </a:p>
-          <a:p xmlns:a="http://schemas.openxmlformats.org/drawingml/2006/main">
-            <a:r>
-              <a:t>学生动作：</a:t>
-            </a:r>
-          </a:p>
-          <a:p xmlns:a="http://schemas.openxmlformats.org/drawingml/2006/main">
-            <a:r>
-              <a:t>无。</a:t>
-            </a:r>
-          </a:p>
-          <a:p xmlns:a="http://schemas.openxmlformats.org/drawingml/2006/main">
-            <a:r>
-              <a:t/>
-            </a:r>
-          </a:p>
-          <a:p xmlns:a="http://schemas.openxmlformats.org/drawingml/2006/main">
-            <a:r>
-              <a:t>来源与边界：</a:t>
-            </a:r>
-          </a:p>
-          <a:p xmlns:a="http://schemas.openxmlformats.org/drawingml/2006/main">
-            <a:r>
-              <a:t>[备课规划.md](../备课规划.md) 第 5 课目标段；[assignments.md](../../course/assignments.md) 第 6 课问题门条件。</a:t>
-            </a:r>
-          </a:p>
-          <a:p xmlns:a="http://schemas.openxmlformats.org/drawingml/2006/main">
-            <a:r>
-              <a:t/>
-            </a:r>
-          </a:p>
-          <a:p xmlns:a="http://schemas.openxmlformats.org/drawingml/2006/main">
-            <a:r>
-              <a:t>---</a:t>
-            </a:r>
-          </a:p>
-          <a:p xmlns:a="http://schemas.openxmlformats.org/drawingml/2006/main">
-            <a:r>
-              <a:t/>
-            </a:r>
-          </a:p>
-          <a:p xmlns:a="http://schemas.openxmlformats.org/drawingml/2006/main">
-            <a:r>
-              <a:t>[Sources]</a:t>
-            </a:r>
-          </a:p>
-          <a:p xmlns:a="http://schemas.openxmlformats.org/drawingml/2006/main">
-            <a:r>
-              <a:t/>
-            </a:r>
-          </a:p>
-          <a:p xmlns:a="http://schemas.openxmlformats.org/drawingml/2006/main">
-            <a:r>
-              <a:t>- 本课 handout.md 与 slides.md</a:t>
-            </a:r>
-          </a:p>
-          <a:p xmlns:a="http://schemas.openxmlformats.org/drawingml/2006/main">
-            <a:r>
-              <a:t/>
+              <a:t>本课 handout.md、judgment-task.md；../../course/judgment-path.md。教学构造仅用于方法判断；本人结果以实际记录为准。</a:t>
             </a:r>
           </a:p>
           <a:p xmlns:a="http://schemas.openxmlformats.org/drawingml/2006/main">
@@ -3813,7 +2553,12 @@
           </a:p>
           <a:p xmlns:a="http://schemas.openxmlformats.org/drawingml/2006/main">
             <a:r>
-              <a:t>讲义位置：本课讲义；见逐页母稿映射表</a:t>
+              <a:t>讲述与校准：</a:t>
+            </a:r>
+          </a:p>
+          <a:p xmlns:a="http://schemas.openxmlformats.org/drawingml/2006/main">
+            <a:r>
+              <a:t>暴露常见错误。摘要堆叠的根本原因是没有把综述组织在一个研究问题周围。没有问题，就无法判断哪条证据支持什么、反驳什么、缺失什么。下面几页来看怎样从研究问题出发重组阅读卡。</a:t>
             </a:r>
           </a:p>
           <a:p xmlns:a="http://schemas.openxmlformats.org/drawingml/2006/main">
@@ -3823,12 +2568,12 @@
           </a:p>
           <a:p xmlns:a="http://schemas.openxmlformats.org/drawingml/2006/main">
             <a:r>
-              <a:t>屏显核对：</a:t>
-            </a:r>
-          </a:p>
-          <a:p xmlns:a="http://schemas.openxmlformats.org/drawingml/2006/main">
-            <a:r>
-              <a:t>一份失败综述：</a:t>
+              <a:t>学生动作：</a:t>
+            </a:r>
+          </a:p>
+          <a:p xmlns:a="http://schemas.openxmlformats.org/drawingml/2006/main">
+            <a:r>
+              <a:t>请学生举手：你是否曾经把多篇阅读卡摘要按顺序拼接成"综述"？只统计，不点名。</a:t>
             </a:r>
           </a:p>
           <a:p xmlns:a="http://schemas.openxmlformats.org/drawingml/2006/main">
@@ -3838,7 +2583,7 @@
           </a:p>
           <a:p xmlns:a="http://schemas.openxmlformats.org/drawingml/2006/main">
             <a:r>
-              <a:t>&gt; 论文 A 提出方法 X；论文 B 提出方法 Y；论文 C 比较了 X 和 Y；论文 D 指出 X 的局限。因此 Y 较优。</a:t>
+              <a:t>课堂安排：按本稿下方 90 分钟教学路由安排；此页不另占独立时段。</a:t>
             </a:r>
           </a:p>
           <a:p xmlns:a="http://schemas.openxmlformats.org/drawingml/2006/main">
@@ -3848,32 +2593,12 @@
           </a:p>
           <a:p xmlns:a="http://schemas.openxmlformats.org/drawingml/2006/main">
             <a:r>
-              <a:t>它没说明：</a:t>
-            </a:r>
-          </a:p>
-          <a:p xmlns:a="http://schemas.openxmlformats.org/drawingml/2006/main">
-            <a:r>
-              <a:t>- 各自主张在什么条件下成立</a:t>
-            </a:r>
-          </a:p>
-          <a:p xmlns:a="http://schemas.openxmlformats.org/drawingml/2006/main">
-            <a:r>
-              <a:t>- 比较的对象、指标和设置是否一致</a:t>
-            </a:r>
-          </a:p>
-          <a:p xmlns:a="http://schemas.openxmlformats.org/drawingml/2006/main">
-            <a:r>
-              <a:t>- "较优"在哪个维度上、相对什么 baseline</a:t>
-            </a:r>
-          </a:p>
-          <a:p xmlns:a="http://schemas.openxmlformats.org/drawingml/2006/main">
-            <a:r>
-              <a:t>- 哪些主张冲突、加强或不可比</a:t>
-            </a:r>
-          </a:p>
-          <a:p xmlns:a="http://schemas.openxmlformats.org/drawingml/2006/main">
-            <a:r>
-              <a:t>- 综述本身要回答什么研究问题</a:t>
+              <a:t>[Sources]</a:t>
+            </a:r>
+          </a:p>
+          <a:p xmlns:a="http://schemas.openxmlformats.org/drawingml/2006/main">
+            <a:r>
+              <a:t>讲义 §二·1 与 §六 常见错误；[AGENTS.md](../../AGENTS.md) 证据标准。</a:t>
             </a:r>
           </a:p>
           <a:p xmlns:a="http://schemas.openxmlformats.org/drawingml/2006/main">
@@ -3883,87 +2608,7 @@
           </a:p>
           <a:p xmlns:a="http://schemas.openxmlformats.org/drawingml/2006/main">
             <a:r>
-              <a:t>&gt; 没有问题，就无法判断证据支持什么、反驳什么、缺失什么。</a:t>
-            </a:r>
-          </a:p>
-          <a:p xmlns:a="http://schemas.openxmlformats.org/drawingml/2006/main">
-            <a:r>
-              <a:t/>
-            </a:r>
-          </a:p>
-          <a:p xmlns:a="http://schemas.openxmlformats.org/drawingml/2006/main">
-            <a:r>
-              <a:t>教师讲述：</a:t>
-            </a:r>
-          </a:p>
-          <a:p xmlns:a="http://schemas.openxmlformats.org/drawingml/2006/main">
-            <a:r>
-              <a:t>暴露常见错误。摘要堆叠的根本原因是没有把综述组织在一个研究问题周围。没有问题，就无法判断哪条证据支持什么、反驳什么、缺失什么。下面几页来看怎样从研究问题出发重组阅读卡。</a:t>
-            </a:r>
-          </a:p>
-          <a:p xmlns:a="http://schemas.openxmlformats.org/drawingml/2006/main">
-            <a:r>
-              <a:t/>
-            </a:r>
-          </a:p>
-          <a:p xmlns:a="http://schemas.openxmlformats.org/drawingml/2006/main">
-            <a:r>
-              <a:t>学生动作：</a:t>
-            </a:r>
-          </a:p>
-          <a:p xmlns:a="http://schemas.openxmlformats.org/drawingml/2006/main">
-            <a:r>
-              <a:t>请学生举手：你是否曾经把多篇阅读卡摘要按顺序拼接成"综述"？只统计，不点名。</a:t>
-            </a:r>
-          </a:p>
-          <a:p xmlns:a="http://schemas.openxmlformats.org/drawingml/2006/main">
-            <a:r>
-              <a:t/>
-            </a:r>
-          </a:p>
-          <a:p xmlns:a="http://schemas.openxmlformats.org/drawingml/2006/main">
-            <a:r>
-              <a:t>来源与边界：</a:t>
-            </a:r>
-          </a:p>
-          <a:p xmlns:a="http://schemas.openxmlformats.org/drawingml/2006/main">
-            <a:r>
-              <a:t>讲义 §二·1 与 §六 常见错误；[AGENTS.md](../../AGENTS.md) 证据标准。</a:t>
-            </a:r>
-          </a:p>
-          <a:p xmlns:a="http://schemas.openxmlformats.org/drawingml/2006/main">
-            <a:r>
-              <a:t/>
-            </a:r>
-          </a:p>
-          <a:p xmlns:a="http://schemas.openxmlformats.org/drawingml/2006/main">
-            <a:r>
-              <a:t>---</a:t>
-            </a:r>
-          </a:p>
-          <a:p xmlns:a="http://schemas.openxmlformats.org/drawingml/2006/main">
-            <a:r>
-              <a:t/>
-            </a:r>
-          </a:p>
-          <a:p xmlns:a="http://schemas.openxmlformats.org/drawingml/2006/main">
-            <a:r>
-              <a:t>[Sources]</a:t>
-            </a:r>
-          </a:p>
-          <a:p xmlns:a="http://schemas.openxmlformats.org/drawingml/2006/main">
-            <a:r>
-              <a:t/>
-            </a:r>
-          </a:p>
-          <a:p xmlns:a="http://schemas.openxmlformats.org/drawingml/2006/main">
-            <a:r>
-              <a:t>- 本课 handout.md 与 slides.md</a:t>
-            </a:r>
-          </a:p>
-          <a:p xmlns:a="http://schemas.openxmlformats.org/drawingml/2006/main">
-            <a:r>
-              <a:t/>
+              <a:t>本课 handout.md、judgment-task.md；../../course/judgment-path.md。</a:t>
             </a:r>
           </a:p>
           <a:p xmlns:a="http://schemas.openxmlformats.org/drawingml/2006/main">
@@ -4048,7 +2693,12 @@
           </a:p>
           <a:p xmlns:a="http://schemas.openxmlformats.org/drawingml/2006/main">
             <a:r>
-              <a:t>讲义位置：本课讲义；见逐页母稿映射表</a:t>
+              <a:t>讲述与校准：</a:t>
+            </a:r>
+          </a:p>
+          <a:p xmlns:a="http://schemas.openxmlformats.org/drawingml/2006/main">
+            <a:r>
+              <a:t>计算机与 AI 研究中叙事性综述更常见，但系统性综述的方法约束（预先写检索式、记录命中数、显式纳入排除）可以显著降低选择性偏倚。本课不要求做完整 SLR，但要求借鉴其可复盘逻辑：综述的纳入、排除和组织方式必须能让同伴复盘你为什么这样组织。</a:t>
             </a:r>
           </a:p>
           <a:p xmlns:a="http://schemas.openxmlformats.org/drawingml/2006/main">
@@ -4058,42 +2708,12 @@
           </a:p>
           <a:p xmlns:a="http://schemas.openxmlformats.org/drawingml/2006/main">
             <a:r>
-              <a:t>屏显核对：</a:t>
-            </a:r>
-          </a:p>
-          <a:p xmlns:a="http://schemas.openxmlformats.org/drawingml/2006/main">
-            <a:r>
-              <a:t>| 维度 | 叙事性综述 | 系统性综述 |</a:t>
-            </a:r>
-          </a:p>
-          <a:p xmlns:a="http://schemas.openxmlformats.org/drawingml/2006/main">
-            <a:r>
-              <a:t>| --- | --- | --- |</a:t>
-            </a:r>
-          </a:p>
-          <a:p xmlns:a="http://schemas.openxmlformats.org/drawingml/2006/main">
-            <a:r>
-              <a:t>| 范围 | 研究者选取，可调整 | 预先定义检索式与纳入排除 |</a:t>
-            </a:r>
-          </a:p>
-          <a:p xmlns:a="http://schemas.openxmlformats.org/drawingml/2006/main">
-            <a:r>
-              <a:t>| 综合 | 按主题、机制或冲突 | 按固定字段提取，结构化合成 |</a:t>
-            </a:r>
-          </a:p>
-          <a:p xmlns:a="http://schemas.openxmlformats.org/drawingml/2006/main">
-            <a:r>
-              <a:t>| 可复现 | 取决于过程记录 | 高；他人可重现 |</a:t>
-            </a:r>
-          </a:p>
-          <a:p xmlns:a="http://schemas.openxmlformats.org/drawingml/2006/main">
-            <a:r>
-              <a:t>| 适用 | 概念厘清、方法谱系 | 实证研究证据合成 |</a:t>
-            </a:r>
-          </a:p>
-          <a:p xmlns:a="http://schemas.openxmlformats.org/drawingml/2006/main">
-            <a:r>
-              <a:t>| 风险 | 选择性引用、忽视冲突 | 机械套用、强行合并不可比研究 |</a:t>
+              <a:t>学生动作：</a:t>
+            </a:r>
+          </a:p>
+          <a:p xmlns:a="http://schemas.openxmlformats.org/drawingml/2006/main">
+            <a:r>
+              <a:t>让学生指出：你之前写的综述更接近哪一种？它过程可复盘吗？</a:t>
             </a:r>
           </a:p>
           <a:p xmlns:a="http://schemas.openxmlformats.org/drawingml/2006/main">
@@ -4103,7 +2723,7 @@
           </a:p>
           <a:p xmlns:a="http://schemas.openxmlformats.org/drawingml/2006/main">
             <a:r>
-              <a:t>&gt; CS/AI 常用叙事性综述，但系统性综述的可复盘逻辑可降低选择性偏倚。</a:t>
+              <a:t>课堂安排：按本稿下方 90 分钟教学路由安排；此页不另占独立时段。</a:t>
             </a:r>
           </a:p>
           <a:p xmlns:a="http://schemas.openxmlformats.org/drawingml/2006/main">
@@ -4113,12 +2733,12 @@
           </a:p>
           <a:p xmlns:a="http://schemas.openxmlformats.org/drawingml/2006/main">
             <a:r>
-              <a:t>教师讲述：</a:t>
-            </a:r>
-          </a:p>
-          <a:p xmlns:a="http://schemas.openxmlformats.org/drawingml/2006/main">
-            <a:r>
-              <a:t>计算机与 AI 研究中叙事性综述更常见，但系统性综述的方法约束（预先写检索式、记录命中数、显式纳入排除）可以显著降低选择性偏倚。本课不要求做完整 SLR，但要求借鉴其可复盘逻辑：综述的纳入、排除和组织方式必须能让同伴复盘你为什么这样组织。</a:t>
+              <a:t>[Sources]</a:t>
+            </a:r>
+          </a:p>
+          <a:p xmlns:a="http://schemas.openxmlformats.org/drawingml/2006/main">
+            <a:r>
+              <a:t>Kitchenham &amp; Charters, *SLR Guidelines*, EBSE-2007-01, 2007. 选读 study quality assessment、data extraction 和 synthesis（[reading-list.md](../../course/reading-list.md) 第 5 课）。</a:t>
             </a:r>
           </a:p>
           <a:p xmlns:a="http://schemas.openxmlformats.org/drawingml/2006/main">
@@ -4128,62 +2748,7 @@
           </a:p>
           <a:p xmlns:a="http://schemas.openxmlformats.org/drawingml/2006/main">
             <a:r>
-              <a:t>学生动作：</a:t>
-            </a:r>
-          </a:p>
-          <a:p xmlns:a="http://schemas.openxmlformats.org/drawingml/2006/main">
-            <a:r>
-              <a:t>让学生指出：你之前写的综述更接近哪一种？它过程可复盘吗？</a:t>
-            </a:r>
-          </a:p>
-          <a:p xmlns:a="http://schemas.openxmlformats.org/drawingml/2006/main">
-            <a:r>
-              <a:t/>
-            </a:r>
-          </a:p>
-          <a:p xmlns:a="http://schemas.openxmlformats.org/drawingml/2006/main">
-            <a:r>
-              <a:t>来源与边界：</a:t>
-            </a:r>
-          </a:p>
-          <a:p xmlns:a="http://schemas.openxmlformats.org/drawingml/2006/main">
-            <a:r>
-              <a:t>Kitchenham &amp; Charters, *SLR Guidelines*, EBSE-2007-01, 2007. 选读 study quality assessment、data extraction 和 synthesis（[reading-list.md](../../course/reading-list.md) 第 5 课）。</a:t>
-            </a:r>
-          </a:p>
-          <a:p xmlns:a="http://schemas.openxmlformats.org/drawingml/2006/main">
-            <a:r>
-              <a:t/>
-            </a:r>
-          </a:p>
-          <a:p xmlns:a="http://schemas.openxmlformats.org/drawingml/2006/main">
-            <a:r>
-              <a:t>---</a:t>
-            </a:r>
-          </a:p>
-          <a:p xmlns:a="http://schemas.openxmlformats.org/drawingml/2006/main">
-            <a:r>
-              <a:t/>
-            </a:r>
-          </a:p>
-          <a:p xmlns:a="http://schemas.openxmlformats.org/drawingml/2006/main">
-            <a:r>
-              <a:t>[Sources]</a:t>
-            </a:r>
-          </a:p>
-          <a:p xmlns:a="http://schemas.openxmlformats.org/drawingml/2006/main">
-            <a:r>
-              <a:t/>
-            </a:r>
-          </a:p>
-          <a:p xmlns:a="http://schemas.openxmlformats.org/drawingml/2006/main">
-            <a:r>
-              <a:t>- 本课 handout.md 与 slides.md</a:t>
-            </a:r>
-          </a:p>
-          <a:p xmlns:a="http://schemas.openxmlformats.org/drawingml/2006/main">
-            <a:r>
-              <a:t/>
+              <a:t>本课 handout.md、judgment-task.md；../../course/judgment-path.md。</a:t>
             </a:r>
           </a:p>
           <a:p xmlns:a="http://schemas.openxmlformats.org/drawingml/2006/main">
@@ -4268,7 +2833,12 @@
           </a:p>
           <a:p xmlns:a="http://schemas.openxmlformats.org/drawingml/2006/main">
             <a:r>
-              <a:t>讲义位置：handout.md §七、贯穿案例：从阅读卡到证据地图</a:t>
+              <a:t>讲述与校准：</a:t>
+            </a:r>
+          </a:p>
+          <a:p xmlns:a="http://schemas.openxmlformats.org/drawingml/2006/main">
+            <a:r>
+              <a:t>先让学生判断“空格能否证明没人做”。预期回答是不能，需要检索范围与筛选依据。若答“直接生成选题”，让其指出支持不存在的证据。转入候选问题前，先补一条可复盘的检索动作。</a:t>
             </a:r>
           </a:p>
           <a:p xmlns:a="http://schemas.openxmlformats.org/drawingml/2006/main">
@@ -4278,27 +2848,12 @@
           </a:p>
           <a:p xmlns:a="http://schemas.openxmlformats.org/drawingml/2006/main">
             <a:r>
-              <a:t>屏显核对：</a:t>
-            </a:r>
-          </a:p>
-          <a:p xmlns:a="http://schemas.openxmlformats.org/drawingml/2006/main">
-            <a:r>
-              <a:t>矩阵单元格为空，至少有三种可能：</a:t>
-            </a:r>
-          </a:p>
-          <a:p xmlns:a="http://schemas.openxmlformats.org/drawingml/2006/main">
-            <a:r>
-              <a:t>- 尚未检索到；</a:t>
-            </a:r>
-          </a:p>
-          <a:p xmlns:a="http://schemas.openxmlformats.org/drawingml/2006/main">
-            <a:r>
-              <a:t>- 已检索但材料不适用；</a:t>
-            </a:r>
-          </a:p>
-          <a:p xmlns:a="http://schemas.openxmlformats.org/drawingml/2006/main">
-            <a:r>
-              <a:t>- 有覆盖证据，确实缺少这一比较。</a:t>
+              <a:t>学生动作：</a:t>
+            </a:r>
+          </a:p>
+          <a:p xmlns:a="http://schemas.openxmlformats.org/drawingml/2006/main">
+            <a:r>
+              <a:t>在一个空格旁写：已查什么、还缺什么。</a:t>
             </a:r>
           </a:p>
           <a:p xmlns:a="http://schemas.openxmlformats.org/drawingml/2006/main">
@@ -4308,7 +2863,7 @@
           </a:p>
           <a:p xmlns:a="http://schemas.openxmlformats.org/drawingml/2006/main">
             <a:r>
-              <a:t>先写覆盖范围和来源，再提出空白候选。</a:t>
+              <a:t>课堂安排：按本稿下方 90 分钟教学路由安排；此页不另占独立时段。</a:t>
             </a:r>
           </a:p>
           <a:p xmlns:a="http://schemas.openxmlformats.org/drawingml/2006/main">
@@ -4318,12 +2873,12 @@
           </a:p>
           <a:p xmlns:a="http://schemas.openxmlformats.org/drawingml/2006/main">
             <a:r>
-              <a:t>教师讲述：</a:t>
-            </a:r>
-          </a:p>
-          <a:p xmlns:a="http://schemas.openxmlformats.org/drawingml/2006/main">
-            <a:r>
-              <a:t>先让学生判断“空格能否证明没人做”。预期回答是不能，需要检索范围与筛选依据。若答“直接生成选题”，让其指出支持不存在的证据。转入候选问题前，先补一条可复盘的检索动作。</a:t>
+              <a:t>[Sources]</a:t>
+            </a:r>
+          </a:p>
+          <a:p xmlns:a="http://schemas.openxmlformats.org/drawingml/2006/main">
+            <a:r>
+              <a:t>./handout.md；本页课堂判断示例不作实证结论</a:t>
             </a:r>
           </a:p>
           <a:p xmlns:a="http://schemas.openxmlformats.org/drawingml/2006/main">
@@ -4333,52 +2888,7 @@
           </a:p>
           <a:p xmlns:a="http://schemas.openxmlformats.org/drawingml/2006/main">
             <a:r>
-              <a:t>学生动作：</a:t>
-            </a:r>
-          </a:p>
-          <a:p xmlns:a="http://schemas.openxmlformats.org/drawingml/2006/main">
-            <a:r>
-              <a:t>在一个空格旁写：已查什么、还缺什么。</a:t>
-            </a:r>
-          </a:p>
-          <a:p xmlns:a="http://schemas.openxmlformats.org/drawingml/2006/main">
-            <a:r>
-              <a:t/>
-            </a:r>
-          </a:p>
-          <a:p xmlns:a="http://schemas.openxmlformats.org/drawingml/2006/main">
-            <a:r>
-              <a:t>来源与边界：</a:t>
-            </a:r>
-          </a:p>
-          <a:p xmlns:a="http://schemas.openxmlformats.org/drawingml/2006/main">
-            <a:r>
-              <a:t>./handout.md；本页课堂判断示例不作实证结论</a:t>
-            </a:r>
-          </a:p>
-          <a:p xmlns:a="http://schemas.openxmlformats.org/drawingml/2006/main">
-            <a:r>
-              <a:t/>
-            </a:r>
-          </a:p>
-          <a:p xmlns:a="http://schemas.openxmlformats.org/drawingml/2006/main">
-            <a:r>
-              <a:t>[Sources]</a:t>
-            </a:r>
-          </a:p>
-          <a:p xmlns:a="http://schemas.openxmlformats.org/drawingml/2006/main">
-            <a:r>
-              <a:t/>
-            </a:r>
-          </a:p>
-          <a:p xmlns:a="http://schemas.openxmlformats.org/drawingml/2006/main">
-            <a:r>
-              <a:t>- 本课 handout.md 与 slides.md</a:t>
-            </a:r>
-          </a:p>
-          <a:p xmlns:a="http://schemas.openxmlformats.org/drawingml/2006/main">
-            <a:r>
-              <a:t/>
+              <a:t>本课 handout.md、judgment-task.md；../../course/judgment-path.md。</a:t>
             </a:r>
           </a:p>
           <a:p xmlns:a="http://schemas.openxmlformats.org/drawingml/2006/main">
@@ -4463,7 +2973,12 @@
           </a:p>
           <a:p xmlns:a="http://schemas.openxmlformats.org/drawingml/2006/main">
             <a:r>
-              <a:t>讲义位置：本课讲义；见逐页母稿映射表</a:t>
+              <a:t>讲述与校准：</a:t>
+            </a:r>
+          </a:p>
+          <a:p xmlns:a="http://schemas.openxmlformats.org/drawingml/2006/main">
+            <a:r>
+              <a:t>第 3 课给了候选文献角色（主证据/补充/对比/探索线索）；问题门检查的是证据地图能否区分直接证据、补充证据、冲突和空白。主证据只有直接回答当前子问题时才进入直接证据视图。对比证据先记录替代解释、反例或不可比边界；只有问题、条件和指标可比且结论相反时才形成冲突。探索线索（含 AI 综述草稿、博客、issue）不进入主格。</a:t>
             </a:r>
           </a:p>
           <a:p xmlns:a="http://schemas.openxmlformats.org/drawingml/2006/main">
@@ -4473,37 +2988,7 @@
           </a:p>
           <a:p xmlns:a="http://schemas.openxmlformats.org/drawingml/2006/main">
             <a:r>
-              <a:t>屏显核对：</a:t>
-            </a:r>
-          </a:p>
-          <a:p xmlns:a="http://schemas.openxmlformats.org/drawingml/2006/main">
-            <a:r>
-              <a:t>| 视图 | 从哪里来 | 不能做 |</a:t>
-            </a:r>
-          </a:p>
-          <a:p xmlns:a="http://schemas.openxmlformats.org/drawingml/2006/main">
-            <a:r>
-              <a:t>| --- | --- | --- |</a:t>
-            </a:r>
-          </a:p>
-          <a:p xmlns:a="http://schemas.openxmlformats.org/drawingml/2006/main">
-            <a:r>
-              <a:t>| 直接证据 | 已核验主证据，直接回答当前子问题 | 不能单独支撑外推 |</a:t>
-            </a:r>
-          </a:p>
-          <a:p xmlns:a="http://schemas.openxmlformats.org/drawingml/2006/main">
-            <a:r>
-              <a:t>| 补充证据 | 不同来源、测量或路径的补充支持 | 不能替代直接证据回答核心问题 |</a:t>
-            </a:r>
-          </a:p>
-          <a:p xmlns:a="http://schemas.openxmlformats.org/drawingml/2006/main">
-            <a:r>
-              <a:t>| 冲突 | 可比条件下，对同一子问题给出相反结论 | 不能把任务/指标不同误写成冲突 |</a:t>
-            </a:r>
-          </a:p>
-          <a:p xmlns:a="http://schemas.openxmlformats.org/drawingml/2006/main">
-            <a:r>
-              <a:t>| 空白 | 当前地图没有直接回答该子问题的核验材料 | 不能直接写成"领域没人做过" |</a:t>
+              <a:t>字段说明（压备注，不上屏显）：原文位置沿用第 4 课阅读卡的定位要求；`pending` 只留线索区；`verified` 可进主格；`verified-with-caveat` 可进主格，但必须保留限定且不得单独支撑 `stable`；`rejected` 仅留审计记录。</a:t>
             </a:r>
           </a:p>
           <a:p xmlns:a="http://schemas.openxmlformats.org/drawingml/2006/main">
@@ -4513,7 +2998,12 @@
           </a:p>
           <a:p xmlns:a="http://schemas.openxmlformats.org/drawingml/2006/main">
             <a:r>
-              <a:t>对比证据先保留替代解释或不可比边界；只有条件可比且结论相反时才形成冲突。探索线索不进入主格。</a:t>
+              <a:t>学生动作：</a:t>
+            </a:r>
+          </a:p>
+          <a:p xmlns:a="http://schemas.openxmlformats.org/drawingml/2006/main">
+            <a:r>
+              <a:t>让学生指出：你目前的材料里，哪条是主证据？哪条是对比证据？有没有冲突被你悄悄取舍过？</a:t>
             </a:r>
           </a:p>
           <a:p xmlns:a="http://schemas.openxmlformats.org/drawingml/2006/main">
@@ -4523,7 +3013,7 @@
           </a:p>
           <a:p xmlns:a="http://schemas.openxmlformats.org/drawingml/2006/main">
             <a:r>
-              <a:t>最小字段：`编号 | 子问题 | 文献 | 原文位置 | 主张 | 证据角色 | 冲突/局限 | 核验状态`</a:t>
+              <a:t>课堂安排：按本稿下方 90 分钟教学路由安排；此页不另占独立时段。</a:t>
             </a:r>
           </a:p>
           <a:p xmlns:a="http://schemas.openxmlformats.org/drawingml/2006/main">
@@ -4533,7 +3023,12 @@
           </a:p>
           <a:p xmlns:a="http://schemas.openxmlformats.org/drawingml/2006/main">
             <a:r>
-              <a:t>&gt; 证据地图是研究者内部工件，服务于问题判断与问题门检查。</a:t>
+              <a:t>[Sources]</a:t>
+            </a:r>
+          </a:p>
+          <a:p xmlns:a="http://schemas.openxmlformats.org/drawingml/2006/main">
+            <a:r>
+              <a:t>讲义 §三·1 证据地图四视图、§三·2 最小字段、§三·3；[assignments.md](../../course/assignments.md) Checkpoint 1；[AGENTS.md](../../AGENTS.md) 证据标准；第 4 课阅读卡定位要求。</a:t>
             </a:r>
           </a:p>
           <a:p xmlns:a="http://schemas.openxmlformats.org/drawingml/2006/main">
@@ -4543,87 +3038,7 @@
           </a:p>
           <a:p xmlns:a="http://schemas.openxmlformats.org/drawingml/2006/main">
             <a:r>
-              <a:t>教师讲述：</a:t>
-            </a:r>
-          </a:p>
-          <a:p xmlns:a="http://schemas.openxmlformats.org/drawingml/2006/main">
-            <a:r>
-              <a:t>第 3 课给了候选文献角色（主证据/补充/对比/探索线索）；问题门检查的是证据地图能否区分直接证据、补充证据、冲突和空白。主证据只有直接回答当前子问题时才进入直接证据视图。对比证据先记录替代解释、反例或不可比边界；只有问题、条件和指标可比且结论相反时才形成冲突。探索线索（含 AI 综述草稿、博客、issue）不进入主格。</a:t>
-            </a:r>
-          </a:p>
-          <a:p xmlns:a="http://schemas.openxmlformats.org/drawingml/2006/main">
-            <a:r>
-              <a:t/>
-            </a:r>
-          </a:p>
-          <a:p xmlns:a="http://schemas.openxmlformats.org/drawingml/2006/main">
-            <a:r>
-              <a:t>字段说明（压备注，不上屏显）：原文位置沿用第 4 课阅读卡的定位要求；`pending` 只留线索区；`verified` 可进主格；`verified-with-caveat` 可进主格，但必须保留限定且不得单独支撑 `stable`；`rejected` 仅留审计记录。</a:t>
-            </a:r>
-          </a:p>
-          <a:p xmlns:a="http://schemas.openxmlformats.org/drawingml/2006/main">
-            <a:r>
-              <a:t/>
-            </a:r>
-          </a:p>
-          <a:p xmlns:a="http://schemas.openxmlformats.org/drawingml/2006/main">
-            <a:r>
-              <a:t>学生动作：</a:t>
-            </a:r>
-          </a:p>
-          <a:p xmlns:a="http://schemas.openxmlformats.org/drawingml/2006/main">
-            <a:r>
-              <a:t>让学生指出：你目前的材料里，哪条是主证据？哪条是对比证据？有没有冲突被你悄悄取舍过？</a:t>
-            </a:r>
-          </a:p>
-          <a:p xmlns:a="http://schemas.openxmlformats.org/drawingml/2006/main">
-            <a:r>
-              <a:t/>
-            </a:r>
-          </a:p>
-          <a:p xmlns:a="http://schemas.openxmlformats.org/drawingml/2006/main">
-            <a:r>
-              <a:t>来源与边界：</a:t>
-            </a:r>
-          </a:p>
-          <a:p xmlns:a="http://schemas.openxmlformats.org/drawingml/2006/main">
-            <a:r>
-              <a:t>讲义 §三·1 证据地图四视图、§三·2 最小字段、§三·3；[assignments.md](../../course/assignments.md) Checkpoint 1；[AGENTS.md](../../AGENTS.md) 证据标准；第 4 课阅读卡定位要求。</a:t>
-            </a:r>
-          </a:p>
-          <a:p xmlns:a="http://schemas.openxmlformats.org/drawingml/2006/main">
-            <a:r>
-              <a:t/>
-            </a:r>
-          </a:p>
-          <a:p xmlns:a="http://schemas.openxmlformats.org/drawingml/2006/main">
-            <a:r>
-              <a:t>---</a:t>
-            </a:r>
-          </a:p>
-          <a:p xmlns:a="http://schemas.openxmlformats.org/drawingml/2006/main">
-            <a:r>
-              <a:t/>
-            </a:r>
-          </a:p>
-          <a:p xmlns:a="http://schemas.openxmlformats.org/drawingml/2006/main">
-            <a:r>
-              <a:t>[Sources]</a:t>
-            </a:r>
-          </a:p>
-          <a:p xmlns:a="http://schemas.openxmlformats.org/drawingml/2006/main">
-            <a:r>
-              <a:t/>
-            </a:r>
-          </a:p>
-          <a:p xmlns:a="http://schemas.openxmlformats.org/drawingml/2006/main">
-            <a:r>
-              <a:t>- 本课 handout.md 与 slides.md</a:t>
-            </a:r>
-          </a:p>
-          <a:p xmlns:a="http://schemas.openxmlformats.org/drawingml/2006/main">
-            <a:r>
-              <a:t/>
+              <a:t>本课 handout.md、judgment-task.md；../../course/judgment-path.md。</a:t>
             </a:r>
           </a:p>
           <a:p xmlns:a="http://schemas.openxmlformats.org/drawingml/2006/main">
@@ -4708,7 +3123,12 @@
           </a:p>
           <a:p xmlns:a="http://schemas.openxmlformats.org/drawingml/2006/main">
             <a:r>
-              <a:t>讲义位置：本课讲义；见逐页母稿映射表</a:t>
+              <a:t>讲述与校准：</a:t>
+            </a:r>
+          </a:p>
+          <a:p xmlns:a="http://schemas.openxmlformats.org/drawingml/2006/main">
+            <a:r>
+              <a:t>研究空白必须能被表述为：在某个具体条件、对照或机制下，已有证据不能回答的问题，并且这个问题值得回答、能在课程周期内做出最小验证。三类空白的识别方法不同：冲突空白看地图里同一子问题是否有相反回答；缺角空白看矩阵是否有整列空白；新问题空白从对比证据的局限或第一性原理反推。</a:t>
             </a:r>
           </a:p>
           <a:p xmlns:a="http://schemas.openxmlformats.org/drawingml/2006/main">
@@ -4718,32 +3138,12 @@
           </a:p>
           <a:p xmlns:a="http://schemas.openxmlformats.org/drawingml/2006/main">
             <a:r>
-              <a:t>屏显核对：</a:t>
-            </a:r>
-          </a:p>
-          <a:p xmlns:a="http://schemas.openxmlformats.org/drawingml/2006/main">
-            <a:r>
-              <a:t>| 类型 | 定义 | 识别方法 |</a:t>
-            </a:r>
-          </a:p>
-          <a:p xmlns:a="http://schemas.openxmlformats.org/drawingml/2006/main">
-            <a:r>
-              <a:t>| --- | --- | --- |</a:t>
-            </a:r>
-          </a:p>
-          <a:p xmlns:a="http://schemas.openxmlformats.org/drawingml/2006/main">
-            <a:r>
-              <a:t>| 冲突空白 | 已有证据对同一问题给出相反结论，且差异未被解释 | 地图中主证据与对比证据对同一子问题给出不同回答 |</a:t>
-            </a:r>
-          </a:p>
-          <a:p xmlns:a="http://schemas.openxmlformats.org/drawingml/2006/main">
-            <a:r>
-              <a:t>| 缺角空白 | 某子问题整列空白，但相关条件已具备 | 相关工作矩阵整列空白，相邻子问题已有材料 |</a:t>
-            </a:r>
-          </a:p>
-          <a:p xmlns:a="http://schemas.openxmlformats.org/drawingml/2006/main">
-            <a:r>
-              <a:t>| 新问题空白 | 由新场景、新条件或新机制衍生 | 从对比证据的局限、新数据条件或第一性原理反推 |</a:t>
+              <a:t>学生动作：</a:t>
+            </a:r>
+          </a:p>
+          <a:p xmlns:a="http://schemas.openxmlformats.org/drawingml/2006/main">
+            <a:r>
+              <a:t>让学生指出：你目前的矩阵里，哪一列最可能是空白候选？属于哪一类？</a:t>
             </a:r>
           </a:p>
           <a:p xmlns:a="http://schemas.openxmlformats.org/drawingml/2006/main">
@@ -4753,7 +3153,7 @@
           </a:p>
           <a:p xmlns:a="http://schemas.openxmlformats.org/drawingml/2006/main">
             <a:r>
-              <a:t>&gt; "还没有论文写过"不等于"这是一个真实的研究空白"。</a:t>
+              <a:t>课堂安排：按本稿下方 90 分钟教学路由安排；此页不另占独立时段。</a:t>
             </a:r>
           </a:p>
           <a:p xmlns:a="http://schemas.openxmlformats.org/drawingml/2006/main">
@@ -4763,12 +3163,12 @@
           </a:p>
           <a:p xmlns:a="http://schemas.openxmlformats.org/drawingml/2006/main">
             <a:r>
-              <a:t>教师讲述：</a:t>
-            </a:r>
-          </a:p>
-          <a:p xmlns:a="http://schemas.openxmlformats.org/drawingml/2006/main">
-            <a:r>
-              <a:t>研究空白必须能被表述为：在某个具体条件、对照或机制下，已有证据不能回答的问题，并且这个问题值得回答、能在课程周期内做出最小验证。三类空白的识别方法不同：冲突空白看地图里同一子问题是否有相反回答；缺角空白看矩阵是否有整列空白；新问题空白从对比证据的局限或第一性原理反推。</a:t>
+              <a:t>[Sources]</a:t>
+            </a:r>
+          </a:p>
+          <a:p xmlns:a="http://schemas.openxmlformats.org/drawingml/2006/main">
+            <a:r>
+              <a:t>讲义 §四·2 三类研究空白。</a:t>
             </a:r>
           </a:p>
           <a:p xmlns:a="http://schemas.openxmlformats.org/drawingml/2006/main">
@@ -4778,62 +3178,7 @@
           </a:p>
           <a:p xmlns:a="http://schemas.openxmlformats.org/drawingml/2006/main">
             <a:r>
-              <a:t>学生动作：</a:t>
-            </a:r>
-          </a:p>
-          <a:p xmlns:a="http://schemas.openxmlformats.org/drawingml/2006/main">
-            <a:r>
-              <a:t>让学生指出：你目前的矩阵里，哪一列最可能是空白候选？属于哪一类？</a:t>
-            </a:r>
-          </a:p>
-          <a:p xmlns:a="http://schemas.openxmlformats.org/drawingml/2006/main">
-            <a:r>
-              <a:t/>
-            </a:r>
-          </a:p>
-          <a:p xmlns:a="http://schemas.openxmlformats.org/drawingml/2006/main">
-            <a:r>
-              <a:t>来源与边界：</a:t>
-            </a:r>
-          </a:p>
-          <a:p xmlns:a="http://schemas.openxmlformats.org/drawingml/2006/main">
-            <a:r>
-              <a:t>讲义 §四·2 三类研究空白。</a:t>
-            </a:r>
-          </a:p>
-          <a:p xmlns:a="http://schemas.openxmlformats.org/drawingml/2006/main">
-            <a:r>
-              <a:t/>
-            </a:r>
-          </a:p>
-          <a:p xmlns:a="http://schemas.openxmlformats.org/drawingml/2006/main">
-            <a:r>
-              <a:t>---</a:t>
-            </a:r>
-          </a:p>
-          <a:p xmlns:a="http://schemas.openxmlformats.org/drawingml/2006/main">
-            <a:r>
-              <a:t/>
-            </a:r>
-          </a:p>
-          <a:p xmlns:a="http://schemas.openxmlformats.org/drawingml/2006/main">
-            <a:r>
-              <a:t>[Sources]</a:t>
-            </a:r>
-          </a:p>
-          <a:p xmlns:a="http://schemas.openxmlformats.org/drawingml/2006/main">
-            <a:r>
-              <a:t/>
-            </a:r>
-          </a:p>
-          <a:p xmlns:a="http://schemas.openxmlformats.org/drawingml/2006/main">
-            <a:r>
-              <a:t>- 本课 handout.md 与 slides.md</a:t>
-            </a:r>
-          </a:p>
-          <a:p xmlns:a="http://schemas.openxmlformats.org/drawingml/2006/main">
-            <a:r>
-              <a:t/>
+              <a:t>本课 handout.md、judgment-task.md；../../course/judgment-path.md。</a:t>
             </a:r>
           </a:p>
           <a:p xmlns:a="http://schemas.openxmlformats.org/drawingml/2006/main">
@@ -4918,7 +3263,12 @@
           </a:p>
           <a:p xmlns:a="http://schemas.openxmlformats.org/drawingml/2006/main">
             <a:r>
-              <a:t>讲义位置：本课讲义；见逐页母稿映射表</a:t>
+              <a:t>讲述与校准：</a:t>
+            </a:r>
+          </a:p>
+          <a:p xmlns:a="http://schemas.openxmlformats.org/drawingml/2006/main">
+            <a:r>
+              <a:t>上一页的三类空白都是文献驱动路径的产物。如果问题只从"关键词 → 找论文 → 找空白"产生，项目容易在文献既有框架里打转。Qian 总结的六种构思模式（填空、扩展、造锤找钉、小处泛化、复现前作、外部来源）里，"表格空位"只是其中一种。本课结束前把空白候选与非文献路径候选集中为候选题池：≥3 个候选、覆盖 ≥2 条路径、≥1 个来自异常观察或实践痛点；当堂最低只记 1 个候选题的表述与路径标签，完整题池与三步检验一样第 6 课前补齐，第 6 课用四维选题标准卡比较筛选。</a:t>
             </a:r>
           </a:p>
           <a:p xmlns:a="http://schemas.openxmlformats.org/drawingml/2006/main">
@@ -4928,12 +3278,12 @@
           </a:p>
           <a:p xmlns:a="http://schemas.openxmlformats.org/drawingml/2006/main">
             <a:r>
-              <a:t>屏显核对：</a:t>
-            </a:r>
-          </a:p>
-          <a:p xmlns:a="http://schemas.openxmlformats.org/drawingml/2006/main">
-            <a:r>
-              <a:t>三类空白是文献路径的产物；问题还可以来自文献之外：</a:t>
+              <a:t>学生动作：</a:t>
+            </a:r>
+          </a:p>
+          <a:p xmlns:a="http://schemas.openxmlformats.org/drawingml/2006/main">
+            <a:r>
+              <a:t>请学生回答：除文献空白外，你见过的问题来自哪条生成路径？只听回答，不评价。</a:t>
             </a:r>
           </a:p>
           <a:p xmlns:a="http://schemas.openxmlformats.org/drawingml/2006/main">
@@ -4943,42 +3293,7 @@
           </a:p>
           <a:p xmlns:a="http://schemas.openxmlformats.org/drawingml/2006/main">
             <a:r>
-              <a:t>| 生成路径 | 典型形态 | 检索的角色 |</a:t>
-            </a:r>
-          </a:p>
-          <a:p xmlns:a="http://schemas.openxmlformats.org/drawingml/2006/main">
-            <a:r>
-              <a:t>| --- | --- | --- |</a:t>
-            </a:r>
-          </a:p>
-          <a:p xmlns:a="http://schemas.openxmlformats.org/drawingml/2006/main">
-            <a:r>
-              <a:t>| 文献冲突/缺口 | 证据矛盾或无回答 | 确认空白真实 |</a:t>
-            </a:r>
-          </a:p>
-          <a:p xmlns:a="http://schemas.openxmlformats.org/drawingml/2006/main">
-            <a:r>
-              <a:t>| 异常观察 | 观察与预期不符 | 检验是否已被解释 |</a:t>
-            </a:r>
-          </a:p>
-          <a:p xmlns:a="http://schemas.openxmlformats.org/drawingml/2006/main">
-            <a:r>
-              <a:t>| 实践痛点 | 自己遇到的一手问题 | 检验是否已有解法 |</a:t>
-            </a:r>
-          </a:p>
-          <a:p xmlns:a="http://schemas.openxmlformats.org/drawingml/2006/main">
-            <a:r>
-              <a:t>| 新条件失效 | 新能力/数据使旧假设失效 | 检验旧结论的假设 |</a:t>
-            </a:r>
-          </a:p>
-          <a:p xmlns:a="http://schemas.openxmlformats.org/drawingml/2006/main">
-            <a:r>
-              <a:t>| 第一性原理反推 | 必要条件与现状对照 | 检验推导前提 |</a:t>
-            </a:r>
-          </a:p>
-          <a:p xmlns:a="http://schemas.openxmlformats.org/drawingml/2006/main">
-            <a:r>
-              <a:t>| 重构/迁移 | 换问法、移植机制 | 检验新提法是否真新 |</a:t>
+              <a:t>课堂安排：按本稿下方 90 分钟教学路由安排；此页不另占独立时段。</a:t>
             </a:r>
           </a:p>
           <a:p xmlns:a="http://schemas.openxmlformats.org/drawingml/2006/main">
@@ -4988,7 +3303,12 @@
           </a:p>
           <a:p xmlns:a="http://schemas.openxmlformats.org/drawingml/2006/main">
             <a:r>
-              <a:t>候选题池（第 6 课前补齐）：≥3 个候选题，每个记表述 + 路径标签 + 当前证据；覆盖 ≥2 条路径，其中 ≥1 个非文献空白路径。当堂先记 1 个候选题的表述与路径标签。</a:t>
+              <a:t>[Sources]</a:t>
+            </a:r>
+          </a:p>
+          <a:p xmlns:a="http://schemas.openxmlformats.org/drawingml/2006/main">
+            <a:r>
+              <a:t>讲义 §四·1、§四·4；Qian, Z. *How to Look for Ideas in Computer Science Research*（第 5 课课堂案例，六种构思模式）。</a:t>
             </a:r>
           </a:p>
           <a:p xmlns:a="http://schemas.openxmlformats.org/drawingml/2006/main">
@@ -4998,87 +3318,7 @@
           </a:p>
           <a:p xmlns:a="http://schemas.openxmlformats.org/drawingml/2006/main">
             <a:r>
-              <a:t>&gt; 检索用来检验问题，不是生成问题。</a:t>
-            </a:r>
-          </a:p>
-          <a:p xmlns:a="http://schemas.openxmlformats.org/drawingml/2006/main">
-            <a:r>
-              <a:t/>
-            </a:r>
-          </a:p>
-          <a:p xmlns:a="http://schemas.openxmlformats.org/drawingml/2006/main">
-            <a:r>
-              <a:t>教师讲述：</a:t>
-            </a:r>
-          </a:p>
-          <a:p xmlns:a="http://schemas.openxmlformats.org/drawingml/2006/main">
-            <a:r>
-              <a:t>上一页的三类空白都是文献驱动路径的产物。如果问题只从"关键词 → 找论文 → 找空白"产生，项目容易在文献既有框架里打转。Qian 总结的六种构思模式（填空、扩展、造锤找钉、小处泛化、复现前作、外部来源）里，"表格空位"只是其中一种。本课结束前把空白候选与非文献路径候选集中为候选题池：≥3 个候选、覆盖 ≥2 条路径、≥1 个来自异常观察或实践痛点；当堂最低只记 1 个候选题的表述与路径标签，完整题池与三步检验一样第 6 课前补齐，第 6 课用四维选题标准卡比较筛选。</a:t>
-            </a:r>
-          </a:p>
-          <a:p xmlns:a="http://schemas.openxmlformats.org/drawingml/2006/main">
-            <a:r>
-              <a:t/>
-            </a:r>
-          </a:p>
-          <a:p xmlns:a="http://schemas.openxmlformats.org/drawingml/2006/main">
-            <a:r>
-              <a:t>学生动作：</a:t>
-            </a:r>
-          </a:p>
-          <a:p xmlns:a="http://schemas.openxmlformats.org/drawingml/2006/main">
-            <a:r>
-              <a:t>请学生回答：除文献空白外，你见过的问题来自哪条生成路径？只听回答，不评价。</a:t>
-            </a:r>
-          </a:p>
-          <a:p xmlns:a="http://schemas.openxmlformats.org/drawingml/2006/main">
-            <a:r>
-              <a:t/>
-            </a:r>
-          </a:p>
-          <a:p xmlns:a="http://schemas.openxmlformats.org/drawingml/2006/main">
-            <a:r>
-              <a:t>来源与边界：</a:t>
-            </a:r>
-          </a:p>
-          <a:p xmlns:a="http://schemas.openxmlformats.org/drawingml/2006/main">
-            <a:r>
-              <a:t>讲义 §四·1、§四·4；Qian, Z. *How to Look for Ideas in Computer Science Research*（第 5 课课堂案例，六种构思模式）。</a:t>
-            </a:r>
-          </a:p>
-          <a:p xmlns:a="http://schemas.openxmlformats.org/drawingml/2006/main">
-            <a:r>
-              <a:t/>
-            </a:r>
-          </a:p>
-          <a:p xmlns:a="http://schemas.openxmlformats.org/drawingml/2006/main">
-            <a:r>
-              <a:t>---</a:t>
-            </a:r>
-          </a:p>
-          <a:p xmlns:a="http://schemas.openxmlformats.org/drawingml/2006/main">
-            <a:r>
-              <a:t/>
-            </a:r>
-          </a:p>
-          <a:p xmlns:a="http://schemas.openxmlformats.org/drawingml/2006/main">
-            <a:r>
-              <a:t>[Sources]</a:t>
-            </a:r>
-          </a:p>
-          <a:p xmlns:a="http://schemas.openxmlformats.org/drawingml/2006/main">
-            <a:r>
-              <a:t/>
-            </a:r>
-          </a:p>
-          <a:p xmlns:a="http://schemas.openxmlformats.org/drawingml/2006/main">
-            <a:r>
-              <a:t>- 本课 handout.md 与 slides.md</a:t>
-            </a:r>
-          </a:p>
-          <a:p xmlns:a="http://schemas.openxmlformats.org/drawingml/2006/main">
-            <a:r>
-              <a:t/>
+              <a:t>本课 handout.md、judgment-task.md；../../course/judgment-path.md。</a:t>
             </a:r>
           </a:p>
           <a:p xmlns:a="http://schemas.openxmlformats.org/drawingml/2006/main">
@@ -13634,34 +11874,55 @@
       </p:grpSpPr>
       <p:sp>
         <p:nvSpPr>
-          <p:cNvPr id="4" name="Text Placeholder 3">
-            <a:extLst xmlns:a="http://schemas.openxmlformats.org/drawingml/2006/main">
-              <a:ext uri="{FF2B5EF4-FFF2-40B4-BE49-F238E27FC236}">
-                <a16:creationId xmlns:a16="http://schemas.microsoft.com/office/drawing/2014/main" id="{4D941B40-7A0A-534E-3563-CA11753C8E3F}"/>
-              </a:ext>
-            </a:extLst>
-          </p:cNvPr>
-          <p:cNvSpPr>
-            <a:spLocks xmlns:a="http://schemas.openxmlformats.org/drawingml/2006/main" noGrp="1"/>
-          </p:cNvSpPr>
-          <p:nvPr>
-            <p:ph type="body" idx="14"/>
-          </p:nvPr>
-        </p:nvSpPr>
-        <p:spPr>
-          <a:xfrm xmlns:a="http://schemas.openxmlformats.org/drawingml/2006/main">
-            <a:off x="1028700" y="28575"/>
-            <a:ext cx="10668000" cy="628650"/>
-          </a:xfrm>
-        </p:spPr>
-        <p:txBody>
-          <a:bodyPr xmlns:a="http://schemas.openxmlformats.org/drawingml/2006/main" lIns="0" tIns="0" rIns="0" bIns="0" anchor="ctr">
-            <a:noAutofit/>
-          </a:bodyPr>
-          <a:lstStyle xmlns:a="http://schemas.openxmlformats.org/drawingml/2006/main"/>
-          <a:p xmlns:a="http://schemas.openxmlformats.org/drawingml/2006/main">
-            <a:pPr algn="l">
-              <a:buNone/>
+          <p:cNvPr id="7" name="judgment-title">
+            <a:extLst xmlns:a="http://schemas.openxmlformats.org/drawingml/2006/main">
+              <a:ext uri="{FF2B5EF4-FFF2-40B4-BE49-F238E27FC236}">
+                <a16:creationId xmlns:a16="http://schemas.microsoft.com/office/drawing/2014/main" id="{67CE4EBC-2EA8-48E5-9325-2393E5269141}"/>
+              </a:ext>
+            </a:extLst>
+          </p:cNvPr>
+          <p:cNvSpPr>
+            <a:spLocks xmlns:a="http://schemas.openxmlformats.org/drawingml/2006/main" noGrp="1"/>
+          </p:cNvSpPr>
+          <p:nvPr/>
+        </p:nvSpPr>
+        <p:spPr>
+          <a:xfrm xmlns:a="http://schemas.openxmlformats.org/drawingml/2006/main">
+            <a:off x="1028700" y="76200"/>
+            <a:ext cx="10687050" cy="514350"/>
+          </a:xfrm>
+          <a:prstGeom xmlns:a="http://schemas.openxmlformats.org/drawingml/2006/main" prst="rect">
+            <a:avLst/>
+          </a:prstGeom>
+          <a:noFill xmlns:a="http://schemas.openxmlformats.org/drawingml/2006/main"/>
+          <a:ln xmlns:a="http://schemas.openxmlformats.org/drawingml/2006/main" w="0">
+            <a:noFill/>
+          </a:ln>
+        </p:spPr>
+        <p:txBody>
+          <a:bodyPr xmlns:a="http://schemas.openxmlformats.org/drawingml/2006/main" lIns="0" tIns="0" rIns="0" bIns="0" anchor="t"/>
+          <a:lstStyle xmlns:a="http://schemas.openxmlformats.org/drawingml/2006/main">
+            <a:defPPr algn="l">
+              <a:defRPr sz="3000" b="1">
+                <a:solidFill>
+                  <a:srgbClr val="FFFFFF"/>
+                </a:solidFill>
+                <a:latin typeface="微软雅黑"/>
+                <a:ea typeface="微软雅黑"/>
+                <a:cs typeface="微软雅黑"/>
+              </a:defRPr>
+            </a:defPPr>
+          </a:lstStyle>
+          <a:p xmlns:a="http://schemas.openxmlformats.org/drawingml/2006/main">
+            <a:pPr algn="l">
+              <a:defRPr sz="3000" b="1">
+                <a:solidFill>
+                  <a:srgbClr val="FFFFFF"/>
+                </a:solidFill>
+                <a:latin typeface="微软雅黑"/>
+                <a:ea typeface="微软雅黑"/>
+                <a:cs typeface="微软雅黑"/>
+              </a:defRPr>
             </a:pPr>
             <a:r>
               <a:rPr sz="3000" b="1">
@@ -13672,951 +11933,337 @@
                 <a:ea typeface="微软雅黑"/>
                 <a:cs typeface="微软雅黑"/>
               </a:rPr>
-              <a:t>个人实践：跑通一次综述结构重组</a:t>
-            </a:r>
-            <a:endParaRPr/>
-          </a:p>
-        </p:txBody>
-      </p:sp>
-      <p:sp>
-        <p:nvSpPr>
-          <p:cNvPr id="5" name="Slide Number Placeholder 4">
-            <a:extLst xmlns:a="http://schemas.openxmlformats.org/drawingml/2006/main">
-              <a:ext uri="{FF2B5EF4-FFF2-40B4-BE49-F238E27FC236}">
-                <a16:creationId xmlns:a16="http://schemas.microsoft.com/office/drawing/2014/main" id="{EBA5909F-738E-F60C-BE8C-B3F1D94548E5}"/>
-              </a:ext>
-            </a:extLst>
-          </p:cNvPr>
-          <p:cNvSpPr>
-            <a:spLocks xmlns:a="http://schemas.openxmlformats.org/drawingml/2006/main" noGrp="1"/>
-          </p:cNvSpPr>
-          <p:nvPr>
-            <p:ph type="sldNum" idx="10"/>
-          </p:nvPr>
-        </p:nvSpPr>
-        <p:spPr/>
-        <p:txBody>
-          <a:bodyPr xmlns:a="http://schemas.openxmlformats.org/drawingml/2006/main"/>
-          <a:lstStyle xmlns:a="http://schemas.openxmlformats.org/drawingml/2006/main"/>
-          <a:p xmlns:a="http://schemas.openxmlformats.org/drawingml/2006/main">
-            <a:fld id="{90F7333B-44AC-F7E9-D49D-FE92F45E0477}" type="slidenum">
+              <a:t>本人项目：决定、核验与回写</a:t>
+            </a:r>
+          </a:p>
+        </p:txBody>
+      </p:sp>
+      <p:sp>
+        <p:nvSpPr>
+          <p:cNvPr id="2" name="judgment-body-0">
+            <a:extLst xmlns:a="http://schemas.openxmlformats.org/drawingml/2006/main">
+              <a:ext uri="{FF2B5EF4-FFF2-40B4-BE49-F238E27FC236}">
+                <a16:creationId xmlns:a16="http://schemas.microsoft.com/office/drawing/2014/main" id="{6B603CE4-7483-4327-A6A2-8D1658D42FB9}"/>
+              </a:ext>
+            </a:extLst>
+          </p:cNvPr>
+          <p:cNvSpPr>
+            <a:spLocks xmlns:a="http://schemas.openxmlformats.org/drawingml/2006/main" noGrp="1"/>
+          </p:cNvSpPr>
+          <p:nvPr/>
+        </p:nvSpPr>
+        <p:spPr>
+          <a:xfrm xmlns:a="http://schemas.openxmlformats.org/drawingml/2006/main">
+            <a:off x="666750" y="1066800"/>
+            <a:ext cx="10858500" cy="1476375"/>
+          </a:xfrm>
+          <a:prstGeom xmlns:a="http://schemas.openxmlformats.org/drawingml/2006/main" prst="rect">
+            <a:avLst/>
+          </a:prstGeom>
+          <a:noFill xmlns:a="http://schemas.openxmlformats.org/drawingml/2006/main"/>
+          <a:ln xmlns:a="http://schemas.openxmlformats.org/drawingml/2006/main" w="0">
+            <a:noFill/>
+          </a:ln>
+        </p:spPr>
+        <p:txBody>
+          <a:bodyPr xmlns:a="http://schemas.openxmlformats.org/drawingml/2006/main" lIns="0" tIns="0" rIns="0" bIns="0" anchor="t"/>
+          <a:lstStyle xmlns:a="http://schemas.openxmlformats.org/drawingml/2006/main">
+            <a:defPPr algn="l">
+              <a:defRPr sz="2400" b="0">
+                <a:solidFill>
+                  <a:srgbClr val="263746"/>
+                </a:solidFill>
+                <a:latin typeface="微软雅黑"/>
+                <a:ea typeface="微软雅黑"/>
+                <a:cs typeface="微软雅黑"/>
+              </a:defRPr>
+            </a:defPPr>
+          </a:lstStyle>
+          <a:p xmlns:a="http://schemas.openxmlformats.org/drawingml/2006/main">
+            <a:pPr algn="l">
+              <a:defRPr sz="2400" b="0">
+                <a:solidFill>
+                  <a:srgbClr val="263746"/>
+                </a:solidFill>
+                <a:latin typeface="微软雅黑"/>
+                <a:ea typeface="微软雅黑"/>
+                <a:cs typeface="微软雅黑"/>
+              </a:defRPr>
+            </a:pPr>
+            <a:r>
+              <a:rPr sz="2400" b="0">
+                <a:solidFill>
+                  <a:srgbClr val="263746"/>
+                </a:solidFill>
+                <a:latin typeface="微软雅黑"/>
+                <a:ea typeface="微软雅黑"/>
+                <a:cs typeface="微软雅黑"/>
+              </a:rPr>
+              <a:t>把已有卡与第二项来源按相同主张对齐，完成第二张精读卡；在同一矩阵标条件差异、支持/冲突和缺证，写一段受限综合与候选问题。</a:t>
+            </a:r>
+          </a:p>
+        </p:txBody>
+      </p:sp>
+      <p:sp>
+        <p:nvSpPr>
+          <p:cNvPr id="3" name="judgment-body-1">
+            <a:extLst xmlns:a="http://schemas.openxmlformats.org/drawingml/2006/main">
+              <a:ext uri="{FF2B5EF4-FFF2-40B4-BE49-F238E27FC236}">
+                <a16:creationId xmlns:a16="http://schemas.microsoft.com/office/drawing/2014/main" id="{FD32002D-2DD8-42B9-A36D-21968E4837E2}"/>
+              </a:ext>
+            </a:extLst>
+          </p:cNvPr>
+          <p:cNvSpPr>
+            <a:spLocks xmlns:a="http://schemas.openxmlformats.org/drawingml/2006/main" noGrp="1"/>
+          </p:cNvSpPr>
+          <p:nvPr/>
+        </p:nvSpPr>
+        <p:spPr>
+          <a:xfrm xmlns:a="http://schemas.openxmlformats.org/drawingml/2006/main">
+            <a:off x="666750" y="2724150"/>
+            <a:ext cx="10858500" cy="1524000"/>
+          </a:xfrm>
+          <a:prstGeom xmlns:a="http://schemas.openxmlformats.org/drawingml/2006/main" prst="rect">
+            <a:avLst/>
+          </a:prstGeom>
+          <a:noFill xmlns:a="http://schemas.openxmlformats.org/drawingml/2006/main"/>
+          <a:ln xmlns:a="http://schemas.openxmlformats.org/drawingml/2006/main" w="0">
+            <a:noFill/>
+          </a:ln>
+        </p:spPr>
+        <p:txBody>
+          <a:bodyPr xmlns:a="http://schemas.openxmlformats.org/drawingml/2006/main" lIns="0" tIns="0" rIns="0" bIns="0" anchor="t"/>
+          <a:lstStyle xmlns:a="http://schemas.openxmlformats.org/drawingml/2006/main">
+            <a:defPPr algn="l">
+              <a:defRPr sz="2400" b="0">
+                <a:solidFill>
+                  <a:srgbClr val="263746"/>
+                </a:solidFill>
+                <a:latin typeface="微软雅黑"/>
+                <a:ea typeface="微软雅黑"/>
+                <a:cs typeface="微软雅黑"/>
+              </a:defRPr>
+            </a:defPPr>
+          </a:lstStyle>
+          <a:p xmlns:a="http://schemas.openxmlformats.org/drawingml/2006/main">
+            <a:pPr algn="l">
+              <a:defRPr sz="2400" b="0">
+                <a:solidFill>
+                  <a:srgbClr val="263746"/>
+                </a:solidFill>
+                <a:latin typeface="微软雅黑"/>
+                <a:ea typeface="微软雅黑"/>
+                <a:cs typeface="微软雅黑"/>
+              </a:defRPr>
+            </a:pPr>
+            <a:r>
+              <a:rPr sz="2400" b="0">
+                <a:solidFill>
+                  <a:srgbClr val="263746"/>
+                </a:solidFill>
+                <a:latin typeface="微软雅黑"/>
+                <a:ea typeface="微软雅黑"/>
+                <a:cs typeface="微软雅黑"/>
+              </a:rPr>
+              <a:t>同伴逐句标出综述中数据、推理和个人判断；把“没人研究”改成有检索范围的待核验空白。</a:t>
+            </a:r>
+          </a:p>
+        </p:txBody>
+      </p:sp>
+      <p:sp>
+        <p:nvSpPr>
+          <p:cNvPr id="4" name="judgment-body-2">
+            <a:extLst xmlns:a="http://schemas.openxmlformats.org/drawingml/2006/main">
+              <a:ext uri="{FF2B5EF4-FFF2-40B4-BE49-F238E27FC236}">
+                <a16:creationId xmlns:a16="http://schemas.microsoft.com/office/drawing/2014/main" id="{8C540C79-683F-4EC1-9547-2C121051FF96}"/>
+              </a:ext>
+            </a:extLst>
+          </p:cNvPr>
+          <p:cNvSpPr>
+            <a:spLocks xmlns:a="http://schemas.openxmlformats.org/drawingml/2006/main" noGrp="1"/>
+          </p:cNvSpPr>
+          <p:nvPr/>
+        </p:nvSpPr>
+        <p:spPr>
+          <a:xfrm xmlns:a="http://schemas.openxmlformats.org/drawingml/2006/main">
+            <a:off x="666750" y="4457700"/>
+            <a:ext cx="10858500" cy="1466850"/>
+          </a:xfrm>
+          <a:prstGeom xmlns:a="http://schemas.openxmlformats.org/drawingml/2006/main" prst="rect">
+            <a:avLst/>
+          </a:prstGeom>
+          <a:noFill xmlns:a="http://schemas.openxmlformats.org/drawingml/2006/main"/>
+          <a:ln xmlns:a="http://schemas.openxmlformats.org/drawingml/2006/main" w="0">
+            <a:noFill/>
+          </a:ln>
+        </p:spPr>
+        <p:txBody>
+          <a:bodyPr xmlns:a="http://schemas.openxmlformats.org/drawingml/2006/main" lIns="0" tIns="0" rIns="0" bIns="0" anchor="t"/>
+          <a:lstStyle xmlns:a="http://schemas.openxmlformats.org/drawingml/2006/main">
+            <a:defPPr algn="l">
+              <a:defRPr sz="2200" b="0">
+                <a:solidFill>
+                  <a:srgbClr val="1F4D78"/>
+                </a:solidFill>
+                <a:latin typeface="微软雅黑"/>
+                <a:ea typeface="微软雅黑"/>
+                <a:cs typeface="微软雅黑"/>
+              </a:defRPr>
+            </a:defPPr>
+          </a:lstStyle>
+          <a:p xmlns:a="http://schemas.openxmlformats.org/drawingml/2006/main">
+            <a:pPr algn="l">
+              <a:defRPr sz="2200" b="0">
+                <a:solidFill>
+                  <a:srgbClr val="1F4D78"/>
+                </a:solidFill>
+                <a:latin typeface="微软雅黑"/>
+                <a:ea typeface="微软雅黑"/>
+                <a:cs typeface="微软雅黑"/>
+              </a:defRPr>
+            </a:pPr>
+            <a:r>
+              <a:rPr sz="2200" b="0">
+                <a:solidFill>
+                  <a:srgbClr val="1F4D78"/>
+                </a:solidFill>
+                <a:latin typeface="微软雅黑"/>
+                <a:ea typeface="微软雅黑"/>
+                <a:cs typeface="微软雅黑"/>
+              </a:rPr>
+              <a:t>保存：同一阅读卡文件的第二张卡＋证据矩阵/地图及候选问题</a:t>
+            </a:r>
+          </a:p>
+        </p:txBody>
+      </p:sp>
+      <p:sp>
+        <p:nvSpPr>
+          <p:cNvPr id="5" name="judgment-source">
+            <a:extLst xmlns:a="http://schemas.openxmlformats.org/drawingml/2006/main">
+              <a:ext uri="{FF2B5EF4-FFF2-40B4-BE49-F238E27FC236}">
+                <a16:creationId xmlns:a16="http://schemas.microsoft.com/office/drawing/2014/main" id="{E7835AC9-FFAD-486F-916F-DA615C72BC1D}"/>
+              </a:ext>
+            </a:extLst>
+          </p:cNvPr>
+          <p:cNvSpPr>
+            <a:spLocks xmlns:a="http://schemas.openxmlformats.org/drawingml/2006/main" noGrp="1"/>
+          </p:cNvSpPr>
+          <p:nvPr/>
+        </p:nvSpPr>
+        <p:spPr>
+          <a:xfrm xmlns:a="http://schemas.openxmlformats.org/drawingml/2006/main">
+            <a:off x="666750" y="6276975"/>
+            <a:ext cx="10572750" cy="209550"/>
+          </a:xfrm>
+          <a:prstGeom xmlns:a="http://schemas.openxmlformats.org/drawingml/2006/main" prst="rect">
+            <a:avLst/>
+          </a:prstGeom>
+          <a:noFill xmlns:a="http://schemas.openxmlformats.org/drawingml/2006/main"/>
+          <a:ln xmlns:a="http://schemas.openxmlformats.org/drawingml/2006/main" w="0">
+            <a:noFill/>
+          </a:ln>
+        </p:spPr>
+        <p:txBody>
+          <a:bodyPr xmlns:a="http://schemas.openxmlformats.org/drawingml/2006/main" lIns="0" tIns="0" rIns="0" bIns="0" anchor="t"/>
+          <a:lstStyle xmlns:a="http://schemas.openxmlformats.org/drawingml/2006/main">
+            <a:defPPr algn="l">
+              <a:defRPr sz="1100" b="0">
+                <a:solidFill>
+                  <a:srgbClr val="667684"/>
+                </a:solidFill>
+                <a:latin typeface="微软雅黑"/>
+                <a:ea typeface="微软雅黑"/>
+                <a:cs typeface="微软雅黑"/>
+              </a:defRPr>
+            </a:defPPr>
+          </a:lstStyle>
+          <a:p xmlns:a="http://schemas.openxmlformats.org/drawingml/2006/main">
+            <a:pPr algn="l">
+              <a:defRPr sz="1100" b="0">
+                <a:solidFill>
+                  <a:srgbClr val="667684"/>
+                </a:solidFill>
+                <a:latin typeface="微软雅黑"/>
+                <a:ea typeface="微软雅黑"/>
+                <a:cs typeface="微软雅黑"/>
+              </a:defRPr>
+            </a:pPr>
+            <a:r>
+              <a:rPr sz="1100" b="0">
+                <a:solidFill>
+                  <a:srgbClr val="667684"/>
+                </a:solidFill>
+                <a:latin typeface="微软雅黑"/>
+                <a:ea typeface="微软雅黑"/>
+                <a:cs typeface="微软雅黑"/>
+              </a:rPr>
+              <a:t>来源：本课判断任务与讲义；构造材料及真实来源按材料包标识</a:t>
+            </a:r>
+          </a:p>
+        </p:txBody>
+      </p:sp>
+      <p:sp>
+        <p:nvSpPr>
+          <p:cNvPr id="6" name="judgment-page">
+            <a:extLst xmlns:a="http://schemas.openxmlformats.org/drawingml/2006/main">
+              <a:ext uri="{FF2B5EF4-FFF2-40B4-BE49-F238E27FC236}">
+                <a16:creationId xmlns:a16="http://schemas.microsoft.com/office/drawing/2014/main" id="{56EA705E-8003-467B-999A-7C755A08E652}"/>
+              </a:ext>
+            </a:extLst>
+          </p:cNvPr>
+          <p:cNvSpPr>
+            <a:spLocks xmlns:a="http://schemas.openxmlformats.org/drawingml/2006/main" noGrp="1"/>
+          </p:cNvSpPr>
+          <p:nvPr/>
+        </p:nvSpPr>
+        <p:spPr>
+          <a:xfrm xmlns:a="http://schemas.openxmlformats.org/drawingml/2006/main">
+            <a:off x="11715750" y="6562725"/>
+            <a:ext cx="238125" cy="171450"/>
+          </a:xfrm>
+          <a:prstGeom xmlns:a="http://schemas.openxmlformats.org/drawingml/2006/main" prst="rect">
+            <a:avLst/>
+          </a:prstGeom>
+          <a:noFill xmlns:a="http://schemas.openxmlformats.org/drawingml/2006/main"/>
+          <a:ln xmlns:a="http://schemas.openxmlformats.org/drawingml/2006/main" w="0">
+            <a:noFill/>
+          </a:ln>
+        </p:spPr>
+        <p:txBody>
+          <a:bodyPr xmlns:a="http://schemas.openxmlformats.org/drawingml/2006/main" lIns="0" tIns="0" rIns="0" bIns="0" anchor="t"/>
+          <a:lstStyle xmlns:a="http://schemas.openxmlformats.org/drawingml/2006/main">
+            <a:defPPr algn="l">
+              <a:defRPr sz="900" b="0">
+                <a:solidFill>
+                  <a:srgbClr val="A5A5A5"/>
+                </a:solidFill>
+                <a:latin typeface="微软雅黑"/>
+                <a:ea typeface="微软雅黑"/>
+                <a:cs typeface="微软雅黑"/>
+              </a:defRPr>
+            </a:defPPr>
+          </a:lstStyle>
+          <a:p xmlns:a="http://schemas.openxmlformats.org/drawingml/2006/main">
+            <a:pPr algn="l">
+              <a:defRPr sz="900" b="0">
+                <a:solidFill>
+                  <a:srgbClr val="A5A5A5"/>
+                </a:solidFill>
+                <a:latin typeface="微软雅黑"/>
+                <a:ea typeface="微软雅黑"/>
+                <a:cs typeface="微软雅黑"/>
+              </a:defRPr>
+            </a:pPr>
+            <a:r>
+              <a:rPr sz="900" b="0">
+                <a:solidFill>
+                  <a:srgbClr val="A5A5A5"/>
+                </a:solidFill>
+                <a:latin typeface="微软雅黑"/>
+                <a:ea typeface="微软雅黑"/>
+                <a:cs typeface="微软雅黑"/>
+              </a:rPr>
               <a:t>17</a:t>
-            </a:fld>
-            <a:endParaRPr/>
-          </a:p>
-        </p:txBody>
-      </p:sp>
-      <p:sp>
-        <p:nvSpPr>
-          <p:cNvPr id="6" name="visual-17-0-minimum">
-            <a:extLst xmlns:a="http://schemas.openxmlformats.org/drawingml/2006/main">
-              <a:ext uri="{FF2B5EF4-FFF2-40B4-BE49-F238E27FC236}">
-                <a16:creationId xmlns:a16="http://schemas.microsoft.com/office/drawing/2014/main" id="{F408980B-B894-4887-BCB9-AC12DFB02B4B}"/>
-              </a:ext>
-            </a:extLst>
-          </p:cNvPr>
-          <p:cNvSpPr>
-            <a:spLocks xmlns:a="http://schemas.openxmlformats.org/drawingml/2006/main" noGrp="1"/>
-          </p:cNvSpPr>
-          <p:nvPr/>
-        </p:nvSpPr>
-        <p:spPr>
-          <a:xfrm xmlns:a="http://schemas.openxmlformats.org/drawingml/2006/main">
-            <a:off x="590550" y="876300"/>
-            <a:ext cx="2095500" cy="400050"/>
-          </a:xfrm>
-          <a:prstGeom xmlns:a="http://schemas.openxmlformats.org/drawingml/2006/main" prst="rect">
-            <a:avLst/>
-          </a:prstGeom>
-          <a:noFill xmlns:a="http://schemas.openxmlformats.org/drawingml/2006/main"/>
-          <a:ln xmlns:a="http://schemas.openxmlformats.org/drawingml/2006/main" w="0">
-            <a:noFill/>
-          </a:ln>
-        </p:spPr>
-        <p:txBody>
-          <a:bodyPr xmlns:a="http://schemas.openxmlformats.org/drawingml/2006/main" lIns="0" tIns="0" rIns="0" bIns="0" anchor="ctr">
-            <a:noAutofit/>
-          </a:bodyPr>
-          <a:lstStyle xmlns:a="http://schemas.openxmlformats.org/drawingml/2006/main"/>
-          <a:p xmlns:a="http://schemas.openxmlformats.org/drawingml/2006/main">
-            <a:pPr algn="l">
-              <a:lnSpc>
-                <a:spcPct val="114000"/>
-              </a:lnSpc>
-              <a:buNone/>
-              <a:defRPr sz="2200" b="1">
-                <a:solidFill>
-                  <a:srgbClr val="1F4D78"/>
-                </a:solidFill>
-                <a:latin typeface="微软雅黑"/>
-                <a:ea typeface="微软雅黑"/>
-                <a:cs typeface="微软雅黑"/>
-              </a:defRPr>
-            </a:pPr>
-            <a:r>
-              <a:rPr sz="2200" b="1">
-                <a:solidFill>
-                  <a:srgbClr val="1F4D78"/>
-                </a:solidFill>
-                <a:latin typeface="微软雅黑"/>
-                <a:ea typeface="微软雅黑"/>
-                <a:cs typeface="微软雅黑"/>
-              </a:rPr>
-              <a:t>课堂最低闭环</a:t>
-            </a:r>
-          </a:p>
-        </p:txBody>
-      </p:sp>
-      <p:sp>
-        <p:nvSpPr>
-          <p:cNvPr id="7" name="visual-17-1-task-n-0">
-            <a:extLst xmlns:a="http://schemas.openxmlformats.org/drawingml/2006/main">
-              <a:ext uri="{FF2B5EF4-FFF2-40B4-BE49-F238E27FC236}">
-                <a16:creationId xmlns:a16="http://schemas.microsoft.com/office/drawing/2014/main" id="{C3A14BC8-F04A-4DFE-90CE-0E762A3DAC95}"/>
-              </a:ext>
-            </a:extLst>
-          </p:cNvPr>
-          <p:cNvSpPr>
-            <a:spLocks xmlns:a="http://schemas.openxmlformats.org/drawingml/2006/main" noGrp="1"/>
-          </p:cNvSpPr>
-          <p:nvPr/>
-        </p:nvSpPr>
-        <p:spPr>
-          <a:xfrm xmlns:a="http://schemas.openxmlformats.org/drawingml/2006/main">
-            <a:off x="552450" y="1524000"/>
-            <a:ext cx="457200" cy="457200"/>
-          </a:xfrm>
-          <a:prstGeom xmlns:a="http://schemas.openxmlformats.org/drawingml/2006/main" prst="rect">
-            <a:avLst/>
-          </a:prstGeom>
-          <a:noFill xmlns:a="http://schemas.openxmlformats.org/drawingml/2006/main"/>
-          <a:ln xmlns:a="http://schemas.openxmlformats.org/drawingml/2006/main" w="0">
-            <a:noFill/>
-          </a:ln>
-        </p:spPr>
-        <p:txBody>
-          <a:bodyPr xmlns:a="http://schemas.openxmlformats.org/drawingml/2006/main" lIns="0" tIns="0" rIns="0" bIns="0" anchor="ctr">
-            <a:noAutofit/>
-          </a:bodyPr>
-          <a:lstStyle xmlns:a="http://schemas.openxmlformats.org/drawingml/2006/main"/>
-          <a:p xmlns:a="http://schemas.openxmlformats.org/drawingml/2006/main">
-            <a:pPr algn="ctr">
-              <a:lnSpc>
-                <a:spcPct val="114000"/>
-              </a:lnSpc>
-              <a:buNone/>
-              <a:defRPr sz="1800" b="1">
-                <a:solidFill>
-                  <a:srgbClr val="C8161E"/>
-                </a:solidFill>
-                <a:latin typeface="微软雅黑"/>
-                <a:ea typeface="微软雅黑"/>
-                <a:cs typeface="微软雅黑"/>
-              </a:defRPr>
-            </a:pPr>
-            <a:r>
-              <a:rPr sz="1800" b="1">
-                <a:solidFill>
-                  <a:srgbClr val="C8161E"/>
-                </a:solidFill>
-                <a:latin typeface="微软雅黑"/>
-                <a:ea typeface="微软雅黑"/>
-                <a:cs typeface="微软雅黑"/>
-              </a:rPr>
-              <a:t>1</a:t>
-            </a:r>
-          </a:p>
-        </p:txBody>
-      </p:sp>
-      <p:sp>
-        <p:nvSpPr>
-          <p:cNvPr id="8" name="visual-17-2-task-0">
-            <a:extLst xmlns:a="http://schemas.openxmlformats.org/drawingml/2006/main">
-              <a:ext uri="{FF2B5EF4-FFF2-40B4-BE49-F238E27FC236}">
-                <a16:creationId xmlns:a16="http://schemas.microsoft.com/office/drawing/2014/main" id="{0C492F05-05F9-45EA-BB76-E2FCA25A3B4F}"/>
-              </a:ext>
-            </a:extLst>
-          </p:cNvPr>
-          <p:cNvSpPr>
-            <a:spLocks xmlns:a="http://schemas.openxmlformats.org/drawingml/2006/main" noGrp="1"/>
-          </p:cNvSpPr>
-          <p:nvPr/>
-        </p:nvSpPr>
-        <p:spPr>
-          <a:xfrm xmlns:a="http://schemas.openxmlformats.org/drawingml/2006/main">
-            <a:off x="1143000" y="1428750"/>
-            <a:ext cx="4953000" cy="647700"/>
-          </a:xfrm>
-          <a:prstGeom xmlns:a="http://schemas.openxmlformats.org/drawingml/2006/main" prst="rect">
-            <a:avLst/>
-          </a:prstGeom>
-          <a:noFill xmlns:a="http://schemas.openxmlformats.org/drawingml/2006/main"/>
-          <a:ln xmlns:a="http://schemas.openxmlformats.org/drawingml/2006/main" w="0">
-            <a:noFill/>
-          </a:ln>
-        </p:spPr>
-        <p:txBody>
-          <a:bodyPr xmlns:a="http://schemas.openxmlformats.org/drawingml/2006/main" lIns="0" tIns="0" rIns="0" bIns="0" anchor="t">
-            <a:noAutofit/>
-          </a:bodyPr>
-          <a:lstStyle xmlns:a="http://schemas.openxmlformats.org/drawingml/2006/main"/>
-          <a:p xmlns:a="http://schemas.openxmlformats.org/drawingml/2006/main">
-            <a:pPr algn="l">
-              <a:lnSpc>
-                <a:spcPct val="114000"/>
-              </a:lnSpc>
-              <a:buNone/>
-              <a:defRPr sz="2200" b="1">
-                <a:solidFill>
-                  <a:srgbClr val="1F4D78"/>
-                </a:solidFill>
-                <a:latin typeface="微软雅黑"/>
-                <a:ea typeface="微软雅黑"/>
-                <a:cs typeface="微软雅黑"/>
-              </a:defRPr>
-            </a:pPr>
-            <a:r>
-              <a:rPr sz="2200" b="1">
-                <a:solidFill>
-                  <a:srgbClr val="1F4D78"/>
-                </a:solidFill>
-                <a:latin typeface="微软雅黑"/>
-                <a:ea typeface="微软雅黑"/>
-                <a:cs typeface="微软雅黑"/>
-              </a:rPr>
-              <a:t>只选 1 个子问题</a:t>
-            </a:r>
-          </a:p>
-        </p:txBody>
-      </p:sp>
-      <p:sp>
-        <p:nvSpPr>
-          <p:cNvPr id="9" name="visual-17-3-task-n-1">
-            <a:extLst xmlns:a="http://schemas.openxmlformats.org/drawingml/2006/main">
-              <a:ext uri="{FF2B5EF4-FFF2-40B4-BE49-F238E27FC236}">
-                <a16:creationId xmlns:a16="http://schemas.microsoft.com/office/drawing/2014/main" id="{755C75C8-03FD-4AEA-9AA4-99178FFFEE15}"/>
-              </a:ext>
-            </a:extLst>
-          </p:cNvPr>
-          <p:cNvSpPr>
-            <a:spLocks xmlns:a="http://schemas.openxmlformats.org/drawingml/2006/main" noGrp="1"/>
-          </p:cNvSpPr>
-          <p:nvPr/>
-        </p:nvSpPr>
-        <p:spPr>
-          <a:xfrm xmlns:a="http://schemas.openxmlformats.org/drawingml/2006/main">
-            <a:off x="6410325" y="1524000"/>
-            <a:ext cx="457200" cy="457200"/>
-          </a:xfrm>
-          <a:prstGeom xmlns:a="http://schemas.openxmlformats.org/drawingml/2006/main" prst="rect">
-            <a:avLst/>
-          </a:prstGeom>
-          <a:noFill xmlns:a="http://schemas.openxmlformats.org/drawingml/2006/main"/>
-          <a:ln xmlns:a="http://schemas.openxmlformats.org/drawingml/2006/main" w="0">
-            <a:noFill/>
-          </a:ln>
-        </p:spPr>
-        <p:txBody>
-          <a:bodyPr xmlns:a="http://schemas.openxmlformats.org/drawingml/2006/main" lIns="0" tIns="0" rIns="0" bIns="0" anchor="ctr">
-            <a:noAutofit/>
-          </a:bodyPr>
-          <a:lstStyle xmlns:a="http://schemas.openxmlformats.org/drawingml/2006/main"/>
-          <a:p xmlns:a="http://schemas.openxmlformats.org/drawingml/2006/main">
-            <a:pPr algn="ctr">
-              <a:lnSpc>
-                <a:spcPct val="114000"/>
-              </a:lnSpc>
-              <a:buNone/>
-              <a:defRPr sz="1800" b="1">
-                <a:solidFill>
-                  <a:srgbClr val="C8161E"/>
-                </a:solidFill>
-                <a:latin typeface="微软雅黑"/>
-                <a:ea typeface="微软雅黑"/>
-                <a:cs typeface="微软雅黑"/>
-              </a:defRPr>
-            </a:pPr>
-            <a:r>
-              <a:rPr sz="1800" b="1">
-                <a:solidFill>
-                  <a:srgbClr val="C8161E"/>
-                </a:solidFill>
-                <a:latin typeface="微软雅黑"/>
-                <a:ea typeface="微软雅黑"/>
-                <a:cs typeface="微软雅黑"/>
-              </a:rPr>
-              <a:t>2</a:t>
-            </a:r>
-          </a:p>
-        </p:txBody>
-      </p:sp>
-      <p:sp>
-        <p:nvSpPr>
-          <p:cNvPr id="10" name="visual-17-4-task-1">
-            <a:extLst xmlns:a="http://schemas.openxmlformats.org/drawingml/2006/main">
-              <a:ext uri="{FF2B5EF4-FFF2-40B4-BE49-F238E27FC236}">
-                <a16:creationId xmlns:a16="http://schemas.microsoft.com/office/drawing/2014/main" id="{59FA76E9-98F9-4796-B0D8-506016B1E2F0}"/>
-              </a:ext>
-            </a:extLst>
-          </p:cNvPr>
-          <p:cNvSpPr>
-            <a:spLocks xmlns:a="http://schemas.openxmlformats.org/drawingml/2006/main" noGrp="1"/>
-          </p:cNvSpPr>
-          <p:nvPr/>
-        </p:nvSpPr>
-        <p:spPr>
-          <a:xfrm xmlns:a="http://schemas.openxmlformats.org/drawingml/2006/main">
-            <a:off x="7000875" y="1428750"/>
-            <a:ext cx="4953000" cy="647700"/>
-          </a:xfrm>
-          <a:prstGeom xmlns:a="http://schemas.openxmlformats.org/drawingml/2006/main" prst="rect">
-            <a:avLst/>
-          </a:prstGeom>
-          <a:noFill xmlns:a="http://schemas.openxmlformats.org/drawingml/2006/main"/>
-          <a:ln xmlns:a="http://schemas.openxmlformats.org/drawingml/2006/main" w="0">
-            <a:noFill/>
-          </a:ln>
-        </p:spPr>
-        <p:txBody>
-          <a:bodyPr xmlns:a="http://schemas.openxmlformats.org/drawingml/2006/main" lIns="0" tIns="0" rIns="0" bIns="0" anchor="t">
-            <a:noAutofit/>
-          </a:bodyPr>
-          <a:lstStyle xmlns:a="http://schemas.openxmlformats.org/drawingml/2006/main"/>
-          <a:p xmlns:a="http://schemas.openxmlformats.org/drawingml/2006/main">
-            <a:pPr algn="l">
-              <a:lnSpc>
-                <a:spcPct val="114000"/>
-              </a:lnSpc>
-              <a:buNone/>
-              <a:defRPr sz="2400" b="0">
-                <a:solidFill>
-                  <a:srgbClr val="27333D"/>
-                </a:solidFill>
-                <a:latin typeface="微软雅黑"/>
-                <a:ea typeface="微软雅黑"/>
-                <a:cs typeface="微软雅黑"/>
-              </a:defRPr>
-            </a:pPr>
-            <a:r>
-              <a:rPr sz="2400" b="0">
-                <a:solidFill>
-                  <a:srgbClr val="27333D"/>
-                </a:solidFill>
-                <a:latin typeface="微软雅黑"/>
-                <a:ea typeface="微软雅黑"/>
-                <a:cs typeface="微软雅黑"/>
-              </a:rPr>
-              <a:t>选 2 张 verified / caveat 阅读卡</a:t>
-            </a:r>
-          </a:p>
-        </p:txBody>
-      </p:sp>
-      <p:sp>
-        <p:nvSpPr>
-          <p:cNvPr id="11" name="visual-17-5-task-n-2">
-            <a:extLst xmlns:a="http://schemas.openxmlformats.org/drawingml/2006/main">
-              <a:ext uri="{FF2B5EF4-FFF2-40B4-BE49-F238E27FC236}">
-                <a16:creationId xmlns:a16="http://schemas.microsoft.com/office/drawing/2014/main" id="{47AD9CAF-7625-4841-9DBD-4EB993E82C1B}"/>
-              </a:ext>
-            </a:extLst>
-          </p:cNvPr>
-          <p:cNvSpPr>
-            <a:spLocks xmlns:a="http://schemas.openxmlformats.org/drawingml/2006/main" noGrp="1"/>
-          </p:cNvSpPr>
-          <p:nvPr/>
-        </p:nvSpPr>
-        <p:spPr>
-          <a:xfrm xmlns:a="http://schemas.openxmlformats.org/drawingml/2006/main">
-            <a:off x="552450" y="2495550"/>
-            <a:ext cx="457200" cy="457200"/>
-          </a:xfrm>
-          <a:prstGeom xmlns:a="http://schemas.openxmlformats.org/drawingml/2006/main" prst="rect">
-            <a:avLst/>
-          </a:prstGeom>
-          <a:noFill xmlns:a="http://schemas.openxmlformats.org/drawingml/2006/main"/>
-          <a:ln xmlns:a="http://schemas.openxmlformats.org/drawingml/2006/main" w="0">
-            <a:noFill/>
-          </a:ln>
-        </p:spPr>
-        <p:txBody>
-          <a:bodyPr xmlns:a="http://schemas.openxmlformats.org/drawingml/2006/main" lIns="0" tIns="0" rIns="0" bIns="0" anchor="ctr">
-            <a:noAutofit/>
-          </a:bodyPr>
-          <a:lstStyle xmlns:a="http://schemas.openxmlformats.org/drawingml/2006/main"/>
-          <a:p xmlns:a="http://schemas.openxmlformats.org/drawingml/2006/main">
-            <a:pPr algn="ctr">
-              <a:lnSpc>
-                <a:spcPct val="114000"/>
-              </a:lnSpc>
-              <a:buNone/>
-              <a:defRPr sz="1800" b="1">
-                <a:solidFill>
-                  <a:srgbClr val="C8161E"/>
-                </a:solidFill>
-                <a:latin typeface="微软雅黑"/>
-                <a:ea typeface="微软雅黑"/>
-                <a:cs typeface="微软雅黑"/>
-              </a:defRPr>
-            </a:pPr>
-            <a:r>
-              <a:rPr sz="1800" b="1">
-                <a:solidFill>
-                  <a:srgbClr val="C8161E"/>
-                </a:solidFill>
-                <a:latin typeface="微软雅黑"/>
-                <a:ea typeface="微软雅黑"/>
-                <a:cs typeface="微软雅黑"/>
-              </a:rPr>
-              <a:t>3</a:t>
-            </a:r>
-          </a:p>
-        </p:txBody>
-      </p:sp>
-      <p:sp>
-        <p:nvSpPr>
-          <p:cNvPr id="12" name="visual-17-6-task-2">
-            <a:extLst xmlns:a="http://schemas.openxmlformats.org/drawingml/2006/main">
-              <a:ext uri="{FF2B5EF4-FFF2-40B4-BE49-F238E27FC236}">
-                <a16:creationId xmlns:a16="http://schemas.microsoft.com/office/drawing/2014/main" id="{78C5D20A-7D65-4CDE-A30A-4C2746071997}"/>
-              </a:ext>
-            </a:extLst>
-          </p:cNvPr>
-          <p:cNvSpPr>
-            <a:spLocks xmlns:a="http://schemas.openxmlformats.org/drawingml/2006/main" noGrp="1"/>
-          </p:cNvSpPr>
-          <p:nvPr/>
-        </p:nvSpPr>
-        <p:spPr>
-          <a:xfrm xmlns:a="http://schemas.openxmlformats.org/drawingml/2006/main">
-            <a:off x="1143000" y="2400300"/>
-            <a:ext cx="4953000" cy="647700"/>
-          </a:xfrm>
-          <a:prstGeom xmlns:a="http://schemas.openxmlformats.org/drawingml/2006/main" prst="rect">
-            <a:avLst/>
-          </a:prstGeom>
-          <a:noFill xmlns:a="http://schemas.openxmlformats.org/drawingml/2006/main"/>
-          <a:ln xmlns:a="http://schemas.openxmlformats.org/drawingml/2006/main" w="0">
-            <a:noFill/>
-          </a:ln>
-        </p:spPr>
-        <p:txBody>
-          <a:bodyPr xmlns:a="http://schemas.openxmlformats.org/drawingml/2006/main" lIns="0" tIns="0" rIns="0" bIns="0" anchor="t">
-            <a:noAutofit/>
-          </a:bodyPr>
-          <a:lstStyle xmlns:a="http://schemas.openxmlformats.org/drawingml/2006/main"/>
-          <a:p xmlns:a="http://schemas.openxmlformats.org/drawingml/2006/main">
-            <a:pPr algn="l">
-              <a:lnSpc>
-                <a:spcPct val="114000"/>
-              </a:lnSpc>
-              <a:buNone/>
-              <a:defRPr sz="2400" b="0">
-                <a:solidFill>
-                  <a:srgbClr val="27333D"/>
-                </a:solidFill>
-                <a:latin typeface="微软雅黑"/>
-                <a:ea typeface="微软雅黑"/>
-                <a:cs typeface="微软雅黑"/>
-              </a:defRPr>
-            </a:pPr>
-            <a:r>
-              <a:rPr sz="2400" b="0">
-                <a:solidFill>
-                  <a:srgbClr val="27333D"/>
-                </a:solidFill>
-                <a:latin typeface="微软雅黑"/>
-                <a:ea typeface="微软雅黑"/>
-                <a:cs typeface="微软雅黑"/>
-              </a:rPr>
-              <a:t>填 1 个窄矩阵，抽取 2 条证据主格</a:t>
-            </a:r>
-          </a:p>
-        </p:txBody>
-      </p:sp>
-      <p:sp>
-        <p:nvSpPr>
-          <p:cNvPr id="13" name="visual-17-7-task-n-3">
-            <a:extLst xmlns:a="http://schemas.openxmlformats.org/drawingml/2006/main">
-              <a:ext uri="{FF2B5EF4-FFF2-40B4-BE49-F238E27FC236}">
-                <a16:creationId xmlns:a16="http://schemas.microsoft.com/office/drawing/2014/main" id="{1A4E2125-0DE0-43CD-B307-0E5A54BA09F4}"/>
-              </a:ext>
-            </a:extLst>
-          </p:cNvPr>
-          <p:cNvSpPr>
-            <a:spLocks xmlns:a="http://schemas.openxmlformats.org/drawingml/2006/main" noGrp="1"/>
-          </p:cNvSpPr>
-          <p:nvPr/>
-        </p:nvSpPr>
-        <p:spPr>
-          <a:xfrm xmlns:a="http://schemas.openxmlformats.org/drawingml/2006/main">
-            <a:off x="6410325" y="2495550"/>
-            <a:ext cx="457200" cy="457200"/>
-          </a:xfrm>
-          <a:prstGeom xmlns:a="http://schemas.openxmlformats.org/drawingml/2006/main" prst="rect">
-            <a:avLst/>
-          </a:prstGeom>
-          <a:noFill xmlns:a="http://schemas.openxmlformats.org/drawingml/2006/main"/>
-          <a:ln xmlns:a="http://schemas.openxmlformats.org/drawingml/2006/main" w="0">
-            <a:noFill/>
-          </a:ln>
-        </p:spPr>
-        <p:txBody>
-          <a:bodyPr xmlns:a="http://schemas.openxmlformats.org/drawingml/2006/main" lIns="0" tIns="0" rIns="0" bIns="0" anchor="ctr">
-            <a:noAutofit/>
-          </a:bodyPr>
-          <a:lstStyle xmlns:a="http://schemas.openxmlformats.org/drawingml/2006/main"/>
-          <a:p xmlns:a="http://schemas.openxmlformats.org/drawingml/2006/main">
-            <a:pPr algn="ctr">
-              <a:lnSpc>
-                <a:spcPct val="114000"/>
-              </a:lnSpc>
-              <a:buNone/>
-              <a:defRPr sz="1800" b="1">
-                <a:solidFill>
-                  <a:srgbClr val="C8161E"/>
-                </a:solidFill>
-                <a:latin typeface="微软雅黑"/>
-                <a:ea typeface="微软雅黑"/>
-                <a:cs typeface="微软雅黑"/>
-              </a:defRPr>
-            </a:pPr>
-            <a:r>
-              <a:rPr sz="1800" b="1">
-                <a:solidFill>
-                  <a:srgbClr val="C8161E"/>
-                </a:solidFill>
-                <a:latin typeface="微软雅黑"/>
-                <a:ea typeface="微软雅黑"/>
-                <a:cs typeface="微软雅黑"/>
-              </a:rPr>
-              <a:t>4</a:t>
-            </a:r>
-          </a:p>
-        </p:txBody>
-      </p:sp>
-      <p:sp>
-        <p:nvSpPr>
-          <p:cNvPr id="14" name="visual-17-8-task-3">
-            <a:extLst xmlns:a="http://schemas.openxmlformats.org/drawingml/2006/main">
-              <a:ext uri="{FF2B5EF4-FFF2-40B4-BE49-F238E27FC236}">
-                <a16:creationId xmlns:a16="http://schemas.microsoft.com/office/drawing/2014/main" id="{E074D6E2-4063-46E4-AE45-8BC8232D4403}"/>
-              </a:ext>
-            </a:extLst>
-          </p:cNvPr>
-          <p:cNvSpPr>
-            <a:spLocks xmlns:a="http://schemas.openxmlformats.org/drawingml/2006/main" noGrp="1"/>
-          </p:cNvSpPr>
-          <p:nvPr/>
-        </p:nvSpPr>
-        <p:spPr>
-          <a:xfrm xmlns:a="http://schemas.openxmlformats.org/drawingml/2006/main">
-            <a:off x="7000875" y="2400300"/>
-            <a:ext cx="4953000" cy="647700"/>
-          </a:xfrm>
-          <a:prstGeom xmlns:a="http://schemas.openxmlformats.org/drawingml/2006/main" prst="rect">
-            <a:avLst/>
-          </a:prstGeom>
-          <a:noFill xmlns:a="http://schemas.openxmlformats.org/drawingml/2006/main"/>
-          <a:ln xmlns:a="http://schemas.openxmlformats.org/drawingml/2006/main" w="0">
-            <a:noFill/>
-          </a:ln>
-        </p:spPr>
-        <p:txBody>
-          <a:bodyPr xmlns:a="http://schemas.openxmlformats.org/drawingml/2006/main" lIns="0" tIns="0" rIns="0" bIns="0" anchor="t">
-            <a:noAutofit/>
-          </a:bodyPr>
-          <a:lstStyle xmlns:a="http://schemas.openxmlformats.org/drawingml/2006/main"/>
-          <a:p xmlns:a="http://schemas.openxmlformats.org/drawingml/2006/main">
-            <a:pPr algn="l">
-              <a:lnSpc>
-                <a:spcPct val="114000"/>
-              </a:lnSpc>
-              <a:buNone/>
-              <a:defRPr sz="2400" b="0">
-                <a:solidFill>
-                  <a:srgbClr val="27333D"/>
-                </a:solidFill>
-                <a:latin typeface="微软雅黑"/>
-                <a:ea typeface="微软雅黑"/>
-                <a:cs typeface="微软雅黑"/>
-              </a:defRPr>
-            </a:pPr>
-            <a:r>
-              <a:rPr sz="2400" b="0">
-                <a:solidFill>
-                  <a:srgbClr val="27333D"/>
-                </a:solidFill>
-                <a:latin typeface="微软雅黑"/>
-                <a:ea typeface="微软雅黑"/>
-                <a:cs typeface="微软雅黑"/>
-              </a:rPr>
-              <a:t>写 4 句 mini literature review</a:t>
-            </a:r>
-          </a:p>
-        </p:txBody>
-      </p:sp>
-      <p:sp>
-        <p:nvSpPr>
-          <p:cNvPr id="15" name="visual-17-9-task-n-4">
-            <a:extLst xmlns:a="http://schemas.openxmlformats.org/drawingml/2006/main">
-              <a:ext uri="{FF2B5EF4-FFF2-40B4-BE49-F238E27FC236}">
-                <a16:creationId xmlns:a16="http://schemas.microsoft.com/office/drawing/2014/main" id="{7C1DD1F7-1427-4E0E-B07B-D37B8EB897E4}"/>
-              </a:ext>
-            </a:extLst>
-          </p:cNvPr>
-          <p:cNvSpPr>
-            <a:spLocks xmlns:a="http://schemas.openxmlformats.org/drawingml/2006/main" noGrp="1"/>
-          </p:cNvSpPr>
-          <p:nvPr/>
-        </p:nvSpPr>
-        <p:spPr>
-          <a:xfrm xmlns:a="http://schemas.openxmlformats.org/drawingml/2006/main">
-            <a:off x="552450" y="3467100"/>
-            <a:ext cx="457200" cy="457200"/>
-          </a:xfrm>
-          <a:prstGeom xmlns:a="http://schemas.openxmlformats.org/drawingml/2006/main" prst="rect">
-            <a:avLst/>
-          </a:prstGeom>
-          <a:noFill xmlns:a="http://schemas.openxmlformats.org/drawingml/2006/main"/>
-          <a:ln xmlns:a="http://schemas.openxmlformats.org/drawingml/2006/main" w="0">
-            <a:noFill/>
-          </a:ln>
-        </p:spPr>
-        <p:txBody>
-          <a:bodyPr xmlns:a="http://schemas.openxmlformats.org/drawingml/2006/main" lIns="0" tIns="0" rIns="0" bIns="0" anchor="ctr">
-            <a:noAutofit/>
-          </a:bodyPr>
-          <a:lstStyle xmlns:a="http://schemas.openxmlformats.org/drawingml/2006/main"/>
-          <a:p xmlns:a="http://schemas.openxmlformats.org/drawingml/2006/main">
-            <a:pPr algn="ctr">
-              <a:lnSpc>
-                <a:spcPct val="114000"/>
-              </a:lnSpc>
-              <a:buNone/>
-              <a:defRPr sz="1800" b="1">
-                <a:solidFill>
-                  <a:srgbClr val="C8161E"/>
-                </a:solidFill>
-                <a:latin typeface="微软雅黑"/>
-                <a:ea typeface="微软雅黑"/>
-                <a:cs typeface="微软雅黑"/>
-              </a:defRPr>
-            </a:pPr>
-            <a:r>
-              <a:rPr sz="1800" b="1">
-                <a:solidFill>
-                  <a:srgbClr val="C8161E"/>
-                </a:solidFill>
-                <a:latin typeface="微软雅黑"/>
-                <a:ea typeface="微软雅黑"/>
-                <a:cs typeface="微软雅黑"/>
-              </a:rPr>
-              <a:t>5</a:t>
-            </a:r>
-          </a:p>
-        </p:txBody>
-      </p:sp>
-      <p:sp>
-        <p:nvSpPr>
-          <p:cNvPr id="16" name="visual-17-10-task-4">
-            <a:extLst xmlns:a="http://schemas.openxmlformats.org/drawingml/2006/main">
-              <a:ext uri="{FF2B5EF4-FFF2-40B4-BE49-F238E27FC236}">
-                <a16:creationId xmlns:a16="http://schemas.microsoft.com/office/drawing/2014/main" id="{6D55DCE9-943A-411A-A233-B442C42A5141}"/>
-              </a:ext>
-            </a:extLst>
-          </p:cNvPr>
-          <p:cNvSpPr>
-            <a:spLocks xmlns:a="http://schemas.openxmlformats.org/drawingml/2006/main" noGrp="1"/>
-          </p:cNvSpPr>
-          <p:nvPr/>
-        </p:nvSpPr>
-        <p:spPr>
-          <a:xfrm xmlns:a="http://schemas.openxmlformats.org/drawingml/2006/main">
-            <a:off x="1143000" y="3371850"/>
-            <a:ext cx="4953000" cy="647700"/>
-          </a:xfrm>
-          <a:prstGeom xmlns:a="http://schemas.openxmlformats.org/drawingml/2006/main" prst="rect">
-            <a:avLst/>
-          </a:prstGeom>
-          <a:noFill xmlns:a="http://schemas.openxmlformats.org/drawingml/2006/main"/>
-          <a:ln xmlns:a="http://schemas.openxmlformats.org/drawingml/2006/main" w="0">
-            <a:noFill/>
-          </a:ln>
-        </p:spPr>
-        <p:txBody>
-          <a:bodyPr xmlns:a="http://schemas.openxmlformats.org/drawingml/2006/main" lIns="0" tIns="0" rIns="0" bIns="0" anchor="t">
-            <a:noAutofit/>
-          </a:bodyPr>
-          <a:lstStyle xmlns:a="http://schemas.openxmlformats.org/drawingml/2006/main"/>
-          <a:p xmlns:a="http://schemas.openxmlformats.org/drawingml/2006/main">
-            <a:pPr algn="l">
-              <a:lnSpc>
-                <a:spcPct val="114000"/>
-              </a:lnSpc>
-              <a:buNone/>
-              <a:defRPr sz="2000" b="0">
-                <a:solidFill>
-                  <a:srgbClr val="1F4D78"/>
-                </a:solidFill>
-                <a:latin typeface="微软雅黑"/>
-                <a:ea typeface="微软雅黑"/>
-                <a:cs typeface="微软雅黑"/>
-              </a:defRPr>
-            </a:pPr>
-            <a:r>
-              <a:rPr sz="2000" b="0">
-                <a:solidFill>
-                  <a:srgbClr val="1F4D78"/>
-                </a:solidFill>
-                <a:latin typeface="微软雅黑"/>
-                <a:ea typeface="微软雅黑"/>
-                <a:cs typeface="微软雅黑"/>
-              </a:rPr>
-              <a:t>核验 1 条 AI 归纳并记日志</a:t>
-            </a:r>
-          </a:p>
-        </p:txBody>
-      </p:sp>
-      <p:sp>
-        <p:nvSpPr>
-          <p:cNvPr id="17" name="visual-17-11-task-n-5">
-            <a:extLst xmlns:a="http://schemas.openxmlformats.org/drawingml/2006/main">
-              <a:ext uri="{FF2B5EF4-FFF2-40B4-BE49-F238E27FC236}">
-                <a16:creationId xmlns:a16="http://schemas.microsoft.com/office/drawing/2014/main" id="{05D2CEAB-5466-48D4-8B77-E96A4B7528F5}"/>
-              </a:ext>
-            </a:extLst>
-          </p:cNvPr>
-          <p:cNvSpPr>
-            <a:spLocks xmlns:a="http://schemas.openxmlformats.org/drawingml/2006/main" noGrp="1"/>
-          </p:cNvSpPr>
-          <p:nvPr/>
-        </p:nvSpPr>
-        <p:spPr>
-          <a:xfrm xmlns:a="http://schemas.openxmlformats.org/drawingml/2006/main">
-            <a:off x="6410325" y="3467100"/>
-            <a:ext cx="457200" cy="457200"/>
-          </a:xfrm>
-          <a:prstGeom xmlns:a="http://schemas.openxmlformats.org/drawingml/2006/main" prst="rect">
-            <a:avLst/>
-          </a:prstGeom>
-          <a:noFill xmlns:a="http://schemas.openxmlformats.org/drawingml/2006/main"/>
-          <a:ln xmlns:a="http://schemas.openxmlformats.org/drawingml/2006/main" w="0">
-            <a:noFill/>
-          </a:ln>
-        </p:spPr>
-        <p:txBody>
-          <a:bodyPr xmlns:a="http://schemas.openxmlformats.org/drawingml/2006/main" lIns="0" tIns="0" rIns="0" bIns="0" anchor="ctr">
-            <a:noAutofit/>
-          </a:bodyPr>
-          <a:lstStyle xmlns:a="http://schemas.openxmlformats.org/drawingml/2006/main"/>
-          <a:p xmlns:a="http://schemas.openxmlformats.org/drawingml/2006/main">
-            <a:pPr algn="ctr">
-              <a:lnSpc>
-                <a:spcPct val="114000"/>
-              </a:lnSpc>
-              <a:buNone/>
-              <a:defRPr sz="1800" b="1">
-                <a:solidFill>
-                  <a:srgbClr val="C8161E"/>
-                </a:solidFill>
-                <a:latin typeface="微软雅黑"/>
-                <a:ea typeface="微软雅黑"/>
-                <a:cs typeface="微软雅黑"/>
-              </a:defRPr>
-            </a:pPr>
-            <a:r>
-              <a:rPr sz="1800" b="1">
-                <a:solidFill>
-                  <a:srgbClr val="C8161E"/>
-                </a:solidFill>
-                <a:latin typeface="微软雅黑"/>
-                <a:ea typeface="微软雅黑"/>
-                <a:cs typeface="微软雅黑"/>
-              </a:rPr>
-              <a:t>6</a:t>
-            </a:r>
-          </a:p>
-        </p:txBody>
-      </p:sp>
-      <p:sp>
-        <p:nvSpPr>
-          <p:cNvPr id="18" name="visual-17-12-task-5">
-            <a:extLst xmlns:a="http://schemas.openxmlformats.org/drawingml/2006/main">
-              <a:ext uri="{FF2B5EF4-FFF2-40B4-BE49-F238E27FC236}">
-                <a16:creationId xmlns:a16="http://schemas.microsoft.com/office/drawing/2014/main" id="{7AFC7F86-96D4-4D81-A6FC-E23050C153DE}"/>
-              </a:ext>
-            </a:extLst>
-          </p:cNvPr>
-          <p:cNvSpPr>
-            <a:spLocks xmlns:a="http://schemas.openxmlformats.org/drawingml/2006/main" noGrp="1"/>
-          </p:cNvSpPr>
-          <p:nvPr/>
-        </p:nvSpPr>
-        <p:spPr>
-          <a:xfrm xmlns:a="http://schemas.openxmlformats.org/drawingml/2006/main">
-            <a:off x="7000875" y="3371850"/>
-            <a:ext cx="4953000" cy="647700"/>
-          </a:xfrm>
-          <a:prstGeom xmlns:a="http://schemas.openxmlformats.org/drawingml/2006/main" prst="rect">
-            <a:avLst/>
-          </a:prstGeom>
-          <a:noFill xmlns:a="http://schemas.openxmlformats.org/drawingml/2006/main"/>
-          <a:ln xmlns:a="http://schemas.openxmlformats.org/drawingml/2006/main" w="0">
-            <a:noFill/>
-          </a:ln>
-        </p:spPr>
-        <p:txBody>
-          <a:bodyPr xmlns:a="http://schemas.openxmlformats.org/drawingml/2006/main" lIns="0" tIns="0" rIns="0" bIns="0" anchor="t">
-            <a:noAutofit/>
-          </a:bodyPr>
-          <a:lstStyle xmlns:a="http://schemas.openxmlformats.org/drawingml/2006/main"/>
-          <a:p xmlns:a="http://schemas.openxmlformats.org/drawingml/2006/main">
-            <a:pPr algn="l">
-              <a:lnSpc>
-                <a:spcPct val="114000"/>
-              </a:lnSpc>
-              <a:buNone/>
-              <a:defRPr sz="2200" b="0">
-                <a:solidFill>
-                  <a:srgbClr val="27333D"/>
-                </a:solidFill>
-                <a:latin typeface="微软雅黑"/>
-                <a:ea typeface="微软雅黑"/>
-                <a:cs typeface="微软雅黑"/>
-              </a:defRPr>
-            </a:pPr>
-            <a:r>
-              <a:rPr sz="2200" b="0">
-                <a:solidFill>
-                  <a:srgbClr val="27333D"/>
-                </a:solidFill>
-                <a:latin typeface="微软雅黑"/>
-                <a:ea typeface="微软雅黑"/>
-                <a:cs typeface="微软雅黑"/>
-              </a:rPr>
-              <a:t>如出现空白：类型 + pending + 下一步窄检索 + 1 个候选题</a:t>
-            </a:r>
-          </a:p>
-        </p:txBody>
-      </p:sp>
-      <p:sp>
-        <p:nvSpPr>
-          <p:cNvPr id="19" name="visual-17-13-choice">
-            <a:extLst xmlns:a="http://schemas.openxmlformats.org/drawingml/2006/main">
-              <a:ext uri="{FF2B5EF4-FFF2-40B4-BE49-F238E27FC236}">
-                <a16:creationId xmlns:a16="http://schemas.microsoft.com/office/drawing/2014/main" id="{BB796D24-7669-4ECF-B86F-16F1B1A45855}"/>
-              </a:ext>
-            </a:extLst>
-          </p:cNvPr>
-          <p:cNvSpPr>
-            <a:spLocks xmlns:a="http://schemas.openxmlformats.org/drawingml/2006/main" noGrp="1"/>
-          </p:cNvSpPr>
-          <p:nvPr/>
-        </p:nvSpPr>
-        <p:spPr>
-          <a:xfrm xmlns:a="http://schemas.openxmlformats.org/drawingml/2006/main">
-            <a:off x="1333500" y="4476750"/>
-            <a:ext cx="9525000" cy="514350"/>
-          </a:xfrm>
-          <a:prstGeom xmlns:a="http://schemas.openxmlformats.org/drawingml/2006/main" prst="rect">
-            <a:avLst/>
-          </a:prstGeom>
-          <a:noFill xmlns:a="http://schemas.openxmlformats.org/drawingml/2006/main"/>
-          <a:ln xmlns:a="http://schemas.openxmlformats.org/drawingml/2006/main" w="0">
-            <a:noFill/>
-          </a:ln>
-        </p:spPr>
-        <p:txBody>
-          <a:bodyPr xmlns:a="http://schemas.openxmlformats.org/drawingml/2006/main" lIns="0" tIns="0" rIns="0" bIns="0" anchor="ctr">
-            <a:noAutofit/>
-          </a:bodyPr>
-          <a:lstStyle xmlns:a="http://schemas.openxmlformats.org/drawingml/2006/main"/>
-          <a:p xmlns:a="http://schemas.openxmlformats.org/drawingml/2006/main">
-            <a:pPr algn="l">
-              <a:lnSpc>
-                <a:spcPct val="114000"/>
-              </a:lnSpc>
-              <a:buNone/>
-              <a:defRPr sz="2400" b="0">
-                <a:solidFill>
-                  <a:srgbClr val="27333D"/>
-                </a:solidFill>
-                <a:latin typeface="微软雅黑"/>
-                <a:ea typeface="微软雅黑"/>
-                <a:cs typeface="微软雅黑"/>
-              </a:defRPr>
-            </a:pPr>
-            <a:r>
-              <a:rPr sz="2400" b="0">
-                <a:solidFill>
-                  <a:srgbClr val="27333D"/>
-                </a:solidFill>
-                <a:latin typeface="微软雅黑"/>
-                <a:ea typeface="微软雅黑"/>
-                <a:cs typeface="微软雅黑"/>
-              </a:rPr>
-              <a:t>选择顺序：本人真实问题 → 导师组公开问题 → 课程贯穿案例</a:t>
-            </a:r>
-          </a:p>
-        </p:txBody>
-      </p:sp>
-      <p:sp>
-        <p:nvSpPr>
-          <p:cNvPr id="20" name="visual-17-14-boundary">
-            <a:extLst xmlns:a="http://schemas.openxmlformats.org/drawingml/2006/main">
-              <a:ext uri="{FF2B5EF4-FFF2-40B4-BE49-F238E27FC236}">
-                <a16:creationId xmlns:a16="http://schemas.microsoft.com/office/drawing/2014/main" id="{F166CAD5-61FC-4DF1-9F71-6872C6C464DF}"/>
-              </a:ext>
-            </a:extLst>
-          </p:cNvPr>
-          <p:cNvSpPr>
-            <a:spLocks xmlns:a="http://schemas.openxmlformats.org/drawingml/2006/main" noGrp="1"/>
-          </p:cNvSpPr>
-          <p:nvPr/>
-        </p:nvSpPr>
-        <p:spPr>
-          <a:xfrm xmlns:a="http://schemas.openxmlformats.org/drawingml/2006/main">
-            <a:off x="1619250" y="5191125"/>
-            <a:ext cx="8953500" cy="457200"/>
-          </a:xfrm>
-          <a:prstGeom xmlns:a="http://schemas.openxmlformats.org/drawingml/2006/main" prst="rect">
-            <a:avLst/>
-          </a:prstGeom>
-          <a:noFill xmlns:a="http://schemas.openxmlformats.org/drawingml/2006/main"/>
-          <a:ln xmlns:a="http://schemas.openxmlformats.org/drawingml/2006/main" w="0">
-            <a:noFill/>
-          </a:ln>
-        </p:spPr>
-        <p:txBody>
-          <a:bodyPr xmlns:a="http://schemas.openxmlformats.org/drawingml/2006/main" lIns="0" tIns="0" rIns="0" bIns="0" anchor="ctr">
-            <a:noAutofit/>
-          </a:bodyPr>
-          <a:lstStyle xmlns:a="http://schemas.openxmlformats.org/drawingml/2006/main"/>
-          <a:p xmlns:a="http://schemas.openxmlformats.org/drawingml/2006/main">
-            <a:pPr algn="l">
-              <a:lnSpc>
-                <a:spcPct val="114000"/>
-              </a:lnSpc>
-              <a:buNone/>
-              <a:defRPr sz="2400" b="0">
-                <a:solidFill>
-                  <a:srgbClr val="27333D"/>
-                </a:solidFill>
-                <a:latin typeface="微软雅黑"/>
-                <a:ea typeface="微软雅黑"/>
-                <a:cs typeface="微软雅黑"/>
-              </a:defRPr>
-            </a:pPr>
-            <a:r>
-              <a:rPr sz="2400" b="0">
-                <a:solidFill>
-                  <a:srgbClr val="27333D"/>
-                </a:solidFill>
-                <a:latin typeface="微软雅黑"/>
-                <a:ea typeface="微软雅黑"/>
-                <a:cs typeface="微软雅黑"/>
-              </a:rPr>
-              <a:t>先判断可比性；再复用同一组记录生成地图与四句综合</a:t>
             </a:r>
           </a:p>
         </p:txBody>
@@ -18289,34 +15936,55 @@
       </p:grpSpPr>
       <p:sp>
         <p:nvSpPr>
-          <p:cNvPr id="4" name="Text Placeholder 3">
-            <a:extLst xmlns:a="http://schemas.openxmlformats.org/drawingml/2006/main">
-              <a:ext uri="{FF2B5EF4-FFF2-40B4-BE49-F238E27FC236}">
-                <a16:creationId xmlns:a16="http://schemas.microsoft.com/office/drawing/2014/main" id="{4D941B40-7A0A-534E-3563-CA11753C8E3F}"/>
-              </a:ext>
-            </a:extLst>
-          </p:cNvPr>
-          <p:cNvSpPr>
-            <a:spLocks xmlns:a="http://schemas.openxmlformats.org/drawingml/2006/main" noGrp="1"/>
-          </p:cNvSpPr>
-          <p:nvPr>
-            <p:ph type="body" idx="14"/>
-          </p:nvPr>
-        </p:nvSpPr>
-        <p:spPr>
-          <a:xfrm xmlns:a="http://schemas.openxmlformats.org/drawingml/2006/main">
-            <a:off x="1028700" y="28575"/>
-            <a:ext cx="10668000" cy="628650"/>
-          </a:xfrm>
-        </p:spPr>
-        <p:txBody>
-          <a:bodyPr xmlns:a="http://schemas.openxmlformats.org/drawingml/2006/main" lIns="0" tIns="0" rIns="0" bIns="0" anchor="ctr">
-            <a:noAutofit/>
-          </a:bodyPr>
-          <a:lstStyle xmlns:a="http://schemas.openxmlformats.org/drawingml/2006/main"/>
-          <a:p xmlns:a="http://schemas.openxmlformats.org/drawingml/2006/main">
-            <a:pPr algn="l">
-              <a:buNone/>
+          <p:cNvPr id="7" name="judgment-title">
+            <a:extLst xmlns:a="http://schemas.openxmlformats.org/drawingml/2006/main">
+              <a:ext uri="{FF2B5EF4-FFF2-40B4-BE49-F238E27FC236}">
+                <a16:creationId xmlns:a16="http://schemas.microsoft.com/office/drawing/2014/main" id="{44984EF2-0AEE-474A-9EFF-83069355F141}"/>
+              </a:ext>
+            </a:extLst>
+          </p:cNvPr>
+          <p:cNvSpPr>
+            <a:spLocks xmlns:a="http://schemas.openxmlformats.org/drawingml/2006/main" noGrp="1"/>
+          </p:cNvSpPr>
+          <p:nvPr/>
+        </p:nvSpPr>
+        <p:spPr>
+          <a:xfrm xmlns:a="http://schemas.openxmlformats.org/drawingml/2006/main">
+            <a:off x="1028700" y="76200"/>
+            <a:ext cx="10687050" cy="514350"/>
+          </a:xfrm>
+          <a:prstGeom xmlns:a="http://schemas.openxmlformats.org/drawingml/2006/main" prst="rect">
+            <a:avLst/>
+          </a:prstGeom>
+          <a:noFill xmlns:a="http://schemas.openxmlformats.org/drawingml/2006/main"/>
+          <a:ln xmlns:a="http://schemas.openxmlformats.org/drawingml/2006/main" w="0">
+            <a:noFill/>
+          </a:ln>
+        </p:spPr>
+        <p:txBody>
+          <a:bodyPr xmlns:a="http://schemas.openxmlformats.org/drawingml/2006/main" lIns="0" tIns="0" rIns="0" bIns="0" anchor="t"/>
+          <a:lstStyle xmlns:a="http://schemas.openxmlformats.org/drawingml/2006/main">
+            <a:defPPr algn="l">
+              <a:defRPr sz="3000" b="1">
+                <a:solidFill>
+                  <a:srgbClr val="FFFFFF"/>
+                </a:solidFill>
+                <a:latin typeface="微软雅黑"/>
+                <a:ea typeface="微软雅黑"/>
+                <a:cs typeface="微软雅黑"/>
+              </a:defRPr>
+            </a:defPPr>
+          </a:lstStyle>
+          <a:p xmlns:a="http://schemas.openxmlformats.org/drawingml/2006/main">
+            <a:pPr algn="l">
+              <a:defRPr sz="3000" b="1">
+                <a:solidFill>
+                  <a:srgbClr val="FFFFFF"/>
+                </a:solidFill>
+                <a:latin typeface="微软雅黑"/>
+                <a:ea typeface="微软雅黑"/>
+                <a:cs typeface="微软雅黑"/>
+              </a:defRPr>
             </a:pPr>
             <a:r>
               <a:rPr sz="3000" b="1">
@@ -18327,856 +15995,337 @@
                 <a:ea typeface="微软雅黑"/>
                 <a:cs typeface="微软雅黑"/>
               </a:rPr>
-              <a:t>退出卡与第 6 课预告</a:t>
-            </a:r>
-            <a:endParaRPr/>
-          </a:p>
-        </p:txBody>
-      </p:sp>
-      <p:sp>
-        <p:nvSpPr>
-          <p:cNvPr id="5" name="Slide Number Placeholder 4">
-            <a:extLst xmlns:a="http://schemas.openxmlformats.org/drawingml/2006/main">
-              <a:ext uri="{FF2B5EF4-FFF2-40B4-BE49-F238E27FC236}">
-                <a16:creationId xmlns:a16="http://schemas.microsoft.com/office/drawing/2014/main" id="{EBA5909F-738E-F60C-BE8C-B3F1D94548E5}"/>
-              </a:ext>
-            </a:extLst>
-          </p:cNvPr>
-          <p:cNvSpPr>
-            <a:spLocks xmlns:a="http://schemas.openxmlformats.org/drawingml/2006/main" noGrp="1"/>
-          </p:cNvSpPr>
-          <p:nvPr>
-            <p:ph type="sldNum" idx="10"/>
-          </p:nvPr>
-        </p:nvSpPr>
-        <p:spPr/>
-        <p:txBody>
-          <a:bodyPr xmlns:a="http://schemas.openxmlformats.org/drawingml/2006/main"/>
-          <a:lstStyle xmlns:a="http://schemas.openxmlformats.org/drawingml/2006/main"/>
-          <a:p xmlns:a="http://schemas.openxmlformats.org/drawingml/2006/main">
-            <a:fld id="{F6DF2BE2-2DFA-1C03-677D-BDC2260D6D92}" type="slidenum">
+              <a:t>保留本课决定，准备下一课输入</a:t>
+            </a:r>
+          </a:p>
+        </p:txBody>
+      </p:sp>
+      <p:sp>
+        <p:nvSpPr>
+          <p:cNvPr id="2" name="judgment-body-0">
+            <a:extLst xmlns:a="http://schemas.openxmlformats.org/drawingml/2006/main">
+              <a:ext uri="{FF2B5EF4-FFF2-40B4-BE49-F238E27FC236}">
+                <a16:creationId xmlns:a16="http://schemas.microsoft.com/office/drawing/2014/main" id="{D21BC202-B65A-4A5E-9EA0-67337F4E1A80}"/>
+              </a:ext>
+            </a:extLst>
+          </p:cNvPr>
+          <p:cNvSpPr>
+            <a:spLocks xmlns:a="http://schemas.openxmlformats.org/drawingml/2006/main" noGrp="1"/>
+          </p:cNvSpPr>
+          <p:nvPr/>
+        </p:nvSpPr>
+        <p:spPr>
+          <a:xfrm xmlns:a="http://schemas.openxmlformats.org/drawingml/2006/main">
+            <a:off x="666750" y="1066800"/>
+            <a:ext cx="10858500" cy="1009650"/>
+          </a:xfrm>
+          <a:prstGeom xmlns:a="http://schemas.openxmlformats.org/drawingml/2006/main" prst="rect">
+            <a:avLst/>
+          </a:prstGeom>
+          <a:noFill xmlns:a="http://schemas.openxmlformats.org/drawingml/2006/main"/>
+          <a:ln xmlns:a="http://schemas.openxmlformats.org/drawingml/2006/main" w="0">
+            <a:noFill/>
+          </a:ln>
+        </p:spPr>
+        <p:txBody>
+          <a:bodyPr xmlns:a="http://schemas.openxmlformats.org/drawingml/2006/main" lIns="0" tIns="0" rIns="0" bIns="0" anchor="t"/>
+          <a:lstStyle xmlns:a="http://schemas.openxmlformats.org/drawingml/2006/main">
+            <a:defPPr algn="l">
+              <a:defRPr sz="2400" b="0">
+                <a:solidFill>
+                  <a:srgbClr val="263746"/>
+                </a:solidFill>
+                <a:latin typeface="微软雅黑"/>
+                <a:ea typeface="微软雅黑"/>
+                <a:cs typeface="微软雅黑"/>
+              </a:defRPr>
+            </a:defPPr>
+          </a:lstStyle>
+          <a:p xmlns:a="http://schemas.openxmlformats.org/drawingml/2006/main">
+            <a:pPr algn="l">
+              <a:defRPr sz="2400" b="0">
+                <a:solidFill>
+                  <a:srgbClr val="263746"/>
+                </a:solidFill>
+                <a:latin typeface="微软雅黑"/>
+                <a:ea typeface="微软雅黑"/>
+                <a:cs typeface="微软雅黑"/>
+              </a:defRPr>
+            </a:pPr>
+            <a:r>
+              <a:rPr sz="2400" b="0">
+                <a:solidFill>
+                  <a:srgbClr val="263746"/>
+                </a:solidFill>
+                <a:latin typeface="微软雅黑"/>
+                <a:ea typeface="微软雅黑"/>
+                <a:cs typeface="微软雅黑"/>
+              </a:rPr>
+              <a:t>L6 用候选问题、前两张卡和第三项关键来源作问题门选择。</a:t>
+            </a:r>
+          </a:p>
+        </p:txBody>
+      </p:sp>
+      <p:sp>
+        <p:nvSpPr>
+          <p:cNvPr id="3" name="judgment-body-1">
+            <a:extLst xmlns:a="http://schemas.openxmlformats.org/drawingml/2006/main">
+              <a:ext uri="{FF2B5EF4-FFF2-40B4-BE49-F238E27FC236}">
+                <a16:creationId xmlns:a16="http://schemas.microsoft.com/office/drawing/2014/main" id="{7D4DF7A4-AEF1-41AC-93E0-5C944209AD5E}"/>
+              </a:ext>
+            </a:extLst>
+          </p:cNvPr>
+          <p:cNvSpPr>
+            <a:spLocks xmlns:a="http://schemas.openxmlformats.org/drawingml/2006/main" noGrp="1"/>
+          </p:cNvSpPr>
+          <p:nvPr/>
+        </p:nvSpPr>
+        <p:spPr>
+          <a:xfrm xmlns:a="http://schemas.openxmlformats.org/drawingml/2006/main">
+            <a:off x="666750" y="2238375"/>
+            <a:ext cx="10858500" cy="2076450"/>
+          </a:xfrm>
+          <a:prstGeom xmlns:a="http://schemas.openxmlformats.org/drawingml/2006/main" prst="rect">
+            <a:avLst/>
+          </a:prstGeom>
+          <a:noFill xmlns:a="http://schemas.openxmlformats.org/drawingml/2006/main"/>
+          <a:ln xmlns:a="http://schemas.openxmlformats.org/drawingml/2006/main" w="0">
+            <a:noFill/>
+          </a:ln>
+        </p:spPr>
+        <p:txBody>
+          <a:bodyPr xmlns:a="http://schemas.openxmlformats.org/drawingml/2006/main" lIns="0" tIns="0" rIns="0" bIns="0" anchor="t"/>
+          <a:lstStyle xmlns:a="http://schemas.openxmlformats.org/drawingml/2006/main">
+            <a:defPPr algn="l">
+              <a:defRPr sz="2400" b="0">
+                <a:solidFill>
+                  <a:srgbClr val="263746"/>
+                </a:solidFill>
+                <a:latin typeface="微软雅黑"/>
+                <a:ea typeface="微软雅黑"/>
+                <a:cs typeface="微软雅黑"/>
+              </a:defRPr>
+            </a:defPPr>
+          </a:lstStyle>
+          <a:p xmlns:a="http://schemas.openxmlformats.org/drawingml/2006/main">
+            <a:pPr algn="l">
+              <a:defRPr sz="2400" b="0">
+                <a:solidFill>
+                  <a:srgbClr val="263746"/>
+                </a:solidFill>
+                <a:latin typeface="微软雅黑"/>
+                <a:ea typeface="微软雅黑"/>
+                <a:cs typeface="微软雅黑"/>
+              </a:defRPr>
+            </a:pPr>
+            <a:r>
+              <a:rPr sz="2400" b="0">
+                <a:solidFill>
+                  <a:srgbClr val="263746"/>
+                </a:solidFill>
+                <a:latin typeface="微软雅黑"/>
+                <a:ea typeface="微软雅黑"/>
+                <a:cs typeface="微软雅黑"/>
+              </a:rPr>
+              <a:t>回写已有项目：同一阅读卡文件的第二张卡＋证据矩阵/地图及候选问题</a:t>
+            </a:r>
+          </a:p>
+        </p:txBody>
+      </p:sp>
+      <p:sp>
+        <p:nvSpPr>
+          <p:cNvPr id="4" name="judgment-body-2">
+            <a:extLst xmlns:a="http://schemas.openxmlformats.org/drawingml/2006/main">
+              <a:ext uri="{FF2B5EF4-FFF2-40B4-BE49-F238E27FC236}">
+                <a16:creationId xmlns:a16="http://schemas.microsoft.com/office/drawing/2014/main" id="{E3C91B17-A061-4A57-93CF-38371199A1EF}"/>
+              </a:ext>
+            </a:extLst>
+          </p:cNvPr>
+          <p:cNvSpPr>
+            <a:spLocks xmlns:a="http://schemas.openxmlformats.org/drawingml/2006/main" noGrp="1"/>
+          </p:cNvSpPr>
+          <p:nvPr/>
+        </p:nvSpPr>
+        <p:spPr>
+          <a:xfrm xmlns:a="http://schemas.openxmlformats.org/drawingml/2006/main">
+            <a:off x="666750" y="4495800"/>
+            <a:ext cx="10858500" cy="1409700"/>
+          </a:xfrm>
+          <a:prstGeom xmlns:a="http://schemas.openxmlformats.org/drawingml/2006/main" prst="rect">
+            <a:avLst/>
+          </a:prstGeom>
+          <a:noFill xmlns:a="http://schemas.openxmlformats.org/drawingml/2006/main"/>
+          <a:ln xmlns:a="http://schemas.openxmlformats.org/drawingml/2006/main" w="0">
+            <a:noFill/>
+          </a:ln>
+        </p:spPr>
+        <p:txBody>
+          <a:bodyPr xmlns:a="http://schemas.openxmlformats.org/drawingml/2006/main" lIns="0" tIns="0" rIns="0" bIns="0" anchor="t"/>
+          <a:lstStyle xmlns:a="http://schemas.openxmlformats.org/drawingml/2006/main">
+            <a:defPPr algn="l">
+              <a:defRPr sz="2200" b="0">
+                <a:solidFill>
+                  <a:srgbClr val="1F4D78"/>
+                </a:solidFill>
+                <a:latin typeface="微软雅黑"/>
+                <a:ea typeface="微软雅黑"/>
+                <a:cs typeface="微软雅黑"/>
+              </a:defRPr>
+            </a:defPPr>
+          </a:lstStyle>
+          <a:p xmlns:a="http://schemas.openxmlformats.org/drawingml/2006/main">
+            <a:pPr algn="l">
+              <a:defRPr sz="2200" b="0">
+                <a:solidFill>
+                  <a:srgbClr val="1F4D78"/>
+                </a:solidFill>
+                <a:latin typeface="微软雅黑"/>
+                <a:ea typeface="微软雅黑"/>
+                <a:cs typeface="微软雅黑"/>
+              </a:defRPr>
+            </a:pPr>
+            <a:r>
+              <a:rPr sz="2200" b="0">
+                <a:solidFill>
+                  <a:srgbClr val="1F4D78"/>
+                </a:solidFill>
+                <a:latin typeface="微软雅黑"/>
+                <a:ea typeface="微软雅黑"/>
+                <a:cs typeface="微软雅黑"/>
+              </a:rPr>
+              <a:t>只读指定段落，补课堂留下的真实缺口。安装与排障计入课外总预算。</a:t>
+            </a:r>
+          </a:p>
+        </p:txBody>
+      </p:sp>
+      <p:sp>
+        <p:nvSpPr>
+          <p:cNvPr id="5" name="judgment-source">
+            <a:extLst xmlns:a="http://schemas.openxmlformats.org/drawingml/2006/main">
+              <a:ext uri="{FF2B5EF4-FFF2-40B4-BE49-F238E27FC236}">
+                <a16:creationId xmlns:a16="http://schemas.microsoft.com/office/drawing/2014/main" id="{59B78CAE-9B11-46AD-AFBF-677944D07D96}"/>
+              </a:ext>
+            </a:extLst>
+          </p:cNvPr>
+          <p:cNvSpPr>
+            <a:spLocks xmlns:a="http://schemas.openxmlformats.org/drawingml/2006/main" noGrp="1"/>
+          </p:cNvSpPr>
+          <p:nvPr/>
+        </p:nvSpPr>
+        <p:spPr>
+          <a:xfrm xmlns:a="http://schemas.openxmlformats.org/drawingml/2006/main">
+            <a:off x="666750" y="6276975"/>
+            <a:ext cx="10572750" cy="209550"/>
+          </a:xfrm>
+          <a:prstGeom xmlns:a="http://schemas.openxmlformats.org/drawingml/2006/main" prst="rect">
+            <a:avLst/>
+          </a:prstGeom>
+          <a:noFill xmlns:a="http://schemas.openxmlformats.org/drawingml/2006/main"/>
+          <a:ln xmlns:a="http://schemas.openxmlformats.org/drawingml/2006/main" w="0">
+            <a:noFill/>
+          </a:ln>
+        </p:spPr>
+        <p:txBody>
+          <a:bodyPr xmlns:a="http://schemas.openxmlformats.org/drawingml/2006/main" lIns="0" tIns="0" rIns="0" bIns="0" anchor="t"/>
+          <a:lstStyle xmlns:a="http://schemas.openxmlformats.org/drawingml/2006/main">
+            <a:defPPr algn="l">
+              <a:defRPr sz="1100" b="0">
+                <a:solidFill>
+                  <a:srgbClr val="667684"/>
+                </a:solidFill>
+                <a:latin typeface="微软雅黑"/>
+                <a:ea typeface="微软雅黑"/>
+                <a:cs typeface="微软雅黑"/>
+              </a:defRPr>
+            </a:defPPr>
+          </a:lstStyle>
+          <a:p xmlns:a="http://schemas.openxmlformats.org/drawingml/2006/main">
+            <a:pPr algn="l">
+              <a:defRPr sz="1100" b="0">
+                <a:solidFill>
+                  <a:srgbClr val="667684"/>
+                </a:solidFill>
+                <a:latin typeface="微软雅黑"/>
+                <a:ea typeface="微软雅黑"/>
+                <a:cs typeface="微软雅黑"/>
+              </a:defRPr>
+            </a:pPr>
+            <a:r>
+              <a:rPr sz="1100" b="0">
+                <a:solidFill>
+                  <a:srgbClr val="667684"/>
+                </a:solidFill>
+                <a:latin typeface="微软雅黑"/>
+                <a:ea typeface="微软雅黑"/>
+                <a:cs typeface="微软雅黑"/>
+              </a:rPr>
+              <a:t>来源：本课判断任务与讲义；构造材料及真实来源按材料包标识</a:t>
+            </a:r>
+          </a:p>
+        </p:txBody>
+      </p:sp>
+      <p:sp>
+        <p:nvSpPr>
+          <p:cNvPr id="6" name="judgment-page">
+            <a:extLst xmlns:a="http://schemas.openxmlformats.org/drawingml/2006/main">
+              <a:ext uri="{FF2B5EF4-FFF2-40B4-BE49-F238E27FC236}">
+                <a16:creationId xmlns:a16="http://schemas.microsoft.com/office/drawing/2014/main" id="{2CDB3024-2C81-4B51-9CBC-311C3D866E52}"/>
+              </a:ext>
+            </a:extLst>
+          </p:cNvPr>
+          <p:cNvSpPr>
+            <a:spLocks xmlns:a="http://schemas.openxmlformats.org/drawingml/2006/main" noGrp="1"/>
+          </p:cNvSpPr>
+          <p:nvPr/>
+        </p:nvSpPr>
+        <p:spPr>
+          <a:xfrm xmlns:a="http://schemas.openxmlformats.org/drawingml/2006/main">
+            <a:off x="11715750" y="6562725"/>
+            <a:ext cx="238125" cy="171450"/>
+          </a:xfrm>
+          <a:prstGeom xmlns:a="http://schemas.openxmlformats.org/drawingml/2006/main" prst="rect">
+            <a:avLst/>
+          </a:prstGeom>
+          <a:noFill xmlns:a="http://schemas.openxmlformats.org/drawingml/2006/main"/>
+          <a:ln xmlns:a="http://schemas.openxmlformats.org/drawingml/2006/main" w="0">
+            <a:noFill/>
+          </a:ln>
+        </p:spPr>
+        <p:txBody>
+          <a:bodyPr xmlns:a="http://schemas.openxmlformats.org/drawingml/2006/main" lIns="0" tIns="0" rIns="0" bIns="0" anchor="t"/>
+          <a:lstStyle xmlns:a="http://schemas.openxmlformats.org/drawingml/2006/main">
+            <a:defPPr algn="l">
+              <a:defRPr sz="900" b="0">
+                <a:solidFill>
+                  <a:srgbClr val="A5A5A5"/>
+                </a:solidFill>
+                <a:latin typeface="微软雅黑"/>
+                <a:ea typeface="微软雅黑"/>
+                <a:cs typeface="微软雅黑"/>
+              </a:defRPr>
+            </a:defPPr>
+          </a:lstStyle>
+          <a:p xmlns:a="http://schemas.openxmlformats.org/drawingml/2006/main">
+            <a:pPr algn="l">
+              <a:defRPr sz="900" b="0">
+                <a:solidFill>
+                  <a:srgbClr val="A5A5A5"/>
+                </a:solidFill>
+                <a:latin typeface="微软雅黑"/>
+                <a:ea typeface="微软雅黑"/>
+                <a:cs typeface="微软雅黑"/>
+              </a:defRPr>
+            </a:pPr>
+            <a:r>
+              <a:rPr sz="900" b="0">
+                <a:solidFill>
+                  <a:srgbClr val="A5A5A5"/>
+                </a:solidFill>
+                <a:latin typeface="微软雅黑"/>
+                <a:ea typeface="微软雅黑"/>
+                <a:cs typeface="微软雅黑"/>
+              </a:rPr>
               <a:t>21</a:t>
-            </a:fld>
-            <a:endParaRPr/>
-          </a:p>
-        </p:txBody>
-      </p:sp>
-      <p:sp>
-        <p:nvSpPr>
-          <p:cNvPr id="6" name="visual-21-0-p21-in0">
-            <a:extLst xmlns:a="http://schemas.openxmlformats.org/drawingml/2006/main">
-              <a:ext uri="{FF2B5EF4-FFF2-40B4-BE49-F238E27FC236}">
-                <a16:creationId xmlns:a16="http://schemas.microsoft.com/office/drawing/2014/main" id="{2512F1E3-A5E8-468A-AC55-3E4410E8A605}"/>
-              </a:ext>
-            </a:extLst>
-          </p:cNvPr>
-          <p:cNvSpPr>
-            <a:spLocks xmlns:a="http://schemas.openxmlformats.org/drawingml/2006/main" noGrp="1"/>
-          </p:cNvSpPr>
-          <p:nvPr/>
-        </p:nvSpPr>
-        <p:spPr>
-          <a:xfrm xmlns:a="http://schemas.openxmlformats.org/drawingml/2006/main">
-            <a:off x="619125" y="1162050"/>
-            <a:ext cx="3429000" cy="628650"/>
-          </a:xfrm>
-          <a:prstGeom xmlns:a="http://schemas.openxmlformats.org/drawingml/2006/main" prst="rect">
-            <a:avLst/>
-          </a:prstGeom>
-          <a:noFill xmlns:a="http://schemas.openxmlformats.org/drawingml/2006/main"/>
-          <a:ln xmlns:a="http://schemas.openxmlformats.org/drawingml/2006/main" w="0">
-            <a:noFill/>
-          </a:ln>
-        </p:spPr>
-        <p:txBody>
-          <a:bodyPr xmlns:a="http://schemas.openxmlformats.org/drawingml/2006/main" lIns="0" tIns="0" rIns="0" bIns="0" anchor="t">
-            <a:noAutofit/>
-          </a:bodyPr>
-          <a:lstStyle xmlns:a="http://schemas.openxmlformats.org/drawingml/2006/main"/>
-          <a:p xmlns:a="http://schemas.openxmlformats.org/drawingml/2006/main">
-            <a:pPr algn="l">
-              <a:lnSpc>
-                <a:spcPct val="114000"/>
-              </a:lnSpc>
-              <a:buNone/>
-              <a:defRPr sz="2000" b="0">
-                <a:solidFill>
-                  <a:srgbClr val="1F4D78"/>
-                </a:solidFill>
-                <a:latin typeface="微软雅黑"/>
-                <a:ea typeface="微软雅黑"/>
-                <a:cs typeface="微软雅黑"/>
-              </a:defRPr>
-            </a:pPr>
-            <a:r>
-              <a:rPr sz="2000" b="0">
-                <a:solidFill>
-                  <a:srgbClr val="1F4D78"/>
-                </a:solidFill>
-                <a:latin typeface="微软雅黑"/>
-                <a:ea typeface="微软雅黑"/>
-                <a:cs typeface="微软雅黑"/>
-              </a:rPr>
-              <a:t>四句 mini review</a:t>
-            </a:r>
-          </a:p>
-        </p:txBody>
-      </p:sp>
-      <p:sp>
-        <p:nvSpPr>
-          <p:cNvPr id="7" name="visual-21-1-p21-a0">
-            <a:extLst xmlns:a="http://schemas.openxmlformats.org/drawingml/2006/main">
-              <a:ext uri="{FF2B5EF4-FFF2-40B4-BE49-F238E27FC236}">
-                <a16:creationId xmlns:a16="http://schemas.microsoft.com/office/drawing/2014/main" id="{3ECC81BB-A823-47DE-AB9A-EFB4AA03DDCA}"/>
-              </a:ext>
-            </a:extLst>
-          </p:cNvPr>
-          <p:cNvSpPr>
-            <a:spLocks xmlns:a="http://schemas.openxmlformats.org/drawingml/2006/main" noGrp="1"/>
-          </p:cNvSpPr>
-          <p:nvPr/>
-        </p:nvSpPr>
-        <p:spPr>
-          <a:xfrm xmlns:a="http://schemas.openxmlformats.org/drawingml/2006/main">
-            <a:off x="4333875" y="1276350"/>
-            <a:ext cx="666750" cy="381000"/>
-          </a:xfrm>
-          <a:prstGeom xmlns:a="http://schemas.openxmlformats.org/drawingml/2006/main" prst="rect">
-            <a:avLst/>
-          </a:prstGeom>
-          <a:noFill xmlns:a="http://schemas.openxmlformats.org/drawingml/2006/main"/>
-          <a:ln xmlns:a="http://schemas.openxmlformats.org/drawingml/2006/main" w="0">
-            <a:noFill/>
-          </a:ln>
-        </p:spPr>
-        <p:txBody>
-          <a:bodyPr xmlns:a="http://schemas.openxmlformats.org/drawingml/2006/main" lIns="0" tIns="0" rIns="0" bIns="0" anchor="ctr">
-            <a:noAutofit/>
-          </a:bodyPr>
-          <a:lstStyle xmlns:a="http://schemas.openxmlformats.org/drawingml/2006/main"/>
-          <a:p xmlns:a="http://schemas.openxmlformats.org/drawingml/2006/main">
-            <a:pPr algn="ctr">
-              <a:lnSpc>
-                <a:spcPct val="114000"/>
-              </a:lnSpc>
-              <a:buNone/>
-              <a:defRPr sz="2200" b="1">
-                <a:solidFill>
-                  <a:srgbClr val="1F4D78"/>
-                </a:solidFill>
-                <a:latin typeface="微软雅黑"/>
-                <a:ea typeface="微软雅黑"/>
-                <a:cs typeface="微软雅黑"/>
-              </a:defRPr>
-            </a:pPr>
-            <a:r>
-              <a:rPr sz="2200" b="1">
-                <a:solidFill>
-                  <a:srgbClr val="1F4D78"/>
-                </a:solidFill>
-                <a:latin typeface="微软雅黑"/>
-                <a:ea typeface="微软雅黑"/>
-                <a:cs typeface="微软雅黑"/>
-              </a:rPr>
-              <a:t>→</a:t>
-            </a:r>
-          </a:p>
-        </p:txBody>
-      </p:sp>
-      <p:sp>
-        <p:nvSpPr>
-          <p:cNvPr id="8" name="visual-21-2-p21-in1">
-            <a:extLst xmlns:a="http://schemas.openxmlformats.org/drawingml/2006/main">
-              <a:ext uri="{FF2B5EF4-FFF2-40B4-BE49-F238E27FC236}">
-                <a16:creationId xmlns:a16="http://schemas.microsoft.com/office/drawing/2014/main" id="{8444DA65-D8EC-4C57-B2AA-FC18224AE35A}"/>
-              </a:ext>
-            </a:extLst>
-          </p:cNvPr>
-          <p:cNvSpPr>
-            <a:spLocks xmlns:a="http://schemas.openxmlformats.org/drawingml/2006/main" noGrp="1"/>
-          </p:cNvSpPr>
-          <p:nvPr/>
-        </p:nvSpPr>
-        <p:spPr>
-          <a:xfrm xmlns:a="http://schemas.openxmlformats.org/drawingml/2006/main">
-            <a:off x="619125" y="2076450"/>
-            <a:ext cx="3429000" cy="628650"/>
-          </a:xfrm>
-          <a:prstGeom xmlns:a="http://schemas.openxmlformats.org/drawingml/2006/main" prst="rect">
-            <a:avLst/>
-          </a:prstGeom>
-          <a:noFill xmlns:a="http://schemas.openxmlformats.org/drawingml/2006/main"/>
-          <a:ln xmlns:a="http://schemas.openxmlformats.org/drawingml/2006/main" w="0">
-            <a:noFill/>
-          </a:ln>
-        </p:spPr>
-        <p:txBody>
-          <a:bodyPr xmlns:a="http://schemas.openxmlformats.org/drawingml/2006/main" lIns="0" tIns="0" rIns="0" bIns="0" anchor="t">
-            <a:noAutofit/>
-          </a:bodyPr>
-          <a:lstStyle xmlns:a="http://schemas.openxmlformats.org/drawingml/2006/main"/>
-          <a:p xmlns:a="http://schemas.openxmlformats.org/drawingml/2006/main">
-            <a:pPr algn="l">
-              <a:lnSpc>
-                <a:spcPct val="114000"/>
-              </a:lnSpc>
-              <a:buNone/>
-              <a:defRPr sz="2200" b="1">
-                <a:solidFill>
-                  <a:srgbClr val="1F4D78"/>
-                </a:solidFill>
-                <a:latin typeface="微软雅黑"/>
-                <a:ea typeface="微软雅黑"/>
-                <a:cs typeface="微软雅黑"/>
-              </a:defRPr>
-            </a:pPr>
-            <a:r>
-              <a:rPr sz="2200" b="1">
-                <a:solidFill>
-                  <a:srgbClr val="1F4D78"/>
-                </a:solidFill>
-                <a:latin typeface="微软雅黑"/>
-                <a:ea typeface="微软雅黑"/>
-                <a:cs typeface="微软雅黑"/>
-              </a:rPr>
-              <a:t>四视图证据地图</a:t>
-            </a:r>
-          </a:p>
-        </p:txBody>
-      </p:sp>
-      <p:sp>
-        <p:nvSpPr>
-          <p:cNvPr id="9" name="visual-21-3-p21-a1">
-            <a:extLst xmlns:a="http://schemas.openxmlformats.org/drawingml/2006/main">
-              <a:ext uri="{FF2B5EF4-FFF2-40B4-BE49-F238E27FC236}">
-                <a16:creationId xmlns:a16="http://schemas.microsoft.com/office/drawing/2014/main" id="{A6E8F722-2F4D-454A-ABBC-3DA165377C1A}"/>
-              </a:ext>
-            </a:extLst>
-          </p:cNvPr>
-          <p:cNvSpPr>
-            <a:spLocks xmlns:a="http://schemas.openxmlformats.org/drawingml/2006/main" noGrp="1"/>
-          </p:cNvSpPr>
-          <p:nvPr/>
-        </p:nvSpPr>
-        <p:spPr>
-          <a:xfrm xmlns:a="http://schemas.openxmlformats.org/drawingml/2006/main">
-            <a:off x="4333875" y="2190750"/>
-            <a:ext cx="666750" cy="381000"/>
-          </a:xfrm>
-          <a:prstGeom xmlns:a="http://schemas.openxmlformats.org/drawingml/2006/main" prst="rect">
-            <a:avLst/>
-          </a:prstGeom>
-          <a:noFill xmlns:a="http://schemas.openxmlformats.org/drawingml/2006/main"/>
-          <a:ln xmlns:a="http://schemas.openxmlformats.org/drawingml/2006/main" w="0">
-            <a:noFill/>
-          </a:ln>
-        </p:spPr>
-        <p:txBody>
-          <a:bodyPr xmlns:a="http://schemas.openxmlformats.org/drawingml/2006/main" lIns="0" tIns="0" rIns="0" bIns="0" anchor="ctr">
-            <a:noAutofit/>
-          </a:bodyPr>
-          <a:lstStyle xmlns:a="http://schemas.openxmlformats.org/drawingml/2006/main"/>
-          <a:p xmlns:a="http://schemas.openxmlformats.org/drawingml/2006/main">
-            <a:pPr algn="ctr">
-              <a:lnSpc>
-                <a:spcPct val="114000"/>
-              </a:lnSpc>
-              <a:buNone/>
-              <a:defRPr sz="2200" b="1">
-                <a:solidFill>
-                  <a:srgbClr val="1F4D78"/>
-                </a:solidFill>
-                <a:latin typeface="微软雅黑"/>
-                <a:ea typeface="微软雅黑"/>
-                <a:cs typeface="微软雅黑"/>
-              </a:defRPr>
-            </a:pPr>
-            <a:r>
-              <a:rPr sz="2200" b="1">
-                <a:solidFill>
-                  <a:srgbClr val="1F4D78"/>
-                </a:solidFill>
-                <a:latin typeface="微软雅黑"/>
-                <a:ea typeface="微软雅黑"/>
-                <a:cs typeface="微软雅黑"/>
-              </a:rPr>
-              <a:t>→</a:t>
-            </a:r>
-          </a:p>
-        </p:txBody>
-      </p:sp>
-      <p:sp>
-        <p:nvSpPr>
-          <p:cNvPr id="10" name="visual-21-4-p21-in2">
-            <a:extLst xmlns:a="http://schemas.openxmlformats.org/drawingml/2006/main">
-              <a:ext uri="{FF2B5EF4-FFF2-40B4-BE49-F238E27FC236}">
-                <a16:creationId xmlns:a16="http://schemas.microsoft.com/office/drawing/2014/main" id="{0D46D94B-5F59-4722-9B70-7D5BE9F5C460}"/>
-              </a:ext>
-            </a:extLst>
-          </p:cNvPr>
-          <p:cNvSpPr>
-            <a:spLocks xmlns:a="http://schemas.openxmlformats.org/drawingml/2006/main" noGrp="1"/>
-          </p:cNvSpPr>
-          <p:nvPr/>
-        </p:nvSpPr>
-        <p:spPr>
-          <a:xfrm xmlns:a="http://schemas.openxmlformats.org/drawingml/2006/main">
-            <a:off x="619125" y="2990850"/>
-            <a:ext cx="3429000" cy="628650"/>
-          </a:xfrm>
-          <a:prstGeom xmlns:a="http://schemas.openxmlformats.org/drawingml/2006/main" prst="rect">
-            <a:avLst/>
-          </a:prstGeom>
-          <a:noFill xmlns:a="http://schemas.openxmlformats.org/drawingml/2006/main"/>
-          <a:ln xmlns:a="http://schemas.openxmlformats.org/drawingml/2006/main" w="0">
-            <a:noFill/>
-          </a:ln>
-        </p:spPr>
-        <p:txBody>
-          <a:bodyPr xmlns:a="http://schemas.openxmlformats.org/drawingml/2006/main" lIns="0" tIns="0" rIns="0" bIns="0" anchor="t">
-            <a:noAutofit/>
-          </a:bodyPr>
-          <a:lstStyle xmlns:a="http://schemas.openxmlformats.org/drawingml/2006/main"/>
-          <a:p xmlns:a="http://schemas.openxmlformats.org/drawingml/2006/main">
-            <a:pPr algn="l">
-              <a:lnSpc>
-                <a:spcPct val="114000"/>
-              </a:lnSpc>
-              <a:buNone/>
-              <a:defRPr sz="2000" b="0">
-                <a:solidFill>
-                  <a:srgbClr val="1F4D78"/>
-                </a:solidFill>
-                <a:latin typeface="微软雅黑"/>
-                <a:ea typeface="微软雅黑"/>
-                <a:cs typeface="微软雅黑"/>
-              </a:defRPr>
-            </a:pPr>
-            <a:r>
-              <a:rPr sz="2000" b="0">
-                <a:solidFill>
-                  <a:srgbClr val="1F4D78"/>
-                </a:solidFill>
-                <a:latin typeface="微软雅黑"/>
-                <a:ea typeface="微软雅黑"/>
-                <a:cs typeface="微软雅黑"/>
-              </a:rPr>
-              <a:t>空白候选 + 候选题记录</a:t>
-            </a:r>
-          </a:p>
-        </p:txBody>
-      </p:sp>
-      <p:sp>
-        <p:nvSpPr>
-          <p:cNvPr id="11" name="visual-21-5-p21-a2">
-            <a:extLst xmlns:a="http://schemas.openxmlformats.org/drawingml/2006/main">
-              <a:ext uri="{FF2B5EF4-FFF2-40B4-BE49-F238E27FC236}">
-                <a16:creationId xmlns:a16="http://schemas.microsoft.com/office/drawing/2014/main" id="{F8E2E30F-6C01-45BD-BE3D-94BC80A0A0E4}"/>
-              </a:ext>
-            </a:extLst>
-          </p:cNvPr>
-          <p:cNvSpPr>
-            <a:spLocks xmlns:a="http://schemas.openxmlformats.org/drawingml/2006/main" noGrp="1"/>
-          </p:cNvSpPr>
-          <p:nvPr/>
-        </p:nvSpPr>
-        <p:spPr>
-          <a:xfrm xmlns:a="http://schemas.openxmlformats.org/drawingml/2006/main">
-            <a:off x="4333875" y="3105150"/>
-            <a:ext cx="666750" cy="381000"/>
-          </a:xfrm>
-          <a:prstGeom xmlns:a="http://schemas.openxmlformats.org/drawingml/2006/main" prst="rect">
-            <a:avLst/>
-          </a:prstGeom>
-          <a:noFill xmlns:a="http://schemas.openxmlformats.org/drawingml/2006/main"/>
-          <a:ln xmlns:a="http://schemas.openxmlformats.org/drawingml/2006/main" w="0">
-            <a:noFill/>
-          </a:ln>
-        </p:spPr>
-        <p:txBody>
-          <a:bodyPr xmlns:a="http://schemas.openxmlformats.org/drawingml/2006/main" lIns="0" tIns="0" rIns="0" bIns="0" anchor="ctr">
-            <a:noAutofit/>
-          </a:bodyPr>
-          <a:lstStyle xmlns:a="http://schemas.openxmlformats.org/drawingml/2006/main"/>
-          <a:p xmlns:a="http://schemas.openxmlformats.org/drawingml/2006/main">
-            <a:pPr algn="ctr">
-              <a:lnSpc>
-                <a:spcPct val="114000"/>
-              </a:lnSpc>
-              <a:buNone/>
-              <a:defRPr sz="2200" b="1">
-                <a:solidFill>
-                  <a:srgbClr val="1F4D78"/>
-                </a:solidFill>
-                <a:latin typeface="微软雅黑"/>
-                <a:ea typeface="微软雅黑"/>
-                <a:cs typeface="微软雅黑"/>
-              </a:defRPr>
-            </a:pPr>
-            <a:r>
-              <a:rPr sz="2200" b="1">
-                <a:solidFill>
-                  <a:srgbClr val="1F4D78"/>
-                </a:solidFill>
-                <a:latin typeface="微软雅黑"/>
-                <a:ea typeface="微软雅黑"/>
-                <a:cs typeface="微软雅黑"/>
-              </a:rPr>
-              <a:t>→</a:t>
-            </a:r>
-          </a:p>
-        </p:txBody>
-      </p:sp>
-      <p:sp>
-        <p:nvSpPr>
-          <p:cNvPr id="12" name="visual-21-6-p21-gate">
-            <a:extLst xmlns:a="http://schemas.openxmlformats.org/drawingml/2006/main">
-              <a:ext uri="{FF2B5EF4-FFF2-40B4-BE49-F238E27FC236}">
-                <a16:creationId xmlns:a16="http://schemas.microsoft.com/office/drawing/2014/main" id="{7FC41357-A244-4B73-9DBC-646D9D8C9403}"/>
-              </a:ext>
-            </a:extLst>
-          </p:cNvPr>
-          <p:cNvSpPr>
-            <a:spLocks xmlns:a="http://schemas.openxmlformats.org/drawingml/2006/main" noGrp="1"/>
-          </p:cNvSpPr>
-          <p:nvPr/>
-        </p:nvSpPr>
-        <p:spPr>
-          <a:xfrm xmlns:a="http://schemas.openxmlformats.org/drawingml/2006/main">
-            <a:off x="5381625" y="1714500"/>
-            <a:ext cx="4000500" cy="1619250"/>
-          </a:xfrm>
-          <a:prstGeom xmlns:a="http://schemas.openxmlformats.org/drawingml/2006/main" prst="rect">
-            <a:avLst/>
-          </a:prstGeom>
-          <a:noFill xmlns:a="http://schemas.openxmlformats.org/drawingml/2006/main"/>
-          <a:ln xmlns:a="http://schemas.openxmlformats.org/drawingml/2006/main" w="0">
-            <a:noFill/>
-          </a:ln>
-        </p:spPr>
-        <p:txBody>
-          <a:bodyPr xmlns:a="http://schemas.openxmlformats.org/drawingml/2006/main" lIns="0" tIns="0" rIns="0" bIns="0" anchor="t">
-            <a:noAutofit/>
-          </a:bodyPr>
-          <a:lstStyle xmlns:a="http://schemas.openxmlformats.org/drawingml/2006/main"/>
-          <a:p xmlns:a="http://schemas.openxmlformats.org/drawingml/2006/main">
-            <a:pPr algn="l">
-              <a:lnSpc>
-                <a:spcPct val="114000"/>
-              </a:lnSpc>
-              <a:buNone/>
-              <a:defRPr sz="2400" b="0">
-                <a:solidFill>
-                  <a:srgbClr val="27333D"/>
-                </a:solidFill>
-                <a:latin typeface="微软雅黑"/>
-                <a:ea typeface="微软雅黑"/>
-                <a:cs typeface="微软雅黑"/>
-              </a:defRPr>
-            </a:pPr>
-            <a:r>
-              <a:rPr sz="2400" b="0">
-                <a:solidFill>
-                  <a:srgbClr val="27333D"/>
-                </a:solidFill>
-                <a:latin typeface="微软雅黑"/>
-                <a:ea typeface="微软雅黑"/>
-                <a:cs typeface="微软雅黑"/>
-              </a:rPr>
-              <a:t>第 6 课</a:t>
-            </a:r>
-          </a:p>
-          <a:p xmlns:a="http://schemas.openxmlformats.org/drawingml/2006/main">
-            <a:pPr algn="l">
-              <a:lnSpc>
-                <a:spcPct val="114000"/>
-              </a:lnSpc>
-              <a:buNone/>
-              <a:defRPr sz="2400" b="0">
-                <a:solidFill>
-                  <a:srgbClr val="27333D"/>
-                </a:solidFill>
-                <a:latin typeface="微软雅黑"/>
-                <a:ea typeface="微软雅黑"/>
-                <a:cs typeface="微软雅黑"/>
-              </a:defRPr>
-            </a:pPr>
-            <a:r>
-              <a:rPr sz="2400" b="0">
-                <a:solidFill>
-                  <a:srgbClr val="27333D"/>
-                </a:solidFill>
-                <a:latin typeface="微软雅黑"/>
-                <a:ea typeface="微软雅黑"/>
-                <a:cs typeface="微软雅黑"/>
-              </a:rPr>
-              <a:t>问题定义 + 第一性原理 + 问题门</a:t>
-            </a:r>
-          </a:p>
-        </p:txBody>
-      </p:sp>
-      <p:sp>
-        <p:nvSpPr>
-          <p:cNvPr id="13" name="visual-21-7-p21-check-h">
-            <a:extLst xmlns:a="http://schemas.openxmlformats.org/drawingml/2006/main">
-              <a:ext uri="{FF2B5EF4-FFF2-40B4-BE49-F238E27FC236}">
-                <a16:creationId xmlns:a16="http://schemas.microsoft.com/office/drawing/2014/main" id="{0B1D8B60-F881-4C73-997E-E74F14814AF0}"/>
-              </a:ext>
-            </a:extLst>
-          </p:cNvPr>
-          <p:cNvSpPr>
-            <a:spLocks xmlns:a="http://schemas.openxmlformats.org/drawingml/2006/main" noGrp="1"/>
-          </p:cNvSpPr>
-          <p:nvPr/>
-        </p:nvSpPr>
-        <p:spPr>
-          <a:xfrm xmlns:a="http://schemas.openxmlformats.org/drawingml/2006/main">
-            <a:off x="9810750" y="1066800"/>
-            <a:ext cx="1809750" cy="457200"/>
-          </a:xfrm>
-          <a:prstGeom xmlns:a="http://schemas.openxmlformats.org/drawingml/2006/main" prst="rect">
-            <a:avLst/>
-          </a:prstGeom>
-          <a:noFill xmlns:a="http://schemas.openxmlformats.org/drawingml/2006/main"/>
-          <a:ln xmlns:a="http://schemas.openxmlformats.org/drawingml/2006/main" w="0">
-            <a:noFill/>
-          </a:ln>
-        </p:spPr>
-        <p:txBody>
-          <a:bodyPr xmlns:a="http://schemas.openxmlformats.org/drawingml/2006/main" lIns="0" tIns="0" rIns="0" bIns="0" anchor="ctr">
-            <a:noAutofit/>
-          </a:bodyPr>
-          <a:lstStyle xmlns:a="http://schemas.openxmlformats.org/drawingml/2006/main"/>
-          <a:p xmlns:a="http://schemas.openxmlformats.org/drawingml/2006/main">
-            <a:pPr algn="l">
-              <a:lnSpc>
-                <a:spcPct val="114000"/>
-              </a:lnSpc>
-              <a:buNone/>
-              <a:defRPr sz="2200" b="1">
-                <a:solidFill>
-                  <a:srgbClr val="1F4D78"/>
-                </a:solidFill>
-                <a:latin typeface="微软雅黑"/>
-                <a:ea typeface="微软雅黑"/>
-                <a:cs typeface="微软雅黑"/>
-              </a:defRPr>
-            </a:pPr>
-            <a:r>
-              <a:rPr sz="2200" b="1">
-                <a:solidFill>
-                  <a:srgbClr val="1F4D78"/>
-                </a:solidFill>
-                <a:latin typeface="微软雅黑"/>
-                <a:ea typeface="微软雅黑"/>
-                <a:cs typeface="微软雅黑"/>
-              </a:rPr>
-              <a:t>退出卡</a:t>
-            </a:r>
-          </a:p>
-        </p:txBody>
-      </p:sp>
-      <p:sp>
-        <p:nvSpPr>
-          <p:cNvPr id="14" name="visual-21-8-p21-c0">
-            <a:extLst xmlns:a="http://schemas.openxmlformats.org/drawingml/2006/main">
-              <a:ext uri="{FF2B5EF4-FFF2-40B4-BE49-F238E27FC236}">
-                <a16:creationId xmlns:a16="http://schemas.microsoft.com/office/drawing/2014/main" id="{9651B044-F3A1-42FF-B211-2EFFCD912862}"/>
-              </a:ext>
-            </a:extLst>
-          </p:cNvPr>
-          <p:cNvSpPr>
-            <a:spLocks xmlns:a="http://schemas.openxmlformats.org/drawingml/2006/main" noGrp="1"/>
-          </p:cNvSpPr>
-          <p:nvPr/>
-        </p:nvSpPr>
-        <p:spPr>
-          <a:xfrm xmlns:a="http://schemas.openxmlformats.org/drawingml/2006/main">
-            <a:off x="9572625" y="1809750"/>
-            <a:ext cx="2095500" cy="628650"/>
-          </a:xfrm>
-          <a:prstGeom xmlns:a="http://schemas.openxmlformats.org/drawingml/2006/main" prst="rect">
-            <a:avLst/>
-          </a:prstGeom>
-          <a:noFill xmlns:a="http://schemas.openxmlformats.org/drawingml/2006/main"/>
-          <a:ln xmlns:a="http://schemas.openxmlformats.org/drawingml/2006/main" w="0">
-            <a:noFill/>
-          </a:ln>
-        </p:spPr>
-        <p:txBody>
-          <a:bodyPr xmlns:a="http://schemas.openxmlformats.org/drawingml/2006/main" lIns="0" tIns="0" rIns="0" bIns="0" anchor="t">
-            <a:noAutofit/>
-          </a:bodyPr>
-          <a:lstStyle xmlns:a="http://schemas.openxmlformats.org/drawingml/2006/main"/>
-          <a:p xmlns:a="http://schemas.openxmlformats.org/drawingml/2006/main">
-            <a:pPr algn="l">
-              <a:lnSpc>
-                <a:spcPct val="114000"/>
-              </a:lnSpc>
-              <a:buNone/>
-              <a:defRPr sz="2000" b="0">
-                <a:solidFill>
-                  <a:srgbClr val="1F4D78"/>
-                </a:solidFill>
-                <a:latin typeface="微软雅黑"/>
-                <a:ea typeface="微软雅黑"/>
-                <a:cs typeface="微软雅黑"/>
-              </a:defRPr>
-            </a:pPr>
-            <a:r>
-              <a:rPr sz="2000" b="0">
-                <a:solidFill>
-                  <a:srgbClr val="1F4D78"/>
-                </a:solidFill>
-                <a:latin typeface="微软雅黑"/>
-                <a:ea typeface="微软雅黑"/>
-                <a:cs typeface="微软雅黑"/>
-              </a:rPr>
-              <a:t>哪一句仍缺直接证据？</a:t>
-            </a:r>
-          </a:p>
-        </p:txBody>
-      </p:sp>
-      <p:sp>
-        <p:nvSpPr>
-          <p:cNvPr id="15" name="visual-21-9-p21-c1">
-            <a:extLst xmlns:a="http://schemas.openxmlformats.org/drawingml/2006/main">
-              <a:ext uri="{FF2B5EF4-FFF2-40B4-BE49-F238E27FC236}">
-                <a16:creationId xmlns:a16="http://schemas.microsoft.com/office/drawing/2014/main" id="{2A09515F-500E-4131-8391-A11D234703C6}"/>
-              </a:ext>
-            </a:extLst>
-          </p:cNvPr>
-          <p:cNvSpPr>
-            <a:spLocks xmlns:a="http://schemas.openxmlformats.org/drawingml/2006/main" noGrp="1"/>
-          </p:cNvSpPr>
-          <p:nvPr/>
-        </p:nvSpPr>
-        <p:spPr>
-          <a:xfrm xmlns:a="http://schemas.openxmlformats.org/drawingml/2006/main">
-            <a:off x="9572625" y="2686050"/>
-            <a:ext cx="2095500" cy="628650"/>
-          </a:xfrm>
-          <a:prstGeom xmlns:a="http://schemas.openxmlformats.org/drawingml/2006/main" prst="rect">
-            <a:avLst/>
-          </a:prstGeom>
-          <a:noFill xmlns:a="http://schemas.openxmlformats.org/drawingml/2006/main"/>
-          <a:ln xmlns:a="http://schemas.openxmlformats.org/drawingml/2006/main" w="0">
-            <a:noFill/>
-          </a:ln>
-        </p:spPr>
-        <p:txBody>
-          <a:bodyPr xmlns:a="http://schemas.openxmlformats.org/drawingml/2006/main" lIns="0" tIns="0" rIns="0" bIns="0" anchor="t">
-            <a:noAutofit/>
-          </a:bodyPr>
-          <a:lstStyle xmlns:a="http://schemas.openxmlformats.org/drawingml/2006/main"/>
-          <a:p xmlns:a="http://schemas.openxmlformats.org/drawingml/2006/main">
-            <a:pPr algn="l">
-              <a:lnSpc>
-                <a:spcPct val="114000"/>
-              </a:lnSpc>
-              <a:buNone/>
-              <a:defRPr sz="2000" b="0">
-                <a:solidFill>
-                  <a:srgbClr val="1F4D78"/>
-                </a:solidFill>
-                <a:latin typeface="微软雅黑"/>
-                <a:ea typeface="微软雅黑"/>
-                <a:cs typeface="微软雅黑"/>
-              </a:defRPr>
-            </a:pPr>
-            <a:r>
-              <a:rPr sz="2000" b="0">
-                <a:solidFill>
-                  <a:srgbClr val="1F4D78"/>
-                </a:solidFill>
-                <a:latin typeface="微软雅黑"/>
-                <a:ea typeface="微软雅黑"/>
-                <a:cs typeface="微软雅黑"/>
-              </a:rPr>
-              <a:t>候选题的生成路径是什么？</a:t>
-            </a:r>
-          </a:p>
-        </p:txBody>
-      </p:sp>
-      <p:sp>
-        <p:nvSpPr>
-          <p:cNvPr id="16" name="visual-21-10-p21-c2">
-            <a:extLst xmlns:a="http://schemas.openxmlformats.org/drawingml/2006/main">
-              <a:ext uri="{FF2B5EF4-FFF2-40B4-BE49-F238E27FC236}">
-                <a16:creationId xmlns:a16="http://schemas.microsoft.com/office/drawing/2014/main" id="{B73F6CC5-29A5-43AF-AF9B-0CC089BF7444}"/>
-              </a:ext>
-            </a:extLst>
-          </p:cNvPr>
-          <p:cNvSpPr>
-            <a:spLocks xmlns:a="http://schemas.openxmlformats.org/drawingml/2006/main" noGrp="1"/>
-          </p:cNvSpPr>
-          <p:nvPr/>
-        </p:nvSpPr>
-        <p:spPr>
-          <a:xfrm xmlns:a="http://schemas.openxmlformats.org/drawingml/2006/main">
-            <a:off x="9572625" y="3562350"/>
-            <a:ext cx="2095500" cy="628650"/>
-          </a:xfrm>
-          <a:prstGeom xmlns:a="http://schemas.openxmlformats.org/drawingml/2006/main" prst="rect">
-            <a:avLst/>
-          </a:prstGeom>
-          <a:noFill xmlns:a="http://schemas.openxmlformats.org/drawingml/2006/main"/>
-          <a:ln xmlns:a="http://schemas.openxmlformats.org/drawingml/2006/main" w="0">
-            <a:noFill/>
-          </a:ln>
-        </p:spPr>
-        <p:txBody>
-          <a:bodyPr xmlns:a="http://schemas.openxmlformats.org/drawingml/2006/main" lIns="0" tIns="0" rIns="0" bIns="0" anchor="t">
-            <a:noAutofit/>
-          </a:bodyPr>
-          <a:lstStyle xmlns:a="http://schemas.openxmlformats.org/drawingml/2006/main"/>
-          <a:p xmlns:a="http://schemas.openxmlformats.org/drawingml/2006/main">
-            <a:pPr algn="l">
-              <a:lnSpc>
-                <a:spcPct val="114000"/>
-              </a:lnSpc>
-              <a:buNone/>
-              <a:defRPr sz="2000" b="0">
-                <a:solidFill>
-                  <a:srgbClr val="1F4D78"/>
-                </a:solidFill>
-                <a:latin typeface="微软雅黑"/>
-                <a:ea typeface="微软雅黑"/>
-                <a:cs typeface="微软雅黑"/>
-              </a:defRPr>
-            </a:pPr>
-            <a:r>
-              <a:rPr sz="2000" b="0">
-                <a:solidFill>
-                  <a:srgbClr val="1F4D78"/>
-                </a:solidFill>
-                <a:latin typeface="微软雅黑"/>
-                <a:ea typeface="微软雅黑"/>
-                <a:cs typeface="微软雅黑"/>
-              </a:rPr>
-              <a:t>问题门还需补哪一项？</a:t>
-            </a:r>
-          </a:p>
-        </p:txBody>
-      </p:sp>
-      <p:sp>
-        <p:nvSpPr>
-          <p:cNvPr id="17" name="visual-21-11-p21-path">
-            <a:extLst xmlns:a="http://schemas.openxmlformats.org/drawingml/2006/main">
-              <a:ext uri="{FF2B5EF4-FFF2-40B4-BE49-F238E27FC236}">
-                <a16:creationId xmlns:a16="http://schemas.microsoft.com/office/drawing/2014/main" id="{F7FD6D50-CC51-4540-A6E3-C946B902DD4E}"/>
-              </a:ext>
-            </a:extLst>
-          </p:cNvPr>
-          <p:cNvSpPr>
-            <a:spLocks xmlns:a="http://schemas.openxmlformats.org/drawingml/2006/main" noGrp="1"/>
-          </p:cNvSpPr>
-          <p:nvPr/>
-        </p:nvSpPr>
-        <p:spPr>
-          <a:xfrm xmlns:a="http://schemas.openxmlformats.org/drawingml/2006/main">
-            <a:off x="1047750" y="4095750"/>
-            <a:ext cx="10096500" cy="685800"/>
-          </a:xfrm>
-          <a:prstGeom xmlns:a="http://schemas.openxmlformats.org/drawingml/2006/main" prst="rect">
-            <a:avLst/>
-          </a:prstGeom>
-          <a:noFill xmlns:a="http://schemas.openxmlformats.org/drawingml/2006/main"/>
-          <a:ln xmlns:a="http://schemas.openxmlformats.org/drawingml/2006/main" w="0">
-            <a:noFill/>
-          </a:ln>
-        </p:spPr>
-        <p:txBody>
-          <a:bodyPr xmlns:a="http://schemas.openxmlformats.org/drawingml/2006/main" lIns="0" tIns="0" rIns="0" bIns="0" anchor="t">
-            <a:noAutofit/>
-          </a:bodyPr>
-          <a:lstStyle xmlns:a="http://schemas.openxmlformats.org/drawingml/2006/main"/>
-          <a:p xmlns:a="http://schemas.openxmlformats.org/drawingml/2006/main">
-            <a:pPr algn="l">
-              <a:lnSpc>
-                <a:spcPct val="114000"/>
-              </a:lnSpc>
-              <a:buNone/>
-              <a:defRPr sz="2400" b="0">
-                <a:solidFill>
-                  <a:srgbClr val="27333D"/>
-                </a:solidFill>
-                <a:latin typeface="微软雅黑"/>
-                <a:ea typeface="微软雅黑"/>
-                <a:cs typeface="微软雅黑"/>
-              </a:defRPr>
-            </a:pPr>
-            <a:r>
-              <a:rPr sz="2400" b="0">
-                <a:solidFill>
-                  <a:srgbClr val="27333D"/>
-                </a:solidFill>
-                <a:latin typeface="微软雅黑"/>
-                <a:ea typeface="微软雅黑"/>
-                <a:cs typeface="微软雅黑"/>
-              </a:rPr>
-              <a:t>阅读卡 → mini review / 证据地图 → 候选题池 → 研究问题 → 可证伪命题</a:t>
-            </a:r>
-          </a:p>
-        </p:txBody>
-      </p:sp>
-      <p:sp>
-        <p:nvSpPr>
-          <p:cNvPr id="18" name="visual-21-12-p21-bottom">
-            <a:extLst xmlns:a="http://schemas.openxmlformats.org/drawingml/2006/main">
-              <a:ext uri="{FF2B5EF4-FFF2-40B4-BE49-F238E27FC236}">
-                <a16:creationId xmlns:a16="http://schemas.microsoft.com/office/drawing/2014/main" id="{83EED24D-BFBA-4C2F-826C-A2EFA220069E}"/>
-              </a:ext>
-            </a:extLst>
-          </p:cNvPr>
-          <p:cNvSpPr>
-            <a:spLocks xmlns:a="http://schemas.openxmlformats.org/drawingml/2006/main" noGrp="1"/>
-          </p:cNvSpPr>
-          <p:nvPr/>
-        </p:nvSpPr>
-        <p:spPr>
-          <a:xfrm xmlns:a="http://schemas.openxmlformats.org/drawingml/2006/main">
-            <a:off x="2143125" y="5095875"/>
-            <a:ext cx="7905750" cy="495300"/>
-          </a:xfrm>
-          <a:prstGeom xmlns:a="http://schemas.openxmlformats.org/drawingml/2006/main" prst="rect">
-            <a:avLst/>
-          </a:prstGeom>
-          <a:noFill xmlns:a="http://schemas.openxmlformats.org/drawingml/2006/main"/>
-          <a:ln xmlns:a="http://schemas.openxmlformats.org/drawingml/2006/main" w="0">
-            <a:noFill/>
-          </a:ln>
-        </p:spPr>
-        <p:txBody>
-          <a:bodyPr xmlns:a="http://schemas.openxmlformats.org/drawingml/2006/main" lIns="0" tIns="0" rIns="0" bIns="0" anchor="ctr">
-            <a:noAutofit/>
-          </a:bodyPr>
-          <a:lstStyle xmlns:a="http://schemas.openxmlformats.org/drawingml/2006/main"/>
-          <a:p xmlns:a="http://schemas.openxmlformats.org/drawingml/2006/main">
-            <a:pPr algn="l">
-              <a:lnSpc>
-                <a:spcPct val="114000"/>
-              </a:lnSpc>
-              <a:buNone/>
-              <a:defRPr sz="2400" b="0">
-                <a:solidFill>
-                  <a:srgbClr val="27333D"/>
-                </a:solidFill>
-                <a:latin typeface="微软雅黑"/>
-                <a:ea typeface="微软雅黑"/>
-                <a:cs typeface="微软雅黑"/>
-              </a:defRPr>
-            </a:pPr>
-            <a:r>
-              <a:rPr sz="2400" b="0">
-                <a:solidFill>
-                  <a:srgbClr val="27333D"/>
-                </a:solidFill>
-                <a:latin typeface="微软雅黑"/>
-                <a:ea typeface="微软雅黑"/>
-                <a:cs typeface="微软雅黑"/>
-              </a:rPr>
-              <a:t>本课不新增正式作业；继续回写同一个人项目。</a:t>
             </a:r>
           </a:p>
         </p:txBody>
@@ -19205,34 +16354,55 @@
       </p:grpSpPr>
       <p:sp>
         <p:nvSpPr>
-          <p:cNvPr id="4" name="Text Placeholder 3">
-            <a:extLst xmlns:a="http://schemas.openxmlformats.org/drawingml/2006/main">
-              <a:ext uri="{FF2B5EF4-FFF2-40B4-BE49-F238E27FC236}">
-                <a16:creationId xmlns:a16="http://schemas.microsoft.com/office/drawing/2014/main" id="{4D941B40-7A0A-534E-3563-CA11753C8E3F}"/>
-              </a:ext>
-            </a:extLst>
-          </p:cNvPr>
-          <p:cNvSpPr>
-            <a:spLocks xmlns:a="http://schemas.openxmlformats.org/drawingml/2006/main" noGrp="1"/>
-          </p:cNvSpPr>
-          <p:nvPr>
-            <p:ph type="body" idx="14"/>
-          </p:nvPr>
-        </p:nvSpPr>
-        <p:spPr>
-          <a:xfrm xmlns:a="http://schemas.openxmlformats.org/drawingml/2006/main">
-            <a:off x="1028700" y="28575"/>
-            <a:ext cx="10668000" cy="628650"/>
-          </a:xfrm>
-        </p:spPr>
-        <p:txBody>
-          <a:bodyPr xmlns:a="http://schemas.openxmlformats.org/drawingml/2006/main" lIns="0" tIns="0" rIns="0" bIns="0" anchor="ctr">
-            <a:noAutofit/>
-          </a:bodyPr>
-          <a:lstStyle xmlns:a="http://schemas.openxmlformats.org/drawingml/2006/main"/>
-          <a:p xmlns:a="http://schemas.openxmlformats.org/drawingml/2006/main">
-            <a:pPr algn="l">
-              <a:buNone/>
+          <p:cNvPr id="7" name="judgment-title">
+            <a:extLst xmlns:a="http://schemas.openxmlformats.org/drawingml/2006/main">
+              <a:ext uri="{FF2B5EF4-FFF2-40B4-BE49-F238E27FC236}">
+                <a16:creationId xmlns:a16="http://schemas.microsoft.com/office/drawing/2014/main" id="{88117127-184F-4F69-87E1-F3A979C00F4C}"/>
+              </a:ext>
+            </a:extLst>
+          </p:cNvPr>
+          <p:cNvSpPr>
+            <a:spLocks xmlns:a="http://schemas.openxmlformats.org/drawingml/2006/main" noGrp="1"/>
+          </p:cNvSpPr>
+          <p:nvPr/>
+        </p:nvSpPr>
+        <p:spPr>
+          <a:xfrm xmlns:a="http://schemas.openxmlformats.org/drawingml/2006/main">
+            <a:off x="1028700" y="76200"/>
+            <a:ext cx="10687050" cy="514350"/>
+          </a:xfrm>
+          <a:prstGeom xmlns:a="http://schemas.openxmlformats.org/drawingml/2006/main" prst="rect">
+            <a:avLst/>
+          </a:prstGeom>
+          <a:noFill xmlns:a="http://schemas.openxmlformats.org/drawingml/2006/main"/>
+          <a:ln xmlns:a="http://schemas.openxmlformats.org/drawingml/2006/main" w="0">
+            <a:noFill/>
+          </a:ln>
+        </p:spPr>
+        <p:txBody>
+          <a:bodyPr xmlns:a="http://schemas.openxmlformats.org/drawingml/2006/main" lIns="0" tIns="0" rIns="0" bIns="0" anchor="t"/>
+          <a:lstStyle xmlns:a="http://schemas.openxmlformats.org/drawingml/2006/main">
+            <a:defPPr algn="l">
+              <a:defRPr sz="3000" b="1">
+                <a:solidFill>
+                  <a:srgbClr val="FFFFFF"/>
+                </a:solidFill>
+                <a:latin typeface="微软雅黑"/>
+                <a:ea typeface="微软雅黑"/>
+                <a:cs typeface="微软雅黑"/>
+              </a:defRPr>
+            </a:defPPr>
+          </a:lstStyle>
+          <a:p xmlns:a="http://schemas.openxmlformats.org/drawingml/2006/main">
+            <a:pPr algn="l">
+              <a:defRPr sz="3000" b="1">
+                <a:solidFill>
+                  <a:srgbClr val="FFFFFF"/>
+                </a:solidFill>
+                <a:latin typeface="微软雅黑"/>
+                <a:ea typeface="微软雅黑"/>
+                <a:cs typeface="微软雅黑"/>
+              </a:defRPr>
             </a:pPr>
             <a:r>
               <a:rPr sz="3000" b="1">
@@ -19243,733 +16413,360 @@
                 <a:ea typeface="微软雅黑"/>
                 <a:cs typeface="微软雅黑"/>
               </a:rPr>
-              <a:t>本课目标与课堂产出</a:t>
-            </a:r>
-            <a:endParaRPr/>
-          </a:p>
-        </p:txBody>
-      </p:sp>
-      <p:sp>
-        <p:nvSpPr>
-          <p:cNvPr id="5" name="Slide Number Placeholder 4">
-            <a:extLst xmlns:a="http://schemas.openxmlformats.org/drawingml/2006/main">
-              <a:ext uri="{FF2B5EF4-FFF2-40B4-BE49-F238E27FC236}">
-                <a16:creationId xmlns:a16="http://schemas.microsoft.com/office/drawing/2014/main" id="{EBA5909F-738E-F60C-BE8C-B3F1D94548E5}"/>
-              </a:ext>
-            </a:extLst>
-          </p:cNvPr>
-          <p:cNvSpPr>
-            <a:spLocks xmlns:a="http://schemas.openxmlformats.org/drawingml/2006/main" noGrp="1"/>
-          </p:cNvSpPr>
-          <p:nvPr>
-            <p:ph type="sldNum" idx="10"/>
-          </p:nvPr>
-        </p:nvSpPr>
-        <p:spPr/>
-        <p:txBody>
-          <a:bodyPr xmlns:a="http://schemas.openxmlformats.org/drawingml/2006/main"/>
-          <a:lstStyle xmlns:a="http://schemas.openxmlformats.org/drawingml/2006/main"/>
-          <a:p xmlns:a="http://schemas.openxmlformats.org/drawingml/2006/main">
-            <a:fld id="{202359C0-8A7A-196E-DD58-8E6569619F09}" type="slidenum">
+              <a:t>结果相反，是否构成冲突</a:t>
+            </a:r>
+          </a:p>
+        </p:txBody>
+      </p:sp>
+      <p:sp>
+        <p:nvSpPr>
+          <p:cNvPr id="2" name="judgment-body-0">
+            <a:extLst xmlns:a="http://schemas.openxmlformats.org/drawingml/2006/main">
+              <a:ext uri="{FF2B5EF4-FFF2-40B4-BE49-F238E27FC236}">
+                <a16:creationId xmlns:a16="http://schemas.microsoft.com/office/drawing/2014/main" id="{9E5DC4D6-545C-4A2C-820E-1B0E874F10EC}"/>
+              </a:ext>
+            </a:extLst>
+          </p:cNvPr>
+          <p:cNvSpPr>
+            <a:spLocks xmlns:a="http://schemas.openxmlformats.org/drawingml/2006/main" noGrp="1"/>
+          </p:cNvSpPr>
+          <p:nvPr/>
+        </p:nvSpPr>
+        <p:spPr>
+          <a:xfrm xmlns:a="http://schemas.openxmlformats.org/drawingml/2006/main">
+            <a:off x="666750" y="1066800"/>
+            <a:ext cx="10858500" cy="1009650"/>
+          </a:xfrm>
+          <a:prstGeom xmlns:a="http://schemas.openxmlformats.org/drawingml/2006/main" prst="rect">
+            <a:avLst/>
+          </a:prstGeom>
+          <a:noFill xmlns:a="http://schemas.openxmlformats.org/drawingml/2006/main"/>
+          <a:ln xmlns:a="http://schemas.openxmlformats.org/drawingml/2006/main" w="0">
+            <a:noFill/>
+          </a:ln>
+        </p:spPr>
+        <p:txBody>
+          <a:bodyPr xmlns:a="http://schemas.openxmlformats.org/drawingml/2006/main" lIns="0" tIns="0" rIns="0" bIns="0" anchor="t"/>
+          <a:lstStyle xmlns:a="http://schemas.openxmlformats.org/drawingml/2006/main">
+            <a:defPPr algn="l">
+              <a:defRPr sz="2400" b="0">
+                <a:solidFill>
+                  <a:srgbClr val="263746"/>
+                </a:solidFill>
+                <a:latin typeface="微软雅黑"/>
+                <a:ea typeface="微软雅黑"/>
+                <a:cs typeface="微软雅黑"/>
+              </a:defRPr>
+            </a:defPPr>
+          </a:lstStyle>
+          <a:p xmlns:a="http://schemas.openxmlformats.org/drawingml/2006/main">
+            <a:pPr algn="l">
+              <a:defRPr sz="2400" b="0">
+                <a:solidFill>
+                  <a:srgbClr val="263746"/>
+                </a:solidFill>
+                <a:latin typeface="微软雅黑"/>
+                <a:ea typeface="微软雅黑"/>
+                <a:cs typeface="微软雅黑"/>
+              </a:defRPr>
+            </a:pPr>
+            <a:r>
+              <a:rPr sz="2400" b="0">
+                <a:solidFill>
+                  <a:srgbClr val="263746"/>
+                </a:solidFill>
+                <a:latin typeface="微软雅黑"/>
+                <a:ea typeface="微软雅黑"/>
+                <a:cs typeface="微软雅黑"/>
+              </a:rPr>
+              <a:t>教学构造：每项 10 段英文文本</a:t>
+            </a:r>
+          </a:p>
+        </p:txBody>
+      </p:sp>
+      <p:sp>
+        <p:nvSpPr>
+          <p:cNvPr id="3" name="judgment-body-1">
+            <a:extLst xmlns:a="http://schemas.openxmlformats.org/drawingml/2006/main">
+              <a:ext uri="{FF2B5EF4-FFF2-40B4-BE49-F238E27FC236}">
+                <a16:creationId xmlns:a16="http://schemas.microsoft.com/office/drawing/2014/main" id="{91FF0A45-351D-4077-A979-4223DBA08631}"/>
+              </a:ext>
+            </a:extLst>
+          </p:cNvPr>
+          <p:cNvSpPr>
+            <a:spLocks xmlns:a="http://schemas.openxmlformats.org/drawingml/2006/main" noGrp="1"/>
+          </p:cNvSpPr>
+          <p:nvPr/>
+        </p:nvSpPr>
+        <p:spPr>
+          <a:xfrm xmlns:a="http://schemas.openxmlformats.org/drawingml/2006/main">
+            <a:off x="666750" y="2238375"/>
+            <a:ext cx="10858500" cy="2076450"/>
+          </a:xfrm>
+          <a:prstGeom xmlns:a="http://schemas.openxmlformats.org/drawingml/2006/main" prst="rect">
+            <a:avLst/>
+          </a:prstGeom>
+          <a:noFill xmlns:a="http://schemas.openxmlformats.org/drawingml/2006/main"/>
+          <a:ln xmlns:a="http://schemas.openxmlformats.org/drawingml/2006/main" w="0">
+            <a:noFill/>
+          </a:ln>
+        </p:spPr>
+        <p:txBody>
+          <a:bodyPr xmlns:a="http://schemas.openxmlformats.org/drawingml/2006/main" lIns="0" tIns="0" rIns="0" bIns="0" anchor="t"/>
+          <a:lstStyle xmlns:a="http://schemas.openxmlformats.org/drawingml/2006/main">
+            <a:defPPr algn="l">
+              <a:defRPr sz="2400" b="0">
+                <a:solidFill>
+                  <a:srgbClr val="263746"/>
+                </a:solidFill>
+                <a:latin typeface="微软雅黑"/>
+                <a:ea typeface="微软雅黑"/>
+                <a:cs typeface="微软雅黑"/>
+              </a:defRPr>
+            </a:defPPr>
+          </a:lstStyle>
+          <a:p xmlns:a="http://schemas.openxmlformats.org/drawingml/2006/main">
+            <a:pPr algn="l">
+              <a:defRPr sz="2400" b="0">
+                <a:solidFill>
+                  <a:srgbClr val="263746"/>
+                </a:solidFill>
+                <a:latin typeface="微软雅黑"/>
+                <a:ea typeface="微软雅黑"/>
+                <a:cs typeface="微软雅黑"/>
+              </a:defRPr>
+            </a:pPr>
+            <a:r>
+              <a:rPr sz="2400" b="0">
+                <a:solidFill>
+                  <a:srgbClr val="263746"/>
+                </a:solidFill>
+                <a:latin typeface="微软雅黑"/>
+                <a:ea typeface="微软雅黑"/>
+                <a:cs typeface="微软雅黑"/>
+              </a:rPr>
+              <a:t>A｜显式条件句；评分可见组别；遗漏 2/30 vs 8/30</a:t>
+            </a:r>
+          </a:p>
+          <a:p xmlns:a="http://schemas.openxmlformats.org/drawingml/2006/main">
+            <a:pPr algn="l">
+              <a:defRPr sz="2400" b="0">
+                <a:solidFill>
+                  <a:srgbClr val="263746"/>
+                </a:solidFill>
+                <a:latin typeface="微软雅黑"/>
+                <a:ea typeface="微软雅黑"/>
+                <a:cs typeface="微软雅黑"/>
+              </a:defRPr>
+            </a:pPr>
+            <a:r>
+              <a:rPr sz="2400" b="0">
+                <a:solidFill>
+                  <a:srgbClr val="263746"/>
+                </a:solidFill>
+                <a:latin typeface="微软雅黑"/>
+                <a:ea typeface="微软雅黑"/>
+                <a:cs typeface="微软雅黑"/>
+              </a:rPr>
+              <a:t>B｜图注条件；评分不见组别；遗漏 9/20 vs 5/20</a:t>
+            </a:r>
+          </a:p>
+        </p:txBody>
+      </p:sp>
+      <p:sp>
+        <p:nvSpPr>
+          <p:cNvPr id="4" name="judgment-body-2">
+            <a:extLst xmlns:a="http://schemas.openxmlformats.org/drawingml/2006/main">
+              <a:ext uri="{FF2B5EF4-FFF2-40B4-BE49-F238E27FC236}">
+                <a16:creationId xmlns:a16="http://schemas.microsoft.com/office/drawing/2014/main" id="{30103CA3-6A72-40A1-BD83-9C51DEA718B2}"/>
+              </a:ext>
+            </a:extLst>
+          </p:cNvPr>
+          <p:cNvSpPr>
+            <a:spLocks xmlns:a="http://schemas.openxmlformats.org/drawingml/2006/main" noGrp="1"/>
+          </p:cNvSpPr>
+          <p:nvPr/>
+        </p:nvSpPr>
+        <p:spPr>
+          <a:xfrm xmlns:a="http://schemas.openxmlformats.org/drawingml/2006/main">
+            <a:off x="666750" y="4495800"/>
+            <a:ext cx="10858500" cy="1409700"/>
+          </a:xfrm>
+          <a:prstGeom xmlns:a="http://schemas.openxmlformats.org/drawingml/2006/main" prst="rect">
+            <a:avLst/>
+          </a:prstGeom>
+          <a:noFill xmlns:a="http://schemas.openxmlformats.org/drawingml/2006/main"/>
+          <a:ln xmlns:a="http://schemas.openxmlformats.org/drawingml/2006/main" w="0">
+            <a:noFill/>
+          </a:ln>
+        </p:spPr>
+        <p:txBody>
+          <a:bodyPr xmlns:a="http://schemas.openxmlformats.org/drawingml/2006/main" lIns="0" tIns="0" rIns="0" bIns="0" anchor="t"/>
+          <a:lstStyle xmlns:a="http://schemas.openxmlformats.org/drawingml/2006/main">
+            <a:defPPr algn="l">
+              <a:defRPr sz="2200" b="0">
+                <a:solidFill>
+                  <a:srgbClr val="1F4D78"/>
+                </a:solidFill>
+                <a:latin typeface="微软雅黑"/>
+                <a:ea typeface="微软雅黑"/>
+                <a:cs typeface="微软雅黑"/>
+              </a:defRPr>
+            </a:defPPr>
+          </a:lstStyle>
+          <a:p xmlns:a="http://schemas.openxmlformats.org/drawingml/2006/main">
+            <a:pPr algn="l">
+              <a:defRPr sz="2200" b="0">
+                <a:solidFill>
+                  <a:srgbClr val="1F4D78"/>
+                </a:solidFill>
+                <a:latin typeface="微软雅黑"/>
+                <a:ea typeface="微软雅黑"/>
+                <a:cs typeface="微软雅黑"/>
+              </a:defRPr>
+            </a:pPr>
+            <a:r>
+              <a:rPr sz="2200" b="0">
+                <a:solidFill>
+                  <a:srgbClr val="1F4D78"/>
+                </a:solidFill>
+                <a:latin typeface="微软雅黑"/>
+                <a:ea typeface="微软雅黑"/>
+                <a:cs typeface="微软雅黑"/>
+              </a:rPr>
+              <a:t>对象和测量同时变化：哪项解释尚未排除？零命中能证明研究空白吗？</a:t>
+            </a:r>
+          </a:p>
+        </p:txBody>
+      </p:sp>
+      <p:sp>
+        <p:nvSpPr>
+          <p:cNvPr id="5" name="judgment-source">
+            <a:extLst xmlns:a="http://schemas.openxmlformats.org/drawingml/2006/main">
+              <a:ext uri="{FF2B5EF4-FFF2-40B4-BE49-F238E27FC236}">
+                <a16:creationId xmlns:a16="http://schemas.microsoft.com/office/drawing/2014/main" id="{4E7F07E6-1C9D-4CD4-B63C-3EB980F1CC4B}"/>
+              </a:ext>
+            </a:extLst>
+          </p:cNvPr>
+          <p:cNvSpPr>
+            <a:spLocks xmlns:a="http://schemas.openxmlformats.org/drawingml/2006/main" noGrp="1"/>
+          </p:cNvSpPr>
+          <p:nvPr/>
+        </p:nvSpPr>
+        <p:spPr>
+          <a:xfrm xmlns:a="http://schemas.openxmlformats.org/drawingml/2006/main">
+            <a:off x="666750" y="6276975"/>
+            <a:ext cx="10572750" cy="209550"/>
+          </a:xfrm>
+          <a:prstGeom xmlns:a="http://schemas.openxmlformats.org/drawingml/2006/main" prst="rect">
+            <a:avLst/>
+          </a:prstGeom>
+          <a:noFill xmlns:a="http://schemas.openxmlformats.org/drawingml/2006/main"/>
+          <a:ln xmlns:a="http://schemas.openxmlformats.org/drawingml/2006/main" w="0">
+            <a:noFill/>
+          </a:ln>
+        </p:spPr>
+        <p:txBody>
+          <a:bodyPr xmlns:a="http://schemas.openxmlformats.org/drawingml/2006/main" lIns="0" tIns="0" rIns="0" bIns="0" anchor="t"/>
+          <a:lstStyle xmlns:a="http://schemas.openxmlformats.org/drawingml/2006/main">
+            <a:defPPr algn="l">
+              <a:defRPr sz="1100" b="0">
+                <a:solidFill>
+                  <a:srgbClr val="667684"/>
+                </a:solidFill>
+                <a:latin typeface="微软雅黑"/>
+                <a:ea typeface="微软雅黑"/>
+                <a:cs typeface="微软雅黑"/>
+              </a:defRPr>
+            </a:defPPr>
+          </a:lstStyle>
+          <a:p xmlns:a="http://schemas.openxmlformats.org/drawingml/2006/main">
+            <a:pPr algn="l">
+              <a:defRPr sz="1100" b="0">
+                <a:solidFill>
+                  <a:srgbClr val="667684"/>
+                </a:solidFill>
+                <a:latin typeface="微软雅黑"/>
+                <a:ea typeface="微软雅黑"/>
+                <a:cs typeface="微软雅黑"/>
+              </a:defRPr>
+            </a:pPr>
+            <a:r>
+              <a:rPr sz="1100" b="0">
+                <a:solidFill>
+                  <a:srgbClr val="667684"/>
+                </a:solidFill>
+                <a:latin typeface="微软雅黑"/>
+                <a:ea typeface="微软雅黑"/>
+                <a:cs typeface="微软雅黑"/>
+              </a:rPr>
+              <a:t>来源：本课判断任务与讲义；构造材料及真实来源按材料包标识</a:t>
+            </a:r>
+          </a:p>
+        </p:txBody>
+      </p:sp>
+      <p:sp>
+        <p:nvSpPr>
+          <p:cNvPr id="6" name="judgment-page">
+            <a:extLst xmlns:a="http://schemas.openxmlformats.org/drawingml/2006/main">
+              <a:ext uri="{FF2B5EF4-FFF2-40B4-BE49-F238E27FC236}">
+                <a16:creationId xmlns:a16="http://schemas.microsoft.com/office/drawing/2014/main" id="{B3CE095D-A894-4993-9579-5AA0DCB27D81}"/>
+              </a:ext>
+            </a:extLst>
+          </p:cNvPr>
+          <p:cNvSpPr>
+            <a:spLocks xmlns:a="http://schemas.openxmlformats.org/drawingml/2006/main" noGrp="1"/>
+          </p:cNvSpPr>
+          <p:nvPr/>
+        </p:nvSpPr>
+        <p:spPr>
+          <a:xfrm xmlns:a="http://schemas.openxmlformats.org/drawingml/2006/main">
+            <a:off x="11715750" y="6562725"/>
+            <a:ext cx="238125" cy="171450"/>
+          </a:xfrm>
+          <a:prstGeom xmlns:a="http://schemas.openxmlformats.org/drawingml/2006/main" prst="rect">
+            <a:avLst/>
+          </a:prstGeom>
+          <a:noFill xmlns:a="http://schemas.openxmlformats.org/drawingml/2006/main"/>
+          <a:ln xmlns:a="http://schemas.openxmlformats.org/drawingml/2006/main" w="0">
+            <a:noFill/>
+          </a:ln>
+        </p:spPr>
+        <p:txBody>
+          <a:bodyPr xmlns:a="http://schemas.openxmlformats.org/drawingml/2006/main" lIns="0" tIns="0" rIns="0" bIns="0" anchor="t"/>
+          <a:lstStyle xmlns:a="http://schemas.openxmlformats.org/drawingml/2006/main">
+            <a:defPPr algn="l">
+              <a:defRPr sz="900" b="0">
+                <a:solidFill>
+                  <a:srgbClr val="A5A5A5"/>
+                </a:solidFill>
+                <a:latin typeface="微软雅黑"/>
+                <a:ea typeface="微软雅黑"/>
+                <a:cs typeface="微软雅黑"/>
+              </a:defRPr>
+            </a:defPPr>
+          </a:lstStyle>
+          <a:p xmlns:a="http://schemas.openxmlformats.org/drawingml/2006/main">
+            <a:pPr algn="l">
+              <a:defRPr sz="900" b="0">
+                <a:solidFill>
+                  <a:srgbClr val="A5A5A5"/>
+                </a:solidFill>
+                <a:latin typeface="微软雅黑"/>
+                <a:ea typeface="微软雅黑"/>
+                <a:cs typeface="微软雅黑"/>
+              </a:defRPr>
+            </a:pPr>
+            <a:r>
+              <a:rPr sz="900" b="0">
+                <a:solidFill>
+                  <a:srgbClr val="A5A5A5"/>
+                </a:solidFill>
+                <a:latin typeface="微软雅黑"/>
+                <a:ea typeface="微软雅黑"/>
+                <a:cs typeface="微软雅黑"/>
+              </a:rPr>
               <a:t>3</a:t>
-            </a:fld>
-            <a:endParaRPr/>
-          </a:p>
-        </p:txBody>
-      </p:sp>
-      <p:sp>
-        <p:nvSpPr>
-          <p:cNvPr id="6" name="visual-3-0-minimum">
-            <a:extLst xmlns:a="http://schemas.openxmlformats.org/drawingml/2006/main">
-              <a:ext uri="{FF2B5EF4-FFF2-40B4-BE49-F238E27FC236}">
-                <a16:creationId xmlns:a16="http://schemas.microsoft.com/office/drawing/2014/main" id="{4E1C664D-559A-499F-95C6-9A8EA875122A}"/>
-              </a:ext>
-            </a:extLst>
-          </p:cNvPr>
-          <p:cNvSpPr>
-            <a:spLocks xmlns:a="http://schemas.openxmlformats.org/drawingml/2006/main" noGrp="1"/>
-          </p:cNvSpPr>
-          <p:nvPr/>
-        </p:nvSpPr>
-        <p:spPr>
-          <a:xfrm xmlns:a="http://schemas.openxmlformats.org/drawingml/2006/main">
-            <a:off x="1428750" y="876300"/>
-            <a:ext cx="9334500" cy="552450"/>
-          </a:xfrm>
-          <a:prstGeom xmlns:a="http://schemas.openxmlformats.org/drawingml/2006/main" prst="rect">
-            <a:avLst/>
-          </a:prstGeom>
-          <a:noFill xmlns:a="http://schemas.openxmlformats.org/drawingml/2006/main"/>
-          <a:ln xmlns:a="http://schemas.openxmlformats.org/drawingml/2006/main" w="0">
-            <a:noFill/>
-          </a:ln>
-        </p:spPr>
-        <p:txBody>
-          <a:bodyPr xmlns:a="http://schemas.openxmlformats.org/drawingml/2006/main" lIns="0" tIns="0" rIns="0" bIns="0" anchor="ctr">
-            <a:noAutofit/>
-          </a:bodyPr>
-          <a:lstStyle xmlns:a="http://schemas.openxmlformats.org/drawingml/2006/main"/>
-          <a:p xmlns:a="http://schemas.openxmlformats.org/drawingml/2006/main">
-            <a:pPr algn="l">
-              <a:lnSpc>
-                <a:spcPct val="114000"/>
-              </a:lnSpc>
-              <a:buNone/>
-              <a:defRPr sz="2400" b="0">
-                <a:solidFill>
-                  <a:srgbClr val="27333D"/>
-                </a:solidFill>
-                <a:latin typeface="微软雅黑"/>
-                <a:ea typeface="微软雅黑"/>
-                <a:cs typeface="微软雅黑"/>
-              </a:defRPr>
-            </a:pPr>
-            <a:r>
-              <a:rPr sz="2400" b="0">
-                <a:solidFill>
-                  <a:srgbClr val="27333D"/>
-                </a:solidFill>
-                <a:latin typeface="微软雅黑"/>
-                <a:ea typeface="微软雅黑"/>
-                <a:cs typeface="微软雅黑"/>
-              </a:rPr>
-              <a:t>课堂最低闭环｜共享记录，只输入一次</a:t>
-            </a:r>
-          </a:p>
-        </p:txBody>
-      </p:sp>
-      <p:sp>
-        <p:nvSpPr>
-          <p:cNvPr id="7" name="visual-3-1-step-0">
-            <a:extLst xmlns:a="http://schemas.openxmlformats.org/drawingml/2006/main">
-              <a:ext uri="{FF2B5EF4-FFF2-40B4-BE49-F238E27FC236}">
-                <a16:creationId xmlns:a16="http://schemas.microsoft.com/office/drawing/2014/main" id="{AE8B5736-55D8-48DF-A1E2-D58F44E35D2A}"/>
-              </a:ext>
-            </a:extLst>
-          </p:cNvPr>
-          <p:cNvSpPr>
-            <a:spLocks xmlns:a="http://schemas.openxmlformats.org/drawingml/2006/main" noGrp="1"/>
-          </p:cNvSpPr>
-          <p:nvPr/>
-        </p:nvSpPr>
-        <p:spPr>
-          <a:xfrm xmlns:a="http://schemas.openxmlformats.org/drawingml/2006/main">
-            <a:off x="523875" y="1714500"/>
-            <a:ext cx="3524250" cy="1381125"/>
-          </a:xfrm>
-          <a:prstGeom xmlns:a="http://schemas.openxmlformats.org/drawingml/2006/main" prst="rect">
-            <a:avLst/>
-          </a:prstGeom>
-          <a:noFill xmlns:a="http://schemas.openxmlformats.org/drawingml/2006/main"/>
-          <a:ln xmlns:a="http://schemas.openxmlformats.org/drawingml/2006/main" w="0">
-            <a:noFill/>
-          </a:ln>
-        </p:spPr>
-        <p:txBody>
-          <a:bodyPr xmlns:a="http://schemas.openxmlformats.org/drawingml/2006/main" lIns="0" tIns="0" rIns="0" bIns="0" anchor="t">
-            <a:noAutofit/>
-          </a:bodyPr>
-          <a:lstStyle xmlns:a="http://schemas.openxmlformats.org/drawingml/2006/main"/>
-          <a:p xmlns:a="http://schemas.openxmlformats.org/drawingml/2006/main">
-            <a:pPr algn="l">
-              <a:lnSpc>
-                <a:spcPct val="114000"/>
-              </a:lnSpc>
-              <a:buNone/>
-              <a:defRPr sz="2400" b="0">
-                <a:solidFill>
-                  <a:srgbClr val="27333D"/>
-                </a:solidFill>
-                <a:latin typeface="微软雅黑"/>
-                <a:ea typeface="微软雅黑"/>
-                <a:cs typeface="微软雅黑"/>
-              </a:defRPr>
-            </a:pPr>
-            <a:r>
-              <a:rPr sz="2400" b="0">
-                <a:solidFill>
-                  <a:srgbClr val="27333D"/>
-                </a:solidFill>
-                <a:latin typeface="微软雅黑"/>
-                <a:ea typeface="微软雅黑"/>
-                <a:cs typeface="微软雅黑"/>
-              </a:rPr>
-              <a:t>01</a:t>
-            </a:r>
-          </a:p>
-          <a:p xmlns:a="http://schemas.openxmlformats.org/drawingml/2006/main">
-            <a:pPr algn="l">
-              <a:lnSpc>
-                <a:spcPct val="114000"/>
-              </a:lnSpc>
-              <a:buNone/>
-              <a:defRPr sz="2400" b="0">
-                <a:solidFill>
-                  <a:srgbClr val="27333D"/>
-                </a:solidFill>
-                <a:latin typeface="微软雅黑"/>
-                <a:ea typeface="微软雅黑"/>
-                <a:cs typeface="微软雅黑"/>
-              </a:defRPr>
-            </a:pPr>
-            <a:r>
-              <a:rPr sz="2400" b="0">
-                <a:solidFill>
-                  <a:srgbClr val="27333D"/>
-                </a:solidFill>
-                <a:latin typeface="微软雅黑"/>
-                <a:ea typeface="微软雅黑"/>
-                <a:cs typeface="微软雅黑"/>
-              </a:rPr>
-              <a:t>可比性判断</a:t>
-            </a:r>
-          </a:p>
-          <a:p xmlns:a="http://schemas.openxmlformats.org/drawingml/2006/main">
-            <a:pPr algn="l">
-              <a:lnSpc>
-                <a:spcPct val="114000"/>
-              </a:lnSpc>
-              <a:buNone/>
-              <a:defRPr sz="2400" b="0">
-                <a:solidFill>
-                  <a:srgbClr val="27333D"/>
-                </a:solidFill>
-                <a:latin typeface="微软雅黑"/>
-                <a:ea typeface="微软雅黑"/>
-                <a:cs typeface="微软雅黑"/>
-              </a:defRPr>
-            </a:pPr>
-            <a:r>
-              <a:rPr sz="2400" b="0">
-                <a:solidFill>
-                  <a:srgbClr val="27333D"/>
-                </a:solidFill>
-                <a:latin typeface="微软雅黑"/>
-                <a:ea typeface="微软雅黑"/>
-                <a:cs typeface="微软雅黑"/>
-              </a:rPr>
-              <a:t>2 张卡 × 1 个子问题</a:t>
-            </a:r>
-          </a:p>
-        </p:txBody>
-      </p:sp>
-      <p:sp>
-        <p:nvSpPr>
-          <p:cNvPr id="8" name="visual-3-2-step-1">
-            <a:extLst xmlns:a="http://schemas.openxmlformats.org/drawingml/2006/main">
-              <a:ext uri="{FF2B5EF4-FFF2-40B4-BE49-F238E27FC236}">
-                <a16:creationId xmlns:a16="http://schemas.microsoft.com/office/drawing/2014/main" id="{B087F7C1-79EC-4895-A01F-C2A85DF4B733}"/>
-              </a:ext>
-            </a:extLst>
-          </p:cNvPr>
-          <p:cNvSpPr>
-            <a:spLocks xmlns:a="http://schemas.openxmlformats.org/drawingml/2006/main" noGrp="1"/>
-          </p:cNvSpPr>
-          <p:nvPr/>
-        </p:nvSpPr>
-        <p:spPr>
-          <a:xfrm xmlns:a="http://schemas.openxmlformats.org/drawingml/2006/main">
-            <a:off x="4429125" y="1714500"/>
-            <a:ext cx="3524250" cy="1381125"/>
-          </a:xfrm>
-          <a:prstGeom xmlns:a="http://schemas.openxmlformats.org/drawingml/2006/main" prst="rect">
-            <a:avLst/>
-          </a:prstGeom>
-          <a:noFill xmlns:a="http://schemas.openxmlformats.org/drawingml/2006/main"/>
-          <a:ln xmlns:a="http://schemas.openxmlformats.org/drawingml/2006/main" w="0">
-            <a:noFill/>
-          </a:ln>
-        </p:spPr>
-        <p:txBody>
-          <a:bodyPr xmlns:a="http://schemas.openxmlformats.org/drawingml/2006/main" lIns="0" tIns="0" rIns="0" bIns="0" anchor="t">
-            <a:noAutofit/>
-          </a:bodyPr>
-          <a:lstStyle xmlns:a="http://schemas.openxmlformats.org/drawingml/2006/main"/>
-          <a:p xmlns:a="http://schemas.openxmlformats.org/drawingml/2006/main">
-            <a:pPr algn="l">
-              <a:lnSpc>
-                <a:spcPct val="114000"/>
-              </a:lnSpc>
-              <a:buNone/>
-              <a:defRPr sz="2400" b="0">
-                <a:solidFill>
-                  <a:srgbClr val="27333D"/>
-                </a:solidFill>
-                <a:latin typeface="微软雅黑"/>
-                <a:ea typeface="微软雅黑"/>
-                <a:cs typeface="微软雅黑"/>
-              </a:defRPr>
-            </a:pPr>
-            <a:r>
-              <a:rPr sz="2400" b="0">
-                <a:solidFill>
-                  <a:srgbClr val="27333D"/>
-                </a:solidFill>
-                <a:latin typeface="微软雅黑"/>
-                <a:ea typeface="微软雅黑"/>
-                <a:cs typeface="微软雅黑"/>
-              </a:rPr>
-              <a:t>02</a:t>
-            </a:r>
-          </a:p>
-          <a:p xmlns:a="http://schemas.openxmlformats.org/drawingml/2006/main">
-            <a:pPr algn="l">
-              <a:lnSpc>
-                <a:spcPct val="114000"/>
-              </a:lnSpc>
-              <a:buNone/>
-              <a:defRPr sz="2400" b="0">
-                <a:solidFill>
-                  <a:srgbClr val="27333D"/>
-                </a:solidFill>
-                <a:latin typeface="微软雅黑"/>
-                <a:ea typeface="微软雅黑"/>
-                <a:cs typeface="微软雅黑"/>
-              </a:defRPr>
-            </a:pPr>
-            <a:r>
-              <a:rPr sz="2400" b="0">
-                <a:solidFill>
-                  <a:srgbClr val="27333D"/>
-                </a:solidFill>
-                <a:latin typeface="微软雅黑"/>
-                <a:ea typeface="微软雅黑"/>
-                <a:cs typeface="微软雅黑"/>
-              </a:rPr>
-              <a:t>共享记录</a:t>
-            </a:r>
-          </a:p>
-          <a:p xmlns:a="http://schemas.openxmlformats.org/drawingml/2006/main">
-            <a:pPr algn="l">
-              <a:lnSpc>
-                <a:spcPct val="114000"/>
-              </a:lnSpc>
-              <a:buNone/>
-              <a:defRPr sz="2400" b="0">
-                <a:solidFill>
-                  <a:srgbClr val="27333D"/>
-                </a:solidFill>
-                <a:latin typeface="微软雅黑"/>
-                <a:ea typeface="微软雅黑"/>
-                <a:cs typeface="微软雅黑"/>
-              </a:defRPr>
-            </a:pPr>
-            <a:r>
-              <a:rPr sz="2400" b="0">
-                <a:solidFill>
-                  <a:srgbClr val="27333D"/>
-                </a:solidFill>
-                <a:latin typeface="微软雅黑"/>
-                <a:ea typeface="微软雅黑"/>
-                <a:cs typeface="微软雅黑"/>
-              </a:rPr>
-              <a:t>矩阵与证据地图复用同一组字段</a:t>
-            </a:r>
-          </a:p>
-        </p:txBody>
-      </p:sp>
-      <p:sp>
-        <p:nvSpPr>
-          <p:cNvPr id="9" name="visual-3-3-step-2">
-            <a:extLst xmlns:a="http://schemas.openxmlformats.org/drawingml/2006/main">
-              <a:ext uri="{FF2B5EF4-FFF2-40B4-BE49-F238E27FC236}">
-                <a16:creationId xmlns:a16="http://schemas.microsoft.com/office/drawing/2014/main" id="{C6856251-8C0B-4A99-93C4-51C93A50C761}"/>
-              </a:ext>
-            </a:extLst>
-          </p:cNvPr>
-          <p:cNvSpPr>
-            <a:spLocks xmlns:a="http://schemas.openxmlformats.org/drawingml/2006/main" noGrp="1"/>
-          </p:cNvSpPr>
-          <p:nvPr/>
-        </p:nvSpPr>
-        <p:spPr>
-          <a:xfrm xmlns:a="http://schemas.openxmlformats.org/drawingml/2006/main">
-            <a:off x="8334375" y="1714500"/>
-            <a:ext cx="3524250" cy="1381125"/>
-          </a:xfrm>
-          <a:prstGeom xmlns:a="http://schemas.openxmlformats.org/drawingml/2006/main" prst="rect">
-            <a:avLst/>
-          </a:prstGeom>
-          <a:noFill xmlns:a="http://schemas.openxmlformats.org/drawingml/2006/main"/>
-          <a:ln xmlns:a="http://schemas.openxmlformats.org/drawingml/2006/main" w="0">
-            <a:noFill/>
-          </a:ln>
-        </p:spPr>
-        <p:txBody>
-          <a:bodyPr xmlns:a="http://schemas.openxmlformats.org/drawingml/2006/main" lIns="0" tIns="0" rIns="0" bIns="0" anchor="t">
-            <a:noAutofit/>
-          </a:bodyPr>
-          <a:lstStyle xmlns:a="http://schemas.openxmlformats.org/drawingml/2006/main"/>
-          <a:p xmlns:a="http://schemas.openxmlformats.org/drawingml/2006/main">
-            <a:pPr algn="l">
-              <a:lnSpc>
-                <a:spcPct val="114000"/>
-              </a:lnSpc>
-              <a:buNone/>
-              <a:defRPr sz="2400" b="0">
-                <a:solidFill>
-                  <a:srgbClr val="27333D"/>
-                </a:solidFill>
-                <a:latin typeface="微软雅黑"/>
-                <a:ea typeface="微软雅黑"/>
-                <a:cs typeface="微软雅黑"/>
-              </a:defRPr>
-            </a:pPr>
-            <a:r>
-              <a:rPr sz="2400" b="0">
-                <a:solidFill>
-                  <a:srgbClr val="27333D"/>
-                </a:solidFill>
-                <a:latin typeface="微软雅黑"/>
-                <a:ea typeface="微软雅黑"/>
-                <a:cs typeface="微软雅黑"/>
-              </a:rPr>
-              <a:t>03</a:t>
-            </a:r>
-          </a:p>
-          <a:p xmlns:a="http://schemas.openxmlformats.org/drawingml/2006/main">
-            <a:pPr algn="l">
-              <a:lnSpc>
-                <a:spcPct val="114000"/>
-              </a:lnSpc>
-              <a:buNone/>
-              <a:defRPr sz="2400" b="0">
-                <a:solidFill>
-                  <a:srgbClr val="27333D"/>
-                </a:solidFill>
-                <a:latin typeface="微软雅黑"/>
-                <a:ea typeface="微软雅黑"/>
-                <a:cs typeface="微软雅黑"/>
-              </a:defRPr>
-            </a:pPr>
-            <a:r>
-              <a:rPr sz="2400" b="0">
-                <a:solidFill>
-                  <a:srgbClr val="27333D"/>
-                </a:solidFill>
-                <a:latin typeface="微软雅黑"/>
-                <a:ea typeface="微软雅黑"/>
-                <a:cs typeface="微软雅黑"/>
-              </a:rPr>
-              <a:t>四句受限综合</a:t>
-            </a:r>
-          </a:p>
-          <a:p xmlns:a="http://schemas.openxmlformats.org/drawingml/2006/main">
-            <a:pPr algn="l">
-              <a:lnSpc>
-                <a:spcPct val="114000"/>
-              </a:lnSpc>
-              <a:buNone/>
-              <a:defRPr sz="2400" b="0">
-                <a:solidFill>
-                  <a:srgbClr val="27333D"/>
-                </a:solidFill>
-                <a:latin typeface="微软雅黑"/>
-                <a:ea typeface="微软雅黑"/>
-                <a:cs typeface="微软雅黑"/>
-              </a:defRPr>
-            </a:pPr>
-            <a:r>
-              <a:rPr sz="2400" b="0">
-                <a:solidFill>
-                  <a:srgbClr val="27333D"/>
-                </a:solidFill>
-                <a:latin typeface="微软雅黑"/>
-                <a:ea typeface="微软雅黑"/>
-                <a:cs typeface="微软雅黑"/>
-              </a:rPr>
-              <a:t>只写已核验条目并保留限定</a:t>
-            </a:r>
-          </a:p>
-        </p:txBody>
-      </p:sp>
-      <p:sp>
-        <p:nvSpPr>
-          <p:cNvPr id="10" name="visual-3-4-step-3">
-            <a:extLst xmlns:a="http://schemas.openxmlformats.org/drawingml/2006/main">
-              <a:ext uri="{FF2B5EF4-FFF2-40B4-BE49-F238E27FC236}">
-                <a16:creationId xmlns:a16="http://schemas.microsoft.com/office/drawing/2014/main" id="{71F509A5-B77B-44FC-84E4-954B231E0548}"/>
-              </a:ext>
-            </a:extLst>
-          </p:cNvPr>
-          <p:cNvSpPr>
-            <a:spLocks xmlns:a="http://schemas.openxmlformats.org/drawingml/2006/main" noGrp="1"/>
-          </p:cNvSpPr>
-          <p:nvPr/>
-        </p:nvSpPr>
-        <p:spPr>
-          <a:xfrm xmlns:a="http://schemas.openxmlformats.org/drawingml/2006/main">
-            <a:off x="2476500" y="3476625"/>
-            <a:ext cx="3524250" cy="1381125"/>
-          </a:xfrm>
-          <a:prstGeom xmlns:a="http://schemas.openxmlformats.org/drawingml/2006/main" prst="rect">
-            <a:avLst/>
-          </a:prstGeom>
-          <a:noFill xmlns:a="http://schemas.openxmlformats.org/drawingml/2006/main"/>
-          <a:ln xmlns:a="http://schemas.openxmlformats.org/drawingml/2006/main" w="0">
-            <a:noFill/>
-          </a:ln>
-        </p:spPr>
-        <p:txBody>
-          <a:bodyPr xmlns:a="http://schemas.openxmlformats.org/drawingml/2006/main" lIns="0" tIns="0" rIns="0" bIns="0" anchor="t">
-            <a:noAutofit/>
-          </a:bodyPr>
-          <a:lstStyle xmlns:a="http://schemas.openxmlformats.org/drawingml/2006/main"/>
-          <a:p xmlns:a="http://schemas.openxmlformats.org/drawingml/2006/main">
-            <a:pPr algn="l">
-              <a:lnSpc>
-                <a:spcPct val="114000"/>
-              </a:lnSpc>
-              <a:buNone/>
-              <a:defRPr sz="2400" b="0">
-                <a:solidFill>
-                  <a:srgbClr val="27333D"/>
-                </a:solidFill>
-                <a:latin typeface="微软雅黑"/>
-                <a:ea typeface="微软雅黑"/>
-                <a:cs typeface="微软雅黑"/>
-              </a:defRPr>
-            </a:pPr>
-            <a:r>
-              <a:rPr sz="2400" b="0">
-                <a:solidFill>
-                  <a:srgbClr val="27333D"/>
-                </a:solidFill>
-                <a:latin typeface="微软雅黑"/>
-                <a:ea typeface="微软雅黑"/>
-                <a:cs typeface="微软雅黑"/>
-              </a:rPr>
-              <a:t>04</a:t>
-            </a:r>
-          </a:p>
-          <a:p xmlns:a="http://schemas.openxmlformats.org/drawingml/2006/main">
-            <a:pPr algn="l">
-              <a:lnSpc>
-                <a:spcPct val="114000"/>
-              </a:lnSpc>
-              <a:buNone/>
-              <a:defRPr sz="2400" b="0">
-                <a:solidFill>
-                  <a:srgbClr val="27333D"/>
-                </a:solidFill>
-                <a:latin typeface="微软雅黑"/>
-                <a:ea typeface="微软雅黑"/>
-                <a:cs typeface="微软雅黑"/>
-              </a:defRPr>
-            </a:pPr>
-            <a:r>
-              <a:rPr sz="2400" b="0">
-                <a:solidFill>
-                  <a:srgbClr val="27333D"/>
-                </a:solidFill>
-                <a:latin typeface="微软雅黑"/>
-                <a:ea typeface="微软雅黑"/>
-                <a:cs typeface="微软雅黑"/>
-              </a:rPr>
-              <a:t>空白诚实记录</a:t>
-            </a:r>
-          </a:p>
-          <a:p xmlns:a="http://schemas.openxmlformats.org/drawingml/2006/main">
-            <a:pPr algn="l">
-              <a:lnSpc>
-                <a:spcPct val="114000"/>
-              </a:lnSpc>
-              <a:buNone/>
-              <a:defRPr sz="2400" b="0">
-                <a:solidFill>
-                  <a:srgbClr val="27333D"/>
-                </a:solidFill>
-                <a:latin typeface="微软雅黑"/>
-                <a:ea typeface="微软雅黑"/>
-                <a:cs typeface="微软雅黑"/>
-              </a:defRPr>
-            </a:pPr>
-            <a:r>
-              <a:rPr sz="2400" b="0">
-                <a:solidFill>
-                  <a:srgbClr val="27333D"/>
-                </a:solidFill>
-                <a:latin typeface="微软雅黑"/>
-                <a:ea typeface="微软雅黑"/>
-                <a:cs typeface="微软雅黑"/>
-              </a:rPr>
-              <a:t>类型 + pending + 下一步窄检索</a:t>
-            </a:r>
-          </a:p>
-        </p:txBody>
-      </p:sp>
-      <p:sp>
-        <p:nvSpPr>
-          <p:cNvPr id="11" name="visual-3-5-step-4">
-            <a:extLst xmlns:a="http://schemas.openxmlformats.org/drawingml/2006/main">
-              <a:ext uri="{FF2B5EF4-FFF2-40B4-BE49-F238E27FC236}">
-                <a16:creationId xmlns:a16="http://schemas.microsoft.com/office/drawing/2014/main" id="{D5284DCF-B69D-41C4-B29F-9929B1CB0B0E}"/>
-              </a:ext>
-            </a:extLst>
-          </p:cNvPr>
-          <p:cNvSpPr>
-            <a:spLocks xmlns:a="http://schemas.openxmlformats.org/drawingml/2006/main" noGrp="1"/>
-          </p:cNvSpPr>
-          <p:nvPr/>
-        </p:nvSpPr>
-        <p:spPr>
-          <a:xfrm xmlns:a="http://schemas.openxmlformats.org/drawingml/2006/main">
-            <a:off x="6381750" y="3476625"/>
-            <a:ext cx="3524250" cy="1381125"/>
-          </a:xfrm>
-          <a:prstGeom xmlns:a="http://schemas.openxmlformats.org/drawingml/2006/main" prst="rect">
-            <a:avLst/>
-          </a:prstGeom>
-          <a:noFill xmlns:a="http://schemas.openxmlformats.org/drawingml/2006/main"/>
-          <a:ln xmlns:a="http://schemas.openxmlformats.org/drawingml/2006/main" w="0">
-            <a:noFill/>
-          </a:ln>
-        </p:spPr>
-        <p:txBody>
-          <a:bodyPr xmlns:a="http://schemas.openxmlformats.org/drawingml/2006/main" lIns="0" tIns="0" rIns="0" bIns="0" anchor="t">
-            <a:noAutofit/>
-          </a:bodyPr>
-          <a:lstStyle xmlns:a="http://schemas.openxmlformats.org/drawingml/2006/main"/>
-          <a:p xmlns:a="http://schemas.openxmlformats.org/drawingml/2006/main">
-            <a:pPr algn="l">
-              <a:lnSpc>
-                <a:spcPct val="114000"/>
-              </a:lnSpc>
-              <a:buNone/>
-              <a:defRPr sz="2400" b="0">
-                <a:solidFill>
-                  <a:srgbClr val="27333D"/>
-                </a:solidFill>
-                <a:latin typeface="微软雅黑"/>
-                <a:ea typeface="微软雅黑"/>
-                <a:cs typeface="微软雅黑"/>
-              </a:defRPr>
-            </a:pPr>
-            <a:r>
-              <a:rPr sz="2400" b="0">
-                <a:solidFill>
-                  <a:srgbClr val="27333D"/>
-                </a:solidFill>
-                <a:latin typeface="微软雅黑"/>
-                <a:ea typeface="微软雅黑"/>
-                <a:cs typeface="微软雅黑"/>
-              </a:rPr>
-              <a:t>05</a:t>
-            </a:r>
-          </a:p>
-          <a:p xmlns:a="http://schemas.openxmlformats.org/drawingml/2006/main">
-            <a:pPr algn="l">
-              <a:lnSpc>
-                <a:spcPct val="114000"/>
-              </a:lnSpc>
-              <a:buNone/>
-              <a:defRPr sz="2400" b="0">
-                <a:solidFill>
-                  <a:srgbClr val="27333D"/>
-                </a:solidFill>
-                <a:latin typeface="微软雅黑"/>
-                <a:ea typeface="微软雅黑"/>
-                <a:cs typeface="微软雅黑"/>
-              </a:defRPr>
-            </a:pPr>
-            <a:r>
-              <a:rPr sz="2400" b="0">
-                <a:solidFill>
-                  <a:srgbClr val="27333D"/>
-                </a:solidFill>
-                <a:latin typeface="微软雅黑"/>
-                <a:ea typeface="微软雅黑"/>
-                <a:cs typeface="微软雅黑"/>
-              </a:rPr>
-              <a:t>一条 AI 核验</a:t>
-            </a:r>
-          </a:p>
-          <a:p xmlns:a="http://schemas.openxmlformats.org/drawingml/2006/main">
-            <a:pPr algn="l">
-              <a:lnSpc>
-                <a:spcPct val="114000"/>
-              </a:lnSpc>
-              <a:buNone/>
-              <a:defRPr sz="2400" b="0">
-                <a:solidFill>
-                  <a:srgbClr val="27333D"/>
-                </a:solidFill>
-                <a:latin typeface="微软雅黑"/>
-                <a:ea typeface="微软雅黑"/>
-                <a:cs typeface="微软雅黑"/>
-              </a:defRPr>
-            </a:pPr>
-            <a:r>
-              <a:rPr sz="2400" b="0">
-                <a:solidFill>
-                  <a:srgbClr val="27333D"/>
-                </a:solidFill>
-                <a:latin typeface="微软雅黑"/>
-                <a:ea typeface="微软雅黑"/>
-                <a:cs typeface="微软雅黑"/>
-              </a:rPr>
-              <a:t>处理决定 + 使用记录</a:t>
-            </a:r>
-          </a:p>
-        </p:txBody>
-      </p:sp>
-      <p:sp>
-        <p:nvSpPr>
-          <p:cNvPr id="12" name="visual-3-6-boundary">
-            <a:extLst xmlns:a="http://schemas.openxmlformats.org/drawingml/2006/main">
-              <a:ext uri="{FF2B5EF4-FFF2-40B4-BE49-F238E27FC236}">
-                <a16:creationId xmlns:a16="http://schemas.microsoft.com/office/drawing/2014/main" id="{2EA0EDE4-1C61-4491-B870-746D12DA39EB}"/>
-              </a:ext>
-            </a:extLst>
-          </p:cNvPr>
-          <p:cNvSpPr>
-            <a:spLocks xmlns:a="http://schemas.openxmlformats.org/drawingml/2006/main" noGrp="1"/>
-          </p:cNvSpPr>
-          <p:nvPr/>
-        </p:nvSpPr>
-        <p:spPr>
-          <a:xfrm xmlns:a="http://schemas.openxmlformats.org/drawingml/2006/main">
-            <a:off x="1238250" y="5191125"/>
-            <a:ext cx="9715500" cy="476250"/>
-          </a:xfrm>
-          <a:prstGeom xmlns:a="http://schemas.openxmlformats.org/drawingml/2006/main" prst="rect">
-            <a:avLst/>
-          </a:prstGeom>
-          <a:noFill xmlns:a="http://schemas.openxmlformats.org/drawingml/2006/main"/>
-          <a:ln xmlns:a="http://schemas.openxmlformats.org/drawingml/2006/main" w="0">
-            <a:noFill/>
-          </a:ln>
-        </p:spPr>
-        <p:txBody>
-          <a:bodyPr xmlns:a="http://schemas.openxmlformats.org/drawingml/2006/main" lIns="0" tIns="0" rIns="0" bIns="0" anchor="ctr">
-            <a:noAutofit/>
-          </a:bodyPr>
-          <a:lstStyle xmlns:a="http://schemas.openxmlformats.org/drawingml/2006/main"/>
-          <a:p xmlns:a="http://schemas.openxmlformats.org/drawingml/2006/main">
-            <a:pPr algn="l">
-              <a:lnSpc>
-                <a:spcPct val="114000"/>
-              </a:lnSpc>
-              <a:buNone/>
-              <a:defRPr sz="2200" b="0">
-                <a:solidFill>
-                  <a:srgbClr val="27333D"/>
-                </a:solidFill>
-                <a:latin typeface="微软雅黑"/>
-                <a:ea typeface="微软雅黑"/>
-                <a:cs typeface="微软雅黑"/>
-              </a:defRPr>
-            </a:pPr>
-            <a:r>
-              <a:rPr sz="2200" b="0">
-                <a:solidFill>
-                  <a:srgbClr val="27333D"/>
-                </a:solidFill>
-                <a:latin typeface="微软雅黑"/>
-                <a:ea typeface="微软雅黑"/>
-                <a:cs typeface="微软雅黑"/>
-              </a:rPr>
-              <a:t>本课不正式提交｜空白完整检验与候选题池课后补全｜第 6 课问题门统一检查</a:t>
             </a:r>
           </a:p>
         </p:txBody>
